--- a/public/course-materials/pptx/Module-07-Créer-et-sécuriser-son-portefeuille.pptx
+++ b/public/course-materials/pptx/Module-07-Créer-et-sécuriser-son-portefeuille.pptx
@@ -3464,28 +3464,96 @@
         </p:nvSpPr>
         <p:spPr>
           <a:xfrm>
+            <a:off x="6400800" y="-457200"/>
+            <a:ext cx="3657600" cy="3657600"/>
+          </a:xfrm>
+          <a:prstGeom prst="ellipse">
+            <a:avLst/>
+          </a:prstGeom>
+          <a:solidFill>
+            <a:srgbClr val="EF4444">
+              <a:alpha val="8000"/>
+            </a:srgbClr>
+          </a:solidFill>
+          <a:ln/>
+        </p:spPr>
+      </p:sp>
+      <p:sp>
+        <p:nvSpPr>
+          <p:cNvPr id="3" name="Shape 1"/>
+          <p:cNvSpPr/>
+          <p:nvPr/>
+        </p:nvSpPr>
+        <p:spPr>
+          <a:xfrm>
+            <a:off x="7315200" y="2286000"/>
+            <a:ext cx="2743200" cy="2743200"/>
+          </a:xfrm>
+          <a:prstGeom prst="ellipse">
+            <a:avLst/>
+          </a:prstGeom>
+          <a:solidFill>
+            <a:srgbClr val="EF4444">
+              <a:alpha val="5000"/>
+            </a:srgbClr>
+          </a:solidFill>
+          <a:ln/>
+        </p:spPr>
+      </p:sp>
+      <p:sp>
+        <p:nvSpPr>
+          <p:cNvPr id="4" name="Shape 2"/>
+          <p:cNvSpPr/>
+          <p:nvPr/>
+        </p:nvSpPr>
+        <p:spPr>
+          <a:xfrm>
             <a:off x="0" y="0"/>
-            <a:ext cx="9144000" cy="54864"/>
+            <a:ext cx="9144000" cy="45720"/>
           </a:xfrm>
           <a:prstGeom prst="rect">
             <a:avLst/>
           </a:prstGeom>
           <a:solidFill>
-            <a:srgbClr val="00BFA6"/>
+            <a:srgbClr val="EF4444"/>
           </a:solidFill>
           <a:ln/>
         </p:spPr>
       </p:sp>
-      <p:sp>
-        <p:nvSpPr>
-          <p:cNvPr id="3" name="Text 1"/>
-          <p:cNvSpPr txBox="1"/>
-          <p:nvPr/>
-        </p:nvSpPr>
-        <p:spPr>
-          <a:xfrm>
-            <a:off x="731520" y="1097280"/>
-            <a:ext cx="2286000" cy="457200"/>
+      <p:pic>
+        <p:nvPicPr>
+          <p:cNvPr id="5" name="Image 0" descr="preencoded.png">    </p:cNvPr>
+          <p:cNvPicPr>
+            <a:picLocks noChangeAspect="1"/>
+          </p:cNvPicPr>
+          <p:nvPr/>
+        </p:nvPicPr>
+        <p:blipFill>
+          <a:blip r:embed="rId1"/>
+          <a:stretch>
+            <a:fillRect/>
+          </a:stretch>
+        </p:blipFill>
+        <p:spPr>
+          <a:xfrm>
+            <a:off x="7132320" y="1097280"/>
+            <a:ext cx="1463040" cy="1463040"/>
+          </a:xfrm>
+          <a:prstGeom prst="rect">
+            <a:avLst/>
+          </a:prstGeom>
+        </p:spPr>
+      </p:pic>
+      <p:sp>
+        <p:nvSpPr>
+          <p:cNvPr id="6" name="Text 3"/>
+          <p:cNvSpPr txBox="1"/>
+          <p:nvPr/>
+        </p:nvSpPr>
+        <p:spPr>
+          <a:xfrm>
+            <a:off x="731520" y="914400"/>
+            <a:ext cx="2286000" cy="365760"/>
           </a:xfrm>
           <a:prstGeom prst="rect">
             <a:avLst/>
@@ -3501,9 +3569,9 @@
               <a:buNone/>
             </a:pPr>
             <a:r>
-              <a:rPr lang="en-US" sz="1400" b="1" spc="400" kern="0" dirty="0">
-                <a:solidFill>
-                  <a:srgbClr val="00BFA6"/>
+              <a:rPr lang="en-US" sz="1300" b="1" spc="400" kern="0" dirty="0">
+                <a:solidFill>
+                  <a:srgbClr val="EF4444"/>
                 </a:solidFill>
                 <a:latin typeface="Calibri" pitchFamily="34" charset="0"/>
                 <a:ea typeface="Calibri" pitchFamily="34" charset="-122"/>
@@ -3511,20 +3579,20 @@
               </a:rPr>
               <a:t>MODULE 7</a:t>
             </a:r>
-            <a:endParaRPr lang="en-US" sz="1400" dirty="0"/>
-          </a:p>
-        </p:txBody>
-      </p:sp>
-      <p:sp>
-        <p:nvSpPr>
-          <p:cNvPr id="4" name="Text 2"/>
-          <p:cNvSpPr txBox="1"/>
-          <p:nvPr/>
-        </p:nvSpPr>
-        <p:spPr>
-          <a:xfrm>
-            <a:off x="731520" y="1645920"/>
-            <a:ext cx="7680960" cy="1463040"/>
+            <a:endParaRPr lang="en-US" sz="1300" dirty="0"/>
+          </a:p>
+        </p:txBody>
+      </p:sp>
+      <p:sp>
+        <p:nvSpPr>
+          <p:cNvPr id="7" name="Text 4"/>
+          <p:cNvSpPr txBox="1"/>
+          <p:nvPr/>
+        </p:nvSpPr>
+        <p:spPr>
+          <a:xfrm>
+            <a:off x="731520" y="1371600"/>
+            <a:ext cx="5943600" cy="1645920"/>
           </a:xfrm>
           <a:prstGeom prst="rect">
             <a:avLst/>
@@ -3556,14 +3624,34 @@
       </p:sp>
       <p:sp>
         <p:nvSpPr>
-          <p:cNvPr id="5" name="Text 3"/>
-          <p:cNvSpPr txBox="1"/>
-          <p:nvPr/>
-        </p:nvSpPr>
-        <p:spPr>
-          <a:xfrm>
-            <a:off x="731520" y="4023360"/>
-            <a:ext cx="2743200" cy="365760"/>
+          <p:cNvPr id="8" name="Shape 5"/>
+          <p:cNvSpPr/>
+          <p:nvPr/>
+        </p:nvSpPr>
+        <p:spPr>
+          <a:xfrm>
+            <a:off x="731520" y="3291840"/>
+            <a:ext cx="1828800" cy="36576"/>
+          </a:xfrm>
+          <a:prstGeom prst="rect">
+            <a:avLst/>
+          </a:prstGeom>
+          <a:solidFill>
+            <a:srgbClr val="EF4444"/>
+          </a:solidFill>
+          <a:ln/>
+        </p:spPr>
+      </p:sp>
+      <p:sp>
+        <p:nvSpPr>
+          <p:cNvPr id="9" name="Text 6"/>
+          <p:cNvSpPr txBox="1"/>
+          <p:nvPr/>
+        </p:nvSpPr>
+        <p:spPr>
+          <a:xfrm>
+            <a:off x="731520" y="3566160"/>
+            <a:ext cx="2743200" cy="320040"/>
           </a:xfrm>
           <a:prstGeom prst="rect">
             <a:avLst/>
@@ -3579,7 +3667,7 @@
               <a:buNone/>
             </a:pPr>
             <a:r>
-              <a:rPr lang="en-US" sz="1200" spc="300" kern="0" dirty="0">
+              <a:rPr lang="en-US" sz="1100" spc="300" kern="0" dirty="0">
                 <a:solidFill>
                   <a:srgbClr val="64748B"/>
                 </a:solidFill>
@@ -3589,20 +3677,20 @@
               </a:rPr>
               <a:t>TEREX ACADEMY</a:t>
             </a:r>
-            <a:endParaRPr lang="en-US" sz="1200" dirty="0"/>
-          </a:p>
-        </p:txBody>
-      </p:sp>
-      <p:sp>
-        <p:nvSpPr>
-          <p:cNvPr id="6" name="Text 4"/>
-          <p:cNvSpPr txBox="1"/>
-          <p:nvPr/>
-        </p:nvSpPr>
-        <p:spPr>
-          <a:xfrm>
-            <a:off x="731520" y="4389120"/>
-            <a:ext cx="3657600" cy="320040"/>
+            <a:endParaRPr lang="en-US" sz="1100" dirty="0"/>
+          </a:p>
+        </p:txBody>
+      </p:sp>
+      <p:sp>
+        <p:nvSpPr>
+          <p:cNvPr id="10" name="Text 7"/>
+          <p:cNvSpPr txBox="1"/>
+          <p:nvPr/>
+        </p:nvSpPr>
+        <p:spPr>
+          <a:xfrm>
+            <a:off x="731520" y="3931920"/>
+            <a:ext cx="3657600" cy="274320"/>
           </a:xfrm>
           <a:prstGeom prst="rect">
             <a:avLst/>
@@ -3664,16 +3752,40 @@
           <a:chExt cx="0" cy="0"/>
         </a:xfrm>
       </p:grpSpPr>
-      <p:sp>
-        <p:nvSpPr>
-          <p:cNvPr id="2" name="Text 0"/>
-          <p:cNvSpPr txBox="1"/>
-          <p:nvPr/>
-        </p:nvSpPr>
-        <p:spPr>
-          <a:xfrm>
-            <a:off x="731520" y="457200"/>
-            <a:ext cx="2743200" cy="365760"/>
+      <p:pic>
+        <p:nvPicPr>
+          <p:cNvPr id="2" name="Image 0" descr="preencoded.png">    </p:cNvPr>
+          <p:cNvPicPr>
+            <a:picLocks noChangeAspect="1"/>
+          </p:cNvPicPr>
+          <p:nvPr/>
+        </p:nvPicPr>
+        <p:blipFill>
+          <a:blip r:embed="rId1"/>
+          <a:stretch>
+            <a:fillRect/>
+          </a:stretch>
+        </p:blipFill>
+        <p:spPr>
+          <a:xfrm>
+            <a:off x="731520" y="320040"/>
+            <a:ext cx="457200" cy="457200"/>
+          </a:xfrm>
+          <a:prstGeom prst="rect">
+            <a:avLst/>
+          </a:prstGeom>
+        </p:spPr>
+      </p:pic>
+      <p:sp>
+        <p:nvSpPr>
+          <p:cNvPr id="3" name="Text 0"/>
+          <p:cNvSpPr txBox="1"/>
+          <p:nvPr/>
+        </p:nvSpPr>
+        <p:spPr>
+          <a:xfrm>
+            <a:off x="1280160" y="365760"/>
+            <a:ext cx="2743200" cy="320040"/>
           </a:xfrm>
           <a:prstGeom prst="rect">
             <a:avLst/>
@@ -3705,14 +3817,14 @@
       </p:sp>
       <p:sp>
         <p:nvSpPr>
-          <p:cNvPr id="3" name="Text 1"/>
-          <p:cNvSpPr txBox="1"/>
-          <p:nvPr/>
-        </p:nvSpPr>
-        <p:spPr>
-          <a:xfrm>
-            <a:off x="731520" y="868680"/>
-            <a:ext cx="7680960" cy="502920"/>
+          <p:cNvPr id="4" name="Text 1"/>
+          <p:cNvSpPr txBox="1"/>
+          <p:nvPr/>
+        </p:nvSpPr>
+        <p:spPr>
+          <a:xfrm>
+            <a:off x="731520" y="822960"/>
+            <a:ext cx="7680960" cy="457200"/>
           </a:xfrm>
           <a:prstGeom prst="rect">
             <a:avLst/>
@@ -3728,7 +3840,7 @@
               <a:buNone/>
             </a:pPr>
             <a:r>
-              <a:rPr lang="en-US" sz="2200" b="1" dirty="0">
+              <a:rPr lang="en-US" sz="2000" b="1" dirty="0">
                 <a:solidFill>
                   <a:srgbClr val="FFFFFF"/>
                 </a:solidFill>
@@ -3738,28 +3850,50 @@
               </a:rPr>
               <a:t>Custodial vs non-custodial : la différence essentielle</a:t>
             </a:r>
-            <a:endParaRPr lang="en-US" sz="2200" dirty="0"/>
-          </a:p>
-        </p:txBody>
-      </p:sp>
-      <p:sp>
-        <p:nvSpPr>
-          <p:cNvPr id="4" name="Text 2"/>
-          <p:cNvSpPr txBox="1"/>
-          <p:nvPr/>
-        </p:nvSpPr>
-        <p:spPr>
-          <a:xfrm>
-            <a:off x="731520" y="1554480"/>
-            <a:ext cx="457200" cy="548640"/>
+            <a:endParaRPr lang="en-US" sz="2000" dirty="0"/>
+          </a:p>
+        </p:txBody>
+      </p:sp>
+      <p:sp>
+        <p:nvSpPr>
+          <p:cNvPr id="5" name="Shape 2"/>
+          <p:cNvSpPr/>
+          <p:nvPr/>
+        </p:nvSpPr>
+        <p:spPr>
+          <a:xfrm>
+            <a:off x="731520" y="1463040"/>
+            <a:ext cx="7680960" cy="548640"/>
           </a:xfrm>
           <a:prstGeom prst="roundRect">
             <a:avLst>
-              <a:gd name="adj" fmla="val 50000"/>
+              <a:gd name="adj" fmla="val 13333"/>
             </a:avLst>
           </a:prstGeom>
           <a:solidFill>
-            <a:srgbClr val="00BFA6"/>
+            <a:srgbClr val="0F1419"/>
+          </a:solidFill>
+          <a:ln/>
+        </p:spPr>
+      </p:sp>
+      <p:sp>
+        <p:nvSpPr>
+          <p:cNvPr id="6" name="Text 3"/>
+          <p:cNvSpPr txBox="1"/>
+          <p:nvPr/>
+        </p:nvSpPr>
+        <p:spPr>
+          <a:xfrm>
+            <a:off x="914400" y="1463040"/>
+            <a:ext cx="411480" cy="548640"/>
+          </a:xfrm>
+          <a:prstGeom prst="roundRect">
+            <a:avLst>
+              <a:gd name="adj" fmla="val 48889"/>
+            </a:avLst>
+          </a:prstGeom>
+          <a:solidFill>
+            <a:srgbClr val="EF4444"/>
           </a:solidFill>
           <a:ln/>
         </p:spPr>
@@ -3771,7 +3905,7 @@
               <a:buNone/>
             </a:pPr>
             <a:r>
-              <a:rPr lang="en-US" sz="1600" b="1" dirty="0">
+              <a:rPr lang="en-US" sz="1500" b="1" dirty="0">
                 <a:solidFill>
                   <a:srgbClr val="0F1419"/>
                 </a:solidFill>
@@ -3781,20 +3915,20 @@
               </a:rPr>
               <a:t>1</a:t>
             </a:r>
-            <a:endParaRPr lang="en-US" sz="1600" dirty="0"/>
-          </a:p>
-        </p:txBody>
-      </p:sp>
-      <p:sp>
-        <p:nvSpPr>
-          <p:cNvPr id="5" name="Text 3"/>
-          <p:cNvSpPr txBox="1"/>
-          <p:nvPr/>
-        </p:nvSpPr>
-        <p:spPr>
-          <a:xfrm>
-            <a:off x="1371600" y="1554480"/>
-            <a:ext cx="7040880" cy="548640"/>
+            <a:endParaRPr lang="en-US" sz="1500" dirty="0"/>
+          </a:p>
+        </p:txBody>
+      </p:sp>
+      <p:sp>
+        <p:nvSpPr>
+          <p:cNvPr id="7" name="Text 4"/>
+          <p:cNvSpPr txBox="1"/>
+          <p:nvPr/>
+        </p:nvSpPr>
+        <p:spPr>
+          <a:xfrm>
+            <a:off x="1508760" y="1463040"/>
+            <a:ext cx="6766560" cy="548640"/>
           </a:xfrm>
           <a:prstGeom prst="rect">
             <a:avLst/>
@@ -3810,7 +3944,7 @@
               <a:buNone/>
             </a:pPr>
             <a:r>
-              <a:rPr lang="en-US" sz="1400" dirty="0">
+              <a:rPr lang="en-US" sz="1300" dirty="0">
                 <a:solidFill>
                   <a:srgbClr val="FFFFFF"/>
                 </a:solidFill>
@@ -3820,28 +3954,50 @@
               </a:rPr>
               <a:t>Simple à utiliser</a:t>
             </a:r>
-            <a:endParaRPr lang="en-US" sz="1400" dirty="0"/>
-          </a:p>
-        </p:txBody>
-      </p:sp>
-      <p:sp>
-        <p:nvSpPr>
-          <p:cNvPr id="6" name="Text 4"/>
-          <p:cNvSpPr txBox="1"/>
-          <p:nvPr/>
-        </p:nvSpPr>
-        <p:spPr>
-          <a:xfrm>
-            <a:off x="731520" y="2212848"/>
-            <a:ext cx="457200" cy="548640"/>
+            <a:endParaRPr lang="en-US" sz="1300" dirty="0"/>
+          </a:p>
+        </p:txBody>
+      </p:sp>
+      <p:sp>
+        <p:nvSpPr>
+          <p:cNvPr id="8" name="Shape 5"/>
+          <p:cNvSpPr/>
+          <p:nvPr/>
+        </p:nvSpPr>
+        <p:spPr>
+          <a:xfrm>
+            <a:off x="731520" y="2103120"/>
+            <a:ext cx="7680960" cy="548640"/>
           </a:xfrm>
           <a:prstGeom prst="roundRect">
             <a:avLst>
-              <a:gd name="adj" fmla="val 50000"/>
+              <a:gd name="adj" fmla="val 13333"/>
             </a:avLst>
           </a:prstGeom>
           <a:solidFill>
-            <a:srgbClr val="00BFA6"/>
+            <a:srgbClr val="0F1419"/>
+          </a:solidFill>
+          <a:ln/>
+        </p:spPr>
+      </p:sp>
+      <p:sp>
+        <p:nvSpPr>
+          <p:cNvPr id="9" name="Text 6"/>
+          <p:cNvSpPr txBox="1"/>
+          <p:nvPr/>
+        </p:nvSpPr>
+        <p:spPr>
+          <a:xfrm>
+            <a:off x="914400" y="2103120"/>
+            <a:ext cx="411480" cy="548640"/>
+          </a:xfrm>
+          <a:prstGeom prst="roundRect">
+            <a:avLst>
+              <a:gd name="adj" fmla="val 48889"/>
+            </a:avLst>
+          </a:prstGeom>
+          <a:solidFill>
+            <a:srgbClr val="EF4444"/>
           </a:solidFill>
           <a:ln/>
         </p:spPr>
@@ -3853,7 +4009,7 @@
               <a:buNone/>
             </a:pPr>
             <a:r>
-              <a:rPr lang="en-US" sz="1600" b="1" dirty="0">
+              <a:rPr lang="en-US" sz="1500" b="1" dirty="0">
                 <a:solidFill>
                   <a:srgbClr val="0F1419"/>
                 </a:solidFill>
@@ -3863,20 +4019,20 @@
               </a:rPr>
               <a:t>2</a:t>
             </a:r>
-            <a:endParaRPr lang="en-US" sz="1600" dirty="0"/>
-          </a:p>
-        </p:txBody>
-      </p:sp>
-      <p:sp>
-        <p:nvSpPr>
-          <p:cNvPr id="7" name="Text 5"/>
-          <p:cNvSpPr txBox="1"/>
-          <p:nvPr/>
-        </p:nvSpPr>
-        <p:spPr>
-          <a:xfrm>
-            <a:off x="1371600" y="2212848"/>
-            <a:ext cx="7040880" cy="548640"/>
+            <a:endParaRPr lang="en-US" sz="1500" dirty="0"/>
+          </a:p>
+        </p:txBody>
+      </p:sp>
+      <p:sp>
+        <p:nvSpPr>
+          <p:cNvPr id="10" name="Text 7"/>
+          <p:cNvSpPr txBox="1"/>
+          <p:nvPr/>
+        </p:nvSpPr>
+        <p:spPr>
+          <a:xfrm>
+            <a:off x="1508760" y="2103120"/>
+            <a:ext cx="6766560" cy="548640"/>
           </a:xfrm>
           <a:prstGeom prst="rect">
             <a:avLst/>
@@ -3892,7 +4048,7 @@
               <a:buNone/>
             </a:pPr>
             <a:r>
-              <a:rPr lang="en-US" sz="1400" dirty="0">
+              <a:rPr lang="en-US" sz="1300" dirty="0">
                 <a:solidFill>
                   <a:srgbClr val="FFFFFF"/>
                 </a:solidFill>
@@ -3902,28 +4058,50 @@
               </a:rPr>
               <a:t>Récupération de compte possible (mot de passe oublié = pas de panique)</a:t>
             </a:r>
-            <a:endParaRPr lang="en-US" sz="1400" dirty="0"/>
-          </a:p>
-        </p:txBody>
-      </p:sp>
-      <p:sp>
-        <p:nvSpPr>
-          <p:cNvPr id="8" name="Text 6"/>
-          <p:cNvSpPr txBox="1"/>
-          <p:nvPr/>
-        </p:nvSpPr>
-        <p:spPr>
-          <a:xfrm>
-            <a:off x="731520" y="2871216"/>
-            <a:ext cx="457200" cy="548640"/>
+            <a:endParaRPr lang="en-US" sz="1300" dirty="0"/>
+          </a:p>
+        </p:txBody>
+      </p:sp>
+      <p:sp>
+        <p:nvSpPr>
+          <p:cNvPr id="11" name="Shape 8"/>
+          <p:cNvSpPr/>
+          <p:nvPr/>
+        </p:nvSpPr>
+        <p:spPr>
+          <a:xfrm>
+            <a:off x="731520" y="2743200"/>
+            <a:ext cx="7680960" cy="548640"/>
           </a:xfrm>
           <a:prstGeom prst="roundRect">
             <a:avLst>
-              <a:gd name="adj" fmla="val 50000"/>
+              <a:gd name="adj" fmla="val 13333"/>
             </a:avLst>
           </a:prstGeom>
           <a:solidFill>
-            <a:srgbClr val="00BFA6"/>
+            <a:srgbClr val="0F1419"/>
+          </a:solidFill>
+          <a:ln/>
+        </p:spPr>
+      </p:sp>
+      <p:sp>
+        <p:nvSpPr>
+          <p:cNvPr id="12" name="Text 9"/>
+          <p:cNvSpPr txBox="1"/>
+          <p:nvPr/>
+        </p:nvSpPr>
+        <p:spPr>
+          <a:xfrm>
+            <a:off x="914400" y="2743200"/>
+            <a:ext cx="411480" cy="548640"/>
+          </a:xfrm>
+          <a:prstGeom prst="roundRect">
+            <a:avLst>
+              <a:gd name="adj" fmla="val 48889"/>
+            </a:avLst>
+          </a:prstGeom>
+          <a:solidFill>
+            <a:srgbClr val="EF4444"/>
           </a:solidFill>
           <a:ln/>
         </p:spPr>
@@ -3935,7 +4113,7 @@
               <a:buNone/>
             </a:pPr>
             <a:r>
-              <a:rPr lang="en-US" sz="1600" b="1" dirty="0">
+              <a:rPr lang="en-US" sz="1500" b="1" dirty="0">
                 <a:solidFill>
                   <a:srgbClr val="0F1419"/>
                 </a:solidFill>
@@ -3945,20 +4123,20 @@
               </a:rPr>
               <a:t>3</a:t>
             </a:r>
-            <a:endParaRPr lang="en-US" sz="1600" dirty="0"/>
-          </a:p>
-        </p:txBody>
-      </p:sp>
-      <p:sp>
-        <p:nvSpPr>
-          <p:cNvPr id="9" name="Text 7"/>
-          <p:cNvSpPr txBox="1"/>
-          <p:nvPr/>
-        </p:nvSpPr>
-        <p:spPr>
-          <a:xfrm>
-            <a:off x="1371600" y="2871216"/>
-            <a:ext cx="7040880" cy="548640"/>
+            <a:endParaRPr lang="en-US" sz="1500" dirty="0"/>
+          </a:p>
+        </p:txBody>
+      </p:sp>
+      <p:sp>
+        <p:nvSpPr>
+          <p:cNvPr id="13" name="Text 10"/>
+          <p:cNvSpPr txBox="1"/>
+          <p:nvPr/>
+        </p:nvSpPr>
+        <p:spPr>
+          <a:xfrm>
+            <a:off x="1508760" y="2743200"/>
+            <a:ext cx="6766560" cy="548640"/>
           </a:xfrm>
           <a:prstGeom prst="rect">
             <a:avLst/>
@@ -3974,7 +4152,7 @@
               <a:buNone/>
             </a:pPr>
             <a:r>
-              <a:rPr lang="en-US" sz="1400" dirty="0">
+              <a:rPr lang="en-US" sz="1300" dirty="0">
                 <a:solidFill>
                   <a:srgbClr val="FFFFFF"/>
                 </a:solidFill>
@@ -3984,28 +4162,50 @@
               </a:rPr>
               <a:t>Support client</a:t>
             </a:r>
-            <a:endParaRPr lang="en-US" sz="1400" dirty="0"/>
-          </a:p>
-        </p:txBody>
-      </p:sp>
-      <p:sp>
-        <p:nvSpPr>
-          <p:cNvPr id="10" name="Text 8"/>
-          <p:cNvSpPr txBox="1"/>
-          <p:nvPr/>
-        </p:nvSpPr>
-        <p:spPr>
-          <a:xfrm>
-            <a:off x="731520" y="3529584"/>
-            <a:ext cx="457200" cy="548640"/>
+            <a:endParaRPr lang="en-US" sz="1300" dirty="0"/>
+          </a:p>
+        </p:txBody>
+      </p:sp>
+      <p:sp>
+        <p:nvSpPr>
+          <p:cNvPr id="14" name="Shape 11"/>
+          <p:cNvSpPr/>
+          <p:nvPr/>
+        </p:nvSpPr>
+        <p:spPr>
+          <a:xfrm>
+            <a:off x="731520" y="3383280"/>
+            <a:ext cx="7680960" cy="548640"/>
           </a:xfrm>
           <a:prstGeom prst="roundRect">
             <a:avLst>
-              <a:gd name="adj" fmla="val 50000"/>
+              <a:gd name="adj" fmla="val 13333"/>
             </a:avLst>
           </a:prstGeom>
           <a:solidFill>
-            <a:srgbClr val="00BFA6"/>
+            <a:srgbClr val="0F1419"/>
+          </a:solidFill>
+          <a:ln/>
+        </p:spPr>
+      </p:sp>
+      <p:sp>
+        <p:nvSpPr>
+          <p:cNvPr id="15" name="Text 12"/>
+          <p:cNvSpPr txBox="1"/>
+          <p:nvPr/>
+        </p:nvSpPr>
+        <p:spPr>
+          <a:xfrm>
+            <a:off x="914400" y="3383280"/>
+            <a:ext cx="411480" cy="548640"/>
+          </a:xfrm>
+          <a:prstGeom prst="roundRect">
+            <a:avLst>
+              <a:gd name="adj" fmla="val 48889"/>
+            </a:avLst>
+          </a:prstGeom>
+          <a:solidFill>
+            <a:srgbClr val="EF4444"/>
           </a:solidFill>
           <a:ln/>
         </p:spPr>
@@ -4017,7 +4217,7 @@
               <a:buNone/>
             </a:pPr>
             <a:r>
-              <a:rPr lang="en-US" sz="1600" b="1" dirty="0">
+              <a:rPr lang="en-US" sz="1500" b="1" dirty="0">
                 <a:solidFill>
                   <a:srgbClr val="0F1419"/>
                 </a:solidFill>
@@ -4027,20 +4227,20 @@
               </a:rPr>
               <a:t>4</a:t>
             </a:r>
-            <a:endParaRPr lang="en-US" sz="1600" dirty="0"/>
-          </a:p>
-        </p:txBody>
-      </p:sp>
-      <p:sp>
-        <p:nvSpPr>
-          <p:cNvPr id="11" name="Text 9"/>
-          <p:cNvSpPr txBox="1"/>
-          <p:nvPr/>
-        </p:nvSpPr>
-        <p:spPr>
-          <a:xfrm>
-            <a:off x="1371600" y="3529584"/>
-            <a:ext cx="7040880" cy="548640"/>
+            <a:endParaRPr lang="en-US" sz="1500" dirty="0"/>
+          </a:p>
+        </p:txBody>
+      </p:sp>
+      <p:sp>
+        <p:nvSpPr>
+          <p:cNvPr id="16" name="Text 13"/>
+          <p:cNvSpPr txBox="1"/>
+          <p:nvPr/>
+        </p:nvSpPr>
+        <p:spPr>
+          <a:xfrm>
+            <a:off x="1508760" y="3383280"/>
+            <a:ext cx="6766560" cy="548640"/>
           </a:xfrm>
           <a:prstGeom prst="rect">
             <a:avLst/>
@@ -4056,7 +4256,7 @@
               <a:buNone/>
             </a:pPr>
             <a:r>
-              <a:rPr lang="en-US" sz="1400" dirty="0">
+              <a:rPr lang="en-US" sz="1300" dirty="0">
                 <a:solidFill>
                   <a:srgbClr val="FFFFFF"/>
                 </a:solidFill>
@@ -4066,28 +4266,50 @@
               </a:rPr>
               <a:t>Vous ne contrôlez pas vraiment vos fonds</a:t>
             </a:r>
-            <a:endParaRPr lang="en-US" sz="1400" dirty="0"/>
-          </a:p>
-        </p:txBody>
-      </p:sp>
-      <p:sp>
-        <p:nvSpPr>
-          <p:cNvPr id="12" name="Text 10"/>
-          <p:cNvSpPr txBox="1"/>
-          <p:nvPr/>
-        </p:nvSpPr>
-        <p:spPr>
-          <a:xfrm>
-            <a:off x="731520" y="4187952"/>
-            <a:ext cx="457200" cy="548640"/>
+            <a:endParaRPr lang="en-US" sz="1300" dirty="0"/>
+          </a:p>
+        </p:txBody>
+      </p:sp>
+      <p:sp>
+        <p:nvSpPr>
+          <p:cNvPr id="17" name="Shape 14"/>
+          <p:cNvSpPr/>
+          <p:nvPr/>
+        </p:nvSpPr>
+        <p:spPr>
+          <a:xfrm>
+            <a:off x="731520" y="4023360"/>
+            <a:ext cx="7680960" cy="548640"/>
           </a:xfrm>
           <a:prstGeom prst="roundRect">
             <a:avLst>
-              <a:gd name="adj" fmla="val 50000"/>
+              <a:gd name="adj" fmla="val 13333"/>
             </a:avLst>
           </a:prstGeom>
           <a:solidFill>
-            <a:srgbClr val="00BFA6"/>
+            <a:srgbClr val="0F1419"/>
+          </a:solidFill>
+          <a:ln/>
+        </p:spPr>
+      </p:sp>
+      <p:sp>
+        <p:nvSpPr>
+          <p:cNvPr id="18" name="Text 15"/>
+          <p:cNvSpPr txBox="1"/>
+          <p:nvPr/>
+        </p:nvSpPr>
+        <p:spPr>
+          <a:xfrm>
+            <a:off x="914400" y="4023360"/>
+            <a:ext cx="411480" cy="548640"/>
+          </a:xfrm>
+          <a:prstGeom prst="roundRect">
+            <a:avLst>
+              <a:gd name="adj" fmla="val 48889"/>
+            </a:avLst>
+          </a:prstGeom>
+          <a:solidFill>
+            <a:srgbClr val="EF4444"/>
           </a:solidFill>
           <a:ln/>
         </p:spPr>
@@ -4099,7 +4321,7 @@
               <a:buNone/>
             </a:pPr>
             <a:r>
-              <a:rPr lang="en-US" sz="1600" b="1" dirty="0">
+              <a:rPr lang="en-US" sz="1500" b="1" dirty="0">
                 <a:solidFill>
                   <a:srgbClr val="0F1419"/>
                 </a:solidFill>
@@ -4109,20 +4331,20 @@
               </a:rPr>
               <a:t>5</a:t>
             </a:r>
-            <a:endParaRPr lang="en-US" sz="1600" dirty="0"/>
-          </a:p>
-        </p:txBody>
-      </p:sp>
-      <p:sp>
-        <p:nvSpPr>
-          <p:cNvPr id="13" name="Text 11"/>
-          <p:cNvSpPr txBox="1"/>
-          <p:nvPr/>
-        </p:nvSpPr>
-        <p:spPr>
-          <a:xfrm>
-            <a:off x="1371600" y="4187952"/>
-            <a:ext cx="7040880" cy="548640"/>
+            <a:endParaRPr lang="en-US" sz="1500" dirty="0"/>
+          </a:p>
+        </p:txBody>
+      </p:sp>
+      <p:sp>
+        <p:nvSpPr>
+          <p:cNvPr id="19" name="Text 16"/>
+          <p:cNvSpPr txBox="1"/>
+          <p:nvPr/>
+        </p:nvSpPr>
+        <p:spPr>
+          <a:xfrm>
+            <a:off x="1508760" y="4023360"/>
+            <a:ext cx="6766560" cy="548640"/>
           </a:xfrm>
           <a:prstGeom prst="rect">
             <a:avLst/>
@@ -4138,7 +4360,7 @@
               <a:buNone/>
             </a:pPr>
             <a:r>
-              <a:rPr lang="en-US" sz="1400" dirty="0">
+              <a:rPr lang="en-US" sz="1300" dirty="0">
                 <a:solidFill>
                   <a:srgbClr val="FFFFFF"/>
                 </a:solidFill>
@@ -4148,7 +4370,7 @@
               </a:rPr>
               <a:t>Si la plateforme fait faillite (comme FTX en 2022), vos fonds sont bloqués voire perdus</a:t>
             </a:r>
-            <a:endParaRPr lang="en-US" sz="1400" dirty="0"/>
+            <a:endParaRPr lang="en-US" sz="1300" dirty="0"/>
           </a:p>
         </p:txBody>
       </p:sp>
@@ -4184,35 +4406,105 @@
           <a:chExt cx="0" cy="0"/>
         </a:xfrm>
       </p:grpSpPr>
-      <p:sp>
-        <p:nvSpPr>
-          <p:cNvPr id="2" name="Shape 0"/>
+      <p:pic>
+        <p:nvPicPr>
+          <p:cNvPr id="2" name="Image 0" descr="preencoded.png">    </p:cNvPr>
+          <p:cNvPicPr>
+            <a:picLocks noChangeAspect="1"/>
+          </p:cNvPicPr>
+          <p:nvPr/>
+        </p:nvPicPr>
+        <p:blipFill>
+          <a:blip r:embed="rId1"/>
+          <a:stretch>
+            <a:fillRect/>
+          </a:stretch>
+        </p:blipFill>
+        <p:spPr>
+          <a:xfrm>
+            <a:off x="7315200" y="548640"/>
+            <a:ext cx="1280160" cy="1280160"/>
+          </a:xfrm>
+          <a:prstGeom prst="rect">
+            <a:avLst/>
+          </a:prstGeom>
+        </p:spPr>
+      </p:pic>
+      <p:pic>
+        <p:nvPicPr>
+          <p:cNvPr id="3" name="Image 1" descr="preencoded.png">    </p:cNvPr>
+          <p:cNvPicPr>
+            <a:picLocks noChangeAspect="1"/>
+          </p:cNvPicPr>
+          <p:nvPr/>
+        </p:nvPicPr>
+        <p:blipFill>
+          <a:blip r:embed="rId2"/>
+          <a:stretch>
+            <a:fillRect/>
+          </a:stretch>
+        </p:blipFill>
+        <p:spPr>
+          <a:xfrm>
+            <a:off x="7772400" y="2011680"/>
+            <a:ext cx="822960" cy="822960"/>
+          </a:xfrm>
+          <a:prstGeom prst="rect">
+            <a:avLst/>
+          </a:prstGeom>
+        </p:spPr>
+      </p:pic>
+      <p:sp>
+        <p:nvSpPr>
+          <p:cNvPr id="4" name="Shape 0"/>
           <p:cNvSpPr/>
           <p:nvPr/>
         </p:nvSpPr>
         <p:spPr>
           <a:xfrm>
-            <a:off x="548640" y="914400"/>
-            <a:ext cx="45720" cy="2560320"/>
-          </a:xfrm>
-          <a:prstGeom prst="rect">
+            <a:off x="6583680" y="-274320"/>
+            <a:ext cx="3200400" cy="3200400"/>
+          </a:xfrm>
+          <a:prstGeom prst="ellipse">
             <a:avLst/>
           </a:prstGeom>
           <a:solidFill>
-            <a:srgbClr val="00BFA6"/>
+            <a:srgbClr val="EF4444">
+              <a:alpha val="6000"/>
+            </a:srgbClr>
           </a:solidFill>
           <a:ln/>
         </p:spPr>
       </p:sp>
       <p:sp>
         <p:nvSpPr>
-          <p:cNvPr id="3" name="Text 1"/>
-          <p:cNvSpPr txBox="1"/>
-          <p:nvPr/>
-        </p:nvSpPr>
-        <p:spPr>
-          <a:xfrm>
-            <a:off x="822960" y="1097280"/>
+          <p:cNvPr id="5" name="Shape 1"/>
+          <p:cNvSpPr/>
+          <p:nvPr/>
+        </p:nvSpPr>
+        <p:spPr>
+          <a:xfrm>
+            <a:off x="731520" y="914400"/>
+            <a:ext cx="45720" cy="2194560"/>
+          </a:xfrm>
+          <a:prstGeom prst="rect">
+            <a:avLst/>
+          </a:prstGeom>
+          <a:solidFill>
+            <a:srgbClr val="EF4444"/>
+          </a:solidFill>
+          <a:ln/>
+        </p:spPr>
+      </p:sp>
+      <p:sp>
+        <p:nvSpPr>
+          <p:cNvPr id="6" name="Text 2"/>
+          <p:cNvSpPr txBox="1"/>
+          <p:nvPr/>
+        </p:nvSpPr>
+        <p:spPr>
+          <a:xfrm>
+            <a:off x="960120" y="914400"/>
             <a:ext cx="2743200" cy="365760"/>
           </a:xfrm>
           <a:prstGeom prst="rect">
@@ -4231,13 +4523,13 @@
             <a:r>
               <a:rPr lang="en-US" sz="1200" b="1" spc="200" kern="0" dirty="0">
                 <a:solidFill>
-                  <a:srgbClr val="00BFA6"/>
-                </a:solidFill>
-                <a:latin typeface="Calibri" pitchFamily="34" charset="0"/>
-                <a:ea typeface="Calibri" pitchFamily="34" charset="-122"/>
-                <a:cs typeface="Calibri" pitchFamily="34" charset="-120"/>
-              </a:rPr>
-              <a:t>Lecon 2 / 3</a:t>
+                  <a:srgbClr val="EF4444"/>
+                </a:solidFill>
+                <a:latin typeface="Calibri" pitchFamily="34" charset="0"/>
+                <a:ea typeface="Calibri" pitchFamily="34" charset="-122"/>
+                <a:cs typeface="Calibri" pitchFamily="34" charset="-120"/>
+              </a:rPr>
+              <a:t>Leçon 2 / 3</a:t>
             </a:r>
             <a:endParaRPr lang="en-US" sz="1200" dirty="0"/>
           </a:p>
@@ -4245,14 +4537,14 @@
       </p:sp>
       <p:sp>
         <p:nvSpPr>
-          <p:cNvPr id="4" name="Text 2"/>
-          <p:cNvSpPr txBox="1"/>
-          <p:nvPr/>
-        </p:nvSpPr>
-        <p:spPr>
-          <a:xfrm>
-            <a:off x="822960" y="1645920"/>
-            <a:ext cx="7498080" cy="1280160"/>
+          <p:cNvPr id="7" name="Text 3"/>
+          <p:cNvSpPr txBox="1"/>
+          <p:nvPr/>
+        </p:nvSpPr>
+        <p:spPr>
+          <a:xfrm>
+            <a:off x="960120" y="1371600"/>
+            <a:ext cx="6217920" cy="1463040"/>
           </a:xfrm>
           <a:prstGeom prst="rect">
             <a:avLst/>
@@ -4268,7 +4560,7 @@
               <a:buNone/>
             </a:pPr>
             <a:r>
-              <a:rPr lang="en-US" sz="3000" b="1" dirty="0">
+              <a:rPr lang="en-US" sz="2800" b="1" dirty="0">
                 <a:solidFill>
                   <a:srgbClr val="FFFFFF"/>
                 </a:solidFill>
@@ -4278,19 +4570,19 @@
               </a:rPr>
               <a:t>Créer un wallet Trust Wallet — pas à pas</a:t>
             </a:r>
-            <a:endParaRPr lang="en-US" sz="3000" dirty="0"/>
-          </a:p>
-        </p:txBody>
-      </p:sp>
-      <p:sp>
-        <p:nvSpPr>
-          <p:cNvPr id="5" name="Text 3"/>
-          <p:cNvSpPr txBox="1"/>
-          <p:nvPr/>
-        </p:nvSpPr>
-        <p:spPr>
-          <a:xfrm>
-            <a:off x="822960" y="4206240"/>
+            <a:endParaRPr lang="en-US" sz="2800" dirty="0"/>
+          </a:p>
+        </p:txBody>
+      </p:sp>
+      <p:sp>
+        <p:nvSpPr>
+          <p:cNvPr id="8" name="Text 4"/>
+          <p:cNvSpPr txBox="1"/>
+          <p:nvPr/>
+        </p:nvSpPr>
+        <p:spPr>
+          <a:xfrm>
+            <a:off x="960120" y="4114800"/>
             <a:ext cx="5486400" cy="320040"/>
           </a:xfrm>
           <a:prstGeom prst="rect">
@@ -4355,7 +4647,53 @@
       </p:grpSpPr>
       <p:sp>
         <p:nvSpPr>
-          <p:cNvPr id="2" name="Text 0"/>
+          <p:cNvPr id="2" name="Shape 0"/>
+          <p:cNvSpPr/>
+          <p:nvPr/>
+        </p:nvSpPr>
+        <p:spPr>
+          <a:xfrm>
+            <a:off x="7955280" y="182880"/>
+            <a:ext cx="640080" cy="640080"/>
+          </a:xfrm>
+          <a:prstGeom prst="ellipse">
+            <a:avLst/>
+          </a:prstGeom>
+          <a:solidFill>
+            <a:srgbClr val="EF4444">
+              <a:alpha val="12000"/>
+            </a:srgbClr>
+          </a:solidFill>
+          <a:ln/>
+        </p:spPr>
+      </p:sp>
+      <p:pic>
+        <p:nvPicPr>
+          <p:cNvPr id="3" name="Image 0" descr="preencoded.png">    </p:cNvPr>
+          <p:cNvPicPr>
+            <a:picLocks noChangeAspect="1"/>
+          </p:cNvPicPr>
+          <p:nvPr/>
+        </p:nvPicPr>
+        <p:blipFill>
+          <a:blip r:embed="rId1"/>
+          <a:stretch>
+            <a:fillRect/>
+          </a:stretch>
+        </p:blipFill>
+        <p:spPr>
+          <a:xfrm>
+            <a:off x="8028432" y="256032"/>
+            <a:ext cx="493776" cy="493776"/>
+          </a:xfrm>
+          <a:prstGeom prst="rect">
+            <a:avLst/>
+          </a:prstGeom>
+        </p:spPr>
+      </p:pic>
+      <p:sp>
+        <p:nvSpPr>
+          <p:cNvPr id="4" name="Text 1"/>
           <p:cNvSpPr txBox="1"/>
           <p:nvPr/>
         </p:nvSpPr>
@@ -4390,15 +4728,57 @@
                 <a:ea typeface="Calibri" pitchFamily="34" charset="-122"/>
                 <a:cs typeface="Calibri" pitchFamily="34" charset="-120"/>
               </a:rPr>
-              <a:t>Trust Wallet est le portefeuille non-custodial le plus populaire au monde (&gt;60 millions d'utilisateurs). Il supporte tous les grands réseaux (Tron, Ethereum, BNB Chain, Solana, ...</a:t>
+              <a:t>Trust Wallet est le portefeuille non-custodial le plus populaire au monde (&gt;60 millions d'utilisateurs).</a:t>
             </a:r>
             <a:endParaRPr lang="en-US" sz="1400" dirty="0"/>
           </a:p>
-        </p:txBody>
-      </p:sp>
-      <p:sp>
-        <p:nvSpPr>
-          <p:cNvPr id="3" name="Text 1"/>
+          <a:p>
+            <a:pPr marL="342900" indent="-342900">
+              <a:spcAft>
+                <a:spcPts val="800"/>
+              </a:spcAft>
+              <a:buSzPct val="100000"/>
+              <a:buChar char="•"/>
+            </a:pPr>
+            <a:r>
+              <a:rPr lang="en-US" sz="1400" dirty="0">
+                <a:solidFill>
+                  <a:srgbClr val="FFFFFF"/>
+                </a:solidFill>
+                <a:latin typeface="Calibri" pitchFamily="34" charset="0"/>
+                <a:ea typeface="Calibri" pitchFamily="34" charset="-122"/>
+                <a:cs typeface="Calibri" pitchFamily="34" charset="-120"/>
+              </a:rPr>
+              <a:t>Il supporte tous les grands réseaux (Tron, Ethereum, BNB Chain, Solana, Polygon…).</a:t>
+            </a:r>
+            <a:endParaRPr lang="en-US" sz="1400" dirty="0"/>
+          </a:p>
+          <a:p>
+            <a:pPr marL="342900" indent="-342900">
+              <a:spcAft>
+                <a:spcPts val="800"/>
+              </a:spcAft>
+              <a:buSzPct val="100000"/>
+              <a:buChar char="•"/>
+            </a:pPr>
+            <a:r>
+              <a:rPr lang="en-US" sz="1400" dirty="0">
+                <a:solidFill>
+                  <a:srgbClr val="FFFFFF"/>
+                </a:solidFill>
+                <a:latin typeface="Calibri" pitchFamily="34" charset="0"/>
+                <a:ea typeface="Calibri" pitchFamily="34" charset="-122"/>
+                <a:cs typeface="Calibri" pitchFamily="34" charset="-120"/>
+              </a:rPr>
+              <a:t>Gratuit, open-source, disponible sur mobile.</a:t>
+            </a:r>
+            <a:endParaRPr lang="en-US" sz="1400" dirty="0"/>
+          </a:p>
+        </p:txBody>
+      </p:sp>
+      <p:sp>
+        <p:nvSpPr>
+          <p:cNvPr id="5" name="Text 2"/>
           <p:cNvSpPr txBox="1"/>
           <p:nvPr/>
         </p:nvSpPr>
@@ -4429,7 +4809,7 @@
                 <a:ea typeface="Calibri" pitchFamily="34" charset="-122"/>
                 <a:cs typeface="Calibri" pitchFamily="34" charset="-120"/>
               </a:rPr>
-              <a:t>Module 7 — Lecon 2</a:t>
+              <a:t>Module 7 — Leçon 2</a:t>
             </a:r>
             <a:endParaRPr lang="en-US" sz="900" dirty="0"/>
           </a:p>
@@ -4475,8 +4855,8 @@
         </p:nvSpPr>
         <p:spPr>
           <a:xfrm>
-            <a:off x="731520" y="365760"/>
-            <a:ext cx="7680960" cy="548640"/>
+            <a:off x="731520" y="274320"/>
+            <a:ext cx="7680960" cy="502920"/>
           </a:xfrm>
           <a:prstGeom prst="rect">
             <a:avLst/>
@@ -4492,9 +4872,9 @@
               <a:buNone/>
             </a:pPr>
             <a:r>
-              <a:rPr lang="en-US" sz="2200" b="1" dirty="0">
-                <a:solidFill>
-                  <a:srgbClr val="00BFA6"/>
+              <a:rPr lang="en-US" sz="2000" b="1" dirty="0">
+                <a:solidFill>
+                  <a:srgbClr val="EF4444"/>
                 </a:solidFill>
                 <a:latin typeface="Calibri" pitchFamily="34" charset="0"/>
                 <a:ea typeface="Calibri" pitchFamily="34" charset="-122"/>
@@ -4502,7 +4882,7 @@
               </a:rPr>
               <a:t>Étape 1 — Télécharger l'application</a:t>
             </a:r>
-            <a:endParaRPr lang="en-US" sz="2200" dirty="0"/>
+            <a:endParaRPr lang="en-US" sz="2000" dirty="0"/>
           </a:p>
         </p:txBody>
       </p:sp>
@@ -4514,8 +4894,8 @@
         </p:nvSpPr>
         <p:spPr>
           <a:xfrm>
-            <a:off x="731520" y="1051560"/>
-            <a:ext cx="7680960" cy="3657600"/>
+            <a:off x="731520" y="1005840"/>
+            <a:ext cx="4206240" cy="3474720"/>
           </a:xfrm>
           <a:prstGeom prst="rect">
             <a:avLst/>
@@ -4529,13 +4909,13 @@
           <a:p>
             <a:pPr marL="342900" indent="-342900">
               <a:spcAft>
-                <a:spcPts val="800"/>
+                <a:spcPts val="600"/>
               </a:spcAft>
               <a:buSzPct val="100000"/>
               <a:buChar char="•"/>
             </a:pPr>
             <a:r>
-              <a:rPr lang="en-US" sz="1400" dirty="0">
+              <a:rPr lang="en-US" sz="1300" dirty="0">
                 <a:solidFill>
                   <a:srgbClr val="FFFFFF"/>
                 </a:solidFill>
@@ -4545,18 +4925,18 @@
               </a:rPr>
               <a:t>Allez sur trustwallet.com et téléchargez l'app :</a:t>
             </a:r>
-            <a:endParaRPr lang="en-US" sz="1400" dirty="0"/>
+            <a:endParaRPr lang="en-US" sz="1300" dirty="0"/>
           </a:p>
           <a:p>
             <a:pPr marL="342900" indent="-342900">
               <a:spcAft>
-                <a:spcPts val="800"/>
+                <a:spcPts val="600"/>
               </a:spcAft>
               <a:buSzPct val="100000"/>
               <a:buChar char="•"/>
             </a:pPr>
             <a:r>
-              <a:rPr lang="en-US" sz="1400" dirty="0">
+              <a:rPr lang="en-US" sz="1300" dirty="0">
                 <a:solidFill>
                   <a:srgbClr val="FFFFFF"/>
                 </a:solidFill>
@@ -4566,18 +4946,82 @@
               </a:rPr>
               <a:t>iPhone : App Store</a:t>
             </a:r>
-            <a:endParaRPr lang="en-US" sz="1400" dirty="0"/>
-          </a:p>
-          <a:p>
-            <a:pPr marL="342900" indent="-342900">
-              <a:spcAft>
-                <a:spcPts val="800"/>
-              </a:spcAft>
-              <a:buSzPct val="100000"/>
-              <a:buChar char="•"/>
-            </a:pPr>
-            <a:r>
-              <a:rPr lang="en-US" sz="1400" dirty="0">
+            <a:endParaRPr lang="en-US" sz="1300" dirty="0"/>
+          </a:p>
+        </p:txBody>
+      </p:sp>
+      <p:sp>
+        <p:nvSpPr>
+          <p:cNvPr id="4" name="Shape 2"/>
+          <p:cNvSpPr/>
+          <p:nvPr/>
+        </p:nvSpPr>
+        <p:spPr>
+          <a:xfrm>
+            <a:off x="5120640" y="1005840"/>
+            <a:ext cx="3474720" cy="640080"/>
+          </a:xfrm>
+          <a:prstGeom prst="roundRect">
+            <a:avLst>
+              <a:gd name="adj" fmla="val 14286"/>
+            </a:avLst>
+          </a:prstGeom>
+          <a:solidFill>
+            <a:srgbClr val="1A2332"/>
+          </a:solidFill>
+          <a:ln/>
+        </p:spPr>
+      </p:sp>
+      <p:pic>
+        <p:nvPicPr>
+          <p:cNvPr id="5" name="Image 0" descr="preencoded.png">    </p:cNvPr>
+          <p:cNvPicPr>
+            <a:picLocks noChangeAspect="1"/>
+          </p:cNvPicPr>
+          <p:nvPr/>
+        </p:nvPicPr>
+        <p:blipFill>
+          <a:blip r:embed="rId1"/>
+          <a:stretch>
+            <a:fillRect/>
+          </a:stretch>
+        </p:blipFill>
+        <p:spPr>
+          <a:xfrm>
+            <a:off x="5257800" y="1106424"/>
+            <a:ext cx="438912" cy="438912"/>
+          </a:xfrm>
+          <a:prstGeom prst="rect">
+            <a:avLst/>
+          </a:prstGeom>
+        </p:spPr>
+      </p:pic>
+      <p:sp>
+        <p:nvSpPr>
+          <p:cNvPr id="6" name="Text 3"/>
+          <p:cNvSpPr txBox="1"/>
+          <p:nvPr/>
+        </p:nvSpPr>
+        <p:spPr>
+          <a:xfrm>
+            <a:off x="5806440" y="1005840"/>
+            <a:ext cx="2651760" cy="640080"/>
+          </a:xfrm>
+          <a:prstGeom prst="rect">
+            <a:avLst/>
+          </a:prstGeom>
+          <a:noFill/>
+          <a:ln/>
+        </p:spPr>
+        <p:txBody>
+          <a:bodyPr wrap="square" lIns="0" tIns="0" rIns="0" bIns="0" rtlCol="0" anchor="ctr"/>
+          <a:lstStyle/>
+          <a:p>
+            <a:pPr indent="0" marL="0">
+              <a:buNone/>
+            </a:pPr>
+            <a:r>
+              <a:rPr lang="en-US" sz="1200" dirty="0">
                 <a:solidFill>
                   <a:srgbClr val="FFFFFF"/>
                 </a:solidFill>
@@ -4587,18 +5031,82 @@
               </a:rPr>
               <a:t>Android : Google Play</a:t>
             </a:r>
-            <a:endParaRPr lang="en-US" sz="1400" dirty="0"/>
-          </a:p>
-          <a:p>
-            <a:pPr marL="342900" indent="-342900">
-              <a:spcAft>
-                <a:spcPts val="800"/>
-              </a:spcAft>
-              <a:buSzPct val="100000"/>
-              <a:buChar char="•"/>
-            </a:pPr>
-            <a:r>
-              <a:rPr lang="en-US" sz="1400" dirty="0">
+            <a:endParaRPr lang="en-US" sz="1200" dirty="0"/>
+          </a:p>
+        </p:txBody>
+      </p:sp>
+      <p:sp>
+        <p:nvSpPr>
+          <p:cNvPr id="7" name="Shape 4"/>
+          <p:cNvSpPr/>
+          <p:nvPr/>
+        </p:nvSpPr>
+        <p:spPr>
+          <a:xfrm>
+            <a:off x="5120640" y="1737360"/>
+            <a:ext cx="3474720" cy="640080"/>
+          </a:xfrm>
+          <a:prstGeom prst="roundRect">
+            <a:avLst>
+              <a:gd name="adj" fmla="val 14286"/>
+            </a:avLst>
+          </a:prstGeom>
+          <a:solidFill>
+            <a:srgbClr val="1A2332"/>
+          </a:solidFill>
+          <a:ln/>
+        </p:spPr>
+      </p:sp>
+      <p:pic>
+        <p:nvPicPr>
+          <p:cNvPr id="8" name="Image 1" descr="preencoded.png">    </p:cNvPr>
+          <p:cNvPicPr>
+            <a:picLocks noChangeAspect="1"/>
+          </p:cNvPicPr>
+          <p:nvPr/>
+        </p:nvPicPr>
+        <p:blipFill>
+          <a:blip r:embed="rId2"/>
+          <a:stretch>
+            <a:fillRect/>
+          </a:stretch>
+        </p:blipFill>
+        <p:spPr>
+          <a:xfrm>
+            <a:off x="5257800" y="1837944"/>
+            <a:ext cx="438912" cy="438912"/>
+          </a:xfrm>
+          <a:prstGeom prst="rect">
+            <a:avLst/>
+          </a:prstGeom>
+        </p:spPr>
+      </p:pic>
+      <p:sp>
+        <p:nvSpPr>
+          <p:cNvPr id="9" name="Text 5"/>
+          <p:cNvSpPr txBox="1"/>
+          <p:nvPr/>
+        </p:nvSpPr>
+        <p:spPr>
+          <a:xfrm>
+            <a:off x="5806440" y="1737360"/>
+            <a:ext cx="2651760" cy="640080"/>
+          </a:xfrm>
+          <a:prstGeom prst="rect">
+            <a:avLst/>
+          </a:prstGeom>
+          <a:noFill/>
+          <a:ln/>
+        </p:spPr>
+        <p:txBody>
+          <a:bodyPr wrap="square" lIns="0" tIns="0" rIns="0" bIns="0" rtlCol="0" anchor="ctr"/>
+          <a:lstStyle/>
+          <a:p>
+            <a:pPr indent="0" marL="0">
+              <a:buNone/>
+            </a:pPr>
+            <a:r>
+              <a:rPr lang="en-US" sz="1200" dirty="0">
                 <a:solidFill>
                   <a:srgbClr val="FFFFFF"/>
                 </a:solidFill>
@@ -4606,48 +5114,9 @@
                 <a:ea typeface="Calibri" pitchFamily="34" charset="-122"/>
                 <a:cs typeface="Calibri" pitchFamily="34" charset="-120"/>
               </a:rPr>
-              <a:t>⚠️ ATTENTION : ne téléchargez JAMAIS depuis un lien qu'on vous envoie sur WhatsApp ou Telegram. Toujours depuis les stores officiels. Il existe des fausses versions qui volent v...</a:t>
-            </a:r>
-            <a:endParaRPr lang="en-US" sz="1400" dirty="0"/>
-          </a:p>
-        </p:txBody>
-      </p:sp>
-      <p:sp>
-        <p:nvSpPr>
-          <p:cNvPr id="4" name="Text 2"/>
-          <p:cNvSpPr txBox="1"/>
-          <p:nvPr/>
-        </p:nvSpPr>
-        <p:spPr>
-          <a:xfrm>
-            <a:off x="731520" y="4709160"/>
-            <a:ext cx="7680960" cy="274320"/>
-          </a:xfrm>
-          <a:prstGeom prst="rect">
-            <a:avLst/>
-          </a:prstGeom>
-          <a:noFill/>
-          <a:ln/>
-        </p:spPr>
-        <p:txBody>
-          <a:bodyPr wrap="square" lIns="0" tIns="0" rIns="0" bIns="0" rtlCol="0" anchor="ctr"/>
-          <a:lstStyle/>
-          <a:p>
-            <a:pPr algn="r" indent="0" marL="0">
-              <a:buNone/>
-            </a:pPr>
-            <a:r>
-              <a:rPr lang="en-US" sz="900" dirty="0">
-                <a:solidFill>
-                  <a:srgbClr val="64748B"/>
-                </a:solidFill>
-                <a:latin typeface="Calibri" pitchFamily="34" charset="0"/>
-                <a:ea typeface="Calibri" pitchFamily="34" charset="-122"/>
-                <a:cs typeface="Calibri" pitchFamily="34" charset="-120"/>
-              </a:rPr>
-              <a:t>Module 7 — Lecon 2</a:t>
-            </a:r>
-            <a:endParaRPr lang="en-US" sz="900" dirty="0"/>
+              <a:t>⚠️ ATTENTION : ne téléchargez JAMAIS depuis un lien qu'on vous envoie sur Wha...</a:t>
+            </a:r>
+            <a:endParaRPr lang="en-US" sz="1200" dirty="0"/>
           </a:p>
         </p:txBody>
       </p:sp>
@@ -4685,14 +5154,60 @@
       </p:grpSpPr>
       <p:sp>
         <p:nvSpPr>
-          <p:cNvPr id="2" name="Text 0"/>
-          <p:cNvSpPr txBox="1"/>
-          <p:nvPr/>
-        </p:nvSpPr>
-        <p:spPr>
-          <a:xfrm>
-            <a:off x="731520" y="365760"/>
-            <a:ext cx="7680960" cy="548640"/>
+          <p:cNvPr id="2" name="Shape 0"/>
+          <p:cNvSpPr/>
+          <p:nvPr/>
+        </p:nvSpPr>
+        <p:spPr>
+          <a:xfrm>
+            <a:off x="7955280" y="182880"/>
+            <a:ext cx="640080" cy="640080"/>
+          </a:xfrm>
+          <a:prstGeom prst="ellipse">
+            <a:avLst/>
+          </a:prstGeom>
+          <a:solidFill>
+            <a:srgbClr val="EF4444">
+              <a:alpha val="12000"/>
+            </a:srgbClr>
+          </a:solidFill>
+          <a:ln/>
+        </p:spPr>
+      </p:sp>
+      <p:pic>
+        <p:nvPicPr>
+          <p:cNvPr id="3" name="Image 0" descr="preencoded.png">    </p:cNvPr>
+          <p:cNvPicPr>
+            <a:picLocks noChangeAspect="1"/>
+          </p:cNvPicPr>
+          <p:nvPr/>
+        </p:nvPicPr>
+        <p:blipFill>
+          <a:blip r:embed="rId1"/>
+          <a:stretch>
+            <a:fillRect/>
+          </a:stretch>
+        </p:blipFill>
+        <p:spPr>
+          <a:xfrm>
+            <a:off x="8028432" y="256032"/>
+            <a:ext cx="493776" cy="493776"/>
+          </a:xfrm>
+          <a:prstGeom prst="rect">
+            <a:avLst/>
+          </a:prstGeom>
+        </p:spPr>
+      </p:pic>
+      <p:sp>
+        <p:nvSpPr>
+          <p:cNvPr id="4" name="Text 1"/>
+          <p:cNvSpPr txBox="1"/>
+          <p:nvPr/>
+        </p:nvSpPr>
+        <p:spPr>
+          <a:xfrm>
+            <a:off x="731520" y="274320"/>
+            <a:ext cx="7132320" cy="502920"/>
           </a:xfrm>
           <a:prstGeom prst="rect">
             <a:avLst/>
@@ -4708,9 +5223,9 @@
               <a:buNone/>
             </a:pPr>
             <a:r>
-              <a:rPr lang="en-US" sz="2200" b="1" dirty="0">
-                <a:solidFill>
-                  <a:srgbClr val="00BFA6"/>
+              <a:rPr lang="en-US" sz="2000" b="1" dirty="0">
+                <a:solidFill>
+                  <a:srgbClr val="EF4444"/>
                 </a:solidFill>
                 <a:latin typeface="Calibri" pitchFamily="34" charset="0"/>
                 <a:ea typeface="Calibri" pitchFamily="34" charset="-122"/>
@@ -4718,19 +5233,19 @@
               </a:rPr>
               <a:t>Étape 2 — Ouvrir un nouveau wallet</a:t>
             </a:r>
-            <a:endParaRPr lang="en-US" sz="2200" dirty="0"/>
-          </a:p>
-        </p:txBody>
-      </p:sp>
-      <p:sp>
-        <p:nvSpPr>
-          <p:cNvPr id="3" name="Text 1"/>
-          <p:cNvSpPr txBox="1"/>
-          <p:nvPr/>
-        </p:nvSpPr>
-        <p:spPr>
-          <a:xfrm>
-            <a:off x="731520" y="1051560"/>
+            <a:endParaRPr lang="en-US" sz="2000" dirty="0"/>
+          </a:p>
+        </p:txBody>
+      </p:sp>
+      <p:sp>
+        <p:nvSpPr>
+          <p:cNvPr id="5" name="Text 2"/>
+          <p:cNvSpPr txBox="1"/>
+          <p:nvPr/>
+        </p:nvSpPr>
+        <p:spPr>
+          <a:xfrm>
+            <a:off x="731520" y="960120"/>
             <a:ext cx="7680960" cy="3657600"/>
           </a:xfrm>
           <a:prstGeom prst="rect">
@@ -4788,7 +5303,7 @@
       </p:sp>
       <p:sp>
         <p:nvSpPr>
-          <p:cNvPr id="4" name="Text 2"/>
+          <p:cNvPr id="6" name="Text 3"/>
           <p:cNvSpPr txBox="1"/>
           <p:nvPr/>
         </p:nvSpPr>
@@ -4819,7 +5334,7 @@
                 <a:ea typeface="Calibri" pitchFamily="34" charset="-122"/>
                 <a:cs typeface="Calibri" pitchFamily="34" charset="-120"/>
               </a:rPr>
-              <a:t>Module 7 — Lecon 2</a:t>
+              <a:t>Module 7 — Leçon 2</a:t>
             </a:r>
             <a:endParaRPr lang="en-US" sz="900" dirty="0"/>
           </a:p>
@@ -4859,14 +5374,60 @@
       </p:grpSpPr>
       <p:sp>
         <p:nvSpPr>
-          <p:cNvPr id="2" name="Text 0"/>
-          <p:cNvSpPr txBox="1"/>
-          <p:nvPr/>
-        </p:nvSpPr>
-        <p:spPr>
-          <a:xfrm>
-            <a:off x="731520" y="365760"/>
-            <a:ext cx="7680960" cy="548640"/>
+          <p:cNvPr id="2" name="Shape 0"/>
+          <p:cNvSpPr/>
+          <p:nvPr/>
+        </p:nvSpPr>
+        <p:spPr>
+          <a:xfrm>
+            <a:off x="7955280" y="182880"/>
+            <a:ext cx="640080" cy="640080"/>
+          </a:xfrm>
+          <a:prstGeom prst="ellipse">
+            <a:avLst/>
+          </a:prstGeom>
+          <a:solidFill>
+            <a:srgbClr val="EF4444">
+              <a:alpha val="12000"/>
+            </a:srgbClr>
+          </a:solidFill>
+          <a:ln/>
+        </p:spPr>
+      </p:sp>
+      <p:pic>
+        <p:nvPicPr>
+          <p:cNvPr id="3" name="Image 0" descr="preencoded.png">    </p:cNvPr>
+          <p:cNvPicPr>
+            <a:picLocks noChangeAspect="1"/>
+          </p:cNvPicPr>
+          <p:nvPr/>
+        </p:nvPicPr>
+        <p:blipFill>
+          <a:blip r:embed="rId1"/>
+          <a:stretch>
+            <a:fillRect/>
+          </a:stretch>
+        </p:blipFill>
+        <p:spPr>
+          <a:xfrm>
+            <a:off x="8028432" y="256032"/>
+            <a:ext cx="493776" cy="493776"/>
+          </a:xfrm>
+          <a:prstGeom prst="rect">
+            <a:avLst/>
+          </a:prstGeom>
+        </p:spPr>
+      </p:pic>
+      <p:sp>
+        <p:nvSpPr>
+          <p:cNvPr id="4" name="Text 1"/>
+          <p:cNvSpPr txBox="1"/>
+          <p:nvPr/>
+        </p:nvSpPr>
+        <p:spPr>
+          <a:xfrm>
+            <a:off x="731520" y="274320"/>
+            <a:ext cx="7132320" cy="502920"/>
           </a:xfrm>
           <a:prstGeom prst="rect">
             <a:avLst/>
@@ -4882,9 +5443,9 @@
               <a:buNone/>
             </a:pPr>
             <a:r>
-              <a:rPr lang="en-US" sz="2200" b="1" dirty="0">
-                <a:solidFill>
-                  <a:srgbClr val="00BFA6"/>
+              <a:rPr lang="en-US" sz="2000" b="1" dirty="0">
+                <a:solidFill>
+                  <a:srgbClr val="EF4444"/>
                 </a:solidFill>
                 <a:latin typeface="Calibri" pitchFamily="34" charset="0"/>
                 <a:ea typeface="Calibri" pitchFamily="34" charset="-122"/>
@@ -4892,19 +5453,19 @@
               </a:rPr>
               <a:t>Étape 3 — Notez votre phrase secrète (LE MOMENT CRITIQUE)</a:t>
             </a:r>
-            <a:endParaRPr lang="en-US" sz="2200" dirty="0"/>
-          </a:p>
-        </p:txBody>
-      </p:sp>
-      <p:sp>
-        <p:nvSpPr>
-          <p:cNvPr id="3" name="Text 1"/>
-          <p:cNvSpPr txBox="1"/>
-          <p:nvPr/>
-        </p:nvSpPr>
-        <p:spPr>
-          <a:xfrm>
-            <a:off x="731520" y="1051560"/>
+            <a:endParaRPr lang="en-US" sz="2000" dirty="0"/>
+          </a:p>
+        </p:txBody>
+      </p:sp>
+      <p:sp>
+        <p:nvSpPr>
+          <p:cNvPr id="5" name="Text 2"/>
+          <p:cNvSpPr txBox="1"/>
+          <p:nvPr/>
+        </p:nvSpPr>
+        <p:spPr>
+          <a:xfrm>
+            <a:off x="731520" y="960120"/>
             <a:ext cx="7680960" cy="3657600"/>
           </a:xfrm>
           <a:prstGeom prst="rect">
@@ -5004,7 +5565,7 @@
       </p:sp>
       <p:sp>
         <p:nvSpPr>
-          <p:cNvPr id="4" name="Text 2"/>
+          <p:cNvPr id="6" name="Text 3"/>
           <p:cNvSpPr txBox="1"/>
           <p:nvPr/>
         </p:nvSpPr>
@@ -5035,7 +5596,7 @@
                 <a:ea typeface="Calibri" pitchFamily="34" charset="-122"/>
                 <a:cs typeface="Calibri" pitchFamily="34" charset="-120"/>
               </a:rPr>
-              <a:t>Module 7 — Lecon 2</a:t>
+              <a:t>Module 7 — Leçon 2</a:t>
             </a:r>
             <a:endParaRPr lang="en-US" sz="900" dirty="0"/>
           </a:p>
@@ -5081,8 +5642,8 @@
         </p:nvSpPr>
         <p:spPr>
           <a:xfrm>
-            <a:off x="731520" y="365760"/>
-            <a:ext cx="7680960" cy="548640"/>
+            <a:off x="731520" y="274320"/>
+            <a:ext cx="7680960" cy="502920"/>
           </a:xfrm>
           <a:prstGeom prst="rect">
             <a:avLst/>
@@ -5098,9 +5659,9 @@
               <a:buNone/>
             </a:pPr>
             <a:r>
-              <a:rPr lang="en-US" sz="2200" b="1" dirty="0">
-                <a:solidFill>
-                  <a:srgbClr val="00BFA6"/>
+              <a:rPr lang="en-US" sz="2000" b="1" dirty="0">
+                <a:solidFill>
+                  <a:srgbClr val="EF4444"/>
                 </a:solidFill>
                 <a:latin typeface="Calibri" pitchFamily="34" charset="0"/>
                 <a:ea typeface="Calibri" pitchFamily="34" charset="-122"/>
@@ -5108,7 +5669,7 @@
               </a:rPr>
               <a:t>Ces 12 mots SONT votre wallet.</a:t>
             </a:r>
-            <a:endParaRPr lang="en-US" sz="2200" dirty="0"/>
+            <a:endParaRPr lang="en-US" sz="2000" dirty="0"/>
           </a:p>
         </p:txBody>
       </p:sp>
@@ -5120,8 +5681,8 @@
         </p:nvSpPr>
         <p:spPr>
           <a:xfrm>
-            <a:off x="731520" y="1051560"/>
-            <a:ext cx="7680960" cy="3657600"/>
+            <a:off x="731520" y="1005840"/>
+            <a:ext cx="4206240" cy="3474720"/>
           </a:xfrm>
           <a:prstGeom prst="rect">
             <a:avLst/>
@@ -5135,13 +5696,13 @@
           <a:p>
             <a:pPr marL="342900" indent="-342900">
               <a:spcAft>
-                <a:spcPts val="800"/>
+                <a:spcPts val="600"/>
               </a:spcAft>
               <a:buSzPct val="100000"/>
               <a:buChar char="•"/>
             </a:pPr>
             <a:r>
-              <a:rPr lang="en-US" sz="1400" dirty="0">
+              <a:rPr lang="en-US" sz="1300" dirty="0">
                 <a:solidFill>
                   <a:srgbClr val="FFFFFF"/>
                 </a:solidFill>
@@ -5151,18 +5712,18 @@
               </a:rPr>
               <a:t>Quiconque possède ces 12 mots peut vider votre wallet en 30 secondes.</a:t>
             </a:r>
-            <a:endParaRPr lang="en-US" sz="1400" dirty="0"/>
+            <a:endParaRPr lang="en-US" sz="1300" dirty="0"/>
           </a:p>
           <a:p>
             <a:pPr marL="342900" indent="-342900">
               <a:spcAft>
-                <a:spcPts val="800"/>
+                <a:spcPts val="600"/>
               </a:spcAft>
               <a:buSzPct val="100000"/>
               <a:buChar char="•"/>
             </a:pPr>
             <a:r>
-              <a:rPr lang="en-US" sz="1400" dirty="0">
+              <a:rPr lang="en-US" sz="1300" dirty="0">
                 <a:solidFill>
                   <a:srgbClr val="FFFFFF"/>
                 </a:solidFill>
@@ -5172,18 +5733,18 @@
               </a:rPr>
               <a:t>Si vous les perdez, vous perdez tout — définitivement, sans recours.</a:t>
             </a:r>
-            <a:endParaRPr lang="en-US" sz="1400" dirty="0"/>
+            <a:endParaRPr lang="en-US" sz="1300" dirty="0"/>
           </a:p>
           <a:p>
             <a:pPr marL="342900" indent="-342900">
               <a:spcAft>
-                <a:spcPts val="800"/>
+                <a:spcPts val="600"/>
               </a:spcAft>
               <a:buSzPct val="100000"/>
               <a:buChar char="•"/>
             </a:pPr>
             <a:r>
-              <a:rPr lang="en-US" sz="1400" dirty="0">
+              <a:rPr lang="en-US" sz="1300" dirty="0">
                 <a:solidFill>
                   <a:srgbClr val="FFFFFF"/>
                 </a:solidFill>
@@ -5193,18 +5754,18 @@
               </a:rPr>
               <a:t>Comment les stocker :</a:t>
             </a:r>
-            <a:endParaRPr lang="en-US" sz="1400" dirty="0"/>
+            <a:endParaRPr lang="en-US" sz="1300" dirty="0"/>
           </a:p>
           <a:p>
             <a:pPr marL="342900" indent="-342900">
               <a:spcAft>
-                <a:spcPts val="800"/>
+                <a:spcPts val="600"/>
               </a:spcAft>
               <a:buSzPct val="100000"/>
               <a:buChar char="•"/>
             </a:pPr>
             <a:r>
-              <a:rPr lang="en-US" sz="1400" dirty="0">
+              <a:rPr lang="en-US" sz="1300" dirty="0">
                 <a:solidFill>
                   <a:srgbClr val="FFFFFF"/>
                 </a:solidFill>
@@ -5214,18 +5775,82 @@
               </a:rPr>
               <a:t>✅ Écrivez-les à la main sur un papier. Deux copies, dans deux endroits différents.</a:t>
             </a:r>
-            <a:endParaRPr lang="en-US" sz="1400" dirty="0"/>
-          </a:p>
-          <a:p>
-            <a:pPr marL="342900" indent="-342900">
-              <a:spcAft>
-                <a:spcPts val="800"/>
-              </a:spcAft>
-              <a:buSzPct val="100000"/>
-              <a:buChar char="•"/>
-            </a:pPr>
-            <a:r>
-              <a:rPr lang="en-US" sz="1400" dirty="0">
+            <a:endParaRPr lang="en-US" sz="1300" dirty="0"/>
+          </a:p>
+        </p:txBody>
+      </p:sp>
+      <p:sp>
+        <p:nvSpPr>
+          <p:cNvPr id="4" name="Shape 2"/>
+          <p:cNvSpPr/>
+          <p:nvPr/>
+        </p:nvSpPr>
+        <p:spPr>
+          <a:xfrm>
+            <a:off x="5120640" y="1005840"/>
+            <a:ext cx="3474720" cy="640080"/>
+          </a:xfrm>
+          <a:prstGeom prst="roundRect">
+            <a:avLst>
+              <a:gd name="adj" fmla="val 14286"/>
+            </a:avLst>
+          </a:prstGeom>
+          <a:solidFill>
+            <a:srgbClr val="1A2332"/>
+          </a:solidFill>
+          <a:ln/>
+        </p:spPr>
+      </p:sp>
+      <p:pic>
+        <p:nvPicPr>
+          <p:cNvPr id="5" name="Image 0" descr="preencoded.png">    </p:cNvPr>
+          <p:cNvPicPr>
+            <a:picLocks noChangeAspect="1"/>
+          </p:cNvPicPr>
+          <p:nvPr/>
+        </p:nvPicPr>
+        <p:blipFill>
+          <a:blip r:embed="rId1"/>
+          <a:stretch>
+            <a:fillRect/>
+          </a:stretch>
+        </p:blipFill>
+        <p:spPr>
+          <a:xfrm>
+            <a:off x="5257800" y="1106424"/>
+            <a:ext cx="438912" cy="438912"/>
+          </a:xfrm>
+          <a:prstGeom prst="rect">
+            <a:avLst/>
+          </a:prstGeom>
+        </p:spPr>
+      </p:pic>
+      <p:sp>
+        <p:nvSpPr>
+          <p:cNvPr id="6" name="Text 3"/>
+          <p:cNvSpPr txBox="1"/>
+          <p:nvPr/>
+        </p:nvSpPr>
+        <p:spPr>
+          <a:xfrm>
+            <a:off x="5806440" y="1005840"/>
+            <a:ext cx="2651760" cy="640080"/>
+          </a:xfrm>
+          <a:prstGeom prst="rect">
+            <a:avLst/>
+          </a:prstGeom>
+          <a:noFill/>
+          <a:ln/>
+        </p:spPr>
+        <p:txBody>
+          <a:bodyPr wrap="square" lIns="0" tIns="0" rIns="0" bIns="0" rtlCol="0" anchor="ctr"/>
+          <a:lstStyle/>
+          <a:p>
+            <a:pPr indent="0" marL="0">
+              <a:buNone/>
+            </a:pPr>
+            <a:r>
+              <a:rPr lang="en-US" sz="1200" dirty="0">
                 <a:solidFill>
                   <a:srgbClr val="FFFFFF"/>
                 </a:solidFill>
@@ -5233,20 +5858,84 @@
                 <a:ea typeface="Calibri" pitchFamily="34" charset="-122"/>
                 <a:cs typeface="Calibri" pitchFamily="34" charset="-120"/>
               </a:rPr>
-              <a:t>✅ Envisagez une plaque en métal (indestructible, résiste au feu et à l'eau) pour les gros montants.</a:t>
-            </a:r>
-            <a:endParaRPr lang="en-US" sz="1400" dirty="0"/>
-          </a:p>
-          <a:p>
-            <a:pPr marL="342900" indent="-342900">
-              <a:spcAft>
-                <a:spcPts val="800"/>
-              </a:spcAft>
-              <a:buSzPct val="100000"/>
-              <a:buChar char="•"/>
-            </a:pPr>
-            <a:r>
-              <a:rPr lang="en-US" sz="1400" dirty="0">
+              <a:t>✅ Envisagez une plaque en métal (indestructible, résiste au feu et à l'eau) p...</a:t>
+            </a:r>
+            <a:endParaRPr lang="en-US" sz="1200" dirty="0"/>
+          </a:p>
+        </p:txBody>
+      </p:sp>
+      <p:sp>
+        <p:nvSpPr>
+          <p:cNvPr id="7" name="Shape 4"/>
+          <p:cNvSpPr/>
+          <p:nvPr/>
+        </p:nvSpPr>
+        <p:spPr>
+          <a:xfrm>
+            <a:off x="5120640" y="1737360"/>
+            <a:ext cx="3474720" cy="640080"/>
+          </a:xfrm>
+          <a:prstGeom prst="roundRect">
+            <a:avLst>
+              <a:gd name="adj" fmla="val 14286"/>
+            </a:avLst>
+          </a:prstGeom>
+          <a:solidFill>
+            <a:srgbClr val="1A2332"/>
+          </a:solidFill>
+          <a:ln/>
+        </p:spPr>
+      </p:sp>
+      <p:pic>
+        <p:nvPicPr>
+          <p:cNvPr id="8" name="Image 1" descr="preencoded.png">    </p:cNvPr>
+          <p:cNvPicPr>
+            <a:picLocks noChangeAspect="1"/>
+          </p:cNvPicPr>
+          <p:nvPr/>
+        </p:nvPicPr>
+        <p:blipFill>
+          <a:blip r:embed="rId2"/>
+          <a:stretch>
+            <a:fillRect/>
+          </a:stretch>
+        </p:blipFill>
+        <p:spPr>
+          <a:xfrm>
+            <a:off x="5257800" y="1837944"/>
+            <a:ext cx="438912" cy="438912"/>
+          </a:xfrm>
+          <a:prstGeom prst="rect">
+            <a:avLst/>
+          </a:prstGeom>
+        </p:spPr>
+      </p:pic>
+      <p:sp>
+        <p:nvSpPr>
+          <p:cNvPr id="9" name="Text 5"/>
+          <p:cNvSpPr txBox="1"/>
+          <p:nvPr/>
+        </p:nvSpPr>
+        <p:spPr>
+          <a:xfrm>
+            <a:off x="5806440" y="1737360"/>
+            <a:ext cx="2651760" cy="640080"/>
+          </a:xfrm>
+          <a:prstGeom prst="rect">
+            <a:avLst/>
+          </a:prstGeom>
+          <a:noFill/>
+          <a:ln/>
+        </p:spPr>
+        <p:txBody>
+          <a:bodyPr wrap="square" lIns="0" tIns="0" rIns="0" bIns="0" rtlCol="0" anchor="ctr"/>
+          <a:lstStyle/>
+          <a:p>
+            <a:pPr indent="0" marL="0">
+              <a:buNone/>
+            </a:pPr>
+            <a:r>
+              <a:rPr lang="en-US" sz="1200" dirty="0">
                 <a:solidFill>
                   <a:srgbClr val="FFFFFF"/>
                 </a:solidFill>
@@ -5254,20 +5943,84 @@
                 <a:ea typeface="Calibri" pitchFamily="34" charset="-122"/>
                 <a:cs typeface="Calibri" pitchFamily="34" charset="-120"/>
               </a:rPr>
-              <a:t>✅ Vérifiez que vous les avez bien écrits : l'app vous demandera de re-taper les mots dans l'ordre.</a:t>
-            </a:r>
-            <a:endParaRPr lang="en-US" sz="1400" dirty="0"/>
-          </a:p>
-          <a:p>
-            <a:pPr marL="342900" indent="-342900">
-              <a:spcAft>
-                <a:spcPts val="800"/>
-              </a:spcAft>
-              <a:buSzPct val="100000"/>
-              <a:buChar char="•"/>
-            </a:pPr>
-            <a:r>
-              <a:rPr lang="en-US" sz="1400" dirty="0">
+              <a:t>✅ Vérifiez que vous les avez bien écrits : l'app vous demandera de re-taper l...</a:t>
+            </a:r>
+            <a:endParaRPr lang="en-US" sz="1200" dirty="0"/>
+          </a:p>
+        </p:txBody>
+      </p:sp>
+      <p:sp>
+        <p:nvSpPr>
+          <p:cNvPr id="10" name="Shape 6"/>
+          <p:cNvSpPr/>
+          <p:nvPr/>
+        </p:nvSpPr>
+        <p:spPr>
+          <a:xfrm>
+            <a:off x="5120640" y="2468880"/>
+            <a:ext cx="3474720" cy="640080"/>
+          </a:xfrm>
+          <a:prstGeom prst="roundRect">
+            <a:avLst>
+              <a:gd name="adj" fmla="val 14286"/>
+            </a:avLst>
+          </a:prstGeom>
+          <a:solidFill>
+            <a:srgbClr val="1A2332"/>
+          </a:solidFill>
+          <a:ln/>
+        </p:spPr>
+      </p:sp>
+      <p:pic>
+        <p:nvPicPr>
+          <p:cNvPr id="11" name="Image 2" descr="preencoded.png">    </p:cNvPr>
+          <p:cNvPicPr>
+            <a:picLocks noChangeAspect="1"/>
+          </p:cNvPicPr>
+          <p:nvPr/>
+        </p:nvPicPr>
+        <p:blipFill>
+          <a:blip r:embed="rId3"/>
+          <a:stretch>
+            <a:fillRect/>
+          </a:stretch>
+        </p:blipFill>
+        <p:spPr>
+          <a:xfrm>
+            <a:off x="5257800" y="2569464"/>
+            <a:ext cx="438912" cy="438912"/>
+          </a:xfrm>
+          <a:prstGeom prst="rect">
+            <a:avLst/>
+          </a:prstGeom>
+        </p:spPr>
+      </p:pic>
+      <p:sp>
+        <p:nvSpPr>
+          <p:cNvPr id="12" name="Text 7"/>
+          <p:cNvSpPr txBox="1"/>
+          <p:nvPr/>
+        </p:nvSpPr>
+        <p:spPr>
+          <a:xfrm>
+            <a:off x="5806440" y="2468880"/>
+            <a:ext cx="2651760" cy="640080"/>
+          </a:xfrm>
+          <a:prstGeom prst="rect">
+            <a:avLst/>
+          </a:prstGeom>
+          <a:noFill/>
+          <a:ln/>
+        </p:spPr>
+        <p:txBody>
+          <a:bodyPr wrap="square" lIns="0" tIns="0" rIns="0" bIns="0" rtlCol="0" anchor="ctr"/>
+          <a:lstStyle/>
+          <a:p>
+            <a:pPr indent="0" marL="0">
+              <a:buNone/>
+            </a:pPr>
+            <a:r>
+              <a:rPr lang="en-US" sz="1200" dirty="0">
                 <a:solidFill>
                   <a:srgbClr val="FFFFFF"/>
                 </a:solidFill>
@@ -5277,46 +6030,7 @@
               </a:rPr>
               <a:t>❌ NE prenez PAS de photo avec votre téléphone.</a:t>
             </a:r>
-            <a:endParaRPr lang="en-US" sz="1400" dirty="0"/>
-          </a:p>
-        </p:txBody>
-      </p:sp>
-      <p:sp>
-        <p:nvSpPr>
-          <p:cNvPr id="4" name="Text 2"/>
-          <p:cNvSpPr txBox="1"/>
-          <p:nvPr/>
-        </p:nvSpPr>
-        <p:spPr>
-          <a:xfrm>
-            <a:off x="731520" y="4709160"/>
-            <a:ext cx="7680960" cy="274320"/>
-          </a:xfrm>
-          <a:prstGeom prst="rect">
-            <a:avLst/>
-          </a:prstGeom>
-          <a:noFill/>
-          <a:ln/>
-        </p:spPr>
-        <p:txBody>
-          <a:bodyPr wrap="square" lIns="0" tIns="0" rIns="0" bIns="0" rtlCol="0" anchor="ctr"/>
-          <a:lstStyle/>
-          <a:p>
-            <a:pPr algn="r" indent="0" marL="0">
-              <a:buNone/>
-            </a:pPr>
-            <a:r>
-              <a:rPr lang="en-US" sz="900" dirty="0">
-                <a:solidFill>
-                  <a:srgbClr val="64748B"/>
-                </a:solidFill>
-                <a:latin typeface="Calibri" pitchFamily="34" charset="0"/>
-                <a:ea typeface="Calibri" pitchFamily="34" charset="-122"/>
-                <a:cs typeface="Calibri" pitchFamily="34" charset="-120"/>
-              </a:rPr>
-              <a:t>Module 7 — Lecon 2</a:t>
-            </a:r>
-            <a:endParaRPr lang="en-US" sz="900" dirty="0"/>
+            <a:endParaRPr lang="en-US" sz="1200" dirty="0"/>
           </a:p>
         </p:txBody>
       </p:sp>
@@ -5360,8 +6074,8 @@
         </p:nvSpPr>
         <p:spPr>
           <a:xfrm>
-            <a:off x="731520" y="365760"/>
-            <a:ext cx="7680960" cy="548640"/>
+            <a:off x="731520" y="274320"/>
+            <a:ext cx="7680960" cy="502920"/>
           </a:xfrm>
           <a:prstGeom prst="rect">
             <a:avLst/>
@@ -5377,9 +6091,9 @@
               <a:buNone/>
             </a:pPr>
             <a:r>
-              <a:rPr lang="en-US" sz="2200" b="1" dirty="0">
-                <a:solidFill>
-                  <a:srgbClr val="00BFA6"/>
+              <a:rPr lang="en-US" sz="2000" b="1" dirty="0">
+                <a:solidFill>
+                  <a:srgbClr val="EF4444"/>
                 </a:solidFill>
                 <a:latin typeface="Calibri" pitchFamily="34" charset="0"/>
                 <a:ea typeface="Calibri" pitchFamily="34" charset="-122"/>
@@ -5387,20 +6101,66 @@
               </a:rPr>
               <a:t>Ces 12 mots SONT votre wallet.</a:t>
             </a:r>
-            <a:endParaRPr lang="en-US" sz="2200" dirty="0"/>
-          </a:p>
-        </p:txBody>
-      </p:sp>
-      <p:sp>
-        <p:nvSpPr>
-          <p:cNvPr id="3" name="Text 1"/>
-          <p:cNvSpPr txBox="1"/>
-          <p:nvPr/>
-        </p:nvSpPr>
-        <p:spPr>
-          <a:xfrm>
-            <a:off x="731520" y="1051560"/>
-            <a:ext cx="7680960" cy="3657600"/>
+            <a:endParaRPr lang="en-US" sz="2000" dirty="0"/>
+          </a:p>
+        </p:txBody>
+      </p:sp>
+      <p:sp>
+        <p:nvSpPr>
+          <p:cNvPr id="3" name="Shape 1"/>
+          <p:cNvSpPr/>
+          <p:nvPr/>
+        </p:nvSpPr>
+        <p:spPr>
+          <a:xfrm>
+            <a:off x="731520" y="1005840"/>
+            <a:ext cx="3657600" cy="1371600"/>
+          </a:xfrm>
+          <a:prstGeom prst="roundRect">
+            <a:avLst>
+              <a:gd name="adj" fmla="val 6667"/>
+            </a:avLst>
+          </a:prstGeom>
+          <a:solidFill>
+            <a:srgbClr val="1A2332"/>
+          </a:solidFill>
+          <a:ln/>
+        </p:spPr>
+      </p:sp>
+      <p:pic>
+        <p:nvPicPr>
+          <p:cNvPr id="4" name="Image 0" descr="preencoded.png">    </p:cNvPr>
+          <p:cNvPicPr>
+            <a:picLocks noChangeAspect="1"/>
+          </p:cNvPicPr>
+          <p:nvPr/>
+        </p:nvPicPr>
+        <p:blipFill>
+          <a:blip r:embed="rId1"/>
+          <a:stretch>
+            <a:fillRect/>
+          </a:stretch>
+        </p:blipFill>
+        <p:spPr>
+          <a:xfrm>
+            <a:off x="868680" y="1143000"/>
+            <a:ext cx="502920" cy="502920"/>
+          </a:xfrm>
+          <a:prstGeom prst="rect">
+            <a:avLst/>
+          </a:prstGeom>
+        </p:spPr>
+      </p:pic>
+      <p:sp>
+        <p:nvSpPr>
+          <p:cNvPr id="5" name="Text 2"/>
+          <p:cNvSpPr txBox="1"/>
+          <p:nvPr/>
+        </p:nvSpPr>
+        <p:spPr>
+          <a:xfrm>
+            <a:off x="868680" y="1719072"/>
+            <a:ext cx="3383280" cy="320040"/>
           </a:xfrm>
           <a:prstGeom prst="rect">
             <a:avLst/>
@@ -5412,15 +6172,11 @@
           <a:bodyPr wrap="square" lIns="0" tIns="0" rIns="0" bIns="0" rtlCol="0" anchor="t"/>
           <a:lstStyle/>
           <a:p>
-            <a:pPr marL="342900" indent="-342900">
-              <a:spcAft>
-                <a:spcPts val="800"/>
-              </a:spcAft>
-              <a:buSzPct val="100000"/>
-              <a:buChar char="•"/>
-            </a:pPr>
-            <a:r>
-              <a:rPr lang="en-US" sz="1400" dirty="0">
+            <a:pPr indent="0" marL="0">
+              <a:buNone/>
+            </a:pPr>
+            <a:r>
+              <a:rPr lang="en-US" sz="1100" b="1" dirty="0">
                 <a:solidFill>
                   <a:srgbClr val="FFFFFF"/>
                 </a:solidFill>
@@ -5428,20 +6184,84 @@
                 <a:ea typeface="Calibri" pitchFamily="34" charset="-122"/>
                 <a:cs typeface="Calibri" pitchFamily="34" charset="-120"/>
               </a:rPr>
-              <a:t>❌ NE la stockez PAS dans Google Drive, iCloud, Dropbox, Notes.</a:t>
-            </a:r>
-            <a:endParaRPr lang="en-US" sz="1400" dirty="0"/>
-          </a:p>
-          <a:p>
-            <a:pPr marL="342900" indent="-342900">
-              <a:spcAft>
-                <a:spcPts val="800"/>
-              </a:spcAft>
-              <a:buSzPct val="100000"/>
-              <a:buChar char="•"/>
-            </a:pPr>
-            <a:r>
-              <a:rPr lang="en-US" sz="1400" dirty="0">
+              <a:t>❌ NE la stockez PAS dans Google Drive, iCloud, Dropbox, N...</a:t>
+            </a:r>
+            <a:endParaRPr lang="en-US" sz="1100" dirty="0"/>
+          </a:p>
+        </p:txBody>
+      </p:sp>
+      <p:sp>
+        <p:nvSpPr>
+          <p:cNvPr id="6" name="Shape 3"/>
+          <p:cNvSpPr/>
+          <p:nvPr/>
+        </p:nvSpPr>
+        <p:spPr>
+          <a:xfrm>
+            <a:off x="4754880" y="1005840"/>
+            <a:ext cx="3657600" cy="1371600"/>
+          </a:xfrm>
+          <a:prstGeom prst="roundRect">
+            <a:avLst>
+              <a:gd name="adj" fmla="val 6667"/>
+            </a:avLst>
+          </a:prstGeom>
+          <a:solidFill>
+            <a:srgbClr val="1A2332"/>
+          </a:solidFill>
+          <a:ln/>
+        </p:spPr>
+      </p:sp>
+      <p:pic>
+        <p:nvPicPr>
+          <p:cNvPr id="7" name="Image 1" descr="preencoded.png">    </p:cNvPr>
+          <p:cNvPicPr>
+            <a:picLocks noChangeAspect="1"/>
+          </p:cNvPicPr>
+          <p:nvPr/>
+        </p:nvPicPr>
+        <p:blipFill>
+          <a:blip r:embed="rId2"/>
+          <a:stretch>
+            <a:fillRect/>
+          </a:stretch>
+        </p:blipFill>
+        <p:spPr>
+          <a:xfrm>
+            <a:off x="4892040" y="1143000"/>
+            <a:ext cx="502920" cy="502920"/>
+          </a:xfrm>
+          <a:prstGeom prst="rect">
+            <a:avLst/>
+          </a:prstGeom>
+        </p:spPr>
+      </p:pic>
+      <p:sp>
+        <p:nvSpPr>
+          <p:cNvPr id="8" name="Text 4"/>
+          <p:cNvSpPr txBox="1"/>
+          <p:nvPr/>
+        </p:nvSpPr>
+        <p:spPr>
+          <a:xfrm>
+            <a:off x="4892040" y="1719072"/>
+            <a:ext cx="3383280" cy="320040"/>
+          </a:xfrm>
+          <a:prstGeom prst="rect">
+            <a:avLst/>
+          </a:prstGeom>
+          <a:noFill/>
+          <a:ln/>
+        </p:spPr>
+        <p:txBody>
+          <a:bodyPr wrap="square" lIns="0" tIns="0" rIns="0" bIns="0" rtlCol="0" anchor="t"/>
+          <a:lstStyle/>
+          <a:p>
+            <a:pPr indent="0" marL="0">
+              <a:buNone/>
+            </a:pPr>
+            <a:r>
+              <a:rPr lang="en-US" sz="1100" b="1" dirty="0">
                 <a:solidFill>
                   <a:srgbClr val="FFFFFF"/>
                 </a:solidFill>
@@ -5449,20 +6269,84 @@
                 <a:ea typeface="Calibri" pitchFamily="34" charset="-122"/>
                 <a:cs typeface="Calibri" pitchFamily="34" charset="-120"/>
               </a:rPr>
-              <a:t>❌ NE l'envoyez à PERSONNE — pas même par WhatsApp à vous-même.</a:t>
-            </a:r>
-            <a:endParaRPr lang="en-US" sz="1400" dirty="0"/>
-          </a:p>
-          <a:p>
-            <a:pPr marL="342900" indent="-342900">
-              <a:spcAft>
-                <a:spcPts val="800"/>
-              </a:spcAft>
-              <a:buSzPct val="100000"/>
-              <a:buChar char="•"/>
-            </a:pPr>
-            <a:r>
-              <a:rPr lang="en-US" sz="1400" dirty="0">
+              <a:t>❌ NE l'envoyez à PERSONNE — pas même par WhatsApp à vous-...</a:t>
+            </a:r>
+            <a:endParaRPr lang="en-US" sz="1100" dirty="0"/>
+          </a:p>
+        </p:txBody>
+      </p:sp>
+      <p:sp>
+        <p:nvSpPr>
+          <p:cNvPr id="9" name="Shape 5"/>
+          <p:cNvSpPr/>
+          <p:nvPr/>
+        </p:nvSpPr>
+        <p:spPr>
+          <a:xfrm>
+            <a:off x="731520" y="2514600"/>
+            <a:ext cx="3657600" cy="1371600"/>
+          </a:xfrm>
+          <a:prstGeom prst="roundRect">
+            <a:avLst>
+              <a:gd name="adj" fmla="val 6667"/>
+            </a:avLst>
+          </a:prstGeom>
+          <a:solidFill>
+            <a:srgbClr val="1A2332"/>
+          </a:solidFill>
+          <a:ln/>
+        </p:spPr>
+      </p:sp>
+      <p:pic>
+        <p:nvPicPr>
+          <p:cNvPr id="10" name="Image 2" descr="preencoded.png">    </p:cNvPr>
+          <p:cNvPicPr>
+            <a:picLocks noChangeAspect="1"/>
+          </p:cNvPicPr>
+          <p:nvPr/>
+        </p:nvPicPr>
+        <p:blipFill>
+          <a:blip r:embed="rId3"/>
+          <a:stretch>
+            <a:fillRect/>
+          </a:stretch>
+        </p:blipFill>
+        <p:spPr>
+          <a:xfrm>
+            <a:off x="868680" y="2651760"/>
+            <a:ext cx="502920" cy="502920"/>
+          </a:xfrm>
+          <a:prstGeom prst="rect">
+            <a:avLst/>
+          </a:prstGeom>
+        </p:spPr>
+      </p:pic>
+      <p:sp>
+        <p:nvSpPr>
+          <p:cNvPr id="11" name="Text 6"/>
+          <p:cNvSpPr txBox="1"/>
+          <p:nvPr/>
+        </p:nvSpPr>
+        <p:spPr>
+          <a:xfrm>
+            <a:off x="868680" y="3227832"/>
+            <a:ext cx="3383280" cy="320040"/>
+          </a:xfrm>
+          <a:prstGeom prst="rect">
+            <a:avLst/>
+          </a:prstGeom>
+          <a:noFill/>
+          <a:ln/>
+        </p:spPr>
+        <p:txBody>
+          <a:bodyPr wrap="square" lIns="0" tIns="0" rIns="0" bIns="0" rtlCol="0" anchor="t"/>
+          <a:lstStyle/>
+          <a:p>
+            <a:pPr indent="0" marL="0">
+              <a:buNone/>
+            </a:pPr>
+            <a:r>
+              <a:rPr lang="en-US" sz="1100" b="1" dirty="0">
                 <a:solidFill>
                   <a:srgbClr val="FFFFFF"/>
                 </a:solidFill>
@@ -5472,46 +6356,7 @@
               </a:rPr>
               <a:t>❌ NE la tapez PAS dans un formulaire en ligne.</a:t>
             </a:r>
-            <a:endParaRPr lang="en-US" sz="1400" dirty="0"/>
-          </a:p>
-        </p:txBody>
-      </p:sp>
-      <p:sp>
-        <p:nvSpPr>
-          <p:cNvPr id="4" name="Text 2"/>
-          <p:cNvSpPr txBox="1"/>
-          <p:nvPr/>
-        </p:nvSpPr>
-        <p:spPr>
-          <a:xfrm>
-            <a:off x="731520" y="4709160"/>
-            <a:ext cx="7680960" cy="274320"/>
-          </a:xfrm>
-          <a:prstGeom prst="rect">
-            <a:avLst/>
-          </a:prstGeom>
-          <a:noFill/>
-          <a:ln/>
-        </p:spPr>
-        <p:txBody>
-          <a:bodyPr wrap="square" lIns="0" tIns="0" rIns="0" bIns="0" rtlCol="0" anchor="ctr"/>
-          <a:lstStyle/>
-          <a:p>
-            <a:pPr algn="r" indent="0" marL="0">
-              <a:buNone/>
-            </a:pPr>
-            <a:r>
-              <a:rPr lang="en-US" sz="900" dirty="0">
-                <a:solidFill>
-                  <a:srgbClr val="64748B"/>
-                </a:solidFill>
-                <a:latin typeface="Calibri" pitchFamily="34" charset="0"/>
-                <a:ea typeface="Calibri" pitchFamily="34" charset="-122"/>
-                <a:cs typeface="Calibri" pitchFamily="34" charset="-120"/>
-              </a:rPr>
-              <a:t>Module 7 — Lecon 2</a:t>
-            </a:r>
-            <a:endParaRPr lang="en-US" sz="900" dirty="0"/>
+            <a:endParaRPr lang="en-US" sz="1100" dirty="0"/>
           </a:p>
         </p:txBody>
       </p:sp>
@@ -5549,14 +6394,60 @@
       </p:grpSpPr>
       <p:sp>
         <p:nvSpPr>
-          <p:cNvPr id="2" name="Text 0"/>
-          <p:cNvSpPr txBox="1"/>
-          <p:nvPr/>
-        </p:nvSpPr>
-        <p:spPr>
-          <a:xfrm>
-            <a:off x="731520" y="365760"/>
-            <a:ext cx="7680960" cy="548640"/>
+          <p:cNvPr id="2" name="Shape 0"/>
+          <p:cNvSpPr/>
+          <p:nvPr/>
+        </p:nvSpPr>
+        <p:spPr>
+          <a:xfrm>
+            <a:off x="7955280" y="182880"/>
+            <a:ext cx="640080" cy="640080"/>
+          </a:xfrm>
+          <a:prstGeom prst="ellipse">
+            <a:avLst/>
+          </a:prstGeom>
+          <a:solidFill>
+            <a:srgbClr val="EF4444">
+              <a:alpha val="12000"/>
+            </a:srgbClr>
+          </a:solidFill>
+          <a:ln/>
+        </p:spPr>
+      </p:sp>
+      <p:pic>
+        <p:nvPicPr>
+          <p:cNvPr id="3" name="Image 0" descr="preencoded.png">    </p:cNvPr>
+          <p:cNvPicPr>
+            <a:picLocks noChangeAspect="1"/>
+          </p:cNvPicPr>
+          <p:nvPr/>
+        </p:nvPicPr>
+        <p:blipFill>
+          <a:blip r:embed="rId1"/>
+          <a:stretch>
+            <a:fillRect/>
+          </a:stretch>
+        </p:blipFill>
+        <p:spPr>
+          <a:xfrm>
+            <a:off x="8028432" y="256032"/>
+            <a:ext cx="493776" cy="493776"/>
+          </a:xfrm>
+          <a:prstGeom prst="rect">
+            <a:avLst/>
+          </a:prstGeom>
+        </p:spPr>
+      </p:pic>
+      <p:sp>
+        <p:nvSpPr>
+          <p:cNvPr id="4" name="Text 1"/>
+          <p:cNvSpPr txBox="1"/>
+          <p:nvPr/>
+        </p:nvSpPr>
+        <p:spPr>
+          <a:xfrm>
+            <a:off x="731520" y="274320"/>
+            <a:ext cx="7132320" cy="502920"/>
           </a:xfrm>
           <a:prstGeom prst="rect">
             <a:avLst/>
@@ -5572,9 +6463,9 @@
               <a:buNone/>
             </a:pPr>
             <a:r>
-              <a:rPr lang="en-US" sz="2200" b="1" dirty="0">
-                <a:solidFill>
-                  <a:srgbClr val="00BFA6"/>
+              <a:rPr lang="en-US" sz="2000" b="1" dirty="0">
+                <a:solidFill>
+                  <a:srgbClr val="EF4444"/>
                 </a:solidFill>
                 <a:latin typeface="Calibri" pitchFamily="34" charset="0"/>
                 <a:ea typeface="Calibri" pitchFamily="34" charset="-122"/>
@@ -5582,19 +6473,19 @@
               </a:rPr>
               <a:t>Étape 4 — Vérifier</a:t>
             </a:r>
-            <a:endParaRPr lang="en-US" sz="2200" dirty="0"/>
-          </a:p>
-        </p:txBody>
-      </p:sp>
-      <p:sp>
-        <p:nvSpPr>
-          <p:cNvPr id="3" name="Text 1"/>
-          <p:cNvSpPr txBox="1"/>
-          <p:nvPr/>
-        </p:nvSpPr>
-        <p:spPr>
-          <a:xfrm>
-            <a:off x="731520" y="1051560"/>
+            <a:endParaRPr lang="en-US" sz="2000" dirty="0"/>
+          </a:p>
+        </p:txBody>
+      </p:sp>
+      <p:sp>
+        <p:nvSpPr>
+          <p:cNvPr id="5" name="Text 2"/>
+          <p:cNvSpPr txBox="1"/>
+          <p:nvPr/>
+        </p:nvSpPr>
+        <p:spPr>
+          <a:xfrm>
+            <a:off x="731520" y="960120"/>
             <a:ext cx="7680960" cy="3657600"/>
           </a:xfrm>
           <a:prstGeom prst="rect">
@@ -5631,7 +6522,7 @@
       </p:sp>
       <p:sp>
         <p:nvSpPr>
-          <p:cNvPr id="4" name="Text 2"/>
+          <p:cNvPr id="6" name="Text 3"/>
           <p:cNvSpPr txBox="1"/>
           <p:nvPr/>
         </p:nvSpPr>
@@ -5662,7 +6553,7 @@
                 <a:ea typeface="Calibri" pitchFamily="34" charset="-122"/>
                 <a:cs typeface="Calibri" pitchFamily="34" charset="-120"/>
               </a:rPr>
-              <a:t>Module 7 — Lecon 2</a:t>
+              <a:t>Module 7 — Leçon 2</a:t>
             </a:r>
             <a:endParaRPr lang="en-US" sz="900" dirty="0"/>
           </a:p>
@@ -5708,8 +6599,8 @@
         </p:nvSpPr>
         <p:spPr>
           <a:xfrm>
-            <a:off x="731520" y="365760"/>
-            <a:ext cx="7680960" cy="548640"/>
+            <a:off x="731520" y="274320"/>
+            <a:ext cx="7680960" cy="502920"/>
           </a:xfrm>
           <a:prstGeom prst="rect">
             <a:avLst/>
@@ -5725,9 +6616,9 @@
               <a:buNone/>
             </a:pPr>
             <a:r>
-              <a:rPr lang="en-US" sz="2200" b="1" dirty="0">
-                <a:solidFill>
-                  <a:srgbClr val="00BFA6"/>
+              <a:rPr lang="en-US" sz="2000" b="1" dirty="0">
+                <a:solidFill>
+                  <a:srgbClr val="EF4444"/>
                 </a:solidFill>
                 <a:latin typeface="Calibri" pitchFamily="34" charset="0"/>
                 <a:ea typeface="Calibri" pitchFamily="34" charset="-122"/>
@@ -5735,7 +6626,7 @@
               </a:rPr>
               <a:t>Étape 5 — Ajouter les tokens que vous voulez suivre</a:t>
             </a:r>
-            <a:endParaRPr lang="en-US" sz="2200" dirty="0"/>
+            <a:endParaRPr lang="en-US" sz="2000" dirty="0"/>
           </a:p>
         </p:txBody>
       </p:sp>
@@ -5747,8 +6638,8 @@
         </p:nvSpPr>
         <p:spPr>
           <a:xfrm>
-            <a:off x="731520" y="1051560"/>
-            <a:ext cx="7680960" cy="3657600"/>
+            <a:off x="731520" y="1005840"/>
+            <a:ext cx="4206240" cy="3474720"/>
           </a:xfrm>
           <a:prstGeom prst="rect">
             <a:avLst/>
@@ -5762,13 +6653,13 @@
           <a:p>
             <a:pPr marL="342900" indent="-342900">
               <a:spcAft>
-                <a:spcPts val="800"/>
+                <a:spcPts val="600"/>
               </a:spcAft>
               <a:buSzPct val="100000"/>
               <a:buChar char="•"/>
             </a:pPr>
             <a:r>
-              <a:rPr lang="en-US" sz="1400" dirty="0">
+              <a:rPr lang="en-US" sz="1300" dirty="0">
                 <a:solidFill>
                   <a:srgbClr val="FFFFFF"/>
                 </a:solidFill>
@@ -5778,18 +6669,18 @@
               </a:rPr>
               <a:t>Dans l'app, appuyez sur l'icône ⚙️ ou « Gérer les cryptos ». Activez :</a:t>
             </a:r>
-            <a:endParaRPr lang="en-US" sz="1400" dirty="0"/>
+            <a:endParaRPr lang="en-US" sz="1300" dirty="0"/>
           </a:p>
           <a:p>
             <a:pPr marL="342900" indent="-342900">
               <a:spcAft>
-                <a:spcPts val="800"/>
+                <a:spcPts val="600"/>
               </a:spcAft>
               <a:buSzPct val="100000"/>
               <a:buChar char="•"/>
             </a:pPr>
             <a:r>
-              <a:rPr lang="en-US" sz="1400" dirty="0">
+              <a:rPr lang="en-US" sz="1300" dirty="0">
                 <a:solidFill>
                   <a:srgbClr val="FFFFFF"/>
                 </a:solidFill>
@@ -5799,18 +6690,82 @@
               </a:rPr>
               <a:t>USDT sur Tron (TRC20)</a:t>
             </a:r>
-            <a:endParaRPr lang="en-US" sz="1400" dirty="0"/>
-          </a:p>
-          <a:p>
-            <a:pPr marL="342900" indent="-342900">
-              <a:spcAft>
-                <a:spcPts val="800"/>
-              </a:spcAft>
-              <a:buSzPct val="100000"/>
-              <a:buChar char="•"/>
-            </a:pPr>
-            <a:r>
-              <a:rPr lang="en-US" sz="1400" dirty="0">
+            <a:endParaRPr lang="en-US" sz="1300" dirty="0"/>
+          </a:p>
+        </p:txBody>
+      </p:sp>
+      <p:sp>
+        <p:nvSpPr>
+          <p:cNvPr id="4" name="Shape 2"/>
+          <p:cNvSpPr/>
+          <p:nvPr/>
+        </p:nvSpPr>
+        <p:spPr>
+          <a:xfrm>
+            <a:off x="5120640" y="1005840"/>
+            <a:ext cx="3474720" cy="640080"/>
+          </a:xfrm>
+          <a:prstGeom prst="roundRect">
+            <a:avLst>
+              <a:gd name="adj" fmla="val 14286"/>
+            </a:avLst>
+          </a:prstGeom>
+          <a:solidFill>
+            <a:srgbClr val="1A2332"/>
+          </a:solidFill>
+          <a:ln/>
+        </p:spPr>
+      </p:sp>
+      <p:pic>
+        <p:nvPicPr>
+          <p:cNvPr id="5" name="Image 0" descr="preencoded.png">    </p:cNvPr>
+          <p:cNvPicPr>
+            <a:picLocks noChangeAspect="1"/>
+          </p:cNvPicPr>
+          <p:nvPr/>
+        </p:nvPicPr>
+        <p:blipFill>
+          <a:blip r:embed="rId1"/>
+          <a:stretch>
+            <a:fillRect/>
+          </a:stretch>
+        </p:blipFill>
+        <p:spPr>
+          <a:xfrm>
+            <a:off x="5257800" y="1106424"/>
+            <a:ext cx="438912" cy="438912"/>
+          </a:xfrm>
+          <a:prstGeom prst="rect">
+            <a:avLst/>
+          </a:prstGeom>
+        </p:spPr>
+      </p:pic>
+      <p:sp>
+        <p:nvSpPr>
+          <p:cNvPr id="6" name="Text 3"/>
+          <p:cNvSpPr txBox="1"/>
+          <p:nvPr/>
+        </p:nvSpPr>
+        <p:spPr>
+          <a:xfrm>
+            <a:off x="5806440" y="1005840"/>
+            <a:ext cx="2651760" cy="640080"/>
+          </a:xfrm>
+          <a:prstGeom prst="rect">
+            <a:avLst/>
+          </a:prstGeom>
+          <a:noFill/>
+          <a:ln/>
+        </p:spPr>
+        <p:txBody>
+          <a:bodyPr wrap="square" lIns="0" tIns="0" rIns="0" bIns="0" rtlCol="0" anchor="ctr"/>
+          <a:lstStyle/>
+          <a:p>
+            <a:pPr indent="0" marL="0">
+              <a:buNone/>
+            </a:pPr>
+            <a:r>
+              <a:rPr lang="en-US" sz="1200" dirty="0">
                 <a:solidFill>
                   <a:srgbClr val="FFFFFF"/>
                 </a:solidFill>
@@ -5820,18 +6775,82 @@
               </a:rPr>
               <a:t>USDT sur BNB Chain (BEP20)</a:t>
             </a:r>
-            <a:endParaRPr lang="en-US" sz="1400" dirty="0"/>
-          </a:p>
-          <a:p>
-            <a:pPr marL="342900" indent="-342900">
-              <a:spcAft>
-                <a:spcPts val="800"/>
-              </a:spcAft>
-              <a:buSzPct val="100000"/>
-              <a:buChar char="•"/>
-            </a:pPr>
-            <a:r>
-              <a:rPr lang="en-US" sz="1400" dirty="0">
+            <a:endParaRPr lang="en-US" sz="1200" dirty="0"/>
+          </a:p>
+        </p:txBody>
+      </p:sp>
+      <p:sp>
+        <p:nvSpPr>
+          <p:cNvPr id="7" name="Shape 4"/>
+          <p:cNvSpPr/>
+          <p:nvPr/>
+        </p:nvSpPr>
+        <p:spPr>
+          <a:xfrm>
+            <a:off x="5120640" y="1737360"/>
+            <a:ext cx="3474720" cy="640080"/>
+          </a:xfrm>
+          <a:prstGeom prst="roundRect">
+            <a:avLst>
+              <a:gd name="adj" fmla="val 14286"/>
+            </a:avLst>
+          </a:prstGeom>
+          <a:solidFill>
+            <a:srgbClr val="1A2332"/>
+          </a:solidFill>
+          <a:ln/>
+        </p:spPr>
+      </p:sp>
+      <p:pic>
+        <p:nvPicPr>
+          <p:cNvPr id="8" name="Image 1" descr="preencoded.png">    </p:cNvPr>
+          <p:cNvPicPr>
+            <a:picLocks noChangeAspect="1"/>
+          </p:cNvPicPr>
+          <p:nvPr/>
+        </p:nvPicPr>
+        <p:blipFill>
+          <a:blip r:embed="rId2"/>
+          <a:stretch>
+            <a:fillRect/>
+          </a:stretch>
+        </p:blipFill>
+        <p:spPr>
+          <a:xfrm>
+            <a:off x="5257800" y="1837944"/>
+            <a:ext cx="438912" cy="438912"/>
+          </a:xfrm>
+          <a:prstGeom prst="rect">
+            <a:avLst/>
+          </a:prstGeom>
+        </p:spPr>
+      </p:pic>
+      <p:sp>
+        <p:nvSpPr>
+          <p:cNvPr id="9" name="Text 5"/>
+          <p:cNvSpPr txBox="1"/>
+          <p:nvPr/>
+        </p:nvSpPr>
+        <p:spPr>
+          <a:xfrm>
+            <a:off x="5806440" y="1737360"/>
+            <a:ext cx="2651760" cy="640080"/>
+          </a:xfrm>
+          <a:prstGeom prst="rect">
+            <a:avLst/>
+          </a:prstGeom>
+          <a:noFill/>
+          <a:ln/>
+        </p:spPr>
+        <p:txBody>
+          <a:bodyPr wrap="square" lIns="0" tIns="0" rIns="0" bIns="0" rtlCol="0" anchor="ctr"/>
+          <a:lstStyle/>
+          <a:p>
+            <a:pPr indent="0" marL="0">
+              <a:buNone/>
+            </a:pPr>
+            <a:r>
+              <a:rPr lang="en-US" sz="1200" dirty="0">
                 <a:solidFill>
                   <a:srgbClr val="FFFFFF"/>
                 </a:solidFill>
@@ -5839,48 +6858,9 @@
                 <a:ea typeface="Calibri" pitchFamily="34" charset="-122"/>
                 <a:cs typeface="Calibri" pitchFamily="34" charset="-120"/>
               </a:rPr>
-              <a:t>Votre wallet est prêt à recevoir des USDT. Copiez votre adresse Tron (elle commence par « T ») — c'est cette adresse que vous donnerez à Terex lors de votre achat.</a:t>
-            </a:r>
-            <a:endParaRPr lang="en-US" sz="1400" dirty="0"/>
-          </a:p>
-        </p:txBody>
-      </p:sp>
-      <p:sp>
-        <p:nvSpPr>
-          <p:cNvPr id="4" name="Text 2"/>
-          <p:cNvSpPr txBox="1"/>
-          <p:nvPr/>
-        </p:nvSpPr>
-        <p:spPr>
-          <a:xfrm>
-            <a:off x="731520" y="4709160"/>
-            <a:ext cx="7680960" cy="274320"/>
-          </a:xfrm>
-          <a:prstGeom prst="rect">
-            <a:avLst/>
-          </a:prstGeom>
-          <a:noFill/>
-          <a:ln/>
-        </p:spPr>
-        <p:txBody>
-          <a:bodyPr wrap="square" lIns="0" tIns="0" rIns="0" bIns="0" rtlCol="0" anchor="ctr"/>
-          <a:lstStyle/>
-          <a:p>
-            <a:pPr algn="r" indent="0" marL="0">
-              <a:buNone/>
-            </a:pPr>
-            <a:r>
-              <a:rPr lang="en-US" sz="900" dirty="0">
-                <a:solidFill>
-                  <a:srgbClr val="64748B"/>
-                </a:solidFill>
-                <a:latin typeface="Calibri" pitchFamily="34" charset="0"/>
-                <a:ea typeface="Calibri" pitchFamily="34" charset="-122"/>
-                <a:cs typeface="Calibri" pitchFamily="34" charset="-120"/>
-              </a:rPr>
-              <a:t>Module 7 — Lecon 2</a:t>
-            </a:r>
-            <a:endParaRPr lang="en-US" sz="900" dirty="0"/>
+              <a:t>Votre wallet est prêt à recevoir des USDT. Copiez votre adresse Tron (elle co...</a:t>
+            </a:r>
+            <a:endParaRPr lang="en-US" sz="1200" dirty="0"/>
           </a:p>
         </p:txBody>
       </p:sp>
@@ -5924,8 +6904,8 @@
         </p:nvSpPr>
         <p:spPr>
           <a:xfrm>
-            <a:off x="731520" y="457200"/>
-            <a:ext cx="2743200" cy="365760"/>
+            <a:off x="731520" y="365760"/>
+            <a:ext cx="2743200" cy="320040"/>
           </a:xfrm>
           <a:prstGeom prst="rect">
             <a:avLst/>
@@ -5943,7 +6923,7 @@
             <a:r>
               <a:rPr lang="en-US" sz="1200" b="1" spc="300" kern="0" dirty="0">
                 <a:solidFill>
-                  <a:srgbClr val="00BFA6"/>
+                  <a:srgbClr val="EF4444"/>
                 </a:solidFill>
                 <a:latin typeface="Calibri" pitchFamily="34" charset="0"/>
                 <a:ea typeface="Calibri" pitchFamily="34" charset="-122"/>
@@ -5963,7 +6943,7 @@
         </p:nvSpPr>
         <p:spPr>
           <a:xfrm>
-            <a:off x="731520" y="868680"/>
+            <a:off x="731520" y="731520"/>
             <a:ext cx="4572000" cy="457200"/>
           </a:xfrm>
           <a:prstGeom prst="rect">
@@ -5996,14 +6976,36 @@
       </p:sp>
       <p:sp>
         <p:nvSpPr>
-          <p:cNvPr id="4" name="Text 2"/>
-          <p:cNvSpPr txBox="1"/>
-          <p:nvPr/>
-        </p:nvSpPr>
-        <p:spPr>
-          <a:xfrm>
-            <a:off x="731520" y="1554480"/>
-            <a:ext cx="7680960" cy="3200400"/>
+          <p:cNvPr id="4" name="Shape 2"/>
+          <p:cNvSpPr/>
+          <p:nvPr/>
+        </p:nvSpPr>
+        <p:spPr>
+          <a:xfrm>
+            <a:off x="731520" y="1371600"/>
+            <a:ext cx="7680960" cy="475488"/>
+          </a:xfrm>
+          <a:prstGeom prst="roundRect">
+            <a:avLst>
+              <a:gd name="adj" fmla="val 15385"/>
+            </a:avLst>
+          </a:prstGeom>
+          <a:solidFill>
+            <a:srgbClr val="1A2332"/>
+          </a:solidFill>
+          <a:ln/>
+        </p:spPr>
+      </p:sp>
+      <p:sp>
+        <p:nvSpPr>
+          <p:cNvPr id="5" name="Text 3"/>
+          <p:cNvSpPr txBox="1"/>
+          <p:nvPr/>
+        </p:nvSpPr>
+        <p:spPr>
+          <a:xfrm>
+            <a:off x="868680" y="1371600"/>
+            <a:ext cx="320040" cy="475488"/>
           </a:xfrm>
           <a:prstGeom prst="rect">
             <a:avLst/>
@@ -6012,17 +7014,77 @@
           <a:ln/>
         </p:spPr>
         <p:txBody>
-          <a:bodyPr wrap="square" lIns="0" tIns="0" rIns="0" bIns="0" rtlCol="0" anchor="t"/>
+          <a:bodyPr wrap="square" lIns="0" tIns="0" rIns="0" bIns="0" rtlCol="0" anchor="ctr"/>
+          <a:lstStyle/>
+          <a:p>
+            <a:pPr algn="ctr" indent="0" marL="0">
+              <a:buNone/>
+            </a:pPr>
+            <a:r>
+              <a:rPr lang="en-US" sz="1300" b="1" dirty="0">
+                <a:solidFill>
+                  <a:srgbClr val="EF4444"/>
+                </a:solidFill>
+                <a:latin typeface="Calibri" pitchFamily="34" charset="0"/>
+                <a:ea typeface="Calibri" pitchFamily="34" charset="-122"/>
+                <a:cs typeface="Calibri" pitchFamily="34" charset="-120"/>
+              </a:rPr>
+              <a:t>1</a:t>
+            </a:r>
+            <a:endParaRPr lang="en-US" sz="1300" dirty="0"/>
+          </a:p>
+        </p:txBody>
+      </p:sp>
+      <p:pic>
+        <p:nvPicPr>
+          <p:cNvPr id="6" name="Image 0" descr="preencoded.png">    </p:cNvPr>
+          <p:cNvPicPr>
+            <a:picLocks noChangeAspect="1"/>
+          </p:cNvPicPr>
+          <p:nvPr/>
+        </p:nvPicPr>
+        <p:blipFill>
+          <a:blip r:embed="rId1"/>
+          <a:stretch>
+            <a:fillRect/>
+          </a:stretch>
+        </p:blipFill>
+        <p:spPr>
+          <a:xfrm>
+            <a:off x="1280160" y="1444752"/>
+            <a:ext cx="329184" cy="329184"/>
+          </a:xfrm>
+          <a:prstGeom prst="rect">
+            <a:avLst/>
+          </a:prstGeom>
+        </p:spPr>
+      </p:pic>
+      <p:sp>
+        <p:nvSpPr>
+          <p:cNvPr id="7" name="Text 4"/>
+          <p:cNvSpPr txBox="1"/>
+          <p:nvPr/>
+        </p:nvSpPr>
+        <p:spPr>
+          <a:xfrm>
+            <a:off x="1737360" y="1371600"/>
+            <a:ext cx="6492240" cy="475488"/>
+          </a:xfrm>
+          <a:prstGeom prst="rect">
+            <a:avLst/>
+          </a:prstGeom>
+          <a:noFill/>
+          <a:ln/>
+        </p:spPr>
+        <p:txBody>
+          <a:bodyPr wrap="square" lIns="0" tIns="0" rIns="0" bIns="0" rtlCol="0" anchor="ctr"/>
           <a:lstStyle/>
           <a:p>
             <a:pPr indent="0" marL="0">
-              <a:spcAft>
-                <a:spcPts val="1000"/>
-              </a:spcAft>
               <a:buNone/>
             </a:pPr>
             <a:r>
-              <a:rPr lang="en-US" sz="1500" dirty="0">
+              <a:rPr lang="en-US" sz="1300" dirty="0">
                 <a:solidFill>
                   <a:srgbClr val="FFFFFF"/>
                 </a:solidFill>
@@ -6030,19 +7092,123 @@
                 <a:ea typeface="Calibri" pitchFamily="34" charset="-122"/>
                 <a:cs typeface="Calibri" pitchFamily="34" charset="-120"/>
               </a:rPr>
-              <a:t>1.  Custodial vs non-custodial : la différence essentielle</a:t>
-            </a:r>
-            <a:endParaRPr lang="en-US" sz="1500" dirty="0"/>
-          </a:p>
+              <a:t>Custodial vs non-custodial : la différence essentielle</a:t>
+            </a:r>
+            <a:endParaRPr lang="en-US" sz="1300" dirty="0"/>
+          </a:p>
+        </p:txBody>
+      </p:sp>
+      <p:sp>
+        <p:nvSpPr>
+          <p:cNvPr id="8" name="Shape 5"/>
+          <p:cNvSpPr/>
+          <p:nvPr/>
+        </p:nvSpPr>
+        <p:spPr>
+          <a:xfrm>
+            <a:off x="731520" y="1920240"/>
+            <a:ext cx="7680960" cy="475488"/>
+          </a:xfrm>
+          <a:prstGeom prst="roundRect">
+            <a:avLst>
+              <a:gd name="adj" fmla="val 15385"/>
+            </a:avLst>
+          </a:prstGeom>
+          <a:solidFill>
+            <a:srgbClr val="1A2332"/>
+          </a:solidFill>
+          <a:ln/>
+        </p:spPr>
+      </p:sp>
+      <p:sp>
+        <p:nvSpPr>
+          <p:cNvPr id="9" name="Text 6"/>
+          <p:cNvSpPr txBox="1"/>
+          <p:nvPr/>
+        </p:nvSpPr>
+        <p:spPr>
+          <a:xfrm>
+            <a:off x="868680" y="1920240"/>
+            <a:ext cx="320040" cy="475488"/>
+          </a:xfrm>
+          <a:prstGeom prst="rect">
+            <a:avLst/>
+          </a:prstGeom>
+          <a:noFill/>
+          <a:ln/>
+        </p:spPr>
+        <p:txBody>
+          <a:bodyPr wrap="square" lIns="0" tIns="0" rIns="0" bIns="0" rtlCol="0" anchor="ctr"/>
+          <a:lstStyle/>
+          <a:p>
+            <a:pPr algn="ctr" indent="0" marL="0">
+              <a:buNone/>
+            </a:pPr>
+            <a:r>
+              <a:rPr lang="en-US" sz="1300" b="1" dirty="0">
+                <a:solidFill>
+                  <a:srgbClr val="EF4444"/>
+                </a:solidFill>
+                <a:latin typeface="Calibri" pitchFamily="34" charset="0"/>
+                <a:ea typeface="Calibri" pitchFamily="34" charset="-122"/>
+                <a:cs typeface="Calibri" pitchFamily="34" charset="-120"/>
+              </a:rPr>
+              <a:t>2</a:t>
+            </a:r>
+            <a:endParaRPr lang="en-US" sz="1300" dirty="0"/>
+          </a:p>
+        </p:txBody>
+      </p:sp>
+      <p:pic>
+        <p:nvPicPr>
+          <p:cNvPr id="10" name="Image 1" descr="preencoded.png">    </p:cNvPr>
+          <p:cNvPicPr>
+            <a:picLocks noChangeAspect="1"/>
+          </p:cNvPicPr>
+          <p:nvPr/>
+        </p:nvPicPr>
+        <p:blipFill>
+          <a:blip r:embed="rId2"/>
+          <a:stretch>
+            <a:fillRect/>
+          </a:stretch>
+        </p:blipFill>
+        <p:spPr>
+          <a:xfrm>
+            <a:off x="1280160" y="1993392"/>
+            <a:ext cx="329184" cy="329184"/>
+          </a:xfrm>
+          <a:prstGeom prst="rect">
+            <a:avLst/>
+          </a:prstGeom>
+        </p:spPr>
+      </p:pic>
+      <p:sp>
+        <p:nvSpPr>
+          <p:cNvPr id="11" name="Text 7"/>
+          <p:cNvSpPr txBox="1"/>
+          <p:nvPr/>
+        </p:nvSpPr>
+        <p:spPr>
+          <a:xfrm>
+            <a:off x="1737360" y="1920240"/>
+            <a:ext cx="6492240" cy="475488"/>
+          </a:xfrm>
+          <a:prstGeom prst="rect">
+            <a:avLst/>
+          </a:prstGeom>
+          <a:noFill/>
+          <a:ln/>
+        </p:spPr>
+        <p:txBody>
+          <a:bodyPr wrap="square" lIns="0" tIns="0" rIns="0" bIns="0" rtlCol="0" anchor="ctr"/>
+          <a:lstStyle/>
           <a:p>
             <a:pPr indent="0" marL="0">
-              <a:spcAft>
-                <a:spcPts val="1000"/>
-              </a:spcAft>
               <a:buNone/>
             </a:pPr>
             <a:r>
-              <a:rPr lang="en-US" sz="1500" dirty="0">
+              <a:rPr lang="en-US" sz="1300" dirty="0">
                 <a:solidFill>
                   <a:srgbClr val="FFFFFF"/>
                 </a:solidFill>
@@ -6050,19 +7216,123 @@
                 <a:ea typeface="Calibri" pitchFamily="34" charset="-122"/>
                 <a:cs typeface="Calibri" pitchFamily="34" charset="-120"/>
               </a:rPr>
-              <a:t>2.  Créer un wallet Trust Wallet — pas à pas</a:t>
-            </a:r>
-            <a:endParaRPr lang="en-US" sz="1500" dirty="0"/>
-          </a:p>
+              <a:t>Créer un wallet Trust Wallet — pas à pas</a:t>
+            </a:r>
+            <a:endParaRPr lang="en-US" sz="1300" dirty="0"/>
+          </a:p>
+        </p:txBody>
+      </p:sp>
+      <p:sp>
+        <p:nvSpPr>
+          <p:cNvPr id="12" name="Shape 8"/>
+          <p:cNvSpPr/>
+          <p:nvPr/>
+        </p:nvSpPr>
+        <p:spPr>
+          <a:xfrm>
+            <a:off x="731520" y="2468880"/>
+            <a:ext cx="7680960" cy="475488"/>
+          </a:xfrm>
+          <a:prstGeom prst="roundRect">
+            <a:avLst>
+              <a:gd name="adj" fmla="val 15385"/>
+            </a:avLst>
+          </a:prstGeom>
+          <a:solidFill>
+            <a:srgbClr val="1A2332"/>
+          </a:solidFill>
+          <a:ln/>
+        </p:spPr>
+      </p:sp>
+      <p:sp>
+        <p:nvSpPr>
+          <p:cNvPr id="13" name="Text 9"/>
+          <p:cNvSpPr txBox="1"/>
+          <p:nvPr/>
+        </p:nvSpPr>
+        <p:spPr>
+          <a:xfrm>
+            <a:off x="868680" y="2468880"/>
+            <a:ext cx="320040" cy="475488"/>
+          </a:xfrm>
+          <a:prstGeom prst="rect">
+            <a:avLst/>
+          </a:prstGeom>
+          <a:noFill/>
+          <a:ln/>
+        </p:spPr>
+        <p:txBody>
+          <a:bodyPr wrap="square" lIns="0" tIns="0" rIns="0" bIns="0" rtlCol="0" anchor="ctr"/>
+          <a:lstStyle/>
+          <a:p>
+            <a:pPr algn="ctr" indent="0" marL="0">
+              <a:buNone/>
+            </a:pPr>
+            <a:r>
+              <a:rPr lang="en-US" sz="1300" b="1" dirty="0">
+                <a:solidFill>
+                  <a:srgbClr val="EF4444"/>
+                </a:solidFill>
+                <a:latin typeface="Calibri" pitchFamily="34" charset="0"/>
+                <a:ea typeface="Calibri" pitchFamily="34" charset="-122"/>
+                <a:cs typeface="Calibri" pitchFamily="34" charset="-120"/>
+              </a:rPr>
+              <a:t>3</a:t>
+            </a:r>
+            <a:endParaRPr lang="en-US" sz="1300" dirty="0"/>
+          </a:p>
+        </p:txBody>
+      </p:sp>
+      <p:pic>
+        <p:nvPicPr>
+          <p:cNvPr id="14" name="Image 2" descr="preencoded.png">    </p:cNvPr>
+          <p:cNvPicPr>
+            <a:picLocks noChangeAspect="1"/>
+          </p:cNvPicPr>
+          <p:nvPr/>
+        </p:nvPicPr>
+        <p:blipFill>
+          <a:blip r:embed="rId3"/>
+          <a:stretch>
+            <a:fillRect/>
+          </a:stretch>
+        </p:blipFill>
+        <p:spPr>
+          <a:xfrm>
+            <a:off x="1280160" y="2542032"/>
+            <a:ext cx="329184" cy="329184"/>
+          </a:xfrm>
+          <a:prstGeom prst="rect">
+            <a:avLst/>
+          </a:prstGeom>
+        </p:spPr>
+      </p:pic>
+      <p:sp>
+        <p:nvSpPr>
+          <p:cNvPr id="15" name="Text 10"/>
+          <p:cNvSpPr txBox="1"/>
+          <p:nvPr/>
+        </p:nvSpPr>
+        <p:spPr>
+          <a:xfrm>
+            <a:off x="1737360" y="2468880"/>
+            <a:ext cx="6492240" cy="475488"/>
+          </a:xfrm>
+          <a:prstGeom prst="rect">
+            <a:avLst/>
+          </a:prstGeom>
+          <a:noFill/>
+          <a:ln/>
+        </p:spPr>
+        <p:txBody>
+          <a:bodyPr wrap="square" lIns="0" tIns="0" rIns="0" bIns="0" rtlCol="0" anchor="ctr"/>
+          <a:lstStyle/>
           <a:p>
             <a:pPr indent="0" marL="0">
-              <a:spcAft>
-                <a:spcPts val="1000"/>
-              </a:spcAft>
               <a:buNone/>
             </a:pPr>
             <a:r>
-              <a:rPr lang="en-US" sz="1500" dirty="0">
+              <a:rPr lang="en-US" sz="1300" dirty="0">
                 <a:solidFill>
                   <a:srgbClr val="FFFFFF"/>
                 </a:solidFill>
@@ -6070,9 +7340,9 @@
                 <a:ea typeface="Calibri" pitchFamily="34" charset="-122"/>
                 <a:cs typeface="Calibri" pitchFamily="34" charset="-120"/>
               </a:rPr>
-              <a:t>3.  La phrase secrète : la règle d'or</a:t>
-            </a:r>
-            <a:endParaRPr lang="en-US" sz="1500" dirty="0"/>
+              <a:t>La phrase secrète : la règle d'or</a:t>
+            </a:r>
+            <a:endParaRPr lang="en-US" sz="1300" dirty="0"/>
           </a:p>
         </p:txBody>
       </p:sp>
@@ -6108,16 +7378,40 @@
           <a:chExt cx="0" cy="0"/>
         </a:xfrm>
       </p:grpSpPr>
-      <p:sp>
-        <p:nvSpPr>
-          <p:cNvPr id="2" name="Text 0"/>
-          <p:cNvSpPr txBox="1"/>
-          <p:nvPr/>
-        </p:nvSpPr>
-        <p:spPr>
-          <a:xfrm>
-            <a:off x="731520" y="457200"/>
-            <a:ext cx="2743200" cy="365760"/>
+      <p:pic>
+        <p:nvPicPr>
+          <p:cNvPr id="2" name="Image 0" descr="preencoded.png">    </p:cNvPr>
+          <p:cNvPicPr>
+            <a:picLocks noChangeAspect="1"/>
+          </p:cNvPicPr>
+          <p:nvPr/>
+        </p:nvPicPr>
+        <p:blipFill>
+          <a:blip r:embed="rId1"/>
+          <a:stretch>
+            <a:fillRect/>
+          </a:stretch>
+        </p:blipFill>
+        <p:spPr>
+          <a:xfrm>
+            <a:off x="731520" y="320040"/>
+            <a:ext cx="457200" cy="457200"/>
+          </a:xfrm>
+          <a:prstGeom prst="rect">
+            <a:avLst/>
+          </a:prstGeom>
+        </p:spPr>
+      </p:pic>
+      <p:sp>
+        <p:nvSpPr>
+          <p:cNvPr id="3" name="Text 0"/>
+          <p:cNvSpPr txBox="1"/>
+          <p:nvPr/>
+        </p:nvSpPr>
+        <p:spPr>
+          <a:xfrm>
+            <a:off x="1280160" y="365760"/>
+            <a:ext cx="2743200" cy="320040"/>
           </a:xfrm>
           <a:prstGeom prst="rect">
             <a:avLst/>
@@ -6149,14 +7443,14 @@
       </p:sp>
       <p:sp>
         <p:nvSpPr>
-          <p:cNvPr id="3" name="Text 1"/>
-          <p:cNvSpPr txBox="1"/>
-          <p:nvPr/>
-        </p:nvSpPr>
-        <p:spPr>
-          <a:xfrm>
-            <a:off x="731520" y="868680"/>
-            <a:ext cx="7680960" cy="502920"/>
+          <p:cNvPr id="4" name="Text 1"/>
+          <p:cNvSpPr txBox="1"/>
+          <p:nvPr/>
+        </p:nvSpPr>
+        <p:spPr>
+          <a:xfrm>
+            <a:off x="731520" y="822960"/>
+            <a:ext cx="7680960" cy="457200"/>
           </a:xfrm>
           <a:prstGeom prst="rect">
             <a:avLst/>
@@ -6172,7 +7466,7 @@
               <a:buNone/>
             </a:pPr>
             <a:r>
-              <a:rPr lang="en-US" sz="2200" b="1" dirty="0">
+              <a:rPr lang="en-US" sz="2000" b="1" dirty="0">
                 <a:solidFill>
                   <a:srgbClr val="FFFFFF"/>
                 </a:solidFill>
@@ -6182,28 +7476,50 @@
               </a:rPr>
               <a:t>Créer un wallet Trust Wallet — pas à pas</a:t>
             </a:r>
-            <a:endParaRPr lang="en-US" sz="2200" dirty="0"/>
-          </a:p>
-        </p:txBody>
-      </p:sp>
-      <p:sp>
-        <p:nvSpPr>
-          <p:cNvPr id="4" name="Text 2"/>
-          <p:cNvSpPr txBox="1"/>
-          <p:nvPr/>
-        </p:nvSpPr>
-        <p:spPr>
-          <a:xfrm>
-            <a:off x="731520" y="1554480"/>
-            <a:ext cx="457200" cy="548640"/>
+            <a:endParaRPr lang="en-US" sz="2000" dirty="0"/>
+          </a:p>
+        </p:txBody>
+      </p:sp>
+      <p:sp>
+        <p:nvSpPr>
+          <p:cNvPr id="5" name="Shape 2"/>
+          <p:cNvSpPr/>
+          <p:nvPr/>
+        </p:nvSpPr>
+        <p:spPr>
+          <a:xfrm>
+            <a:off x="731520" y="1463040"/>
+            <a:ext cx="7680960" cy="548640"/>
           </a:xfrm>
           <a:prstGeom prst="roundRect">
             <a:avLst>
-              <a:gd name="adj" fmla="val 50000"/>
+              <a:gd name="adj" fmla="val 13333"/>
             </a:avLst>
           </a:prstGeom>
           <a:solidFill>
-            <a:srgbClr val="00BFA6"/>
+            <a:srgbClr val="0F1419"/>
+          </a:solidFill>
+          <a:ln/>
+        </p:spPr>
+      </p:sp>
+      <p:sp>
+        <p:nvSpPr>
+          <p:cNvPr id="6" name="Text 3"/>
+          <p:cNvSpPr txBox="1"/>
+          <p:nvPr/>
+        </p:nvSpPr>
+        <p:spPr>
+          <a:xfrm>
+            <a:off x="914400" y="1463040"/>
+            <a:ext cx="411480" cy="548640"/>
+          </a:xfrm>
+          <a:prstGeom prst="roundRect">
+            <a:avLst>
+              <a:gd name="adj" fmla="val 48889"/>
+            </a:avLst>
+          </a:prstGeom>
+          <a:solidFill>
+            <a:srgbClr val="EF4444"/>
           </a:solidFill>
           <a:ln/>
         </p:spPr>
@@ -6215,7 +7531,7 @@
               <a:buNone/>
             </a:pPr>
             <a:r>
-              <a:rPr lang="en-US" sz="1600" b="1" dirty="0">
+              <a:rPr lang="en-US" sz="1500" b="1" dirty="0">
                 <a:solidFill>
                   <a:srgbClr val="0F1419"/>
                 </a:solidFill>
@@ -6225,20 +7541,20 @@
               </a:rPr>
               <a:t>1</a:t>
             </a:r>
-            <a:endParaRPr lang="en-US" sz="1600" dirty="0"/>
-          </a:p>
-        </p:txBody>
-      </p:sp>
-      <p:sp>
-        <p:nvSpPr>
-          <p:cNvPr id="5" name="Text 3"/>
-          <p:cNvSpPr txBox="1"/>
-          <p:nvPr/>
-        </p:nvSpPr>
-        <p:spPr>
-          <a:xfrm>
-            <a:off x="1371600" y="1554480"/>
-            <a:ext cx="7040880" cy="548640"/>
+            <a:endParaRPr lang="en-US" sz="1500" dirty="0"/>
+          </a:p>
+        </p:txBody>
+      </p:sp>
+      <p:sp>
+        <p:nvSpPr>
+          <p:cNvPr id="7" name="Text 4"/>
+          <p:cNvSpPr txBox="1"/>
+          <p:nvPr/>
+        </p:nvSpPr>
+        <p:spPr>
+          <a:xfrm>
+            <a:off x="1508760" y="1463040"/>
+            <a:ext cx="6766560" cy="548640"/>
           </a:xfrm>
           <a:prstGeom prst="rect">
             <a:avLst/>
@@ -6254,7 +7570,7 @@
               <a:buNone/>
             </a:pPr>
             <a:r>
-              <a:rPr lang="en-US" sz="1400" dirty="0">
+              <a:rPr lang="en-US" sz="1300" dirty="0">
                 <a:solidFill>
                   <a:srgbClr val="FFFFFF"/>
                 </a:solidFill>
@@ -6264,28 +7580,50 @@
               </a:rPr>
               <a:t>iPhone : App Store</a:t>
             </a:r>
-            <a:endParaRPr lang="en-US" sz="1400" dirty="0"/>
-          </a:p>
-        </p:txBody>
-      </p:sp>
-      <p:sp>
-        <p:nvSpPr>
-          <p:cNvPr id="6" name="Text 4"/>
-          <p:cNvSpPr txBox="1"/>
-          <p:nvPr/>
-        </p:nvSpPr>
-        <p:spPr>
-          <a:xfrm>
-            <a:off x="731520" y="2212848"/>
-            <a:ext cx="457200" cy="548640"/>
+            <a:endParaRPr lang="en-US" sz="1300" dirty="0"/>
+          </a:p>
+        </p:txBody>
+      </p:sp>
+      <p:sp>
+        <p:nvSpPr>
+          <p:cNvPr id="8" name="Shape 5"/>
+          <p:cNvSpPr/>
+          <p:nvPr/>
+        </p:nvSpPr>
+        <p:spPr>
+          <a:xfrm>
+            <a:off x="731520" y="2103120"/>
+            <a:ext cx="7680960" cy="548640"/>
           </a:xfrm>
           <a:prstGeom prst="roundRect">
             <a:avLst>
-              <a:gd name="adj" fmla="val 50000"/>
+              <a:gd name="adj" fmla="val 13333"/>
             </a:avLst>
           </a:prstGeom>
           <a:solidFill>
-            <a:srgbClr val="00BFA6"/>
+            <a:srgbClr val="0F1419"/>
+          </a:solidFill>
+          <a:ln/>
+        </p:spPr>
+      </p:sp>
+      <p:sp>
+        <p:nvSpPr>
+          <p:cNvPr id="9" name="Text 6"/>
+          <p:cNvSpPr txBox="1"/>
+          <p:nvPr/>
+        </p:nvSpPr>
+        <p:spPr>
+          <a:xfrm>
+            <a:off x="914400" y="2103120"/>
+            <a:ext cx="411480" cy="548640"/>
+          </a:xfrm>
+          <a:prstGeom prst="roundRect">
+            <a:avLst>
+              <a:gd name="adj" fmla="val 48889"/>
+            </a:avLst>
+          </a:prstGeom>
+          <a:solidFill>
+            <a:srgbClr val="EF4444"/>
           </a:solidFill>
           <a:ln/>
         </p:spPr>
@@ -6297,7 +7635,7 @@
               <a:buNone/>
             </a:pPr>
             <a:r>
-              <a:rPr lang="en-US" sz="1600" b="1" dirty="0">
+              <a:rPr lang="en-US" sz="1500" b="1" dirty="0">
                 <a:solidFill>
                   <a:srgbClr val="0F1419"/>
                 </a:solidFill>
@@ -6307,20 +7645,20 @@
               </a:rPr>
               <a:t>2</a:t>
             </a:r>
-            <a:endParaRPr lang="en-US" sz="1600" dirty="0"/>
-          </a:p>
-        </p:txBody>
-      </p:sp>
-      <p:sp>
-        <p:nvSpPr>
-          <p:cNvPr id="7" name="Text 5"/>
-          <p:cNvSpPr txBox="1"/>
-          <p:nvPr/>
-        </p:nvSpPr>
-        <p:spPr>
-          <a:xfrm>
-            <a:off x="1371600" y="2212848"/>
-            <a:ext cx="7040880" cy="548640"/>
+            <a:endParaRPr lang="en-US" sz="1500" dirty="0"/>
+          </a:p>
+        </p:txBody>
+      </p:sp>
+      <p:sp>
+        <p:nvSpPr>
+          <p:cNvPr id="10" name="Text 7"/>
+          <p:cNvSpPr txBox="1"/>
+          <p:nvPr/>
+        </p:nvSpPr>
+        <p:spPr>
+          <a:xfrm>
+            <a:off x="1508760" y="2103120"/>
+            <a:ext cx="6766560" cy="548640"/>
           </a:xfrm>
           <a:prstGeom prst="rect">
             <a:avLst/>
@@ -6336,7 +7674,7 @@
               <a:buNone/>
             </a:pPr>
             <a:r>
-              <a:rPr lang="en-US" sz="1400" dirty="0">
+              <a:rPr lang="en-US" sz="1300" dirty="0">
                 <a:solidFill>
                   <a:srgbClr val="FFFFFF"/>
                 </a:solidFill>
@@ -6346,28 +7684,50 @@
               </a:rPr>
               <a:t>Android : Google Play</a:t>
             </a:r>
-            <a:endParaRPr lang="en-US" sz="1400" dirty="0"/>
-          </a:p>
-        </p:txBody>
-      </p:sp>
-      <p:sp>
-        <p:nvSpPr>
-          <p:cNvPr id="8" name="Text 6"/>
-          <p:cNvSpPr txBox="1"/>
-          <p:nvPr/>
-        </p:nvSpPr>
-        <p:spPr>
-          <a:xfrm>
-            <a:off x="731520" y="2871216"/>
-            <a:ext cx="457200" cy="548640"/>
+            <a:endParaRPr lang="en-US" sz="1300" dirty="0"/>
+          </a:p>
+        </p:txBody>
+      </p:sp>
+      <p:sp>
+        <p:nvSpPr>
+          <p:cNvPr id="11" name="Shape 8"/>
+          <p:cNvSpPr/>
+          <p:nvPr/>
+        </p:nvSpPr>
+        <p:spPr>
+          <a:xfrm>
+            <a:off x="731520" y="2743200"/>
+            <a:ext cx="7680960" cy="548640"/>
           </a:xfrm>
           <a:prstGeom prst="roundRect">
             <a:avLst>
-              <a:gd name="adj" fmla="val 50000"/>
+              <a:gd name="adj" fmla="val 13333"/>
             </a:avLst>
           </a:prstGeom>
           <a:solidFill>
-            <a:srgbClr val="00BFA6"/>
+            <a:srgbClr val="0F1419"/>
+          </a:solidFill>
+          <a:ln/>
+        </p:spPr>
+      </p:sp>
+      <p:sp>
+        <p:nvSpPr>
+          <p:cNvPr id="12" name="Text 9"/>
+          <p:cNvSpPr txBox="1"/>
+          <p:nvPr/>
+        </p:nvSpPr>
+        <p:spPr>
+          <a:xfrm>
+            <a:off x="914400" y="2743200"/>
+            <a:ext cx="411480" cy="548640"/>
+          </a:xfrm>
+          <a:prstGeom prst="roundRect">
+            <a:avLst>
+              <a:gd name="adj" fmla="val 48889"/>
+            </a:avLst>
+          </a:prstGeom>
+          <a:solidFill>
+            <a:srgbClr val="EF4444"/>
           </a:solidFill>
           <a:ln/>
         </p:spPr>
@@ -6379,7 +7739,7 @@
               <a:buNone/>
             </a:pPr>
             <a:r>
-              <a:rPr lang="en-US" sz="1600" b="1" dirty="0">
+              <a:rPr lang="en-US" sz="1500" b="1" dirty="0">
                 <a:solidFill>
                   <a:srgbClr val="0F1419"/>
                 </a:solidFill>
@@ -6389,20 +7749,20 @@
               </a:rPr>
               <a:t>3</a:t>
             </a:r>
-            <a:endParaRPr lang="en-US" sz="1600" dirty="0"/>
-          </a:p>
-        </p:txBody>
-      </p:sp>
-      <p:sp>
-        <p:nvSpPr>
-          <p:cNvPr id="9" name="Text 7"/>
-          <p:cNvSpPr txBox="1"/>
-          <p:nvPr/>
-        </p:nvSpPr>
-        <p:spPr>
-          <a:xfrm>
-            <a:off x="1371600" y="2871216"/>
-            <a:ext cx="7040880" cy="548640"/>
+            <a:endParaRPr lang="en-US" sz="1500" dirty="0"/>
+          </a:p>
+        </p:txBody>
+      </p:sp>
+      <p:sp>
+        <p:nvSpPr>
+          <p:cNvPr id="13" name="Text 10"/>
+          <p:cNvSpPr txBox="1"/>
+          <p:nvPr/>
+        </p:nvSpPr>
+        <p:spPr>
+          <a:xfrm>
+            <a:off x="1508760" y="2743200"/>
+            <a:ext cx="6766560" cy="548640"/>
           </a:xfrm>
           <a:prstGeom prst="rect">
             <a:avLst/>
@@ -6418,7 +7778,7 @@
               <a:buNone/>
             </a:pPr>
             <a:r>
-              <a:rPr lang="en-US" sz="1400" dirty="0">
+              <a:rPr lang="en-US" sz="1300" dirty="0">
                 <a:solidFill>
                   <a:srgbClr val="FFFFFF"/>
                 </a:solidFill>
@@ -6428,28 +7788,50 @@
               </a:rPr>
               <a:t>voyage    2. table    3. lampe    4. écrire</a:t>
             </a:r>
-            <a:endParaRPr lang="en-US" sz="1400" dirty="0"/>
-          </a:p>
-        </p:txBody>
-      </p:sp>
-      <p:sp>
-        <p:nvSpPr>
-          <p:cNvPr id="10" name="Text 8"/>
-          <p:cNvSpPr txBox="1"/>
-          <p:nvPr/>
-        </p:nvSpPr>
-        <p:spPr>
-          <a:xfrm>
-            <a:off x="731520" y="3529584"/>
-            <a:ext cx="457200" cy="548640"/>
+            <a:endParaRPr lang="en-US" sz="1300" dirty="0"/>
+          </a:p>
+        </p:txBody>
+      </p:sp>
+      <p:sp>
+        <p:nvSpPr>
+          <p:cNvPr id="14" name="Shape 11"/>
+          <p:cNvSpPr/>
+          <p:nvPr/>
+        </p:nvSpPr>
+        <p:spPr>
+          <a:xfrm>
+            <a:off x="731520" y="3383280"/>
+            <a:ext cx="7680960" cy="548640"/>
           </a:xfrm>
           <a:prstGeom prst="roundRect">
             <a:avLst>
-              <a:gd name="adj" fmla="val 50000"/>
+              <a:gd name="adj" fmla="val 13333"/>
             </a:avLst>
           </a:prstGeom>
           <a:solidFill>
-            <a:srgbClr val="00BFA6"/>
+            <a:srgbClr val="0F1419"/>
+          </a:solidFill>
+          <a:ln/>
+        </p:spPr>
+      </p:sp>
+      <p:sp>
+        <p:nvSpPr>
+          <p:cNvPr id="15" name="Text 12"/>
+          <p:cNvSpPr txBox="1"/>
+          <p:nvPr/>
+        </p:nvSpPr>
+        <p:spPr>
+          <a:xfrm>
+            <a:off x="914400" y="3383280"/>
+            <a:ext cx="411480" cy="548640"/>
+          </a:xfrm>
+          <a:prstGeom prst="roundRect">
+            <a:avLst>
+              <a:gd name="adj" fmla="val 48889"/>
+            </a:avLst>
+          </a:prstGeom>
+          <a:solidFill>
+            <a:srgbClr val="EF4444"/>
           </a:solidFill>
           <a:ln/>
         </p:spPr>
@@ -6461,7 +7843,7 @@
               <a:buNone/>
             </a:pPr>
             <a:r>
-              <a:rPr lang="en-US" sz="1600" b="1" dirty="0">
+              <a:rPr lang="en-US" sz="1500" b="1" dirty="0">
                 <a:solidFill>
                   <a:srgbClr val="0F1419"/>
                 </a:solidFill>
@@ -6471,20 +7853,20 @@
               </a:rPr>
               <a:t>4</a:t>
             </a:r>
-            <a:endParaRPr lang="en-US" sz="1600" dirty="0"/>
-          </a:p>
-        </p:txBody>
-      </p:sp>
-      <p:sp>
-        <p:nvSpPr>
-          <p:cNvPr id="11" name="Text 9"/>
-          <p:cNvSpPr txBox="1"/>
-          <p:nvPr/>
-        </p:nvSpPr>
-        <p:spPr>
-          <a:xfrm>
-            <a:off x="1371600" y="3529584"/>
-            <a:ext cx="7040880" cy="548640"/>
+            <a:endParaRPr lang="en-US" sz="1500" dirty="0"/>
+          </a:p>
+        </p:txBody>
+      </p:sp>
+      <p:sp>
+        <p:nvSpPr>
+          <p:cNvPr id="16" name="Text 13"/>
+          <p:cNvSpPr txBox="1"/>
+          <p:nvPr/>
+        </p:nvSpPr>
+        <p:spPr>
+          <a:xfrm>
+            <a:off x="1508760" y="3383280"/>
+            <a:ext cx="6766560" cy="548640"/>
           </a:xfrm>
           <a:prstGeom prst="rect">
             <a:avLst/>
@@ -6500,7 +7882,7 @@
               <a:buNone/>
             </a:pPr>
             <a:r>
-              <a:rPr lang="en-US" sz="1400" dirty="0">
+              <a:rPr lang="en-US" sz="1300" dirty="0">
                 <a:solidFill>
                   <a:srgbClr val="FFFFFF"/>
                 </a:solidFill>
@@ -6510,28 +7892,50 @@
               </a:rPr>
               <a:t>cheval    6. lundi    7. simple   8. mardi</a:t>
             </a:r>
-            <a:endParaRPr lang="en-US" sz="1400" dirty="0"/>
-          </a:p>
-        </p:txBody>
-      </p:sp>
-      <p:sp>
-        <p:nvSpPr>
-          <p:cNvPr id="12" name="Text 10"/>
-          <p:cNvSpPr txBox="1"/>
-          <p:nvPr/>
-        </p:nvSpPr>
-        <p:spPr>
-          <a:xfrm>
-            <a:off x="731520" y="4187952"/>
-            <a:ext cx="457200" cy="548640"/>
+            <a:endParaRPr lang="en-US" sz="1300" dirty="0"/>
+          </a:p>
+        </p:txBody>
+      </p:sp>
+      <p:sp>
+        <p:nvSpPr>
+          <p:cNvPr id="17" name="Shape 14"/>
+          <p:cNvSpPr/>
+          <p:nvPr/>
+        </p:nvSpPr>
+        <p:spPr>
+          <a:xfrm>
+            <a:off x="731520" y="4023360"/>
+            <a:ext cx="7680960" cy="548640"/>
           </a:xfrm>
           <a:prstGeom prst="roundRect">
             <a:avLst>
-              <a:gd name="adj" fmla="val 50000"/>
+              <a:gd name="adj" fmla="val 13333"/>
             </a:avLst>
           </a:prstGeom>
           <a:solidFill>
-            <a:srgbClr val="00BFA6"/>
+            <a:srgbClr val="0F1419"/>
+          </a:solidFill>
+          <a:ln/>
+        </p:spPr>
+      </p:sp>
+      <p:sp>
+        <p:nvSpPr>
+          <p:cNvPr id="18" name="Text 15"/>
+          <p:cNvSpPr txBox="1"/>
+          <p:nvPr/>
+        </p:nvSpPr>
+        <p:spPr>
+          <a:xfrm>
+            <a:off x="914400" y="4023360"/>
+            <a:ext cx="411480" cy="548640"/>
+          </a:xfrm>
+          <a:prstGeom prst="roundRect">
+            <a:avLst>
+              <a:gd name="adj" fmla="val 48889"/>
+            </a:avLst>
+          </a:prstGeom>
+          <a:solidFill>
+            <a:srgbClr val="EF4444"/>
           </a:solidFill>
           <a:ln/>
         </p:spPr>
@@ -6543,7 +7947,7 @@
               <a:buNone/>
             </a:pPr>
             <a:r>
-              <a:rPr lang="en-US" sz="1600" b="1" dirty="0">
+              <a:rPr lang="en-US" sz="1500" b="1" dirty="0">
                 <a:solidFill>
                   <a:srgbClr val="0F1419"/>
                 </a:solidFill>
@@ -6553,20 +7957,20 @@
               </a:rPr>
               <a:t>5</a:t>
             </a:r>
-            <a:endParaRPr lang="en-US" sz="1600" dirty="0"/>
-          </a:p>
-        </p:txBody>
-      </p:sp>
-      <p:sp>
-        <p:nvSpPr>
-          <p:cNvPr id="13" name="Text 11"/>
-          <p:cNvSpPr txBox="1"/>
-          <p:nvPr/>
-        </p:nvSpPr>
-        <p:spPr>
-          <a:xfrm>
-            <a:off x="1371600" y="4187952"/>
-            <a:ext cx="7040880" cy="548640"/>
+            <a:endParaRPr lang="en-US" sz="1500" dirty="0"/>
+          </a:p>
+        </p:txBody>
+      </p:sp>
+      <p:sp>
+        <p:nvSpPr>
+          <p:cNvPr id="19" name="Text 16"/>
+          <p:cNvSpPr txBox="1"/>
+          <p:nvPr/>
+        </p:nvSpPr>
+        <p:spPr>
+          <a:xfrm>
+            <a:off x="1508760" y="4023360"/>
+            <a:ext cx="6766560" cy="548640"/>
           </a:xfrm>
           <a:prstGeom prst="rect">
             <a:avLst/>
@@ -6582,7 +7986,7 @@
               <a:buNone/>
             </a:pPr>
             <a:r>
-              <a:rPr lang="en-US" sz="1400" dirty="0">
+              <a:rPr lang="en-US" sz="1300" dirty="0">
                 <a:solidFill>
                   <a:srgbClr val="FFFFFF"/>
                 </a:solidFill>
@@ -6592,7 +7996,7 @@
               </a:rPr>
               <a:t>arbre    10. porte   11. clef    12. terre</a:t>
             </a:r>
-            <a:endParaRPr lang="en-US" sz="1400" dirty="0"/>
+            <a:endParaRPr lang="en-US" sz="1300" dirty="0"/>
           </a:p>
         </p:txBody>
       </p:sp>
@@ -6636,12 +8040,12 @@
         </p:nvSpPr>
         <p:spPr>
           <a:xfrm>
-            <a:off x="548640" y="731520"/>
-            <a:ext cx="8046720" cy="3657600"/>
+            <a:off x="548640" y="548640"/>
+            <a:ext cx="8046720" cy="3840480"/>
           </a:xfrm>
           <a:prstGeom prst="roundRect">
             <a:avLst>
-              <a:gd name="adj" fmla="val 3750"/>
+              <a:gd name="adj" fmla="val 3571"/>
             </a:avLst>
           </a:prstGeom>
           <a:solidFill>
@@ -6652,14 +8056,58 @@
       </p:sp>
       <p:sp>
         <p:nvSpPr>
-          <p:cNvPr id="3" name="Text 1"/>
-          <p:cNvSpPr txBox="1"/>
-          <p:nvPr/>
-        </p:nvSpPr>
-        <p:spPr>
-          <a:xfrm>
-            <a:off x="822960" y="914400"/>
-            <a:ext cx="2743200" cy="411480"/>
+          <p:cNvPr id="3" name="Shape 1"/>
+          <p:cNvSpPr/>
+          <p:nvPr/>
+        </p:nvSpPr>
+        <p:spPr>
+          <a:xfrm>
+            <a:off x="548640" y="548640"/>
+            <a:ext cx="54864" cy="3840480"/>
+          </a:xfrm>
+          <a:prstGeom prst="rect">
+            <a:avLst/>
+          </a:prstGeom>
+          <a:solidFill>
+            <a:srgbClr val="EF4444"/>
+          </a:solidFill>
+          <a:ln/>
+        </p:spPr>
+      </p:sp>
+      <p:pic>
+        <p:nvPicPr>
+          <p:cNvPr id="4" name="Image 0" descr="preencoded.png">    </p:cNvPr>
+          <p:cNvPicPr>
+            <a:picLocks noChangeAspect="1"/>
+          </p:cNvPicPr>
+          <p:nvPr/>
+        </p:nvPicPr>
+        <p:blipFill>
+          <a:blip r:embed="rId1"/>
+          <a:stretch>
+            <a:fillRect/>
+          </a:stretch>
+        </p:blipFill>
+        <p:spPr>
+          <a:xfrm>
+            <a:off x="914400" y="777240"/>
+            <a:ext cx="548640" cy="548640"/>
+          </a:xfrm>
+          <a:prstGeom prst="rect">
+            <a:avLst/>
+          </a:prstGeom>
+        </p:spPr>
+      </p:pic>
+      <p:sp>
+        <p:nvSpPr>
+          <p:cNvPr id="5" name="Text 2"/>
+          <p:cNvSpPr txBox="1"/>
+          <p:nvPr/>
+        </p:nvSpPr>
+        <p:spPr>
+          <a:xfrm>
+            <a:off x="1600200" y="777240"/>
+            <a:ext cx="2743200" cy="320040"/>
           </a:xfrm>
           <a:prstGeom prst="rect">
             <a:avLst/>
@@ -6675,7 +8123,7 @@
               <a:buNone/>
             </a:pPr>
             <a:r>
-              <a:rPr lang="en-US" sz="1400" b="1" spc="300" kern="0" dirty="0">
+              <a:rPr lang="en-US" sz="1200" b="1" spc="300" kern="0" dirty="0">
                 <a:solidFill>
                   <a:srgbClr val="EF4444"/>
                 </a:solidFill>
@@ -6685,20 +8133,20 @@
               </a:rPr>
               <a:t>ATTENTION</a:t>
             </a:r>
-            <a:endParaRPr lang="en-US" sz="1400" dirty="0"/>
-          </a:p>
-        </p:txBody>
-      </p:sp>
-      <p:sp>
-        <p:nvSpPr>
-          <p:cNvPr id="4" name="Text 2"/>
-          <p:cNvSpPr txBox="1"/>
-          <p:nvPr/>
-        </p:nvSpPr>
-        <p:spPr>
-          <a:xfrm>
-            <a:off x="822960" y="1371600"/>
-            <a:ext cx="7498080" cy="2194560"/>
+            <a:endParaRPr lang="en-US" sz="1200" dirty="0"/>
+          </a:p>
+        </p:txBody>
+      </p:sp>
+      <p:sp>
+        <p:nvSpPr>
+          <p:cNvPr id="6" name="Text 3"/>
+          <p:cNvSpPr txBox="1"/>
+          <p:nvPr/>
+        </p:nvSpPr>
+        <p:spPr>
+          <a:xfrm>
+            <a:off x="914400" y="1371600"/>
+            <a:ext cx="7406640" cy="2286000"/>
           </a:xfrm>
           <a:prstGeom prst="rect">
             <a:avLst/>
@@ -6806,35 +8254,105 @@
           <a:chExt cx="0" cy="0"/>
         </a:xfrm>
       </p:grpSpPr>
-      <p:sp>
-        <p:nvSpPr>
-          <p:cNvPr id="2" name="Shape 0"/>
+      <p:pic>
+        <p:nvPicPr>
+          <p:cNvPr id="2" name="Image 0" descr="preencoded.png">    </p:cNvPr>
+          <p:cNvPicPr>
+            <a:picLocks noChangeAspect="1"/>
+          </p:cNvPicPr>
+          <p:nvPr/>
+        </p:nvPicPr>
+        <p:blipFill>
+          <a:blip r:embed="rId1"/>
+          <a:stretch>
+            <a:fillRect/>
+          </a:stretch>
+        </p:blipFill>
+        <p:spPr>
+          <a:xfrm>
+            <a:off x="7315200" y="548640"/>
+            <a:ext cx="1280160" cy="1280160"/>
+          </a:xfrm>
+          <a:prstGeom prst="rect">
+            <a:avLst/>
+          </a:prstGeom>
+        </p:spPr>
+      </p:pic>
+      <p:pic>
+        <p:nvPicPr>
+          <p:cNvPr id="3" name="Image 1" descr="preencoded.png">    </p:cNvPr>
+          <p:cNvPicPr>
+            <a:picLocks noChangeAspect="1"/>
+          </p:cNvPicPr>
+          <p:nvPr/>
+        </p:nvPicPr>
+        <p:blipFill>
+          <a:blip r:embed="rId2"/>
+          <a:stretch>
+            <a:fillRect/>
+          </a:stretch>
+        </p:blipFill>
+        <p:spPr>
+          <a:xfrm>
+            <a:off x="7772400" y="2011680"/>
+            <a:ext cx="822960" cy="822960"/>
+          </a:xfrm>
+          <a:prstGeom prst="rect">
+            <a:avLst/>
+          </a:prstGeom>
+        </p:spPr>
+      </p:pic>
+      <p:sp>
+        <p:nvSpPr>
+          <p:cNvPr id="4" name="Shape 0"/>
           <p:cNvSpPr/>
           <p:nvPr/>
         </p:nvSpPr>
         <p:spPr>
           <a:xfrm>
-            <a:off x="548640" y="914400"/>
-            <a:ext cx="45720" cy="2560320"/>
-          </a:xfrm>
-          <a:prstGeom prst="rect">
+            <a:off x="6583680" y="-274320"/>
+            <a:ext cx="3200400" cy="3200400"/>
+          </a:xfrm>
+          <a:prstGeom prst="ellipse">
             <a:avLst/>
           </a:prstGeom>
           <a:solidFill>
-            <a:srgbClr val="00BFA6"/>
+            <a:srgbClr val="EF4444">
+              <a:alpha val="6000"/>
+            </a:srgbClr>
           </a:solidFill>
           <a:ln/>
         </p:spPr>
       </p:sp>
       <p:sp>
         <p:nvSpPr>
-          <p:cNvPr id="3" name="Text 1"/>
-          <p:cNvSpPr txBox="1"/>
-          <p:nvPr/>
-        </p:nvSpPr>
-        <p:spPr>
-          <a:xfrm>
-            <a:off x="822960" y="1097280"/>
+          <p:cNvPr id="5" name="Shape 1"/>
+          <p:cNvSpPr/>
+          <p:nvPr/>
+        </p:nvSpPr>
+        <p:spPr>
+          <a:xfrm>
+            <a:off x="731520" y="914400"/>
+            <a:ext cx="45720" cy="2194560"/>
+          </a:xfrm>
+          <a:prstGeom prst="rect">
+            <a:avLst/>
+          </a:prstGeom>
+          <a:solidFill>
+            <a:srgbClr val="EF4444"/>
+          </a:solidFill>
+          <a:ln/>
+        </p:spPr>
+      </p:sp>
+      <p:sp>
+        <p:nvSpPr>
+          <p:cNvPr id="6" name="Text 2"/>
+          <p:cNvSpPr txBox="1"/>
+          <p:nvPr/>
+        </p:nvSpPr>
+        <p:spPr>
+          <a:xfrm>
+            <a:off x="960120" y="914400"/>
             <a:ext cx="2743200" cy="365760"/>
           </a:xfrm>
           <a:prstGeom prst="rect">
@@ -6853,13 +8371,13 @@
             <a:r>
               <a:rPr lang="en-US" sz="1200" b="1" spc="200" kern="0" dirty="0">
                 <a:solidFill>
-                  <a:srgbClr val="00BFA6"/>
-                </a:solidFill>
-                <a:latin typeface="Calibri" pitchFamily="34" charset="0"/>
-                <a:ea typeface="Calibri" pitchFamily="34" charset="-122"/>
-                <a:cs typeface="Calibri" pitchFamily="34" charset="-120"/>
-              </a:rPr>
-              <a:t>Lecon 3 / 3</a:t>
+                  <a:srgbClr val="EF4444"/>
+                </a:solidFill>
+                <a:latin typeface="Calibri" pitchFamily="34" charset="0"/>
+                <a:ea typeface="Calibri" pitchFamily="34" charset="-122"/>
+                <a:cs typeface="Calibri" pitchFamily="34" charset="-120"/>
+              </a:rPr>
+              <a:t>Leçon 3 / 3</a:t>
             </a:r>
             <a:endParaRPr lang="en-US" sz="1200" dirty="0"/>
           </a:p>
@@ -6867,14 +8385,14 @@
       </p:sp>
       <p:sp>
         <p:nvSpPr>
-          <p:cNvPr id="4" name="Text 2"/>
-          <p:cNvSpPr txBox="1"/>
-          <p:nvPr/>
-        </p:nvSpPr>
-        <p:spPr>
-          <a:xfrm>
-            <a:off x="822960" y="1645920"/>
-            <a:ext cx="7498080" cy="1280160"/>
+          <p:cNvPr id="7" name="Text 3"/>
+          <p:cNvSpPr txBox="1"/>
+          <p:nvPr/>
+        </p:nvSpPr>
+        <p:spPr>
+          <a:xfrm>
+            <a:off x="960120" y="1371600"/>
+            <a:ext cx="6217920" cy="1463040"/>
           </a:xfrm>
           <a:prstGeom prst="rect">
             <a:avLst/>
@@ -6890,7 +8408,7 @@
               <a:buNone/>
             </a:pPr>
             <a:r>
-              <a:rPr lang="en-US" sz="3000" b="1" dirty="0">
+              <a:rPr lang="en-US" sz="2800" b="1" dirty="0">
                 <a:solidFill>
                   <a:srgbClr val="FFFFFF"/>
                 </a:solidFill>
@@ -6900,19 +8418,19 @@
               </a:rPr>
               <a:t>La phrase secrète : la règle d'or</a:t>
             </a:r>
-            <a:endParaRPr lang="en-US" sz="3000" dirty="0"/>
-          </a:p>
-        </p:txBody>
-      </p:sp>
-      <p:sp>
-        <p:nvSpPr>
-          <p:cNvPr id="5" name="Text 3"/>
-          <p:cNvSpPr txBox="1"/>
-          <p:nvPr/>
-        </p:nvSpPr>
-        <p:spPr>
-          <a:xfrm>
-            <a:off x="822960" y="4206240"/>
+            <a:endParaRPr lang="en-US" sz="2800" dirty="0"/>
+          </a:p>
+        </p:txBody>
+      </p:sp>
+      <p:sp>
+        <p:nvSpPr>
+          <p:cNvPr id="8" name="Text 4"/>
+          <p:cNvSpPr txBox="1"/>
+          <p:nvPr/>
+        </p:nvSpPr>
+        <p:spPr>
+          <a:xfrm>
+            <a:off x="960120" y="4114800"/>
             <a:ext cx="5486400" cy="320040"/>
           </a:xfrm>
           <a:prstGeom prst="rect">
@@ -6977,7 +8495,53 @@
       </p:grpSpPr>
       <p:sp>
         <p:nvSpPr>
-          <p:cNvPr id="2" name="Text 0"/>
+          <p:cNvPr id="2" name="Shape 0"/>
+          <p:cNvSpPr/>
+          <p:nvPr/>
+        </p:nvSpPr>
+        <p:spPr>
+          <a:xfrm>
+            <a:off x="7955280" y="182880"/>
+            <a:ext cx="640080" cy="640080"/>
+          </a:xfrm>
+          <a:prstGeom prst="ellipse">
+            <a:avLst/>
+          </a:prstGeom>
+          <a:solidFill>
+            <a:srgbClr val="EF4444">
+              <a:alpha val="12000"/>
+            </a:srgbClr>
+          </a:solidFill>
+          <a:ln/>
+        </p:spPr>
+      </p:sp>
+      <p:pic>
+        <p:nvPicPr>
+          <p:cNvPr id="3" name="Image 0" descr="preencoded.png">    </p:cNvPr>
+          <p:cNvPicPr>
+            <a:picLocks noChangeAspect="1"/>
+          </p:cNvPicPr>
+          <p:nvPr/>
+        </p:nvPicPr>
+        <p:blipFill>
+          <a:blip r:embed="rId1"/>
+          <a:stretch>
+            <a:fillRect/>
+          </a:stretch>
+        </p:blipFill>
+        <p:spPr>
+          <a:xfrm>
+            <a:off x="8028432" y="256032"/>
+            <a:ext cx="493776" cy="493776"/>
+          </a:xfrm>
+          <a:prstGeom prst="rect">
+            <a:avLst/>
+          </a:prstGeom>
+        </p:spPr>
+      </p:pic>
+      <p:sp>
+        <p:nvSpPr>
+          <p:cNvPr id="4" name="Text 1"/>
           <p:cNvSpPr txBox="1"/>
           <p:nvPr/>
         </p:nvSpPr>
@@ -7020,7 +8584,7 @@
       </p:sp>
       <p:sp>
         <p:nvSpPr>
-          <p:cNvPr id="3" name="Text 1"/>
+          <p:cNvPr id="5" name="Text 2"/>
           <p:cNvSpPr txBox="1"/>
           <p:nvPr/>
         </p:nvSpPr>
@@ -7051,7 +8615,7 @@
                 <a:ea typeface="Calibri" pitchFamily="34" charset="-122"/>
                 <a:cs typeface="Calibri" pitchFamily="34" charset="-120"/>
               </a:rPr>
-              <a:t>Module 7 — Lecon 3</a:t>
+              <a:t>Module 7 — Leçon 3</a:t>
             </a:r>
             <a:endParaRPr lang="en-US" sz="900" dirty="0"/>
           </a:p>
@@ -7097,8 +8661,8 @@
         </p:nvSpPr>
         <p:spPr>
           <a:xfrm>
-            <a:off x="731520" y="365760"/>
-            <a:ext cx="7680960" cy="548640"/>
+            <a:off x="731520" y="274320"/>
+            <a:ext cx="7680960" cy="502920"/>
           </a:xfrm>
           <a:prstGeom prst="rect">
             <a:avLst/>
@@ -7114,9 +8678,9 @@
               <a:buNone/>
             </a:pPr>
             <a:r>
-              <a:rPr lang="en-US" sz="2200" b="1" dirty="0">
-                <a:solidFill>
-                  <a:srgbClr val="00BFA6"/>
+              <a:rPr lang="en-US" sz="2000" b="1" dirty="0">
+                <a:solidFill>
+                  <a:srgbClr val="EF4444"/>
                 </a:solidFill>
                 <a:latin typeface="Calibri" pitchFamily="34" charset="0"/>
                 <a:ea typeface="Calibri" pitchFamily="34" charset="-122"/>
@@ -7124,7 +8688,7 @@
               </a:rPr>
               <a:t>Pourquoi c'est si important ?</a:t>
             </a:r>
-            <a:endParaRPr lang="en-US" sz="2200" dirty="0"/>
+            <a:endParaRPr lang="en-US" sz="2000" dirty="0"/>
           </a:p>
         </p:txBody>
       </p:sp>
@@ -7136,8 +8700,8 @@
         </p:nvSpPr>
         <p:spPr>
           <a:xfrm>
-            <a:off x="731520" y="1051560"/>
-            <a:ext cx="7680960" cy="3657600"/>
+            <a:off x="731520" y="1005840"/>
+            <a:ext cx="4206240" cy="3474720"/>
           </a:xfrm>
           <a:prstGeom prst="rect">
             <a:avLst/>
@@ -7151,13 +8715,13 @@
           <a:p>
             <a:pPr marL="342900" indent="-342900">
               <a:spcAft>
-                <a:spcPts val="800"/>
+                <a:spcPts val="600"/>
               </a:spcAft>
               <a:buSzPct val="100000"/>
               <a:buChar char="•"/>
             </a:pPr>
             <a:r>
-              <a:rPr lang="en-US" sz="1400" dirty="0">
+              <a:rPr lang="en-US" sz="1300" dirty="0">
                 <a:solidFill>
                   <a:srgbClr val="FFFFFF"/>
                 </a:solidFill>
@@ -7165,20 +8729,20 @@
                 <a:ea typeface="Calibri" pitchFamily="34" charset="-122"/>
                 <a:cs typeface="Calibri" pitchFamily="34" charset="-120"/>
               </a:rPr>
-              <a:t>Votre phrase secrète n'est pas un mot de passe. Un mot de passe peut être réinitialisé. Votre phrase secrète, elle, EST votre wallet. Elle a été générée aléatoirement parmi 2¹²⁸...</a:t>
-            </a:r>
-            <a:endParaRPr lang="en-US" sz="1400" dirty="0"/>
+              <a:t>Votre phrase secrète n'est pas un mot de passe. Un mot de passe peut être réinitialisé. Votre phrase secrète, elle, E...</a:t>
+            </a:r>
+            <a:endParaRPr lang="en-US" sz="1300" dirty="0"/>
           </a:p>
           <a:p>
             <a:pPr marL="342900" indent="-342900">
               <a:spcAft>
-                <a:spcPts val="800"/>
+                <a:spcPts val="600"/>
               </a:spcAft>
               <a:buSzPct val="100000"/>
               <a:buChar char="•"/>
             </a:pPr>
             <a:r>
-              <a:rPr lang="en-US" sz="1400" dirty="0">
+              <a:rPr lang="en-US" sz="1300" dirty="0">
                 <a:solidFill>
                   <a:srgbClr val="FFFFFF"/>
                 </a:solidFill>
@@ -7188,18 +8752,18 @@
               </a:rPr>
               <a:t>Avec cette phrase :</a:t>
             </a:r>
-            <a:endParaRPr lang="en-US" sz="1400" dirty="0"/>
+            <a:endParaRPr lang="en-US" sz="1300" dirty="0"/>
           </a:p>
           <a:p>
             <a:pPr marL="342900" indent="-342900">
               <a:spcAft>
-                <a:spcPts val="800"/>
+                <a:spcPts val="600"/>
               </a:spcAft>
               <a:buSzPct val="100000"/>
               <a:buChar char="•"/>
             </a:pPr>
             <a:r>
-              <a:rPr lang="en-US" sz="1400" dirty="0">
+              <a:rPr lang="en-US" sz="1300" dirty="0">
                 <a:solidFill>
                   <a:srgbClr val="FFFFFF"/>
                 </a:solidFill>
@@ -7209,18 +8773,82 @@
               </a:rPr>
               <a:t>N'importe qui peut recréer votre wallet sur n'importe quel appareil, n'importe où dans le monde.</a:t>
             </a:r>
-            <a:endParaRPr lang="en-US" sz="1400" dirty="0"/>
-          </a:p>
-          <a:p>
-            <a:pPr marL="342900" indent="-342900">
-              <a:spcAft>
-                <a:spcPts val="800"/>
-              </a:spcAft>
-              <a:buSzPct val="100000"/>
-              <a:buChar char="•"/>
-            </a:pPr>
-            <a:r>
-              <a:rPr lang="en-US" sz="1400" dirty="0">
+            <a:endParaRPr lang="en-US" sz="1300" dirty="0"/>
+          </a:p>
+        </p:txBody>
+      </p:sp>
+      <p:sp>
+        <p:nvSpPr>
+          <p:cNvPr id="4" name="Shape 2"/>
+          <p:cNvSpPr/>
+          <p:nvPr/>
+        </p:nvSpPr>
+        <p:spPr>
+          <a:xfrm>
+            <a:off x="5120640" y="1005840"/>
+            <a:ext cx="3474720" cy="640080"/>
+          </a:xfrm>
+          <a:prstGeom prst="roundRect">
+            <a:avLst>
+              <a:gd name="adj" fmla="val 14286"/>
+            </a:avLst>
+          </a:prstGeom>
+          <a:solidFill>
+            <a:srgbClr val="1A2332"/>
+          </a:solidFill>
+          <a:ln/>
+        </p:spPr>
+      </p:sp>
+      <p:pic>
+        <p:nvPicPr>
+          <p:cNvPr id="5" name="Image 0" descr="preencoded.png">    </p:cNvPr>
+          <p:cNvPicPr>
+            <a:picLocks noChangeAspect="1"/>
+          </p:cNvPicPr>
+          <p:nvPr/>
+        </p:nvPicPr>
+        <p:blipFill>
+          <a:blip r:embed="rId1"/>
+          <a:stretch>
+            <a:fillRect/>
+          </a:stretch>
+        </p:blipFill>
+        <p:spPr>
+          <a:xfrm>
+            <a:off x="5257800" y="1106424"/>
+            <a:ext cx="438912" cy="438912"/>
+          </a:xfrm>
+          <a:prstGeom prst="rect">
+            <a:avLst/>
+          </a:prstGeom>
+        </p:spPr>
+      </p:pic>
+      <p:sp>
+        <p:nvSpPr>
+          <p:cNvPr id="6" name="Text 3"/>
+          <p:cNvSpPr txBox="1"/>
+          <p:nvPr/>
+        </p:nvSpPr>
+        <p:spPr>
+          <a:xfrm>
+            <a:off x="5806440" y="1005840"/>
+            <a:ext cx="2651760" cy="640080"/>
+          </a:xfrm>
+          <a:prstGeom prst="rect">
+            <a:avLst/>
+          </a:prstGeom>
+          <a:noFill/>
+          <a:ln/>
+        </p:spPr>
+        <p:txBody>
+          <a:bodyPr wrap="square" lIns="0" tIns="0" rIns="0" bIns="0" rtlCol="0" anchor="ctr"/>
+          <a:lstStyle/>
+          <a:p>
+            <a:pPr indent="0" marL="0">
+              <a:buNone/>
+            </a:pPr>
+            <a:r>
+              <a:rPr lang="en-US" sz="1200" dirty="0">
                 <a:solidFill>
                   <a:srgbClr val="FFFFFF"/>
                 </a:solidFill>
@@ -7230,18 +8858,82 @@
               </a:rPr>
               <a:t>L'accès est instantané, irréversible, invisible.</a:t>
             </a:r>
-            <a:endParaRPr lang="en-US" sz="1400" dirty="0"/>
-          </a:p>
-          <a:p>
-            <a:pPr marL="342900" indent="-342900">
-              <a:spcAft>
-                <a:spcPts val="800"/>
-              </a:spcAft>
-              <a:buSzPct val="100000"/>
-              <a:buChar char="•"/>
-            </a:pPr>
-            <a:r>
-              <a:rPr lang="en-US" sz="1400" dirty="0">
+            <a:endParaRPr lang="en-US" sz="1200" dirty="0"/>
+          </a:p>
+        </p:txBody>
+      </p:sp>
+      <p:sp>
+        <p:nvSpPr>
+          <p:cNvPr id="7" name="Shape 4"/>
+          <p:cNvSpPr/>
+          <p:nvPr/>
+        </p:nvSpPr>
+        <p:spPr>
+          <a:xfrm>
+            <a:off x="5120640" y="1737360"/>
+            <a:ext cx="3474720" cy="640080"/>
+          </a:xfrm>
+          <a:prstGeom prst="roundRect">
+            <a:avLst>
+              <a:gd name="adj" fmla="val 14286"/>
+            </a:avLst>
+          </a:prstGeom>
+          <a:solidFill>
+            <a:srgbClr val="1A2332"/>
+          </a:solidFill>
+          <a:ln/>
+        </p:spPr>
+      </p:sp>
+      <p:pic>
+        <p:nvPicPr>
+          <p:cNvPr id="8" name="Image 1" descr="preencoded.png">    </p:cNvPr>
+          <p:cNvPicPr>
+            <a:picLocks noChangeAspect="1"/>
+          </p:cNvPicPr>
+          <p:nvPr/>
+        </p:nvPicPr>
+        <p:blipFill>
+          <a:blip r:embed="rId2"/>
+          <a:stretch>
+            <a:fillRect/>
+          </a:stretch>
+        </p:blipFill>
+        <p:spPr>
+          <a:xfrm>
+            <a:off x="5257800" y="1837944"/>
+            <a:ext cx="438912" cy="438912"/>
+          </a:xfrm>
+          <a:prstGeom prst="rect">
+            <a:avLst/>
+          </a:prstGeom>
+        </p:spPr>
+      </p:pic>
+      <p:sp>
+        <p:nvSpPr>
+          <p:cNvPr id="9" name="Text 5"/>
+          <p:cNvSpPr txBox="1"/>
+          <p:nvPr/>
+        </p:nvSpPr>
+        <p:spPr>
+          <a:xfrm>
+            <a:off x="5806440" y="1737360"/>
+            <a:ext cx="2651760" cy="640080"/>
+          </a:xfrm>
+          <a:prstGeom prst="rect">
+            <a:avLst/>
+          </a:prstGeom>
+          <a:noFill/>
+          <a:ln/>
+        </p:spPr>
+        <p:txBody>
+          <a:bodyPr wrap="square" lIns="0" tIns="0" rIns="0" bIns="0" rtlCol="0" anchor="ctr"/>
+          <a:lstStyle/>
+          <a:p>
+            <a:pPr indent="0" marL="0">
+              <a:buNone/>
+            </a:pPr>
+            <a:r>
+              <a:rPr lang="en-US" sz="1200" dirty="0">
                 <a:solidFill>
                   <a:srgbClr val="FFFFFF"/>
                 </a:solidFill>
@@ -7251,46 +8943,7 @@
               </a:rPr>
               <a:t>Vous ne recevrez AUCUNE alerte.</a:t>
             </a:r>
-            <a:endParaRPr lang="en-US" sz="1400" dirty="0"/>
-          </a:p>
-        </p:txBody>
-      </p:sp>
-      <p:sp>
-        <p:nvSpPr>
-          <p:cNvPr id="4" name="Text 2"/>
-          <p:cNvSpPr txBox="1"/>
-          <p:nvPr/>
-        </p:nvSpPr>
-        <p:spPr>
-          <a:xfrm>
-            <a:off x="731520" y="4709160"/>
-            <a:ext cx="7680960" cy="274320"/>
-          </a:xfrm>
-          <a:prstGeom prst="rect">
-            <a:avLst/>
-          </a:prstGeom>
-          <a:noFill/>
-          <a:ln/>
-        </p:spPr>
-        <p:txBody>
-          <a:bodyPr wrap="square" lIns="0" tIns="0" rIns="0" bIns="0" rtlCol="0" anchor="ctr"/>
-          <a:lstStyle/>
-          <a:p>
-            <a:pPr algn="r" indent="0" marL="0">
-              <a:buNone/>
-            </a:pPr>
-            <a:r>
-              <a:rPr lang="en-US" sz="900" dirty="0">
-                <a:solidFill>
-                  <a:srgbClr val="64748B"/>
-                </a:solidFill>
-                <a:latin typeface="Calibri" pitchFamily="34" charset="0"/>
-                <a:ea typeface="Calibri" pitchFamily="34" charset="-122"/>
-                <a:cs typeface="Calibri" pitchFamily="34" charset="-120"/>
-              </a:rPr>
-              <a:t>Module 7 — Lecon 3</a:t>
-            </a:r>
-            <a:endParaRPr lang="en-US" sz="900" dirty="0"/>
+            <a:endParaRPr lang="en-US" sz="1200" dirty="0"/>
           </a:p>
         </p:txBody>
       </p:sp>
@@ -7334,8 +8987,8 @@
         </p:nvSpPr>
         <p:spPr>
           <a:xfrm>
-            <a:off x="731520" y="365760"/>
-            <a:ext cx="7680960" cy="548640"/>
+            <a:off x="731520" y="274320"/>
+            <a:ext cx="7680960" cy="502920"/>
           </a:xfrm>
           <a:prstGeom prst="rect">
             <a:avLst/>
@@ -7351,9 +9004,9 @@
               <a:buNone/>
             </a:pPr>
             <a:r>
-              <a:rPr lang="en-US" sz="2200" b="1" dirty="0">
-                <a:solidFill>
-                  <a:srgbClr val="00BFA6"/>
+              <a:rPr lang="en-US" sz="2000" b="1" dirty="0">
+                <a:solidFill>
+                  <a:srgbClr val="EF4444"/>
                 </a:solidFill>
                 <a:latin typeface="Calibri" pitchFamily="34" charset="0"/>
                 <a:ea typeface="Calibri" pitchFamily="34" charset="-122"/>
@@ -7361,20 +9014,66 @@
               </a:rPr>
               <a:t>Les erreurs qui coûtent une fortune</a:t>
             </a:r>
-            <a:endParaRPr lang="en-US" sz="2200" dirty="0"/>
-          </a:p>
-        </p:txBody>
-      </p:sp>
-      <p:sp>
-        <p:nvSpPr>
-          <p:cNvPr id="3" name="Text 1"/>
-          <p:cNvSpPr txBox="1"/>
-          <p:nvPr/>
-        </p:nvSpPr>
-        <p:spPr>
-          <a:xfrm>
-            <a:off x="731520" y="1051560"/>
-            <a:ext cx="7680960" cy="3657600"/>
+            <a:endParaRPr lang="en-US" sz="2000" dirty="0"/>
+          </a:p>
+        </p:txBody>
+      </p:sp>
+      <p:sp>
+        <p:nvSpPr>
+          <p:cNvPr id="3" name="Shape 1"/>
+          <p:cNvSpPr/>
+          <p:nvPr/>
+        </p:nvSpPr>
+        <p:spPr>
+          <a:xfrm>
+            <a:off x="594360" y="1005840"/>
+            <a:ext cx="2468880" cy="1371600"/>
+          </a:xfrm>
+          <a:prstGeom prst="roundRect">
+            <a:avLst>
+              <a:gd name="adj" fmla="val 6667"/>
+            </a:avLst>
+          </a:prstGeom>
+          <a:solidFill>
+            <a:srgbClr val="1A2332"/>
+          </a:solidFill>
+          <a:ln/>
+        </p:spPr>
+      </p:sp>
+      <p:pic>
+        <p:nvPicPr>
+          <p:cNvPr id="4" name="Image 0" descr="preencoded.png">    </p:cNvPr>
+          <p:cNvPicPr>
+            <a:picLocks noChangeAspect="1"/>
+          </p:cNvPicPr>
+          <p:nvPr/>
+        </p:nvPicPr>
+        <p:blipFill>
+          <a:blip r:embed="rId1"/>
+          <a:stretch>
+            <a:fillRect/>
+          </a:stretch>
+        </p:blipFill>
+        <p:spPr>
+          <a:xfrm>
+            <a:off x="731520" y="1143000"/>
+            <a:ext cx="502920" cy="502920"/>
+          </a:xfrm>
+          <a:prstGeom prst="rect">
+            <a:avLst/>
+          </a:prstGeom>
+        </p:spPr>
+      </p:pic>
+      <p:sp>
+        <p:nvSpPr>
+          <p:cNvPr id="5" name="Text 2"/>
+          <p:cNvSpPr txBox="1"/>
+          <p:nvPr/>
+        </p:nvSpPr>
+        <p:spPr>
+          <a:xfrm>
+            <a:off x="731520" y="1719072"/>
+            <a:ext cx="2194560" cy="320040"/>
           </a:xfrm>
           <a:prstGeom prst="rect">
             <a:avLst/>
@@ -7386,15 +9085,11 @@
           <a:bodyPr wrap="square" lIns="0" tIns="0" rIns="0" bIns="0" rtlCol="0" anchor="t"/>
           <a:lstStyle/>
           <a:p>
-            <a:pPr marL="342900" indent="-342900">
-              <a:spcAft>
-                <a:spcPts val="800"/>
-              </a:spcAft>
-              <a:buSzPct val="100000"/>
-              <a:buChar char="•"/>
-            </a:pPr>
-            <a:r>
-              <a:rPr lang="en-US" sz="1400" dirty="0">
+            <a:pPr indent="0" marL="0">
+              <a:buNone/>
+            </a:pPr>
+            <a:r>
+              <a:rPr lang="en-US" sz="1100" b="1" dirty="0">
                 <a:solidFill>
                   <a:srgbClr val="FFFFFF"/>
                 </a:solidFill>
@@ -7402,20 +9097,123 @@
                 <a:ea typeface="Calibri" pitchFamily="34" charset="-122"/>
                 <a:cs typeface="Calibri" pitchFamily="34" charset="-120"/>
               </a:rPr>
-              <a:t>La stocker en ligne : Google Drive piraté = fonds volés. Cas ultra fréquent.</a:t>
-            </a:r>
-            <a:endParaRPr lang="en-US" sz="1400" dirty="0"/>
-          </a:p>
-          <a:p>
-            <a:pPr marL="342900" indent="-342900">
-              <a:spcAft>
-                <a:spcPts val="800"/>
-              </a:spcAft>
-              <a:buSzPct val="100000"/>
-              <a:buChar char="•"/>
-            </a:pPr>
-            <a:r>
-              <a:rPr lang="en-US" sz="1400" dirty="0">
+              <a:t>La stocker en ligne : Google Drive piraté = fonds volés. ...</a:t>
+            </a:r>
+            <a:endParaRPr lang="en-US" sz="1100" dirty="0"/>
+          </a:p>
+        </p:txBody>
+      </p:sp>
+      <p:sp>
+        <p:nvSpPr>
+          <p:cNvPr id="6" name="Text 3"/>
+          <p:cNvSpPr txBox="1"/>
+          <p:nvPr/>
+        </p:nvSpPr>
+        <p:spPr>
+          <a:xfrm>
+            <a:off x="731520" y="2011680"/>
+            <a:ext cx="2194560" cy="274320"/>
+          </a:xfrm>
+          <a:prstGeom prst="rect">
+            <a:avLst/>
+          </a:prstGeom>
+          <a:noFill/>
+          <a:ln/>
+        </p:spPr>
+        <p:txBody>
+          <a:bodyPr wrap="square" lIns="0" tIns="0" rIns="0" bIns="0" rtlCol="0" anchor="t"/>
+          <a:lstStyle/>
+          <a:p>
+            <a:pPr indent="0" marL="0">
+              <a:buNone/>
+            </a:pPr>
+            <a:r>
+              <a:rPr lang="en-US" sz="900" dirty="0">
+                <a:solidFill>
+                  <a:srgbClr val="94A3B8"/>
+                </a:solidFill>
+                <a:latin typeface="Calibri" pitchFamily="34" charset="0"/>
+                <a:ea typeface="Calibri" pitchFamily="34" charset="-122"/>
+                <a:cs typeface="Calibri" pitchFamily="34" charset="-120"/>
+              </a:rPr>
+              <a:t>quent.</a:t>
+            </a:r>
+            <a:endParaRPr lang="en-US" sz="900" dirty="0"/>
+          </a:p>
+        </p:txBody>
+      </p:sp>
+      <p:sp>
+        <p:nvSpPr>
+          <p:cNvPr id="7" name="Shape 4"/>
+          <p:cNvSpPr/>
+          <p:nvPr/>
+        </p:nvSpPr>
+        <p:spPr>
+          <a:xfrm>
+            <a:off x="3246120" y="1005840"/>
+            <a:ext cx="2468880" cy="1371600"/>
+          </a:xfrm>
+          <a:prstGeom prst="roundRect">
+            <a:avLst>
+              <a:gd name="adj" fmla="val 6667"/>
+            </a:avLst>
+          </a:prstGeom>
+          <a:solidFill>
+            <a:srgbClr val="1A2332"/>
+          </a:solidFill>
+          <a:ln/>
+        </p:spPr>
+      </p:sp>
+      <p:pic>
+        <p:nvPicPr>
+          <p:cNvPr id="8" name="Image 1" descr="preencoded.png">    </p:cNvPr>
+          <p:cNvPicPr>
+            <a:picLocks noChangeAspect="1"/>
+          </p:cNvPicPr>
+          <p:nvPr/>
+        </p:nvPicPr>
+        <p:blipFill>
+          <a:blip r:embed="rId2"/>
+          <a:stretch>
+            <a:fillRect/>
+          </a:stretch>
+        </p:blipFill>
+        <p:spPr>
+          <a:xfrm>
+            <a:off x="3383280" y="1143000"/>
+            <a:ext cx="502920" cy="502920"/>
+          </a:xfrm>
+          <a:prstGeom prst="rect">
+            <a:avLst/>
+          </a:prstGeom>
+        </p:spPr>
+      </p:pic>
+      <p:sp>
+        <p:nvSpPr>
+          <p:cNvPr id="9" name="Text 5"/>
+          <p:cNvSpPr txBox="1"/>
+          <p:nvPr/>
+        </p:nvSpPr>
+        <p:spPr>
+          <a:xfrm>
+            <a:off x="3383280" y="1719072"/>
+            <a:ext cx="2194560" cy="320040"/>
+          </a:xfrm>
+          <a:prstGeom prst="rect">
+            <a:avLst/>
+          </a:prstGeom>
+          <a:noFill/>
+          <a:ln/>
+        </p:spPr>
+        <p:txBody>
+          <a:bodyPr wrap="square" lIns="0" tIns="0" rIns="0" bIns="0" rtlCol="0" anchor="t"/>
+          <a:lstStyle/>
+          <a:p>
+            <a:pPr indent="0" marL="0">
+              <a:buNone/>
+            </a:pPr>
+            <a:r>
+              <a:rPr lang="en-US" sz="1100" b="1" dirty="0">
                 <a:solidFill>
                   <a:srgbClr val="FFFFFF"/>
                 </a:solidFill>
@@ -7423,20 +9221,123 @@
                 <a:ea typeface="Calibri" pitchFamily="34" charset="-122"/>
                 <a:cs typeface="Calibri" pitchFamily="34" charset="-120"/>
               </a:rPr>
-              <a:t>Prendre une photo : votre téléphone est piraté ou perdu = fin de partie.</a:t>
-            </a:r>
-            <a:endParaRPr lang="en-US" sz="1400" dirty="0"/>
-          </a:p>
-          <a:p>
-            <a:pPr marL="342900" indent="-342900">
-              <a:spcAft>
-                <a:spcPts val="800"/>
-              </a:spcAft>
-              <a:buSzPct val="100000"/>
-              <a:buChar char="•"/>
-            </a:pPr>
-            <a:r>
-              <a:rPr lang="en-US" sz="1400" dirty="0">
+              <a:t>Prendre une photo : votre téléphone est piraté ou perdu =...</a:t>
+            </a:r>
+            <a:endParaRPr lang="en-US" sz="1100" dirty="0"/>
+          </a:p>
+        </p:txBody>
+      </p:sp>
+      <p:sp>
+        <p:nvSpPr>
+          <p:cNvPr id="10" name="Text 6"/>
+          <p:cNvSpPr txBox="1"/>
+          <p:nvPr/>
+        </p:nvSpPr>
+        <p:spPr>
+          <a:xfrm>
+            <a:off x="3383280" y="2011680"/>
+            <a:ext cx="2194560" cy="274320"/>
+          </a:xfrm>
+          <a:prstGeom prst="rect">
+            <a:avLst/>
+          </a:prstGeom>
+          <a:noFill/>
+          <a:ln/>
+        </p:spPr>
+        <p:txBody>
+          <a:bodyPr wrap="square" lIns="0" tIns="0" rIns="0" bIns="0" rtlCol="0" anchor="t"/>
+          <a:lstStyle/>
+          <a:p>
+            <a:pPr indent="0" marL="0">
+              <a:buNone/>
+            </a:pPr>
+            <a:r>
+              <a:rPr lang="en-US" sz="900" dirty="0">
+                <a:solidFill>
+                  <a:srgbClr val="94A3B8"/>
+                </a:solidFill>
+                <a:latin typeface="Calibri" pitchFamily="34" charset="0"/>
+                <a:ea typeface="Calibri" pitchFamily="34" charset="-122"/>
+                <a:cs typeface="Calibri" pitchFamily="34" charset="-120"/>
+              </a:rPr>
+              <a:t>e.</a:t>
+            </a:r>
+            <a:endParaRPr lang="en-US" sz="900" dirty="0"/>
+          </a:p>
+        </p:txBody>
+      </p:sp>
+      <p:sp>
+        <p:nvSpPr>
+          <p:cNvPr id="11" name="Shape 7"/>
+          <p:cNvSpPr/>
+          <p:nvPr/>
+        </p:nvSpPr>
+        <p:spPr>
+          <a:xfrm>
+            <a:off x="5897880" y="1005840"/>
+            <a:ext cx="2468880" cy="1371600"/>
+          </a:xfrm>
+          <a:prstGeom prst="roundRect">
+            <a:avLst>
+              <a:gd name="adj" fmla="val 6667"/>
+            </a:avLst>
+          </a:prstGeom>
+          <a:solidFill>
+            <a:srgbClr val="1A2332"/>
+          </a:solidFill>
+          <a:ln/>
+        </p:spPr>
+      </p:sp>
+      <p:pic>
+        <p:nvPicPr>
+          <p:cNvPr id="12" name="Image 2" descr="preencoded.png">    </p:cNvPr>
+          <p:cNvPicPr>
+            <a:picLocks noChangeAspect="1"/>
+          </p:cNvPicPr>
+          <p:nvPr/>
+        </p:nvPicPr>
+        <p:blipFill>
+          <a:blip r:embed="rId3"/>
+          <a:stretch>
+            <a:fillRect/>
+          </a:stretch>
+        </p:blipFill>
+        <p:spPr>
+          <a:xfrm>
+            <a:off x="6035040" y="1143000"/>
+            <a:ext cx="502920" cy="502920"/>
+          </a:xfrm>
+          <a:prstGeom prst="rect">
+            <a:avLst/>
+          </a:prstGeom>
+        </p:spPr>
+      </p:pic>
+      <p:sp>
+        <p:nvSpPr>
+          <p:cNvPr id="13" name="Text 8"/>
+          <p:cNvSpPr txBox="1"/>
+          <p:nvPr/>
+        </p:nvSpPr>
+        <p:spPr>
+          <a:xfrm>
+            <a:off x="6035040" y="1719072"/>
+            <a:ext cx="2194560" cy="320040"/>
+          </a:xfrm>
+          <a:prstGeom prst="rect">
+            <a:avLst/>
+          </a:prstGeom>
+          <a:noFill/>
+          <a:ln/>
+        </p:spPr>
+        <p:txBody>
+          <a:bodyPr wrap="square" lIns="0" tIns="0" rIns="0" bIns="0" rtlCol="0" anchor="t"/>
+          <a:lstStyle/>
+          <a:p>
+            <a:pPr indent="0" marL="0">
+              <a:buNone/>
+            </a:pPr>
+            <a:r>
+              <a:rPr lang="en-US" sz="1100" b="1" dirty="0">
                 <a:solidFill>
                   <a:srgbClr val="FFFFFF"/>
                 </a:solidFill>
@@ -7444,20 +9345,123 @@
                 <a:ea typeface="Calibri" pitchFamily="34" charset="-122"/>
                 <a:cs typeface="Calibri" pitchFamily="34" charset="-120"/>
               </a:rPr>
-              <a:t>La saisir sur un site : AUCUN site légitime ne vous demandera jamais votre phrase secrète. AUCUN. Si un site vous la demande = c'est une arnaque, à 100%.</a:t>
-            </a:r>
-            <a:endParaRPr lang="en-US" sz="1400" dirty="0"/>
-          </a:p>
-          <a:p>
-            <a:pPr marL="342900" indent="-342900">
-              <a:spcAft>
-                <a:spcPts val="800"/>
-              </a:spcAft>
-              <a:buSzPct val="100000"/>
-              <a:buChar char="•"/>
-            </a:pPr>
-            <a:r>
-              <a:rPr lang="en-US" sz="1400" dirty="0">
+              <a:t>La saisir sur un site : AUCUN site légitime ne vous deman...</a:t>
+            </a:r>
+            <a:endParaRPr lang="en-US" sz="1100" dirty="0"/>
+          </a:p>
+        </p:txBody>
+      </p:sp>
+      <p:sp>
+        <p:nvSpPr>
+          <p:cNvPr id="14" name="Text 9"/>
+          <p:cNvSpPr txBox="1"/>
+          <p:nvPr/>
+        </p:nvSpPr>
+        <p:spPr>
+          <a:xfrm>
+            <a:off x="6035040" y="2011680"/>
+            <a:ext cx="2194560" cy="274320"/>
+          </a:xfrm>
+          <a:prstGeom prst="rect">
+            <a:avLst/>
+          </a:prstGeom>
+          <a:noFill/>
+          <a:ln/>
+        </p:spPr>
+        <p:txBody>
+          <a:bodyPr wrap="square" lIns="0" tIns="0" rIns="0" bIns="0" rtlCol="0" anchor="t"/>
+          <a:lstStyle/>
+          <a:p>
+            <a:pPr indent="0" marL="0">
+              <a:buNone/>
+            </a:pPr>
+            <a:r>
+              <a:rPr lang="en-US" sz="900" dirty="0">
+                <a:solidFill>
+                  <a:srgbClr val="94A3B8"/>
+                </a:solidFill>
+                <a:latin typeface="Calibri" pitchFamily="34" charset="0"/>
+                <a:ea typeface="Calibri" pitchFamily="34" charset="-122"/>
+                <a:cs typeface="Calibri" pitchFamily="34" charset="-120"/>
+              </a:rPr>
+              <a:t>otre phrase secrète. AUCUN. Si un site vous la demande = c'est une arnaque, à 10</a:t>
+            </a:r>
+            <a:endParaRPr lang="en-US" sz="900" dirty="0"/>
+          </a:p>
+        </p:txBody>
+      </p:sp>
+      <p:sp>
+        <p:nvSpPr>
+          <p:cNvPr id="15" name="Shape 10"/>
+          <p:cNvSpPr/>
+          <p:nvPr/>
+        </p:nvSpPr>
+        <p:spPr>
+          <a:xfrm>
+            <a:off x="594360" y="2514600"/>
+            <a:ext cx="2468880" cy="1371600"/>
+          </a:xfrm>
+          <a:prstGeom prst="roundRect">
+            <a:avLst>
+              <a:gd name="adj" fmla="val 6667"/>
+            </a:avLst>
+          </a:prstGeom>
+          <a:solidFill>
+            <a:srgbClr val="1A2332"/>
+          </a:solidFill>
+          <a:ln/>
+        </p:spPr>
+      </p:sp>
+      <p:pic>
+        <p:nvPicPr>
+          <p:cNvPr id="16" name="Image 3" descr="preencoded.png">    </p:cNvPr>
+          <p:cNvPicPr>
+            <a:picLocks noChangeAspect="1"/>
+          </p:cNvPicPr>
+          <p:nvPr/>
+        </p:nvPicPr>
+        <p:blipFill>
+          <a:blip r:embed="rId4"/>
+          <a:stretch>
+            <a:fillRect/>
+          </a:stretch>
+        </p:blipFill>
+        <p:spPr>
+          <a:xfrm>
+            <a:off x="731520" y="2651760"/>
+            <a:ext cx="502920" cy="502920"/>
+          </a:xfrm>
+          <a:prstGeom prst="rect">
+            <a:avLst/>
+          </a:prstGeom>
+        </p:spPr>
+      </p:pic>
+      <p:sp>
+        <p:nvSpPr>
+          <p:cNvPr id="17" name="Text 11"/>
+          <p:cNvSpPr txBox="1"/>
+          <p:nvPr/>
+        </p:nvSpPr>
+        <p:spPr>
+          <a:xfrm>
+            <a:off x="731520" y="3227832"/>
+            <a:ext cx="2194560" cy="320040"/>
+          </a:xfrm>
+          <a:prstGeom prst="rect">
+            <a:avLst/>
+          </a:prstGeom>
+          <a:noFill/>
+          <a:ln/>
+        </p:spPr>
+        <p:txBody>
+          <a:bodyPr wrap="square" lIns="0" tIns="0" rIns="0" bIns="0" rtlCol="0" anchor="t"/>
+          <a:lstStyle/>
+          <a:p>
+            <a:pPr indent="0" marL="0">
+              <a:buNone/>
+            </a:pPr>
+            <a:r>
+              <a:rPr lang="en-US" sz="1100" b="1" dirty="0">
                 <a:solidFill>
                   <a:srgbClr val="FFFFFF"/>
                 </a:solidFill>
@@ -7465,20 +9469,123 @@
                 <a:ea typeface="Calibri" pitchFamily="34" charset="-122"/>
                 <a:cs typeface="Calibri" pitchFamily="34" charset="-120"/>
               </a:rPr>
-              <a:t>La donner à un « support technique » : Trust Wallet et MetaMask N'ONT PAS de support qui vous contactera. Si quelqu'un se dit « support » et vous demande votre phrase = arnaque.</a:t>
-            </a:r>
-            <a:endParaRPr lang="en-US" sz="1400" dirty="0"/>
-          </a:p>
-          <a:p>
-            <a:pPr marL="342900" indent="-342900">
-              <a:spcAft>
-                <a:spcPts val="800"/>
-              </a:spcAft>
-              <a:buSzPct val="100000"/>
-              <a:buChar char="•"/>
-            </a:pPr>
-            <a:r>
-              <a:rPr lang="en-US" sz="1400" dirty="0">
+              <a:t>La donner à un « support technique » : Trust Wallet et Me...</a:t>
+            </a:r>
+            <a:endParaRPr lang="en-US" sz="1100" dirty="0"/>
+          </a:p>
+        </p:txBody>
+      </p:sp>
+      <p:sp>
+        <p:nvSpPr>
+          <p:cNvPr id="18" name="Text 12"/>
+          <p:cNvSpPr txBox="1"/>
+          <p:nvPr/>
+        </p:nvSpPr>
+        <p:spPr>
+          <a:xfrm>
+            <a:off x="731520" y="3520440"/>
+            <a:ext cx="2194560" cy="274320"/>
+          </a:xfrm>
+          <a:prstGeom prst="rect">
+            <a:avLst/>
+          </a:prstGeom>
+          <a:noFill/>
+          <a:ln/>
+        </p:spPr>
+        <p:txBody>
+          <a:bodyPr wrap="square" lIns="0" tIns="0" rIns="0" bIns="0" rtlCol="0" anchor="t"/>
+          <a:lstStyle/>
+          <a:p>
+            <a:pPr indent="0" marL="0">
+              <a:buNone/>
+            </a:pPr>
+            <a:r>
+              <a:rPr lang="en-US" sz="900" dirty="0">
+                <a:solidFill>
+                  <a:srgbClr val="94A3B8"/>
+                </a:solidFill>
+                <a:latin typeface="Calibri" pitchFamily="34" charset="0"/>
+                <a:ea typeface="Calibri" pitchFamily="34" charset="-122"/>
+                <a:cs typeface="Calibri" pitchFamily="34" charset="-120"/>
+              </a:rPr>
+              <a:t>PAS de support qui vous contactera. Si quelqu'un se dit « support » et vous dema</a:t>
+            </a:r>
+            <a:endParaRPr lang="en-US" sz="900" dirty="0"/>
+          </a:p>
+        </p:txBody>
+      </p:sp>
+      <p:sp>
+        <p:nvSpPr>
+          <p:cNvPr id="19" name="Shape 13"/>
+          <p:cNvSpPr/>
+          <p:nvPr/>
+        </p:nvSpPr>
+        <p:spPr>
+          <a:xfrm>
+            <a:off x="3246120" y="2514600"/>
+            <a:ext cx="2468880" cy="1371600"/>
+          </a:xfrm>
+          <a:prstGeom prst="roundRect">
+            <a:avLst>
+              <a:gd name="adj" fmla="val 6667"/>
+            </a:avLst>
+          </a:prstGeom>
+          <a:solidFill>
+            <a:srgbClr val="1A2332"/>
+          </a:solidFill>
+          <a:ln/>
+        </p:spPr>
+      </p:sp>
+      <p:pic>
+        <p:nvPicPr>
+          <p:cNvPr id="20" name="Image 4" descr="preencoded.png">    </p:cNvPr>
+          <p:cNvPicPr>
+            <a:picLocks noChangeAspect="1"/>
+          </p:cNvPicPr>
+          <p:nvPr/>
+        </p:nvPicPr>
+        <p:blipFill>
+          <a:blip r:embed="rId5"/>
+          <a:stretch>
+            <a:fillRect/>
+          </a:stretch>
+        </p:blipFill>
+        <p:spPr>
+          <a:xfrm>
+            <a:off x="3383280" y="2651760"/>
+            <a:ext cx="502920" cy="502920"/>
+          </a:xfrm>
+          <a:prstGeom prst="rect">
+            <a:avLst/>
+          </a:prstGeom>
+        </p:spPr>
+      </p:pic>
+      <p:sp>
+        <p:nvSpPr>
+          <p:cNvPr id="21" name="Text 14"/>
+          <p:cNvSpPr txBox="1"/>
+          <p:nvPr/>
+        </p:nvSpPr>
+        <p:spPr>
+          <a:xfrm>
+            <a:off x="3383280" y="3227832"/>
+            <a:ext cx="2194560" cy="320040"/>
+          </a:xfrm>
+          <a:prstGeom prst="rect">
+            <a:avLst/>
+          </a:prstGeom>
+          <a:noFill/>
+          <a:ln/>
+        </p:spPr>
+        <p:txBody>
+          <a:bodyPr wrap="square" lIns="0" tIns="0" rIns="0" bIns="0" rtlCol="0" anchor="t"/>
+          <a:lstStyle/>
+          <a:p>
+            <a:pPr indent="0" marL="0">
+              <a:buNone/>
+            </a:pPr>
+            <a:r>
+              <a:rPr lang="en-US" sz="1100" b="1" dirty="0">
                 <a:solidFill>
                   <a:srgbClr val="FFFFFF"/>
                 </a:solidFill>
@@ -7486,22 +9593,22 @@
                 <a:ea typeface="Calibri" pitchFamily="34" charset="-122"/>
                 <a:cs typeface="Calibri" pitchFamily="34" charset="-120"/>
               </a:rPr>
-              <a:t>La partager avec un « conseiller » sur Telegram/WhatsApp : les groupes crypto sont infestés d'arnaqueurs. Ne donnez JAMAIS votre phrase à personne.</a:t>
-            </a:r>
-            <a:endParaRPr lang="en-US" sz="1400" dirty="0"/>
-          </a:p>
-        </p:txBody>
-      </p:sp>
-      <p:sp>
-        <p:nvSpPr>
-          <p:cNvPr id="4" name="Text 2"/>
-          <p:cNvSpPr txBox="1"/>
-          <p:nvPr/>
-        </p:nvSpPr>
-        <p:spPr>
-          <a:xfrm>
-            <a:off x="731520" y="4709160"/>
-            <a:ext cx="7680960" cy="274320"/>
+              <a:t>La partager avec un « conseiller » sur Telegram/WhatsApp ...</a:t>
+            </a:r>
+            <a:endParaRPr lang="en-US" sz="1100" dirty="0"/>
+          </a:p>
+        </p:txBody>
+      </p:sp>
+      <p:sp>
+        <p:nvSpPr>
+          <p:cNvPr id="22" name="Text 15"/>
+          <p:cNvSpPr txBox="1"/>
+          <p:nvPr/>
+        </p:nvSpPr>
+        <p:spPr>
+          <a:xfrm>
+            <a:off x="3383280" y="3520440"/>
+            <a:ext cx="2194560" cy="274320"/>
           </a:xfrm>
           <a:prstGeom prst="rect">
             <a:avLst/>
@@ -7510,22 +9617,22 @@
           <a:ln/>
         </p:spPr>
         <p:txBody>
-          <a:bodyPr wrap="square" lIns="0" tIns="0" rIns="0" bIns="0" rtlCol="0" anchor="ctr"/>
-          <a:lstStyle/>
-          <a:p>
-            <a:pPr algn="r" indent="0" marL="0">
+          <a:bodyPr wrap="square" lIns="0" tIns="0" rIns="0" bIns="0" rtlCol="0" anchor="t"/>
+          <a:lstStyle/>
+          <a:p>
+            <a:pPr indent="0" marL="0">
               <a:buNone/>
             </a:pPr>
             <a:r>
               <a:rPr lang="en-US" sz="900" dirty="0">
                 <a:solidFill>
-                  <a:srgbClr val="64748B"/>
-                </a:solidFill>
-                <a:latin typeface="Calibri" pitchFamily="34" charset="0"/>
-                <a:ea typeface="Calibri" pitchFamily="34" charset="-122"/>
-                <a:cs typeface="Calibri" pitchFamily="34" charset="-120"/>
-              </a:rPr>
-              <a:t>Module 7 — Lecon 3</a:t>
+                  <a:srgbClr val="94A3B8"/>
+                </a:solidFill>
+                <a:latin typeface="Calibri" pitchFamily="34" charset="0"/>
+                <a:ea typeface="Calibri" pitchFamily="34" charset="-122"/>
+                <a:cs typeface="Calibri" pitchFamily="34" charset="-120"/>
+              </a:rPr>
+              <a:t> crypto sont infestés d'arnaqueurs. Ne donnez JAMAIS votre phrase à personne.</a:t>
             </a:r>
             <a:endParaRPr lang="en-US" sz="900" dirty="0"/>
           </a:p>
@@ -7565,14 +9672,60 @@
       </p:grpSpPr>
       <p:sp>
         <p:nvSpPr>
-          <p:cNvPr id="2" name="Text 0"/>
-          <p:cNvSpPr txBox="1"/>
-          <p:nvPr/>
-        </p:nvSpPr>
-        <p:spPr>
-          <a:xfrm>
-            <a:off x="731520" y="365760"/>
-            <a:ext cx="7680960" cy="548640"/>
+          <p:cNvPr id="2" name="Shape 0"/>
+          <p:cNvSpPr/>
+          <p:nvPr/>
+        </p:nvSpPr>
+        <p:spPr>
+          <a:xfrm>
+            <a:off x="7955280" y="182880"/>
+            <a:ext cx="640080" cy="640080"/>
+          </a:xfrm>
+          <a:prstGeom prst="ellipse">
+            <a:avLst/>
+          </a:prstGeom>
+          <a:solidFill>
+            <a:srgbClr val="EF4444">
+              <a:alpha val="12000"/>
+            </a:srgbClr>
+          </a:solidFill>
+          <a:ln/>
+        </p:spPr>
+      </p:sp>
+      <p:pic>
+        <p:nvPicPr>
+          <p:cNvPr id="3" name="Image 0" descr="preencoded.png">    </p:cNvPr>
+          <p:cNvPicPr>
+            <a:picLocks noChangeAspect="1"/>
+          </p:cNvPicPr>
+          <p:nvPr/>
+        </p:nvPicPr>
+        <p:blipFill>
+          <a:blip r:embed="rId1"/>
+          <a:stretch>
+            <a:fillRect/>
+          </a:stretch>
+        </p:blipFill>
+        <p:spPr>
+          <a:xfrm>
+            <a:off x="8028432" y="256032"/>
+            <a:ext cx="493776" cy="493776"/>
+          </a:xfrm>
+          <a:prstGeom prst="rect">
+            <a:avLst/>
+          </a:prstGeom>
+        </p:spPr>
+      </p:pic>
+      <p:sp>
+        <p:nvSpPr>
+          <p:cNvPr id="4" name="Text 1"/>
+          <p:cNvSpPr txBox="1"/>
+          <p:nvPr/>
+        </p:nvSpPr>
+        <p:spPr>
+          <a:xfrm>
+            <a:off x="731520" y="274320"/>
+            <a:ext cx="7132320" cy="502920"/>
           </a:xfrm>
           <a:prstGeom prst="rect">
             <a:avLst/>
@@ -7588,9 +9741,9 @@
               <a:buNone/>
             </a:pPr>
             <a:r>
-              <a:rPr lang="en-US" sz="2200" b="1" dirty="0">
-                <a:solidFill>
-                  <a:srgbClr val="00BFA6"/>
+              <a:rPr lang="en-US" sz="2000" b="1" dirty="0">
+                <a:solidFill>
+                  <a:srgbClr val="EF4444"/>
                 </a:solidFill>
                 <a:latin typeface="Calibri" pitchFamily="34" charset="0"/>
                 <a:ea typeface="Calibri" pitchFamily="34" charset="-122"/>
@@ -7598,19 +9751,19 @@
               </a:rPr>
               <a:t>Les bonnes pratiques concrètes</a:t>
             </a:r>
-            <a:endParaRPr lang="en-US" sz="2200" dirty="0"/>
-          </a:p>
-        </p:txBody>
-      </p:sp>
-      <p:sp>
-        <p:nvSpPr>
-          <p:cNvPr id="3" name="Text 1"/>
-          <p:cNvSpPr txBox="1"/>
-          <p:nvPr/>
-        </p:nvSpPr>
-        <p:spPr>
-          <a:xfrm>
-            <a:off x="731520" y="1051560"/>
+            <a:endParaRPr lang="en-US" sz="2000" dirty="0"/>
+          </a:p>
+        </p:txBody>
+      </p:sp>
+      <p:sp>
+        <p:nvSpPr>
+          <p:cNvPr id="5" name="Text 2"/>
+          <p:cNvSpPr txBox="1"/>
+          <p:nvPr/>
+        </p:nvSpPr>
+        <p:spPr>
+          <a:xfrm>
+            <a:off x="731520" y="960120"/>
             <a:ext cx="7680960" cy="3657600"/>
           </a:xfrm>
           <a:prstGeom prst="rect">
@@ -7710,7 +9863,7 @@
       </p:sp>
       <p:sp>
         <p:nvSpPr>
-          <p:cNvPr id="4" name="Text 2"/>
+          <p:cNvPr id="6" name="Text 3"/>
           <p:cNvSpPr txBox="1"/>
           <p:nvPr/>
         </p:nvSpPr>
@@ -7741,7 +9894,7 @@
                 <a:ea typeface="Calibri" pitchFamily="34" charset="-122"/>
                 <a:cs typeface="Calibri" pitchFamily="34" charset="-120"/>
               </a:rPr>
-              <a:t>Module 7 — Lecon 3</a:t>
+              <a:t>Module 7 — Leçon 3</a:t>
             </a:r>
             <a:endParaRPr lang="en-US" sz="900" dirty="0"/>
           </a:p>
@@ -7787,8 +9940,8 @@
         </p:nvSpPr>
         <p:spPr>
           <a:xfrm>
-            <a:off x="731520" y="365760"/>
-            <a:ext cx="7680960" cy="548640"/>
+            <a:off x="731520" y="274320"/>
+            <a:ext cx="7680960" cy="502920"/>
           </a:xfrm>
           <a:prstGeom prst="rect">
             <a:avLst/>
@@ -7804,9 +9957,9 @@
               <a:buNone/>
             </a:pPr>
             <a:r>
-              <a:rPr lang="en-US" sz="2200" b="1" dirty="0">
-                <a:solidFill>
-                  <a:srgbClr val="00BFA6"/>
+              <a:rPr lang="en-US" sz="2000" b="1" dirty="0">
+                <a:solidFill>
+                  <a:srgbClr val="EF4444"/>
                 </a:solidFill>
                 <a:latin typeface="Calibri" pitchFamily="34" charset="0"/>
                 <a:ea typeface="Calibri" pitchFamily="34" charset="-122"/>
@@ -7814,7 +9967,7 @@
               </a:rPr>
               <a:t>Rappel final</a:t>
             </a:r>
-            <a:endParaRPr lang="en-US" sz="2200" dirty="0"/>
+            <a:endParaRPr lang="en-US" sz="2000" dirty="0"/>
           </a:p>
         </p:txBody>
       </p:sp>
@@ -7826,8 +9979,8 @@
         </p:nvSpPr>
         <p:spPr>
           <a:xfrm>
-            <a:off x="731520" y="1051560"/>
-            <a:ext cx="7680960" cy="3657600"/>
+            <a:off x="731520" y="1005840"/>
+            <a:ext cx="4206240" cy="3474720"/>
           </a:xfrm>
           <a:prstGeom prst="rect">
             <a:avLst/>
@@ -7841,13 +9994,13 @@
           <a:p>
             <a:pPr marL="342900" indent="-342900">
               <a:spcAft>
-                <a:spcPts val="800"/>
+                <a:spcPts val="600"/>
               </a:spcAft>
               <a:buSzPct val="100000"/>
               <a:buChar char="•"/>
             </a:pPr>
             <a:r>
-              <a:rPr lang="en-US" sz="1400" dirty="0">
+              <a:rPr lang="en-US" sz="1300" dirty="0">
                 <a:solidFill>
                   <a:srgbClr val="FFFFFF"/>
                 </a:solidFill>
@@ -7857,18 +10010,18 @@
               </a:rPr>
               <a:t>En crypto, vous êtes votre propre banque. Cela veut dire :</a:t>
             </a:r>
-            <a:endParaRPr lang="en-US" sz="1400" dirty="0"/>
+            <a:endParaRPr lang="en-US" sz="1300" dirty="0"/>
           </a:p>
           <a:p>
             <a:pPr marL="342900" indent="-342900">
               <a:spcAft>
-                <a:spcPts val="800"/>
+                <a:spcPts val="600"/>
               </a:spcAft>
               <a:buSzPct val="100000"/>
               <a:buChar char="•"/>
             </a:pPr>
             <a:r>
-              <a:rPr lang="en-US" sz="1400" dirty="0">
+              <a:rPr lang="en-US" sz="1300" dirty="0">
                 <a:solidFill>
                   <a:srgbClr val="FFFFFF"/>
                 </a:solidFill>
@@ -7878,18 +10031,18 @@
               </a:rPr>
               <a:t>Une liberté totale.</a:t>
             </a:r>
-            <a:endParaRPr lang="en-US" sz="1400" dirty="0"/>
+            <a:endParaRPr lang="en-US" sz="1300" dirty="0"/>
           </a:p>
           <a:p>
             <a:pPr marL="342900" indent="-342900">
               <a:spcAft>
-                <a:spcPts val="800"/>
+                <a:spcPts val="600"/>
               </a:spcAft>
               <a:buSzPct val="100000"/>
               <a:buChar char="•"/>
             </a:pPr>
             <a:r>
-              <a:rPr lang="en-US" sz="1400" dirty="0">
+              <a:rPr lang="en-US" sz="1300" dirty="0">
                 <a:solidFill>
                   <a:srgbClr val="FFFFFF"/>
                 </a:solidFill>
@@ -7899,18 +10052,82 @@
               </a:rPr>
               <a:t>Une responsabilité totale.</a:t>
             </a:r>
-            <a:endParaRPr lang="en-US" sz="1400" dirty="0"/>
-          </a:p>
-          <a:p>
-            <a:pPr marL="342900" indent="-342900">
-              <a:spcAft>
-                <a:spcPts val="800"/>
-              </a:spcAft>
-              <a:buSzPct val="100000"/>
-              <a:buChar char="•"/>
-            </a:pPr>
-            <a:r>
-              <a:rPr lang="en-US" sz="1400" dirty="0">
+            <a:endParaRPr lang="en-US" sz="1300" dirty="0"/>
+          </a:p>
+        </p:txBody>
+      </p:sp>
+      <p:sp>
+        <p:nvSpPr>
+          <p:cNvPr id="4" name="Shape 2"/>
+          <p:cNvSpPr/>
+          <p:nvPr/>
+        </p:nvSpPr>
+        <p:spPr>
+          <a:xfrm>
+            <a:off x="5120640" y="1005840"/>
+            <a:ext cx="3474720" cy="640080"/>
+          </a:xfrm>
+          <a:prstGeom prst="roundRect">
+            <a:avLst>
+              <a:gd name="adj" fmla="val 14286"/>
+            </a:avLst>
+          </a:prstGeom>
+          <a:solidFill>
+            <a:srgbClr val="1A2332"/>
+          </a:solidFill>
+          <a:ln/>
+        </p:spPr>
+      </p:sp>
+      <p:pic>
+        <p:nvPicPr>
+          <p:cNvPr id="5" name="Image 0" descr="preencoded.png">    </p:cNvPr>
+          <p:cNvPicPr>
+            <a:picLocks noChangeAspect="1"/>
+          </p:cNvPicPr>
+          <p:nvPr/>
+        </p:nvPicPr>
+        <p:blipFill>
+          <a:blip r:embed="rId1"/>
+          <a:stretch>
+            <a:fillRect/>
+          </a:stretch>
+        </p:blipFill>
+        <p:spPr>
+          <a:xfrm>
+            <a:off x="5257800" y="1106424"/>
+            <a:ext cx="438912" cy="438912"/>
+          </a:xfrm>
+          <a:prstGeom prst="rect">
+            <a:avLst/>
+          </a:prstGeom>
+        </p:spPr>
+      </p:pic>
+      <p:sp>
+        <p:nvSpPr>
+          <p:cNvPr id="6" name="Text 3"/>
+          <p:cNvSpPr txBox="1"/>
+          <p:nvPr/>
+        </p:nvSpPr>
+        <p:spPr>
+          <a:xfrm>
+            <a:off x="5806440" y="1005840"/>
+            <a:ext cx="2651760" cy="640080"/>
+          </a:xfrm>
+          <a:prstGeom prst="rect">
+            <a:avLst/>
+          </a:prstGeom>
+          <a:noFill/>
+          <a:ln/>
+        </p:spPr>
+        <p:txBody>
+          <a:bodyPr wrap="square" lIns="0" tIns="0" rIns="0" bIns="0" rtlCol="0" anchor="ctr"/>
+          <a:lstStyle/>
+          <a:p>
+            <a:pPr indent="0" marL="0">
+              <a:buNone/>
+            </a:pPr>
+            <a:r>
+              <a:rPr lang="en-US" sz="1200" dirty="0">
                 <a:solidFill>
                   <a:srgbClr val="FFFFFF"/>
                 </a:solidFill>
@@ -7920,18 +10137,82 @@
               </a:rPr>
               <a:t>Aucun recours possible en cas d'erreur.</a:t>
             </a:r>
-            <a:endParaRPr lang="en-US" sz="1400" dirty="0"/>
-          </a:p>
-          <a:p>
-            <a:pPr marL="342900" indent="-342900">
-              <a:spcAft>
-                <a:spcPts val="800"/>
-              </a:spcAft>
-              <a:buSzPct val="100000"/>
-              <a:buChar char="•"/>
-            </a:pPr>
-            <a:r>
-              <a:rPr lang="en-US" sz="1400" dirty="0">
+            <a:endParaRPr lang="en-US" sz="1200" dirty="0"/>
+          </a:p>
+        </p:txBody>
+      </p:sp>
+      <p:sp>
+        <p:nvSpPr>
+          <p:cNvPr id="7" name="Shape 4"/>
+          <p:cNvSpPr/>
+          <p:nvPr/>
+        </p:nvSpPr>
+        <p:spPr>
+          <a:xfrm>
+            <a:off x="5120640" y="1737360"/>
+            <a:ext cx="3474720" cy="640080"/>
+          </a:xfrm>
+          <a:prstGeom prst="roundRect">
+            <a:avLst>
+              <a:gd name="adj" fmla="val 14286"/>
+            </a:avLst>
+          </a:prstGeom>
+          <a:solidFill>
+            <a:srgbClr val="1A2332"/>
+          </a:solidFill>
+          <a:ln/>
+        </p:spPr>
+      </p:sp>
+      <p:pic>
+        <p:nvPicPr>
+          <p:cNvPr id="8" name="Image 1" descr="preencoded.png">    </p:cNvPr>
+          <p:cNvPicPr>
+            <a:picLocks noChangeAspect="1"/>
+          </p:cNvPicPr>
+          <p:nvPr/>
+        </p:nvPicPr>
+        <p:blipFill>
+          <a:blip r:embed="rId2"/>
+          <a:stretch>
+            <a:fillRect/>
+          </a:stretch>
+        </p:blipFill>
+        <p:spPr>
+          <a:xfrm>
+            <a:off x="5257800" y="1837944"/>
+            <a:ext cx="438912" cy="438912"/>
+          </a:xfrm>
+          <a:prstGeom prst="rect">
+            <a:avLst/>
+          </a:prstGeom>
+        </p:spPr>
+      </p:pic>
+      <p:sp>
+        <p:nvSpPr>
+          <p:cNvPr id="9" name="Text 5"/>
+          <p:cNvSpPr txBox="1"/>
+          <p:nvPr/>
+        </p:nvSpPr>
+        <p:spPr>
+          <a:xfrm>
+            <a:off x="5806440" y="1737360"/>
+            <a:ext cx="2651760" cy="640080"/>
+          </a:xfrm>
+          <a:prstGeom prst="rect">
+            <a:avLst/>
+          </a:prstGeom>
+          <a:noFill/>
+          <a:ln/>
+        </p:spPr>
+        <p:txBody>
+          <a:bodyPr wrap="square" lIns="0" tIns="0" rIns="0" bIns="0" rtlCol="0" anchor="ctr"/>
+          <a:lstStyle/>
+          <a:p>
+            <a:pPr indent="0" marL="0">
+              <a:buNone/>
+            </a:pPr>
+            <a:r>
+              <a:rPr lang="en-US" sz="1200" dirty="0">
                 <a:solidFill>
                   <a:srgbClr val="FFFFFF"/>
                 </a:solidFill>
@@ -7939,48 +10220,9 @@
                 <a:ea typeface="Calibri" pitchFamily="34" charset="-122"/>
                 <a:cs typeface="Calibri" pitchFamily="34" charset="-120"/>
               </a:rPr>
-              <a:t>Protégez votre phrase comme si votre patrimoine en dépendait — parce que c'est le cas.</a:t>
-            </a:r>
-            <a:endParaRPr lang="en-US" sz="1400" dirty="0"/>
-          </a:p>
-        </p:txBody>
-      </p:sp>
-      <p:sp>
-        <p:nvSpPr>
-          <p:cNvPr id="4" name="Text 2"/>
-          <p:cNvSpPr txBox="1"/>
-          <p:nvPr/>
-        </p:nvSpPr>
-        <p:spPr>
-          <a:xfrm>
-            <a:off x="731520" y="4709160"/>
-            <a:ext cx="7680960" cy="274320"/>
-          </a:xfrm>
-          <a:prstGeom prst="rect">
-            <a:avLst/>
-          </a:prstGeom>
-          <a:noFill/>
-          <a:ln/>
-        </p:spPr>
-        <p:txBody>
-          <a:bodyPr wrap="square" lIns="0" tIns="0" rIns="0" bIns="0" rtlCol="0" anchor="ctr"/>
-          <a:lstStyle/>
-          <a:p>
-            <a:pPr algn="r" indent="0" marL="0">
-              <a:buNone/>
-            </a:pPr>
-            <a:r>
-              <a:rPr lang="en-US" sz="900" dirty="0">
-                <a:solidFill>
-                  <a:srgbClr val="64748B"/>
-                </a:solidFill>
-                <a:latin typeface="Calibri" pitchFamily="34" charset="0"/>
-                <a:ea typeface="Calibri" pitchFamily="34" charset="-122"/>
-                <a:cs typeface="Calibri" pitchFamily="34" charset="-120"/>
-              </a:rPr>
-              <a:t>Module 7 — Lecon 3</a:t>
-            </a:r>
-            <a:endParaRPr lang="en-US" sz="900" dirty="0"/>
+              <a:t>Protégez votre phrase comme si votre patrimoine en dépendait — parce que c'es...</a:t>
+            </a:r>
+            <a:endParaRPr lang="en-US" sz="1200" dirty="0"/>
           </a:p>
         </p:txBody>
       </p:sp>
@@ -8016,16 +10258,40 @@
           <a:chExt cx="0" cy="0"/>
         </a:xfrm>
       </p:grpSpPr>
-      <p:sp>
-        <p:nvSpPr>
-          <p:cNvPr id="2" name="Text 0"/>
-          <p:cNvSpPr txBox="1"/>
-          <p:nvPr/>
-        </p:nvSpPr>
-        <p:spPr>
-          <a:xfrm>
-            <a:off x="731520" y="457200"/>
-            <a:ext cx="2743200" cy="365760"/>
+      <p:pic>
+        <p:nvPicPr>
+          <p:cNvPr id="2" name="Image 0" descr="preencoded.png">    </p:cNvPr>
+          <p:cNvPicPr>
+            <a:picLocks noChangeAspect="1"/>
+          </p:cNvPicPr>
+          <p:nvPr/>
+        </p:nvPicPr>
+        <p:blipFill>
+          <a:blip r:embed="rId1"/>
+          <a:stretch>
+            <a:fillRect/>
+          </a:stretch>
+        </p:blipFill>
+        <p:spPr>
+          <a:xfrm>
+            <a:off x="731520" y="320040"/>
+            <a:ext cx="457200" cy="457200"/>
+          </a:xfrm>
+          <a:prstGeom prst="rect">
+            <a:avLst/>
+          </a:prstGeom>
+        </p:spPr>
+      </p:pic>
+      <p:sp>
+        <p:nvSpPr>
+          <p:cNvPr id="3" name="Text 0"/>
+          <p:cNvSpPr txBox="1"/>
+          <p:nvPr/>
+        </p:nvSpPr>
+        <p:spPr>
+          <a:xfrm>
+            <a:off x="1280160" y="365760"/>
+            <a:ext cx="2743200" cy="320040"/>
           </a:xfrm>
           <a:prstGeom prst="rect">
             <a:avLst/>
@@ -8057,14 +10323,14 @@
       </p:sp>
       <p:sp>
         <p:nvSpPr>
-          <p:cNvPr id="3" name="Text 1"/>
-          <p:cNvSpPr txBox="1"/>
-          <p:nvPr/>
-        </p:nvSpPr>
-        <p:spPr>
-          <a:xfrm>
-            <a:off x="731520" y="868680"/>
-            <a:ext cx="7680960" cy="502920"/>
+          <p:cNvPr id="4" name="Text 1"/>
+          <p:cNvSpPr txBox="1"/>
+          <p:nvPr/>
+        </p:nvSpPr>
+        <p:spPr>
+          <a:xfrm>
+            <a:off x="731520" y="822960"/>
+            <a:ext cx="7680960" cy="457200"/>
           </a:xfrm>
           <a:prstGeom prst="rect">
             <a:avLst/>
@@ -8080,7 +10346,7 @@
               <a:buNone/>
             </a:pPr>
             <a:r>
-              <a:rPr lang="en-US" sz="2200" b="1" dirty="0">
+              <a:rPr lang="en-US" sz="2000" b="1" dirty="0">
                 <a:solidFill>
                   <a:srgbClr val="FFFFFF"/>
                 </a:solidFill>
@@ -8090,28 +10356,50 @@
               </a:rPr>
               <a:t>La phrase secrète : la règle d'or</a:t>
             </a:r>
-            <a:endParaRPr lang="en-US" sz="2200" dirty="0"/>
-          </a:p>
-        </p:txBody>
-      </p:sp>
-      <p:sp>
-        <p:nvSpPr>
-          <p:cNvPr id="4" name="Text 2"/>
-          <p:cNvSpPr txBox="1"/>
-          <p:nvPr/>
-        </p:nvSpPr>
-        <p:spPr>
-          <a:xfrm>
-            <a:off x="731520" y="1554480"/>
-            <a:ext cx="457200" cy="548640"/>
+            <a:endParaRPr lang="en-US" sz="2000" dirty="0"/>
+          </a:p>
+        </p:txBody>
+      </p:sp>
+      <p:sp>
+        <p:nvSpPr>
+          <p:cNvPr id="5" name="Shape 2"/>
+          <p:cNvSpPr/>
+          <p:nvPr/>
+        </p:nvSpPr>
+        <p:spPr>
+          <a:xfrm>
+            <a:off x="731520" y="1463040"/>
+            <a:ext cx="7680960" cy="548640"/>
           </a:xfrm>
           <a:prstGeom prst="roundRect">
             <a:avLst>
-              <a:gd name="adj" fmla="val 50000"/>
+              <a:gd name="adj" fmla="val 13333"/>
             </a:avLst>
           </a:prstGeom>
           <a:solidFill>
-            <a:srgbClr val="00BFA6"/>
+            <a:srgbClr val="0F1419"/>
+          </a:solidFill>
+          <a:ln/>
+        </p:spPr>
+      </p:sp>
+      <p:sp>
+        <p:nvSpPr>
+          <p:cNvPr id="6" name="Text 3"/>
+          <p:cNvSpPr txBox="1"/>
+          <p:nvPr/>
+        </p:nvSpPr>
+        <p:spPr>
+          <a:xfrm>
+            <a:off x="914400" y="1463040"/>
+            <a:ext cx="411480" cy="548640"/>
+          </a:xfrm>
+          <a:prstGeom prst="roundRect">
+            <a:avLst>
+              <a:gd name="adj" fmla="val 48889"/>
+            </a:avLst>
+          </a:prstGeom>
+          <a:solidFill>
+            <a:srgbClr val="EF4444"/>
           </a:solidFill>
           <a:ln/>
         </p:spPr>
@@ -8123,7 +10411,7 @@
               <a:buNone/>
             </a:pPr>
             <a:r>
-              <a:rPr lang="en-US" sz="1600" b="1" dirty="0">
+              <a:rPr lang="en-US" sz="1500" b="1" dirty="0">
                 <a:solidFill>
                   <a:srgbClr val="0F1419"/>
                 </a:solidFill>
@@ -8133,20 +10421,20 @@
               </a:rPr>
               <a:t>1</a:t>
             </a:r>
-            <a:endParaRPr lang="en-US" sz="1600" dirty="0"/>
-          </a:p>
-        </p:txBody>
-      </p:sp>
-      <p:sp>
-        <p:nvSpPr>
-          <p:cNvPr id="5" name="Text 3"/>
-          <p:cNvSpPr txBox="1"/>
-          <p:nvPr/>
-        </p:nvSpPr>
-        <p:spPr>
-          <a:xfrm>
-            <a:off x="1371600" y="1554480"/>
-            <a:ext cx="7040880" cy="548640"/>
+            <a:endParaRPr lang="en-US" sz="1500" dirty="0"/>
+          </a:p>
+        </p:txBody>
+      </p:sp>
+      <p:sp>
+        <p:nvSpPr>
+          <p:cNvPr id="7" name="Text 4"/>
+          <p:cNvSpPr txBox="1"/>
+          <p:nvPr/>
+        </p:nvSpPr>
+        <p:spPr>
+          <a:xfrm>
+            <a:off x="1508760" y="1463040"/>
+            <a:ext cx="6766560" cy="548640"/>
           </a:xfrm>
           <a:prstGeom prst="rect">
             <a:avLst/>
@@ -8162,7 +10450,7 @@
               <a:buNone/>
             </a:pPr>
             <a:r>
-              <a:rPr lang="en-US" sz="1400" dirty="0">
+              <a:rPr lang="en-US" sz="1300" dirty="0">
                 <a:solidFill>
                   <a:srgbClr val="FFFFFF"/>
                 </a:solidFill>
@@ -8172,28 +10460,50 @@
               </a:rPr>
               <a:t>N'importe qui peut recréer votre wallet sur n'importe quel appareil, n'importe où dans le monde.</a:t>
             </a:r>
-            <a:endParaRPr lang="en-US" sz="1400" dirty="0"/>
-          </a:p>
-        </p:txBody>
-      </p:sp>
-      <p:sp>
-        <p:nvSpPr>
-          <p:cNvPr id="6" name="Text 4"/>
-          <p:cNvSpPr txBox="1"/>
-          <p:nvPr/>
-        </p:nvSpPr>
-        <p:spPr>
-          <a:xfrm>
-            <a:off x="731520" y="2212848"/>
-            <a:ext cx="457200" cy="548640"/>
+            <a:endParaRPr lang="en-US" sz="1300" dirty="0"/>
+          </a:p>
+        </p:txBody>
+      </p:sp>
+      <p:sp>
+        <p:nvSpPr>
+          <p:cNvPr id="8" name="Shape 5"/>
+          <p:cNvSpPr/>
+          <p:nvPr/>
+        </p:nvSpPr>
+        <p:spPr>
+          <a:xfrm>
+            <a:off x="731520" y="2103120"/>
+            <a:ext cx="7680960" cy="548640"/>
           </a:xfrm>
           <a:prstGeom prst="roundRect">
             <a:avLst>
-              <a:gd name="adj" fmla="val 50000"/>
+              <a:gd name="adj" fmla="val 13333"/>
             </a:avLst>
           </a:prstGeom>
           <a:solidFill>
-            <a:srgbClr val="00BFA6"/>
+            <a:srgbClr val="0F1419"/>
+          </a:solidFill>
+          <a:ln/>
+        </p:spPr>
+      </p:sp>
+      <p:sp>
+        <p:nvSpPr>
+          <p:cNvPr id="9" name="Text 6"/>
+          <p:cNvSpPr txBox="1"/>
+          <p:nvPr/>
+        </p:nvSpPr>
+        <p:spPr>
+          <a:xfrm>
+            <a:off x="914400" y="2103120"/>
+            <a:ext cx="411480" cy="548640"/>
+          </a:xfrm>
+          <a:prstGeom prst="roundRect">
+            <a:avLst>
+              <a:gd name="adj" fmla="val 48889"/>
+            </a:avLst>
+          </a:prstGeom>
+          <a:solidFill>
+            <a:srgbClr val="EF4444"/>
           </a:solidFill>
           <a:ln/>
         </p:spPr>
@@ -8205,7 +10515,7 @@
               <a:buNone/>
             </a:pPr>
             <a:r>
-              <a:rPr lang="en-US" sz="1600" b="1" dirty="0">
+              <a:rPr lang="en-US" sz="1500" b="1" dirty="0">
                 <a:solidFill>
                   <a:srgbClr val="0F1419"/>
                 </a:solidFill>
@@ -8215,20 +10525,20 @@
               </a:rPr>
               <a:t>2</a:t>
             </a:r>
-            <a:endParaRPr lang="en-US" sz="1600" dirty="0"/>
-          </a:p>
-        </p:txBody>
-      </p:sp>
-      <p:sp>
-        <p:nvSpPr>
-          <p:cNvPr id="7" name="Text 5"/>
-          <p:cNvSpPr txBox="1"/>
-          <p:nvPr/>
-        </p:nvSpPr>
-        <p:spPr>
-          <a:xfrm>
-            <a:off x="1371600" y="2212848"/>
-            <a:ext cx="7040880" cy="548640"/>
+            <a:endParaRPr lang="en-US" sz="1500" dirty="0"/>
+          </a:p>
+        </p:txBody>
+      </p:sp>
+      <p:sp>
+        <p:nvSpPr>
+          <p:cNvPr id="10" name="Text 7"/>
+          <p:cNvSpPr txBox="1"/>
+          <p:nvPr/>
+        </p:nvSpPr>
+        <p:spPr>
+          <a:xfrm>
+            <a:off x="1508760" y="2103120"/>
+            <a:ext cx="6766560" cy="548640"/>
           </a:xfrm>
           <a:prstGeom prst="rect">
             <a:avLst/>
@@ -8244,7 +10554,7 @@
               <a:buNone/>
             </a:pPr>
             <a:r>
-              <a:rPr lang="en-US" sz="1400" dirty="0">
+              <a:rPr lang="en-US" sz="1300" dirty="0">
                 <a:solidFill>
                   <a:srgbClr val="FFFFFF"/>
                 </a:solidFill>
@@ -8254,28 +10564,50 @@
               </a:rPr>
               <a:t>L'accès est instantané, irréversible, invisible.</a:t>
             </a:r>
-            <a:endParaRPr lang="en-US" sz="1400" dirty="0"/>
-          </a:p>
-        </p:txBody>
-      </p:sp>
-      <p:sp>
-        <p:nvSpPr>
-          <p:cNvPr id="8" name="Text 6"/>
-          <p:cNvSpPr txBox="1"/>
-          <p:nvPr/>
-        </p:nvSpPr>
-        <p:spPr>
-          <a:xfrm>
-            <a:off x="731520" y="2871216"/>
-            <a:ext cx="457200" cy="548640"/>
+            <a:endParaRPr lang="en-US" sz="1300" dirty="0"/>
+          </a:p>
+        </p:txBody>
+      </p:sp>
+      <p:sp>
+        <p:nvSpPr>
+          <p:cNvPr id="11" name="Shape 8"/>
+          <p:cNvSpPr/>
+          <p:nvPr/>
+        </p:nvSpPr>
+        <p:spPr>
+          <a:xfrm>
+            <a:off x="731520" y="2743200"/>
+            <a:ext cx="7680960" cy="548640"/>
           </a:xfrm>
           <a:prstGeom prst="roundRect">
             <a:avLst>
-              <a:gd name="adj" fmla="val 50000"/>
+              <a:gd name="adj" fmla="val 13333"/>
             </a:avLst>
           </a:prstGeom>
           <a:solidFill>
-            <a:srgbClr val="00BFA6"/>
+            <a:srgbClr val="0F1419"/>
+          </a:solidFill>
+          <a:ln/>
+        </p:spPr>
+      </p:sp>
+      <p:sp>
+        <p:nvSpPr>
+          <p:cNvPr id="12" name="Text 9"/>
+          <p:cNvSpPr txBox="1"/>
+          <p:nvPr/>
+        </p:nvSpPr>
+        <p:spPr>
+          <a:xfrm>
+            <a:off x="914400" y="2743200"/>
+            <a:ext cx="411480" cy="548640"/>
+          </a:xfrm>
+          <a:prstGeom prst="roundRect">
+            <a:avLst>
+              <a:gd name="adj" fmla="val 48889"/>
+            </a:avLst>
+          </a:prstGeom>
+          <a:solidFill>
+            <a:srgbClr val="EF4444"/>
           </a:solidFill>
           <a:ln/>
         </p:spPr>
@@ -8287,7 +10619,7 @@
               <a:buNone/>
             </a:pPr>
             <a:r>
-              <a:rPr lang="en-US" sz="1600" b="1" dirty="0">
+              <a:rPr lang="en-US" sz="1500" b="1" dirty="0">
                 <a:solidFill>
                   <a:srgbClr val="0F1419"/>
                 </a:solidFill>
@@ -8297,20 +10629,20 @@
               </a:rPr>
               <a:t>3</a:t>
             </a:r>
-            <a:endParaRPr lang="en-US" sz="1600" dirty="0"/>
-          </a:p>
-        </p:txBody>
-      </p:sp>
-      <p:sp>
-        <p:nvSpPr>
-          <p:cNvPr id="9" name="Text 7"/>
-          <p:cNvSpPr txBox="1"/>
-          <p:nvPr/>
-        </p:nvSpPr>
-        <p:spPr>
-          <a:xfrm>
-            <a:off x="1371600" y="2871216"/>
-            <a:ext cx="7040880" cy="548640"/>
+            <a:endParaRPr lang="en-US" sz="1500" dirty="0"/>
+          </a:p>
+        </p:txBody>
+      </p:sp>
+      <p:sp>
+        <p:nvSpPr>
+          <p:cNvPr id="13" name="Text 10"/>
+          <p:cNvSpPr txBox="1"/>
+          <p:nvPr/>
+        </p:nvSpPr>
+        <p:spPr>
+          <a:xfrm>
+            <a:off x="1508760" y="2743200"/>
+            <a:ext cx="6766560" cy="548640"/>
           </a:xfrm>
           <a:prstGeom prst="rect">
             <a:avLst/>
@@ -8326,7 +10658,7 @@
               <a:buNone/>
             </a:pPr>
             <a:r>
-              <a:rPr lang="en-US" sz="1400" dirty="0">
+              <a:rPr lang="en-US" sz="1300" dirty="0">
                 <a:solidFill>
                   <a:srgbClr val="FFFFFF"/>
                 </a:solidFill>
@@ -8336,28 +10668,50 @@
               </a:rPr>
               <a:t>Vous ne recevrez AUCUNE alerte.</a:t>
             </a:r>
-            <a:endParaRPr lang="en-US" sz="1400" dirty="0"/>
-          </a:p>
-        </p:txBody>
-      </p:sp>
-      <p:sp>
-        <p:nvSpPr>
-          <p:cNvPr id="10" name="Text 8"/>
-          <p:cNvSpPr txBox="1"/>
-          <p:nvPr/>
-        </p:nvSpPr>
-        <p:spPr>
-          <a:xfrm>
-            <a:off x="731520" y="3529584"/>
-            <a:ext cx="457200" cy="548640"/>
+            <a:endParaRPr lang="en-US" sz="1300" dirty="0"/>
+          </a:p>
+        </p:txBody>
+      </p:sp>
+      <p:sp>
+        <p:nvSpPr>
+          <p:cNvPr id="14" name="Shape 11"/>
+          <p:cNvSpPr/>
+          <p:nvPr/>
+        </p:nvSpPr>
+        <p:spPr>
+          <a:xfrm>
+            <a:off x="731520" y="3383280"/>
+            <a:ext cx="7680960" cy="548640"/>
           </a:xfrm>
           <a:prstGeom prst="roundRect">
             <a:avLst>
-              <a:gd name="adj" fmla="val 50000"/>
+              <a:gd name="adj" fmla="val 13333"/>
             </a:avLst>
           </a:prstGeom>
           <a:solidFill>
-            <a:srgbClr val="00BFA6"/>
+            <a:srgbClr val="0F1419"/>
+          </a:solidFill>
+          <a:ln/>
+        </p:spPr>
+      </p:sp>
+      <p:sp>
+        <p:nvSpPr>
+          <p:cNvPr id="15" name="Text 12"/>
+          <p:cNvSpPr txBox="1"/>
+          <p:nvPr/>
+        </p:nvSpPr>
+        <p:spPr>
+          <a:xfrm>
+            <a:off x="914400" y="3383280"/>
+            <a:ext cx="411480" cy="548640"/>
+          </a:xfrm>
+          <a:prstGeom prst="roundRect">
+            <a:avLst>
+              <a:gd name="adj" fmla="val 48889"/>
+            </a:avLst>
+          </a:prstGeom>
+          <a:solidFill>
+            <a:srgbClr val="EF4444"/>
           </a:solidFill>
           <a:ln/>
         </p:spPr>
@@ -8369,7 +10723,7 @@
               <a:buNone/>
             </a:pPr>
             <a:r>
-              <a:rPr lang="en-US" sz="1600" b="1" dirty="0">
+              <a:rPr lang="en-US" sz="1500" b="1" dirty="0">
                 <a:solidFill>
                   <a:srgbClr val="0F1419"/>
                 </a:solidFill>
@@ -8379,20 +10733,20 @@
               </a:rPr>
               <a:t>4</a:t>
             </a:r>
-            <a:endParaRPr lang="en-US" sz="1600" dirty="0"/>
-          </a:p>
-        </p:txBody>
-      </p:sp>
-      <p:sp>
-        <p:nvSpPr>
-          <p:cNvPr id="11" name="Text 9"/>
-          <p:cNvSpPr txBox="1"/>
-          <p:nvPr/>
-        </p:nvSpPr>
-        <p:spPr>
-          <a:xfrm>
-            <a:off x="1371600" y="3529584"/>
-            <a:ext cx="7040880" cy="548640"/>
+            <a:endParaRPr lang="en-US" sz="1500" dirty="0"/>
+          </a:p>
+        </p:txBody>
+      </p:sp>
+      <p:sp>
+        <p:nvSpPr>
+          <p:cNvPr id="16" name="Text 13"/>
+          <p:cNvSpPr txBox="1"/>
+          <p:nvPr/>
+        </p:nvSpPr>
+        <p:spPr>
+          <a:xfrm>
+            <a:off x="1508760" y="3383280"/>
+            <a:ext cx="6766560" cy="548640"/>
           </a:xfrm>
           <a:prstGeom prst="rect">
             <a:avLst/>
@@ -8408,7 +10762,7 @@
               <a:buNone/>
             </a:pPr>
             <a:r>
-              <a:rPr lang="en-US" sz="1400" dirty="0">
+              <a:rPr lang="en-US" sz="1300" dirty="0">
                 <a:solidFill>
                   <a:srgbClr val="FFFFFF"/>
                 </a:solidFill>
@@ -8418,28 +10772,50 @@
               </a:rPr>
               <a:t>La stocker en ligne : Google Drive piraté = fonds volés. Cas ultra fréquent.</a:t>
             </a:r>
-            <a:endParaRPr lang="en-US" sz="1400" dirty="0"/>
-          </a:p>
-        </p:txBody>
-      </p:sp>
-      <p:sp>
-        <p:nvSpPr>
-          <p:cNvPr id="12" name="Text 10"/>
-          <p:cNvSpPr txBox="1"/>
-          <p:nvPr/>
-        </p:nvSpPr>
-        <p:spPr>
-          <a:xfrm>
-            <a:off x="731520" y="4187952"/>
-            <a:ext cx="457200" cy="548640"/>
+            <a:endParaRPr lang="en-US" sz="1300" dirty="0"/>
+          </a:p>
+        </p:txBody>
+      </p:sp>
+      <p:sp>
+        <p:nvSpPr>
+          <p:cNvPr id="17" name="Shape 14"/>
+          <p:cNvSpPr/>
+          <p:nvPr/>
+        </p:nvSpPr>
+        <p:spPr>
+          <a:xfrm>
+            <a:off x="731520" y="4023360"/>
+            <a:ext cx="7680960" cy="548640"/>
           </a:xfrm>
           <a:prstGeom prst="roundRect">
             <a:avLst>
-              <a:gd name="adj" fmla="val 50000"/>
+              <a:gd name="adj" fmla="val 13333"/>
             </a:avLst>
           </a:prstGeom>
           <a:solidFill>
-            <a:srgbClr val="00BFA6"/>
+            <a:srgbClr val="0F1419"/>
+          </a:solidFill>
+          <a:ln/>
+        </p:spPr>
+      </p:sp>
+      <p:sp>
+        <p:nvSpPr>
+          <p:cNvPr id="18" name="Text 15"/>
+          <p:cNvSpPr txBox="1"/>
+          <p:nvPr/>
+        </p:nvSpPr>
+        <p:spPr>
+          <a:xfrm>
+            <a:off x="914400" y="4023360"/>
+            <a:ext cx="411480" cy="548640"/>
+          </a:xfrm>
+          <a:prstGeom prst="roundRect">
+            <a:avLst>
+              <a:gd name="adj" fmla="val 48889"/>
+            </a:avLst>
+          </a:prstGeom>
+          <a:solidFill>
+            <a:srgbClr val="EF4444"/>
           </a:solidFill>
           <a:ln/>
         </p:spPr>
@@ -8451,7 +10827,7 @@
               <a:buNone/>
             </a:pPr>
             <a:r>
-              <a:rPr lang="en-US" sz="1600" b="1" dirty="0">
+              <a:rPr lang="en-US" sz="1500" b="1" dirty="0">
                 <a:solidFill>
                   <a:srgbClr val="0F1419"/>
                 </a:solidFill>
@@ -8461,20 +10837,20 @@
               </a:rPr>
               <a:t>5</a:t>
             </a:r>
-            <a:endParaRPr lang="en-US" sz="1600" dirty="0"/>
-          </a:p>
-        </p:txBody>
-      </p:sp>
-      <p:sp>
-        <p:nvSpPr>
-          <p:cNvPr id="13" name="Text 11"/>
-          <p:cNvSpPr txBox="1"/>
-          <p:nvPr/>
-        </p:nvSpPr>
-        <p:spPr>
-          <a:xfrm>
-            <a:off x="1371600" y="4187952"/>
-            <a:ext cx="7040880" cy="548640"/>
+            <a:endParaRPr lang="en-US" sz="1500" dirty="0"/>
+          </a:p>
+        </p:txBody>
+      </p:sp>
+      <p:sp>
+        <p:nvSpPr>
+          <p:cNvPr id="19" name="Text 16"/>
+          <p:cNvSpPr txBox="1"/>
+          <p:nvPr/>
+        </p:nvSpPr>
+        <p:spPr>
+          <a:xfrm>
+            <a:off x="1508760" y="4023360"/>
+            <a:ext cx="6766560" cy="548640"/>
           </a:xfrm>
           <a:prstGeom prst="rect">
             <a:avLst/>
@@ -8490,7 +10866,7 @@
               <a:buNone/>
             </a:pPr>
             <a:r>
-              <a:rPr lang="en-US" sz="1400" dirty="0">
+              <a:rPr lang="en-US" sz="1300" dirty="0">
                 <a:solidFill>
                   <a:srgbClr val="FFFFFF"/>
                 </a:solidFill>
@@ -8500,7 +10876,7 @@
               </a:rPr>
               <a:t>Prendre une photo : votre téléphone est piraté ou perdu = fin de partie.</a:t>
             </a:r>
-            <a:endParaRPr lang="en-US" sz="1400" dirty="0"/>
+            <a:endParaRPr lang="en-US" sz="1300" dirty="0"/>
           </a:p>
         </p:txBody>
       </p:sp>
@@ -8544,12 +10920,12 @@
         </p:nvSpPr>
         <p:spPr>
           <a:xfrm>
-            <a:off x="548640" y="731520"/>
-            <a:ext cx="8046720" cy="3657600"/>
+            <a:off x="548640" y="548640"/>
+            <a:ext cx="8046720" cy="3840480"/>
           </a:xfrm>
           <a:prstGeom prst="roundRect">
             <a:avLst>
-              <a:gd name="adj" fmla="val 3750"/>
+              <a:gd name="adj" fmla="val 3571"/>
             </a:avLst>
           </a:prstGeom>
           <a:solidFill>
@@ -8560,14 +10936,58 @@
       </p:sp>
       <p:sp>
         <p:nvSpPr>
-          <p:cNvPr id="3" name="Text 1"/>
-          <p:cNvSpPr txBox="1"/>
-          <p:nvPr/>
-        </p:nvSpPr>
-        <p:spPr>
-          <a:xfrm>
-            <a:off x="822960" y="914400"/>
-            <a:ext cx="2743200" cy="411480"/>
+          <p:cNvPr id="3" name="Shape 1"/>
+          <p:cNvSpPr/>
+          <p:nvPr/>
+        </p:nvSpPr>
+        <p:spPr>
+          <a:xfrm>
+            <a:off x="548640" y="548640"/>
+            <a:ext cx="54864" cy="3840480"/>
+          </a:xfrm>
+          <a:prstGeom prst="rect">
+            <a:avLst/>
+          </a:prstGeom>
+          <a:solidFill>
+            <a:srgbClr val="EF4444"/>
+          </a:solidFill>
+          <a:ln/>
+        </p:spPr>
+      </p:sp>
+      <p:pic>
+        <p:nvPicPr>
+          <p:cNvPr id="4" name="Image 0" descr="preencoded.png">    </p:cNvPr>
+          <p:cNvPicPr>
+            <a:picLocks noChangeAspect="1"/>
+          </p:cNvPicPr>
+          <p:nvPr/>
+        </p:nvPicPr>
+        <p:blipFill>
+          <a:blip r:embed="rId1"/>
+          <a:stretch>
+            <a:fillRect/>
+          </a:stretch>
+        </p:blipFill>
+        <p:spPr>
+          <a:xfrm>
+            <a:off x="914400" y="777240"/>
+            <a:ext cx="548640" cy="548640"/>
+          </a:xfrm>
+          <a:prstGeom prst="rect">
+            <a:avLst/>
+          </a:prstGeom>
+        </p:spPr>
+      </p:pic>
+      <p:sp>
+        <p:nvSpPr>
+          <p:cNvPr id="5" name="Text 2"/>
+          <p:cNvSpPr txBox="1"/>
+          <p:nvPr/>
+        </p:nvSpPr>
+        <p:spPr>
+          <a:xfrm>
+            <a:off x="1600200" y="777240"/>
+            <a:ext cx="2743200" cy="320040"/>
           </a:xfrm>
           <a:prstGeom prst="rect">
             <a:avLst/>
@@ -8583,7 +11003,7 @@
               <a:buNone/>
             </a:pPr>
             <a:r>
-              <a:rPr lang="en-US" sz="1400" b="1" spc="300" kern="0" dirty="0">
+              <a:rPr lang="en-US" sz="1200" b="1" spc="300" kern="0" dirty="0">
                 <a:solidFill>
                   <a:srgbClr val="EF4444"/>
                 </a:solidFill>
@@ -8593,20 +11013,20 @@
               </a:rPr>
               <a:t>ATTENTION</a:t>
             </a:r>
-            <a:endParaRPr lang="en-US" sz="1400" dirty="0"/>
-          </a:p>
-        </p:txBody>
-      </p:sp>
-      <p:sp>
-        <p:nvSpPr>
-          <p:cNvPr id="4" name="Text 2"/>
-          <p:cNvSpPr txBox="1"/>
-          <p:nvPr/>
-        </p:nvSpPr>
-        <p:spPr>
-          <a:xfrm>
-            <a:off x="822960" y="1371600"/>
-            <a:ext cx="7498080" cy="2194560"/>
+            <a:endParaRPr lang="en-US" sz="1200" dirty="0"/>
+          </a:p>
+        </p:txBody>
+      </p:sp>
+      <p:sp>
+        <p:nvSpPr>
+          <p:cNvPr id="6" name="Text 3"/>
+          <p:cNvSpPr txBox="1"/>
+          <p:nvPr/>
+        </p:nvSpPr>
+        <p:spPr>
+          <a:xfrm>
+            <a:off x="914400" y="1371600"/>
+            <a:ext cx="7406640" cy="2286000"/>
           </a:xfrm>
           <a:prstGeom prst="rect">
             <a:avLst/>
@@ -8714,35 +11134,105 @@
           <a:chExt cx="0" cy="0"/>
         </a:xfrm>
       </p:grpSpPr>
-      <p:sp>
-        <p:nvSpPr>
-          <p:cNvPr id="2" name="Shape 0"/>
+      <p:pic>
+        <p:nvPicPr>
+          <p:cNvPr id="2" name="Image 0" descr="preencoded.png">    </p:cNvPr>
+          <p:cNvPicPr>
+            <a:picLocks noChangeAspect="1"/>
+          </p:cNvPicPr>
+          <p:nvPr/>
+        </p:nvPicPr>
+        <p:blipFill>
+          <a:blip r:embed="rId1"/>
+          <a:stretch>
+            <a:fillRect/>
+          </a:stretch>
+        </p:blipFill>
+        <p:spPr>
+          <a:xfrm>
+            <a:off x="7315200" y="548640"/>
+            <a:ext cx="1280160" cy="1280160"/>
+          </a:xfrm>
+          <a:prstGeom prst="rect">
+            <a:avLst/>
+          </a:prstGeom>
+        </p:spPr>
+      </p:pic>
+      <p:pic>
+        <p:nvPicPr>
+          <p:cNvPr id="3" name="Image 1" descr="preencoded.png">    </p:cNvPr>
+          <p:cNvPicPr>
+            <a:picLocks noChangeAspect="1"/>
+          </p:cNvPicPr>
+          <p:nvPr/>
+        </p:nvPicPr>
+        <p:blipFill>
+          <a:blip r:embed="rId2"/>
+          <a:stretch>
+            <a:fillRect/>
+          </a:stretch>
+        </p:blipFill>
+        <p:spPr>
+          <a:xfrm>
+            <a:off x="7772400" y="2011680"/>
+            <a:ext cx="822960" cy="822960"/>
+          </a:xfrm>
+          <a:prstGeom prst="rect">
+            <a:avLst/>
+          </a:prstGeom>
+        </p:spPr>
+      </p:pic>
+      <p:sp>
+        <p:nvSpPr>
+          <p:cNvPr id="4" name="Shape 0"/>
           <p:cNvSpPr/>
           <p:nvPr/>
         </p:nvSpPr>
         <p:spPr>
           <a:xfrm>
-            <a:off x="548640" y="914400"/>
-            <a:ext cx="45720" cy="2560320"/>
-          </a:xfrm>
-          <a:prstGeom prst="rect">
+            <a:off x="6583680" y="-274320"/>
+            <a:ext cx="3200400" cy="3200400"/>
+          </a:xfrm>
+          <a:prstGeom prst="ellipse">
             <a:avLst/>
           </a:prstGeom>
           <a:solidFill>
-            <a:srgbClr val="00BFA6"/>
+            <a:srgbClr val="EF4444">
+              <a:alpha val="6000"/>
+            </a:srgbClr>
           </a:solidFill>
           <a:ln/>
         </p:spPr>
       </p:sp>
       <p:sp>
         <p:nvSpPr>
-          <p:cNvPr id="3" name="Text 1"/>
-          <p:cNvSpPr txBox="1"/>
-          <p:nvPr/>
-        </p:nvSpPr>
-        <p:spPr>
-          <a:xfrm>
-            <a:off x="822960" y="1097280"/>
+          <p:cNvPr id="5" name="Shape 1"/>
+          <p:cNvSpPr/>
+          <p:nvPr/>
+        </p:nvSpPr>
+        <p:spPr>
+          <a:xfrm>
+            <a:off x="731520" y="914400"/>
+            <a:ext cx="45720" cy="2194560"/>
+          </a:xfrm>
+          <a:prstGeom prst="rect">
+            <a:avLst/>
+          </a:prstGeom>
+          <a:solidFill>
+            <a:srgbClr val="EF4444"/>
+          </a:solidFill>
+          <a:ln/>
+        </p:spPr>
+      </p:sp>
+      <p:sp>
+        <p:nvSpPr>
+          <p:cNvPr id="6" name="Text 2"/>
+          <p:cNvSpPr txBox="1"/>
+          <p:nvPr/>
+        </p:nvSpPr>
+        <p:spPr>
+          <a:xfrm>
+            <a:off x="960120" y="914400"/>
             <a:ext cx="2743200" cy="365760"/>
           </a:xfrm>
           <a:prstGeom prst="rect">
@@ -8761,13 +11251,13 @@
             <a:r>
               <a:rPr lang="en-US" sz="1200" b="1" spc="200" kern="0" dirty="0">
                 <a:solidFill>
-                  <a:srgbClr val="00BFA6"/>
-                </a:solidFill>
-                <a:latin typeface="Calibri" pitchFamily="34" charset="0"/>
-                <a:ea typeface="Calibri" pitchFamily="34" charset="-122"/>
-                <a:cs typeface="Calibri" pitchFamily="34" charset="-120"/>
-              </a:rPr>
-              <a:t>Lecon 1 / 3</a:t>
+                  <a:srgbClr val="EF4444"/>
+                </a:solidFill>
+                <a:latin typeface="Calibri" pitchFamily="34" charset="0"/>
+                <a:ea typeface="Calibri" pitchFamily="34" charset="-122"/>
+                <a:cs typeface="Calibri" pitchFamily="34" charset="-120"/>
+              </a:rPr>
+              <a:t>Leçon 1 / 3</a:t>
             </a:r>
             <a:endParaRPr lang="en-US" sz="1200" dirty="0"/>
           </a:p>
@@ -8775,14 +11265,14 @@
       </p:sp>
       <p:sp>
         <p:nvSpPr>
-          <p:cNvPr id="4" name="Text 2"/>
-          <p:cNvSpPr txBox="1"/>
-          <p:nvPr/>
-        </p:nvSpPr>
-        <p:spPr>
-          <a:xfrm>
-            <a:off x="822960" y="1645920"/>
-            <a:ext cx="7498080" cy="1280160"/>
+          <p:cNvPr id="7" name="Text 3"/>
+          <p:cNvSpPr txBox="1"/>
+          <p:nvPr/>
+        </p:nvSpPr>
+        <p:spPr>
+          <a:xfrm>
+            <a:off x="960120" y="1371600"/>
+            <a:ext cx="6217920" cy="1463040"/>
           </a:xfrm>
           <a:prstGeom prst="rect">
             <a:avLst/>
@@ -8798,7 +11288,7 @@
               <a:buNone/>
             </a:pPr>
             <a:r>
-              <a:rPr lang="en-US" sz="3000" b="1" dirty="0">
+              <a:rPr lang="en-US" sz="2800" b="1" dirty="0">
                 <a:solidFill>
                   <a:srgbClr val="FFFFFF"/>
                 </a:solidFill>
@@ -8808,19 +11298,19 @@
               </a:rPr>
               <a:t>Custodial vs non-custodial : la différence essentielle</a:t>
             </a:r>
-            <a:endParaRPr lang="en-US" sz="3000" dirty="0"/>
-          </a:p>
-        </p:txBody>
-      </p:sp>
-      <p:sp>
-        <p:nvSpPr>
-          <p:cNvPr id="5" name="Text 3"/>
-          <p:cNvSpPr txBox="1"/>
-          <p:nvPr/>
-        </p:nvSpPr>
-        <p:spPr>
-          <a:xfrm>
-            <a:off x="822960" y="4206240"/>
+            <a:endParaRPr lang="en-US" sz="2800" dirty="0"/>
+          </a:p>
+        </p:txBody>
+      </p:sp>
+      <p:sp>
+        <p:nvSpPr>
+          <p:cNvPr id="8" name="Text 4"/>
+          <p:cNvSpPr txBox="1"/>
+          <p:nvPr/>
+        </p:nvSpPr>
+        <p:spPr>
+          <a:xfrm>
+            <a:off x="960120" y="4114800"/>
             <a:ext cx="5486400" cy="320040"/>
           </a:xfrm>
           <a:prstGeom prst="rect">
@@ -8885,14 +11375,60 @@
       </p:grpSpPr>
       <p:sp>
         <p:nvSpPr>
-          <p:cNvPr id="2" name="Text 0"/>
-          <p:cNvSpPr txBox="1"/>
-          <p:nvPr/>
-        </p:nvSpPr>
-        <p:spPr>
-          <a:xfrm>
-            <a:off x="731520" y="1371600"/>
-            <a:ext cx="7680960" cy="640080"/>
+          <p:cNvPr id="2" name="Shape 0"/>
+          <p:cNvSpPr/>
+          <p:nvPr/>
+        </p:nvSpPr>
+        <p:spPr>
+          <a:xfrm>
+            <a:off x="2743200" y="457200"/>
+            <a:ext cx="3657600" cy="3657600"/>
+          </a:xfrm>
+          <a:prstGeom prst="ellipse">
+            <a:avLst/>
+          </a:prstGeom>
+          <a:solidFill>
+            <a:srgbClr val="EF4444">
+              <a:alpha val="6000"/>
+            </a:srgbClr>
+          </a:solidFill>
+          <a:ln/>
+        </p:spPr>
+      </p:sp>
+      <p:pic>
+        <p:nvPicPr>
+          <p:cNvPr id="3" name="Image 0" descr="preencoded.png">    </p:cNvPr>
+          <p:cNvPicPr>
+            <a:picLocks noChangeAspect="1"/>
+          </p:cNvPicPr>
+          <p:nvPr/>
+        </p:nvPicPr>
+        <p:blipFill>
+          <a:blip r:embed="rId1"/>
+          <a:stretch>
+            <a:fillRect/>
+          </a:stretch>
+        </p:blipFill>
+        <p:spPr>
+          <a:xfrm>
+            <a:off x="3931920" y="914400"/>
+            <a:ext cx="1280160" cy="1280160"/>
+          </a:xfrm>
+          <a:prstGeom prst="rect">
+            <a:avLst/>
+          </a:prstGeom>
+        </p:spPr>
+      </p:pic>
+      <p:sp>
+        <p:nvSpPr>
+          <p:cNvPr id="4" name="Text 1"/>
+          <p:cNvSpPr txBox="1"/>
+          <p:nvPr/>
+        </p:nvSpPr>
+        <p:spPr>
+          <a:xfrm>
+            <a:off x="731520" y="2377440"/>
+            <a:ext cx="7680960" cy="548640"/>
           </a:xfrm>
           <a:prstGeom prst="rect">
             <a:avLst/>
@@ -8908,7 +11444,7 @@
               <a:buNone/>
             </a:pPr>
             <a:r>
-              <a:rPr lang="en-US" sz="3000" b="1" dirty="0">
+              <a:rPr lang="en-US" sz="2800" b="1" dirty="0">
                 <a:solidFill>
                   <a:srgbClr val="FFFFFF"/>
                 </a:solidFill>
@@ -8918,20 +11454,20 @@
               </a:rPr>
               <a:t>Module 7 termine</a:t>
             </a:r>
-            <a:endParaRPr lang="en-US" sz="3000" dirty="0"/>
-          </a:p>
-        </p:txBody>
-      </p:sp>
-      <p:sp>
-        <p:nvSpPr>
-          <p:cNvPr id="3" name="Text 1"/>
-          <p:cNvSpPr txBox="1"/>
-          <p:nvPr/>
-        </p:nvSpPr>
-        <p:spPr>
-          <a:xfrm>
-            <a:off x="1371600" y="2194560"/>
-            <a:ext cx="6400800" cy="457200"/>
+            <a:endParaRPr lang="en-US" sz="2800" dirty="0"/>
+          </a:p>
+        </p:txBody>
+      </p:sp>
+      <p:sp>
+        <p:nvSpPr>
+          <p:cNvPr id="5" name="Text 2"/>
+          <p:cNvSpPr txBox="1"/>
+          <p:nvPr/>
+        </p:nvSpPr>
+        <p:spPr>
+          <a:xfrm>
+            <a:off x="1371600" y="3017520"/>
+            <a:ext cx="6400800" cy="365760"/>
           </a:xfrm>
           <a:prstGeom prst="rect">
             <a:avLst/>
@@ -8947,7 +11483,7 @@
               <a:buNone/>
             </a:pPr>
             <a:r>
-              <a:rPr lang="en-US" sz="1400" dirty="0">
+              <a:rPr lang="en-US" sz="1300" dirty="0">
                 <a:solidFill>
                   <a:srgbClr val="94A3B8"/>
                 </a:solidFill>
@@ -8957,40 +11493,40 @@
               </a:rPr>
               <a:t>Passez au module suivant pour continuer votre apprentissage.</a:t>
             </a:r>
-            <a:endParaRPr lang="en-US" sz="1400" dirty="0"/>
-          </a:p>
-        </p:txBody>
-      </p:sp>
-      <p:sp>
-        <p:nvSpPr>
-          <p:cNvPr id="4" name="Shape 2"/>
+            <a:endParaRPr lang="en-US" sz="1300" dirty="0"/>
+          </a:p>
+        </p:txBody>
+      </p:sp>
+      <p:sp>
+        <p:nvSpPr>
+          <p:cNvPr id="6" name="Shape 3"/>
           <p:cNvSpPr/>
           <p:nvPr/>
         </p:nvSpPr>
         <p:spPr>
           <a:xfrm>
-            <a:off x="3200400" y="2926080"/>
-            <a:ext cx="2743200" cy="54864"/>
+            <a:off x="3200400" y="3657600"/>
+            <a:ext cx="2743200" cy="36576"/>
           </a:xfrm>
           <a:prstGeom prst="rect">
             <a:avLst/>
           </a:prstGeom>
           <a:solidFill>
-            <a:srgbClr val="00BFA6"/>
+            <a:srgbClr val="EF4444"/>
           </a:solidFill>
           <a:ln/>
         </p:spPr>
       </p:sp>
       <p:sp>
         <p:nvSpPr>
-          <p:cNvPr id="5" name="Text 3"/>
-          <p:cNvSpPr txBox="1"/>
-          <p:nvPr/>
-        </p:nvSpPr>
-        <p:spPr>
-          <a:xfrm>
-            <a:off x="2286000" y="3291840"/>
-            <a:ext cx="4572000" cy="365760"/>
+          <p:cNvPr id="7" name="Text 4"/>
+          <p:cNvSpPr txBox="1"/>
+          <p:nvPr/>
+        </p:nvSpPr>
+        <p:spPr>
+          <a:xfrm>
+            <a:off x="2286000" y="3931920"/>
+            <a:ext cx="4572000" cy="320040"/>
           </a:xfrm>
           <a:prstGeom prst="rect">
             <a:avLst/>
@@ -9006,7 +11542,7 @@
               <a:buNone/>
             </a:pPr>
             <a:r>
-              <a:rPr lang="en-US" sz="1200" spc="300" kern="0" dirty="0">
+              <a:rPr lang="en-US" sz="1100" spc="300" kern="0" dirty="0">
                 <a:solidFill>
                   <a:srgbClr val="64748B"/>
                 </a:solidFill>
@@ -9016,20 +11552,20 @@
               </a:rPr>
               <a:t>TEREX ACADEMY</a:t>
             </a:r>
-            <a:endParaRPr lang="en-US" sz="1200" dirty="0"/>
-          </a:p>
-        </p:txBody>
-      </p:sp>
-      <p:sp>
-        <p:nvSpPr>
-          <p:cNvPr id="6" name="Text 4"/>
-          <p:cNvSpPr txBox="1"/>
-          <p:nvPr/>
-        </p:nvSpPr>
-        <p:spPr>
-          <a:xfrm>
-            <a:off x="2286000" y="3657600"/>
-            <a:ext cx="4572000" cy="320040"/>
+            <a:endParaRPr lang="en-US" sz="1100" dirty="0"/>
+          </a:p>
+        </p:txBody>
+      </p:sp>
+      <p:sp>
+        <p:nvSpPr>
+          <p:cNvPr id="8" name="Text 5"/>
+          <p:cNvSpPr txBox="1"/>
+          <p:nvPr/>
+        </p:nvSpPr>
+        <p:spPr>
+          <a:xfrm>
+            <a:off x="2286000" y="4251960"/>
+            <a:ext cx="4572000" cy="274320"/>
           </a:xfrm>
           <a:prstGeom prst="rect">
             <a:avLst/>
@@ -9093,7 +11629,53 @@
       </p:grpSpPr>
       <p:sp>
         <p:nvSpPr>
-          <p:cNvPr id="2" name="Text 0"/>
+          <p:cNvPr id="2" name="Shape 0"/>
+          <p:cNvSpPr/>
+          <p:nvPr/>
+        </p:nvSpPr>
+        <p:spPr>
+          <a:xfrm>
+            <a:off x="7955280" y="182880"/>
+            <a:ext cx="640080" cy="640080"/>
+          </a:xfrm>
+          <a:prstGeom prst="ellipse">
+            <a:avLst/>
+          </a:prstGeom>
+          <a:solidFill>
+            <a:srgbClr val="EF4444">
+              <a:alpha val="12000"/>
+            </a:srgbClr>
+          </a:solidFill>
+          <a:ln/>
+        </p:spPr>
+      </p:sp>
+      <p:pic>
+        <p:nvPicPr>
+          <p:cNvPr id="3" name="Image 0" descr="preencoded.png">    </p:cNvPr>
+          <p:cNvPicPr>
+            <a:picLocks noChangeAspect="1"/>
+          </p:cNvPicPr>
+          <p:nvPr/>
+        </p:nvPicPr>
+        <p:blipFill>
+          <a:blip r:embed="rId1"/>
+          <a:stretch>
+            <a:fillRect/>
+          </a:stretch>
+        </p:blipFill>
+        <p:spPr>
+          <a:xfrm>
+            <a:off x="8028432" y="256032"/>
+            <a:ext cx="493776" cy="493776"/>
+          </a:xfrm>
+          <a:prstGeom prst="rect">
+            <a:avLst/>
+          </a:prstGeom>
+        </p:spPr>
+      </p:pic>
+      <p:sp>
+        <p:nvSpPr>
+          <p:cNvPr id="4" name="Text 1"/>
           <p:cNvSpPr txBox="1"/>
           <p:nvPr/>
         </p:nvSpPr>
@@ -9136,7 +11718,7 @@
       </p:sp>
       <p:sp>
         <p:nvSpPr>
-          <p:cNvPr id="3" name="Text 1"/>
+          <p:cNvPr id="5" name="Text 2"/>
           <p:cNvSpPr txBox="1"/>
           <p:nvPr/>
         </p:nvSpPr>
@@ -9167,7 +11749,7 @@
                 <a:ea typeface="Calibri" pitchFamily="34" charset="-122"/>
                 <a:cs typeface="Calibri" pitchFamily="34" charset="-120"/>
               </a:rPr>
-              <a:t>Module 7 — Lecon 1</a:t>
+              <a:t>Module 7 — Leçon 1</a:t>
             </a:r>
             <a:endParaRPr lang="en-US" sz="900" dirty="0"/>
           </a:p>
@@ -9213,8 +11795,8 @@
         </p:nvSpPr>
         <p:spPr>
           <a:xfrm>
-            <a:off x="731520" y="365760"/>
-            <a:ext cx="7680960" cy="548640"/>
+            <a:off x="731520" y="274320"/>
+            <a:ext cx="7680960" cy="502920"/>
           </a:xfrm>
           <a:prstGeom prst="rect">
             <a:avLst/>
@@ -9230,9 +11812,9 @@
               <a:buNone/>
             </a:pPr>
             <a:r>
-              <a:rPr lang="en-US" sz="2200" b="1" dirty="0">
-                <a:solidFill>
-                  <a:srgbClr val="00BFA6"/>
+              <a:rPr lang="en-US" sz="2000" b="1" dirty="0">
+                <a:solidFill>
+                  <a:srgbClr val="EF4444"/>
                 </a:solidFill>
                 <a:latin typeface="Calibri" pitchFamily="34" charset="0"/>
                 <a:ea typeface="Calibri" pitchFamily="34" charset="-122"/>
@@ -9240,7 +11822,7 @@
               </a:rPr>
               <a:t>Le wallet custodial (garde partagée)</a:t>
             </a:r>
-            <a:endParaRPr lang="en-US" sz="2200" dirty="0"/>
+            <a:endParaRPr lang="en-US" sz="2000" dirty="0"/>
           </a:p>
         </p:txBody>
       </p:sp>
@@ -9252,8 +11834,8 @@
         </p:nvSpPr>
         <p:spPr>
           <a:xfrm>
-            <a:off x="731520" y="1051560"/>
-            <a:ext cx="7680960" cy="3657600"/>
+            <a:off x="731520" y="1005840"/>
+            <a:ext cx="4206240" cy="3474720"/>
           </a:xfrm>
           <a:prstGeom prst="rect">
             <a:avLst/>
@@ -9267,13 +11849,13 @@
           <a:p>
             <a:pPr marL="342900" indent="-342900">
               <a:spcAft>
-                <a:spcPts val="800"/>
+                <a:spcPts val="600"/>
               </a:spcAft>
               <a:buSzPct val="100000"/>
               <a:buChar char="•"/>
             </a:pPr>
             <a:r>
-              <a:rPr lang="en-US" sz="1400" dirty="0">
+              <a:rPr lang="en-US" sz="1300" dirty="0">
                 <a:solidFill>
                   <a:srgbClr val="FFFFFF"/>
                 </a:solidFill>
@@ -9281,20 +11863,20 @@
                 <a:ea typeface="Calibri" pitchFamily="34" charset="-122"/>
                 <a:cs typeface="Calibri" pitchFamily="34" charset="-120"/>
               </a:rPr>
-              <a:t>Un tiers (une plateforme comme Binance, Coinbase) garde vos cryptos pour vous. Vous avez un compte et un mot de passe, comme sur une application bancaire.</a:t>
-            </a:r>
-            <a:endParaRPr lang="en-US" sz="1400" dirty="0"/>
+              <a:t>Un tiers (une plateforme comme Binance, Coinbase) garde vos cryptos pour vous. Vous avez un compte et un mot de passe...</a:t>
+            </a:r>
+            <a:endParaRPr lang="en-US" sz="1300" dirty="0"/>
           </a:p>
           <a:p>
             <a:pPr marL="342900" indent="-342900">
               <a:spcAft>
-                <a:spcPts val="800"/>
+                <a:spcPts val="600"/>
               </a:spcAft>
               <a:buSzPct val="100000"/>
               <a:buChar char="•"/>
             </a:pPr>
             <a:r>
-              <a:rPr lang="en-US" sz="1400" dirty="0">
+              <a:rPr lang="en-US" sz="1300" dirty="0">
                 <a:solidFill>
                   <a:srgbClr val="FFFFFF"/>
                 </a:solidFill>
@@ -9304,18 +11886,18 @@
               </a:rPr>
               <a:t>Avantages :</a:t>
             </a:r>
-            <a:endParaRPr lang="en-US" sz="1400" dirty="0"/>
+            <a:endParaRPr lang="en-US" sz="1300" dirty="0"/>
           </a:p>
           <a:p>
             <a:pPr marL="342900" indent="-342900">
               <a:spcAft>
-                <a:spcPts val="800"/>
+                <a:spcPts val="600"/>
               </a:spcAft>
               <a:buSzPct val="100000"/>
               <a:buChar char="•"/>
             </a:pPr>
             <a:r>
-              <a:rPr lang="en-US" sz="1400" dirty="0">
+              <a:rPr lang="en-US" sz="1300" dirty="0">
                 <a:solidFill>
                   <a:srgbClr val="FFFFFF"/>
                 </a:solidFill>
@@ -9325,18 +11907,18 @@
               </a:rPr>
               <a:t>Simple à utiliser</a:t>
             </a:r>
-            <a:endParaRPr lang="en-US" sz="1400" dirty="0"/>
+            <a:endParaRPr lang="en-US" sz="1300" dirty="0"/>
           </a:p>
           <a:p>
             <a:pPr marL="342900" indent="-342900">
               <a:spcAft>
-                <a:spcPts val="800"/>
+                <a:spcPts val="600"/>
               </a:spcAft>
               <a:buSzPct val="100000"/>
               <a:buChar char="•"/>
             </a:pPr>
             <a:r>
-              <a:rPr lang="en-US" sz="1400" dirty="0">
+              <a:rPr lang="en-US" sz="1300" dirty="0">
                 <a:solidFill>
                   <a:srgbClr val="FFFFFF"/>
                 </a:solidFill>
@@ -9346,18 +11928,82 @@
               </a:rPr>
               <a:t>Récupération de compte possible (mot de passe oublié = pas de panique)</a:t>
             </a:r>
-            <a:endParaRPr lang="en-US" sz="1400" dirty="0"/>
-          </a:p>
-          <a:p>
-            <a:pPr marL="342900" indent="-342900">
-              <a:spcAft>
-                <a:spcPts val="800"/>
-              </a:spcAft>
-              <a:buSzPct val="100000"/>
-              <a:buChar char="•"/>
-            </a:pPr>
-            <a:r>
-              <a:rPr lang="en-US" sz="1400" dirty="0">
+            <a:endParaRPr lang="en-US" sz="1300" dirty="0"/>
+          </a:p>
+        </p:txBody>
+      </p:sp>
+      <p:sp>
+        <p:nvSpPr>
+          <p:cNvPr id="4" name="Shape 2"/>
+          <p:cNvSpPr/>
+          <p:nvPr/>
+        </p:nvSpPr>
+        <p:spPr>
+          <a:xfrm>
+            <a:off x="5120640" y="1005840"/>
+            <a:ext cx="3474720" cy="640080"/>
+          </a:xfrm>
+          <a:prstGeom prst="roundRect">
+            <a:avLst>
+              <a:gd name="adj" fmla="val 14286"/>
+            </a:avLst>
+          </a:prstGeom>
+          <a:solidFill>
+            <a:srgbClr val="1A2332"/>
+          </a:solidFill>
+          <a:ln/>
+        </p:spPr>
+      </p:sp>
+      <p:pic>
+        <p:nvPicPr>
+          <p:cNvPr id="5" name="Image 0" descr="preencoded.png">    </p:cNvPr>
+          <p:cNvPicPr>
+            <a:picLocks noChangeAspect="1"/>
+          </p:cNvPicPr>
+          <p:nvPr/>
+        </p:nvPicPr>
+        <p:blipFill>
+          <a:blip r:embed="rId1"/>
+          <a:stretch>
+            <a:fillRect/>
+          </a:stretch>
+        </p:blipFill>
+        <p:spPr>
+          <a:xfrm>
+            <a:off x="5257800" y="1106424"/>
+            <a:ext cx="438912" cy="438912"/>
+          </a:xfrm>
+          <a:prstGeom prst="rect">
+            <a:avLst/>
+          </a:prstGeom>
+        </p:spPr>
+      </p:pic>
+      <p:sp>
+        <p:nvSpPr>
+          <p:cNvPr id="6" name="Text 3"/>
+          <p:cNvSpPr txBox="1"/>
+          <p:nvPr/>
+        </p:nvSpPr>
+        <p:spPr>
+          <a:xfrm>
+            <a:off x="5806440" y="1005840"/>
+            <a:ext cx="2651760" cy="640080"/>
+          </a:xfrm>
+          <a:prstGeom prst="rect">
+            <a:avLst/>
+          </a:prstGeom>
+          <a:noFill/>
+          <a:ln/>
+        </p:spPr>
+        <p:txBody>
+          <a:bodyPr wrap="square" lIns="0" tIns="0" rIns="0" bIns="0" rtlCol="0" anchor="ctr"/>
+          <a:lstStyle/>
+          <a:p>
+            <a:pPr indent="0" marL="0">
+              <a:buNone/>
+            </a:pPr>
+            <a:r>
+              <a:rPr lang="en-US" sz="1200" dirty="0">
                 <a:solidFill>
                   <a:srgbClr val="FFFFFF"/>
                 </a:solidFill>
@@ -9367,18 +12013,82 @@
               </a:rPr>
               <a:t>Support client</a:t>
             </a:r>
-            <a:endParaRPr lang="en-US" sz="1400" dirty="0"/>
-          </a:p>
-          <a:p>
-            <a:pPr marL="342900" indent="-342900">
-              <a:spcAft>
-                <a:spcPts val="800"/>
-              </a:spcAft>
-              <a:buSzPct val="100000"/>
-              <a:buChar char="•"/>
-            </a:pPr>
-            <a:r>
-              <a:rPr lang="en-US" sz="1400" dirty="0">
+            <a:endParaRPr lang="en-US" sz="1200" dirty="0"/>
+          </a:p>
+        </p:txBody>
+      </p:sp>
+      <p:sp>
+        <p:nvSpPr>
+          <p:cNvPr id="7" name="Shape 4"/>
+          <p:cNvSpPr/>
+          <p:nvPr/>
+        </p:nvSpPr>
+        <p:spPr>
+          <a:xfrm>
+            <a:off x="5120640" y="1737360"/>
+            <a:ext cx="3474720" cy="640080"/>
+          </a:xfrm>
+          <a:prstGeom prst="roundRect">
+            <a:avLst>
+              <a:gd name="adj" fmla="val 14286"/>
+            </a:avLst>
+          </a:prstGeom>
+          <a:solidFill>
+            <a:srgbClr val="1A2332"/>
+          </a:solidFill>
+          <a:ln/>
+        </p:spPr>
+      </p:sp>
+      <p:pic>
+        <p:nvPicPr>
+          <p:cNvPr id="8" name="Image 1" descr="preencoded.png">    </p:cNvPr>
+          <p:cNvPicPr>
+            <a:picLocks noChangeAspect="1"/>
+          </p:cNvPicPr>
+          <p:nvPr/>
+        </p:nvPicPr>
+        <p:blipFill>
+          <a:blip r:embed="rId2"/>
+          <a:stretch>
+            <a:fillRect/>
+          </a:stretch>
+        </p:blipFill>
+        <p:spPr>
+          <a:xfrm>
+            <a:off x="5257800" y="1837944"/>
+            <a:ext cx="438912" cy="438912"/>
+          </a:xfrm>
+          <a:prstGeom prst="rect">
+            <a:avLst/>
+          </a:prstGeom>
+        </p:spPr>
+      </p:pic>
+      <p:sp>
+        <p:nvSpPr>
+          <p:cNvPr id="9" name="Text 5"/>
+          <p:cNvSpPr txBox="1"/>
+          <p:nvPr/>
+        </p:nvSpPr>
+        <p:spPr>
+          <a:xfrm>
+            <a:off x="5806440" y="1737360"/>
+            <a:ext cx="2651760" cy="640080"/>
+          </a:xfrm>
+          <a:prstGeom prst="rect">
+            <a:avLst/>
+          </a:prstGeom>
+          <a:noFill/>
+          <a:ln/>
+        </p:spPr>
+        <p:txBody>
+          <a:bodyPr wrap="square" lIns="0" tIns="0" rIns="0" bIns="0" rtlCol="0" anchor="ctr"/>
+          <a:lstStyle/>
+          <a:p>
+            <a:pPr indent="0" marL="0">
+              <a:buNone/>
+            </a:pPr>
+            <a:r>
+              <a:rPr lang="en-US" sz="1200" dirty="0">
                 <a:solidFill>
                   <a:srgbClr val="FFFFFF"/>
                 </a:solidFill>
@@ -9388,18 +12098,82 @@
               </a:rPr>
               <a:t>Inconvénients :</a:t>
             </a:r>
-            <a:endParaRPr lang="en-US" sz="1400" dirty="0"/>
-          </a:p>
-          <a:p>
-            <a:pPr marL="342900" indent="-342900">
-              <a:spcAft>
-                <a:spcPts val="800"/>
-              </a:spcAft>
-              <a:buSzPct val="100000"/>
-              <a:buChar char="•"/>
-            </a:pPr>
-            <a:r>
-              <a:rPr lang="en-US" sz="1400" dirty="0">
+            <a:endParaRPr lang="en-US" sz="1200" dirty="0"/>
+          </a:p>
+        </p:txBody>
+      </p:sp>
+      <p:sp>
+        <p:nvSpPr>
+          <p:cNvPr id="10" name="Shape 6"/>
+          <p:cNvSpPr/>
+          <p:nvPr/>
+        </p:nvSpPr>
+        <p:spPr>
+          <a:xfrm>
+            <a:off x="5120640" y="2468880"/>
+            <a:ext cx="3474720" cy="640080"/>
+          </a:xfrm>
+          <a:prstGeom prst="roundRect">
+            <a:avLst>
+              <a:gd name="adj" fmla="val 14286"/>
+            </a:avLst>
+          </a:prstGeom>
+          <a:solidFill>
+            <a:srgbClr val="1A2332"/>
+          </a:solidFill>
+          <a:ln/>
+        </p:spPr>
+      </p:sp>
+      <p:pic>
+        <p:nvPicPr>
+          <p:cNvPr id="11" name="Image 2" descr="preencoded.png">    </p:cNvPr>
+          <p:cNvPicPr>
+            <a:picLocks noChangeAspect="1"/>
+          </p:cNvPicPr>
+          <p:nvPr/>
+        </p:nvPicPr>
+        <p:blipFill>
+          <a:blip r:embed="rId3"/>
+          <a:stretch>
+            <a:fillRect/>
+          </a:stretch>
+        </p:blipFill>
+        <p:spPr>
+          <a:xfrm>
+            <a:off x="5257800" y="2569464"/>
+            <a:ext cx="438912" cy="438912"/>
+          </a:xfrm>
+          <a:prstGeom prst="rect">
+            <a:avLst/>
+          </a:prstGeom>
+        </p:spPr>
+      </p:pic>
+      <p:sp>
+        <p:nvSpPr>
+          <p:cNvPr id="12" name="Text 7"/>
+          <p:cNvSpPr txBox="1"/>
+          <p:nvPr/>
+        </p:nvSpPr>
+        <p:spPr>
+          <a:xfrm>
+            <a:off x="5806440" y="2468880"/>
+            <a:ext cx="2651760" cy="640080"/>
+          </a:xfrm>
+          <a:prstGeom prst="rect">
+            <a:avLst/>
+          </a:prstGeom>
+          <a:noFill/>
+          <a:ln/>
+        </p:spPr>
+        <p:txBody>
+          <a:bodyPr wrap="square" lIns="0" tIns="0" rIns="0" bIns="0" rtlCol="0" anchor="ctr"/>
+          <a:lstStyle/>
+          <a:p>
+            <a:pPr indent="0" marL="0">
+              <a:buNone/>
+            </a:pPr>
+            <a:r>
+              <a:rPr lang="en-US" sz="1200" dirty="0">
                 <a:solidFill>
                   <a:srgbClr val="FFFFFF"/>
                 </a:solidFill>
@@ -9409,46 +12183,7 @@
               </a:rPr>
               <a:t>Vous ne contrôlez pas vraiment vos fonds</a:t>
             </a:r>
-            <a:endParaRPr lang="en-US" sz="1400" dirty="0"/>
-          </a:p>
-        </p:txBody>
-      </p:sp>
-      <p:sp>
-        <p:nvSpPr>
-          <p:cNvPr id="4" name="Text 2"/>
-          <p:cNvSpPr txBox="1"/>
-          <p:nvPr/>
-        </p:nvSpPr>
-        <p:spPr>
-          <a:xfrm>
-            <a:off x="731520" y="4709160"/>
-            <a:ext cx="7680960" cy="274320"/>
-          </a:xfrm>
-          <a:prstGeom prst="rect">
-            <a:avLst/>
-          </a:prstGeom>
-          <a:noFill/>
-          <a:ln/>
-        </p:spPr>
-        <p:txBody>
-          <a:bodyPr wrap="square" lIns="0" tIns="0" rIns="0" bIns="0" rtlCol="0" anchor="ctr"/>
-          <a:lstStyle/>
-          <a:p>
-            <a:pPr algn="r" indent="0" marL="0">
-              <a:buNone/>
-            </a:pPr>
-            <a:r>
-              <a:rPr lang="en-US" sz="900" dirty="0">
-                <a:solidFill>
-                  <a:srgbClr val="64748B"/>
-                </a:solidFill>
-                <a:latin typeface="Calibri" pitchFamily="34" charset="0"/>
-                <a:ea typeface="Calibri" pitchFamily="34" charset="-122"/>
-                <a:cs typeface="Calibri" pitchFamily="34" charset="-120"/>
-              </a:rPr>
-              <a:t>Module 7 — Lecon 1</a:t>
-            </a:r>
-            <a:endParaRPr lang="en-US" sz="900" dirty="0"/>
+            <a:endParaRPr lang="en-US" sz="1200" dirty="0"/>
           </a:p>
         </p:txBody>
       </p:sp>
@@ -9492,8 +12227,8 @@
         </p:nvSpPr>
         <p:spPr>
           <a:xfrm>
-            <a:off x="731520" y="365760"/>
-            <a:ext cx="7680960" cy="548640"/>
+            <a:off x="731520" y="274320"/>
+            <a:ext cx="7680960" cy="502920"/>
           </a:xfrm>
           <a:prstGeom prst="rect">
             <a:avLst/>
@@ -9509,9 +12244,9 @@
               <a:buNone/>
             </a:pPr>
             <a:r>
-              <a:rPr lang="en-US" sz="2200" b="1" dirty="0">
-                <a:solidFill>
-                  <a:srgbClr val="00BFA6"/>
+              <a:rPr lang="en-US" sz="2000" b="1" dirty="0">
+                <a:solidFill>
+                  <a:srgbClr val="EF4444"/>
                 </a:solidFill>
                 <a:latin typeface="Calibri" pitchFamily="34" charset="0"/>
                 <a:ea typeface="Calibri" pitchFamily="34" charset="-122"/>
@@ -9519,20 +12254,66 @@
               </a:rPr>
               <a:t>Le wallet custodial (garde partagée)</a:t>
             </a:r>
-            <a:endParaRPr lang="en-US" sz="2200" dirty="0"/>
-          </a:p>
-        </p:txBody>
-      </p:sp>
-      <p:sp>
-        <p:nvSpPr>
-          <p:cNvPr id="3" name="Text 1"/>
-          <p:cNvSpPr txBox="1"/>
-          <p:nvPr/>
-        </p:nvSpPr>
-        <p:spPr>
-          <a:xfrm>
-            <a:off x="731520" y="1051560"/>
-            <a:ext cx="7680960" cy="3657600"/>
+            <a:endParaRPr lang="en-US" sz="2000" dirty="0"/>
+          </a:p>
+        </p:txBody>
+      </p:sp>
+      <p:sp>
+        <p:nvSpPr>
+          <p:cNvPr id="3" name="Shape 1"/>
+          <p:cNvSpPr/>
+          <p:nvPr/>
+        </p:nvSpPr>
+        <p:spPr>
+          <a:xfrm>
+            <a:off x="731520" y="1005840"/>
+            <a:ext cx="3657600" cy="1371600"/>
+          </a:xfrm>
+          <a:prstGeom prst="roundRect">
+            <a:avLst>
+              <a:gd name="adj" fmla="val 6667"/>
+            </a:avLst>
+          </a:prstGeom>
+          <a:solidFill>
+            <a:srgbClr val="1A2332"/>
+          </a:solidFill>
+          <a:ln/>
+        </p:spPr>
+      </p:sp>
+      <p:pic>
+        <p:nvPicPr>
+          <p:cNvPr id="4" name="Image 0" descr="preencoded.png">    </p:cNvPr>
+          <p:cNvPicPr>
+            <a:picLocks noChangeAspect="1"/>
+          </p:cNvPicPr>
+          <p:nvPr/>
+        </p:nvPicPr>
+        <p:blipFill>
+          <a:blip r:embed="rId1"/>
+          <a:stretch>
+            <a:fillRect/>
+          </a:stretch>
+        </p:blipFill>
+        <p:spPr>
+          <a:xfrm>
+            <a:off x="868680" y="1143000"/>
+            <a:ext cx="502920" cy="502920"/>
+          </a:xfrm>
+          <a:prstGeom prst="rect">
+            <a:avLst/>
+          </a:prstGeom>
+        </p:spPr>
+      </p:pic>
+      <p:sp>
+        <p:nvSpPr>
+          <p:cNvPr id="5" name="Text 2"/>
+          <p:cNvSpPr txBox="1"/>
+          <p:nvPr/>
+        </p:nvSpPr>
+        <p:spPr>
+          <a:xfrm>
+            <a:off x="868680" y="1719072"/>
+            <a:ext cx="3383280" cy="320040"/>
           </a:xfrm>
           <a:prstGeom prst="rect">
             <a:avLst/>
@@ -9544,15 +12325,11 @@
           <a:bodyPr wrap="square" lIns="0" tIns="0" rIns="0" bIns="0" rtlCol="0" anchor="t"/>
           <a:lstStyle/>
           <a:p>
-            <a:pPr marL="342900" indent="-342900">
-              <a:spcAft>
-                <a:spcPts val="800"/>
-              </a:spcAft>
-              <a:buSzPct val="100000"/>
-              <a:buChar char="•"/>
-            </a:pPr>
-            <a:r>
-              <a:rPr lang="en-US" sz="1400" dirty="0">
+            <a:pPr indent="0" marL="0">
+              <a:buNone/>
+            </a:pPr>
+            <a:r>
+              <a:rPr lang="en-US" sz="1100" b="1" dirty="0">
                 <a:solidFill>
                   <a:srgbClr val="FFFFFF"/>
                 </a:solidFill>
@@ -9560,20 +12337,123 @@
                 <a:ea typeface="Calibri" pitchFamily="34" charset="-122"/>
                 <a:cs typeface="Calibri" pitchFamily="34" charset="-120"/>
               </a:rPr>
-              <a:t>Si la plateforme fait faillite (comme FTX en 2022), vos fonds sont bloqués voire perdus</a:t>
-            </a:r>
-            <a:endParaRPr lang="en-US" sz="1400" dirty="0"/>
-          </a:p>
-          <a:p>
-            <a:pPr marL="342900" indent="-342900">
-              <a:spcAft>
-                <a:spcPts val="800"/>
-              </a:spcAft>
-              <a:buSzPct val="100000"/>
-              <a:buChar char="•"/>
-            </a:pPr>
-            <a:r>
-              <a:rPr lang="en-US" sz="1400" dirty="0">
+              <a:t>Si la plateforme fait faillite (comme FTX en 2022), vos f...</a:t>
+            </a:r>
+            <a:endParaRPr lang="en-US" sz="1100" dirty="0"/>
+          </a:p>
+        </p:txBody>
+      </p:sp>
+      <p:sp>
+        <p:nvSpPr>
+          <p:cNvPr id="6" name="Text 3"/>
+          <p:cNvSpPr txBox="1"/>
+          <p:nvPr/>
+        </p:nvSpPr>
+        <p:spPr>
+          <a:xfrm>
+            <a:off x="868680" y="2011680"/>
+            <a:ext cx="3383280" cy="274320"/>
+          </a:xfrm>
+          <a:prstGeom prst="rect">
+            <a:avLst/>
+          </a:prstGeom>
+          <a:noFill/>
+          <a:ln/>
+        </p:spPr>
+        <p:txBody>
+          <a:bodyPr wrap="square" lIns="0" tIns="0" rIns="0" bIns="0" rtlCol="0" anchor="t"/>
+          <a:lstStyle/>
+          <a:p>
+            <a:pPr indent="0" marL="0">
+              <a:buNone/>
+            </a:pPr>
+            <a:r>
+              <a:rPr lang="en-US" sz="900" dirty="0">
+                <a:solidFill>
+                  <a:srgbClr val="94A3B8"/>
+                </a:solidFill>
+                <a:latin typeface="Calibri" pitchFamily="34" charset="0"/>
+                <a:ea typeface="Calibri" pitchFamily="34" charset="-122"/>
+                <a:cs typeface="Calibri" pitchFamily="34" charset="-120"/>
+              </a:rPr>
+              <a:t>qués voire perdus</a:t>
+            </a:r>
+            <a:endParaRPr lang="en-US" sz="900" dirty="0"/>
+          </a:p>
+        </p:txBody>
+      </p:sp>
+      <p:sp>
+        <p:nvSpPr>
+          <p:cNvPr id="7" name="Shape 4"/>
+          <p:cNvSpPr/>
+          <p:nvPr/>
+        </p:nvSpPr>
+        <p:spPr>
+          <a:xfrm>
+            <a:off x="4754880" y="1005840"/>
+            <a:ext cx="3657600" cy="1371600"/>
+          </a:xfrm>
+          <a:prstGeom prst="roundRect">
+            <a:avLst>
+              <a:gd name="adj" fmla="val 6667"/>
+            </a:avLst>
+          </a:prstGeom>
+          <a:solidFill>
+            <a:srgbClr val="1A2332"/>
+          </a:solidFill>
+          <a:ln/>
+        </p:spPr>
+      </p:sp>
+      <p:pic>
+        <p:nvPicPr>
+          <p:cNvPr id="8" name="Image 1" descr="preencoded.png">    </p:cNvPr>
+          <p:cNvPicPr>
+            <a:picLocks noChangeAspect="1"/>
+          </p:cNvPicPr>
+          <p:nvPr/>
+        </p:nvPicPr>
+        <p:blipFill>
+          <a:blip r:embed="rId2"/>
+          <a:stretch>
+            <a:fillRect/>
+          </a:stretch>
+        </p:blipFill>
+        <p:spPr>
+          <a:xfrm>
+            <a:off x="4892040" y="1143000"/>
+            <a:ext cx="502920" cy="502920"/>
+          </a:xfrm>
+          <a:prstGeom prst="rect">
+            <a:avLst/>
+          </a:prstGeom>
+        </p:spPr>
+      </p:pic>
+      <p:sp>
+        <p:nvSpPr>
+          <p:cNvPr id="9" name="Text 5"/>
+          <p:cNvSpPr txBox="1"/>
+          <p:nvPr/>
+        </p:nvSpPr>
+        <p:spPr>
+          <a:xfrm>
+            <a:off x="4892040" y="1719072"/>
+            <a:ext cx="3383280" cy="320040"/>
+          </a:xfrm>
+          <a:prstGeom prst="rect">
+            <a:avLst/>
+          </a:prstGeom>
+          <a:noFill/>
+          <a:ln/>
+        </p:spPr>
+        <p:txBody>
+          <a:bodyPr wrap="square" lIns="0" tIns="0" rIns="0" bIns="0" rtlCol="0" anchor="t"/>
+          <a:lstStyle/>
+          <a:p>
+            <a:pPr indent="0" marL="0">
+              <a:buNone/>
+            </a:pPr>
+            <a:r>
+              <a:rPr lang="en-US" sz="1100" b="1" dirty="0">
                 <a:solidFill>
                   <a:srgbClr val="FFFFFF"/>
                 </a:solidFill>
@@ -9583,18 +12463,82 @@
               </a:rPr>
               <a:t>La plateforme peut geler votre compte à tout moment</a:t>
             </a:r>
-            <a:endParaRPr lang="en-US" sz="1400" dirty="0"/>
-          </a:p>
-          <a:p>
-            <a:pPr marL="342900" indent="-342900">
-              <a:spcAft>
-                <a:spcPts val="800"/>
-              </a:spcAft>
-              <a:buSzPct val="100000"/>
-              <a:buChar char="•"/>
-            </a:pPr>
-            <a:r>
-              <a:rPr lang="en-US" sz="1400" dirty="0">
+            <a:endParaRPr lang="en-US" sz="1100" dirty="0"/>
+          </a:p>
+        </p:txBody>
+      </p:sp>
+      <p:sp>
+        <p:nvSpPr>
+          <p:cNvPr id="10" name="Shape 6"/>
+          <p:cNvSpPr/>
+          <p:nvPr/>
+        </p:nvSpPr>
+        <p:spPr>
+          <a:xfrm>
+            <a:off x="731520" y="2514600"/>
+            <a:ext cx="3657600" cy="1371600"/>
+          </a:xfrm>
+          <a:prstGeom prst="roundRect">
+            <a:avLst>
+              <a:gd name="adj" fmla="val 6667"/>
+            </a:avLst>
+          </a:prstGeom>
+          <a:solidFill>
+            <a:srgbClr val="1A2332"/>
+          </a:solidFill>
+          <a:ln/>
+        </p:spPr>
+      </p:sp>
+      <p:pic>
+        <p:nvPicPr>
+          <p:cNvPr id="11" name="Image 2" descr="preencoded.png">    </p:cNvPr>
+          <p:cNvPicPr>
+            <a:picLocks noChangeAspect="1"/>
+          </p:cNvPicPr>
+          <p:nvPr/>
+        </p:nvPicPr>
+        <p:blipFill>
+          <a:blip r:embed="rId3"/>
+          <a:stretch>
+            <a:fillRect/>
+          </a:stretch>
+        </p:blipFill>
+        <p:spPr>
+          <a:xfrm>
+            <a:off x="868680" y="2651760"/>
+            <a:ext cx="502920" cy="502920"/>
+          </a:xfrm>
+          <a:prstGeom prst="rect">
+            <a:avLst/>
+          </a:prstGeom>
+        </p:spPr>
+      </p:pic>
+      <p:sp>
+        <p:nvSpPr>
+          <p:cNvPr id="12" name="Text 7"/>
+          <p:cNvSpPr txBox="1"/>
+          <p:nvPr/>
+        </p:nvSpPr>
+        <p:spPr>
+          <a:xfrm>
+            <a:off x="868680" y="3227832"/>
+            <a:ext cx="3383280" cy="320040"/>
+          </a:xfrm>
+          <a:prstGeom prst="rect">
+            <a:avLst/>
+          </a:prstGeom>
+          <a:noFill/>
+          <a:ln/>
+        </p:spPr>
+        <p:txBody>
+          <a:bodyPr wrap="square" lIns="0" tIns="0" rIns="0" bIns="0" rtlCol="0" anchor="t"/>
+          <a:lstStyle/>
+          <a:p>
+            <a:pPr indent="0" marL="0">
+              <a:buNone/>
+            </a:pPr>
+            <a:r>
+              <a:rPr lang="en-US" sz="1100" b="1" dirty="0">
                 <a:solidFill>
                   <a:srgbClr val="FFFFFF"/>
                 </a:solidFill>
@@ -9602,48 +12546,9 @@
                 <a:ea typeface="Calibri" pitchFamily="34" charset="-122"/>
                 <a:cs typeface="Calibri" pitchFamily="34" charset="-120"/>
               </a:rPr>
-              <a:t>Piratage massif possible (Mt. Gox en 2014, plus récemment en 2024)</a:t>
-            </a:r>
-            <a:endParaRPr lang="en-US" sz="1400" dirty="0"/>
-          </a:p>
-        </p:txBody>
-      </p:sp>
-      <p:sp>
-        <p:nvSpPr>
-          <p:cNvPr id="4" name="Text 2"/>
-          <p:cNvSpPr txBox="1"/>
-          <p:nvPr/>
-        </p:nvSpPr>
-        <p:spPr>
-          <a:xfrm>
-            <a:off x="731520" y="4709160"/>
-            <a:ext cx="7680960" cy="274320"/>
-          </a:xfrm>
-          <a:prstGeom prst="rect">
-            <a:avLst/>
-          </a:prstGeom>
-          <a:noFill/>
-          <a:ln/>
-        </p:spPr>
-        <p:txBody>
-          <a:bodyPr wrap="square" lIns="0" tIns="0" rIns="0" bIns="0" rtlCol="0" anchor="ctr"/>
-          <a:lstStyle/>
-          <a:p>
-            <a:pPr algn="r" indent="0" marL="0">
-              <a:buNone/>
-            </a:pPr>
-            <a:r>
-              <a:rPr lang="en-US" sz="900" dirty="0">
-                <a:solidFill>
-                  <a:srgbClr val="64748B"/>
-                </a:solidFill>
-                <a:latin typeface="Calibri" pitchFamily="34" charset="0"/>
-                <a:ea typeface="Calibri" pitchFamily="34" charset="-122"/>
-                <a:cs typeface="Calibri" pitchFamily="34" charset="-120"/>
-              </a:rPr>
-              <a:t>Module 7 — Lecon 1</a:t>
-            </a:r>
-            <a:endParaRPr lang="en-US" sz="900" dirty="0"/>
+              <a:t>Piratage massif possible (Mt. Gox en 2014, plus récemment...</a:t>
+            </a:r>
+            <a:endParaRPr lang="en-US" sz="1100" dirty="0"/>
           </a:p>
         </p:txBody>
       </p:sp>
@@ -9681,14 +12586,60 @@
       </p:grpSpPr>
       <p:sp>
         <p:nvSpPr>
-          <p:cNvPr id="2" name="Text 0"/>
-          <p:cNvSpPr txBox="1"/>
-          <p:nvPr/>
-        </p:nvSpPr>
-        <p:spPr>
-          <a:xfrm>
-            <a:off x="731520" y="365760"/>
-            <a:ext cx="7680960" cy="548640"/>
+          <p:cNvPr id="2" name="Shape 0"/>
+          <p:cNvSpPr/>
+          <p:nvPr/>
+        </p:nvSpPr>
+        <p:spPr>
+          <a:xfrm>
+            <a:off x="7955280" y="182880"/>
+            <a:ext cx="640080" cy="640080"/>
+          </a:xfrm>
+          <a:prstGeom prst="ellipse">
+            <a:avLst/>
+          </a:prstGeom>
+          <a:solidFill>
+            <a:srgbClr val="EF4444">
+              <a:alpha val="12000"/>
+            </a:srgbClr>
+          </a:solidFill>
+          <a:ln/>
+        </p:spPr>
+      </p:sp>
+      <p:pic>
+        <p:nvPicPr>
+          <p:cNvPr id="3" name="Image 0" descr="preencoded.png">    </p:cNvPr>
+          <p:cNvPicPr>
+            <a:picLocks noChangeAspect="1"/>
+          </p:cNvPicPr>
+          <p:nvPr/>
+        </p:nvPicPr>
+        <p:blipFill>
+          <a:blip r:embed="rId1"/>
+          <a:stretch>
+            <a:fillRect/>
+          </a:stretch>
+        </p:blipFill>
+        <p:spPr>
+          <a:xfrm>
+            <a:off x="8028432" y="256032"/>
+            <a:ext cx="493776" cy="493776"/>
+          </a:xfrm>
+          <a:prstGeom prst="rect">
+            <a:avLst/>
+          </a:prstGeom>
+        </p:spPr>
+      </p:pic>
+      <p:sp>
+        <p:nvSpPr>
+          <p:cNvPr id="4" name="Text 1"/>
+          <p:cNvSpPr txBox="1"/>
+          <p:nvPr/>
+        </p:nvSpPr>
+        <p:spPr>
+          <a:xfrm>
+            <a:off x="731520" y="274320"/>
+            <a:ext cx="7132320" cy="502920"/>
           </a:xfrm>
           <a:prstGeom prst="rect">
             <a:avLst/>
@@ -9704,9 +12655,9 @@
               <a:buNone/>
             </a:pPr>
             <a:r>
-              <a:rPr lang="en-US" sz="2200" b="1" dirty="0">
-                <a:solidFill>
-                  <a:srgbClr val="00BFA6"/>
+              <a:rPr lang="en-US" sz="2000" b="1" dirty="0">
+                <a:solidFill>
+                  <a:srgbClr val="EF4444"/>
                 </a:solidFill>
                 <a:latin typeface="Calibri" pitchFamily="34" charset="0"/>
                 <a:ea typeface="Calibri" pitchFamily="34" charset="-122"/>
@@ -9714,19 +12665,19 @@
               </a:rPr>
               <a:t>Le wallet non-custodial (contrôle total)</a:t>
             </a:r>
-            <a:endParaRPr lang="en-US" sz="2200" dirty="0"/>
-          </a:p>
-        </p:txBody>
-      </p:sp>
-      <p:sp>
-        <p:nvSpPr>
-          <p:cNvPr id="3" name="Text 1"/>
-          <p:cNvSpPr txBox="1"/>
-          <p:nvPr/>
-        </p:nvSpPr>
-        <p:spPr>
-          <a:xfrm>
-            <a:off x="731520" y="1051560"/>
+            <a:endParaRPr lang="en-US" sz="2000" dirty="0"/>
+          </a:p>
+        </p:txBody>
+      </p:sp>
+      <p:sp>
+        <p:nvSpPr>
+          <p:cNvPr id="5" name="Text 2"/>
+          <p:cNvSpPr txBox="1"/>
+          <p:nvPr/>
+        </p:nvSpPr>
+        <p:spPr>
+          <a:xfrm>
+            <a:off x="731520" y="960120"/>
             <a:ext cx="7680960" cy="3657600"/>
           </a:xfrm>
           <a:prstGeom prst="rect">
@@ -9889,7 +12840,7 @@
       </p:sp>
       <p:sp>
         <p:nvSpPr>
-          <p:cNvPr id="4" name="Text 2"/>
+          <p:cNvPr id="6" name="Text 3"/>
           <p:cNvSpPr txBox="1"/>
           <p:nvPr/>
         </p:nvSpPr>
@@ -9920,7 +12871,7 @@
                 <a:ea typeface="Calibri" pitchFamily="34" charset="-122"/>
                 <a:cs typeface="Calibri" pitchFamily="34" charset="-120"/>
               </a:rPr>
-              <a:t>Module 7 — Lecon 1</a:t>
+              <a:t>Module 7 — Leçon 1</a:t>
             </a:r>
             <a:endParaRPr lang="en-US" sz="900" dirty="0"/>
           </a:p>
@@ -9966,8 +12917,8 @@
         </p:nvSpPr>
         <p:spPr>
           <a:xfrm>
-            <a:off x="731520" y="365760"/>
-            <a:ext cx="7680960" cy="548640"/>
+            <a:off x="731520" y="274320"/>
+            <a:ext cx="7680960" cy="502920"/>
           </a:xfrm>
           <a:prstGeom prst="rect">
             <a:avLst/>
@@ -9983,9 +12934,9 @@
               <a:buNone/>
             </a:pPr>
             <a:r>
-              <a:rPr lang="en-US" sz="2200" b="1" dirty="0">
-                <a:solidFill>
-                  <a:srgbClr val="00BFA6"/>
+              <a:rPr lang="en-US" sz="2000" b="1" dirty="0">
+                <a:solidFill>
+                  <a:srgbClr val="EF4444"/>
                 </a:solidFill>
                 <a:latin typeface="Calibri" pitchFamily="34" charset="0"/>
                 <a:ea typeface="Calibri" pitchFamily="34" charset="-122"/>
@@ -9993,7 +12944,7 @@
               </a:rPr>
               <a:t>Le wallet non-custodial (contrôle total)</a:t>
             </a:r>
-            <a:endParaRPr lang="en-US" sz="2200" dirty="0"/>
+            <a:endParaRPr lang="en-US" sz="2000" dirty="0"/>
           </a:p>
         </p:txBody>
       </p:sp>
@@ -10005,8 +12956,8 @@
         </p:nvSpPr>
         <p:spPr>
           <a:xfrm>
-            <a:off x="731520" y="1051560"/>
-            <a:ext cx="7680960" cy="3657600"/>
+            <a:off x="731520" y="1005840"/>
+            <a:ext cx="4206240" cy="3474720"/>
           </a:xfrm>
           <a:prstGeom prst="rect">
             <a:avLst/>
@@ -10020,13 +12971,13 @@
           <a:p>
             <a:pPr marL="342900" indent="-342900">
               <a:spcAft>
-                <a:spcPts val="800"/>
+                <a:spcPts val="600"/>
               </a:spcAft>
               <a:buSzPct val="100000"/>
               <a:buChar char="•"/>
             </a:pPr>
             <a:r>
-              <a:rPr lang="en-US" sz="1400" dirty="0">
+              <a:rPr lang="en-US" sz="1300" dirty="0">
                 <a:solidFill>
                   <a:srgbClr val="FFFFFF"/>
                 </a:solidFill>
@@ -10036,18 +12987,18 @@
               </a:rPr>
               <a:t>Si vous perdez votre phrase secrète, votre argent est PERDU. Personne ne peut la récupérer.</a:t>
             </a:r>
-            <a:endParaRPr lang="en-US" sz="1400" dirty="0"/>
+            <a:endParaRPr lang="en-US" sz="1300" dirty="0"/>
           </a:p>
           <a:p>
             <a:pPr marL="342900" indent="-342900">
               <a:spcAft>
-                <a:spcPts val="800"/>
+                <a:spcPts val="600"/>
               </a:spcAft>
               <a:buSzPct val="100000"/>
               <a:buChar char="•"/>
             </a:pPr>
             <a:r>
-              <a:rPr lang="en-US" sz="1400" dirty="0">
+              <a:rPr lang="en-US" sz="1300" dirty="0">
                 <a:solidFill>
                   <a:srgbClr val="FFFFFF"/>
                 </a:solidFill>
@@ -10057,18 +13008,82 @@
               </a:rPr>
               <a:t>Aucun support client — vous êtes responsable</a:t>
             </a:r>
-            <a:endParaRPr lang="en-US" sz="1400" dirty="0"/>
-          </a:p>
-          <a:p>
-            <a:pPr marL="342900" indent="-342900">
-              <a:spcAft>
-                <a:spcPts val="800"/>
-              </a:spcAft>
-              <a:buSzPct val="100000"/>
-              <a:buChar char="•"/>
-            </a:pPr>
-            <a:r>
-              <a:rPr lang="en-US" sz="1400" dirty="0">
+            <a:endParaRPr lang="en-US" sz="1300" dirty="0"/>
+          </a:p>
+        </p:txBody>
+      </p:sp>
+      <p:sp>
+        <p:nvSpPr>
+          <p:cNvPr id="4" name="Shape 2"/>
+          <p:cNvSpPr/>
+          <p:nvPr/>
+        </p:nvSpPr>
+        <p:spPr>
+          <a:xfrm>
+            <a:off x="5120640" y="1005840"/>
+            <a:ext cx="3474720" cy="640080"/>
+          </a:xfrm>
+          <a:prstGeom prst="roundRect">
+            <a:avLst>
+              <a:gd name="adj" fmla="val 14286"/>
+            </a:avLst>
+          </a:prstGeom>
+          <a:solidFill>
+            <a:srgbClr val="1A2332"/>
+          </a:solidFill>
+          <a:ln/>
+        </p:spPr>
+      </p:sp>
+      <p:pic>
+        <p:nvPicPr>
+          <p:cNvPr id="5" name="Image 0" descr="preencoded.png">    </p:cNvPr>
+          <p:cNvPicPr>
+            <a:picLocks noChangeAspect="1"/>
+          </p:cNvPicPr>
+          <p:nvPr/>
+        </p:nvPicPr>
+        <p:blipFill>
+          <a:blip r:embed="rId1"/>
+          <a:stretch>
+            <a:fillRect/>
+          </a:stretch>
+        </p:blipFill>
+        <p:spPr>
+          <a:xfrm>
+            <a:off x="5257800" y="1106424"/>
+            <a:ext cx="438912" cy="438912"/>
+          </a:xfrm>
+          <a:prstGeom prst="rect">
+            <a:avLst/>
+          </a:prstGeom>
+        </p:spPr>
+      </p:pic>
+      <p:sp>
+        <p:nvSpPr>
+          <p:cNvPr id="6" name="Text 3"/>
+          <p:cNvSpPr txBox="1"/>
+          <p:nvPr/>
+        </p:nvSpPr>
+        <p:spPr>
+          <a:xfrm>
+            <a:off x="5806440" y="1005840"/>
+            <a:ext cx="2651760" cy="640080"/>
+          </a:xfrm>
+          <a:prstGeom prst="rect">
+            <a:avLst/>
+          </a:prstGeom>
+          <a:noFill/>
+          <a:ln/>
+        </p:spPr>
+        <p:txBody>
+          <a:bodyPr wrap="square" lIns="0" tIns="0" rIns="0" bIns="0" rtlCol="0" anchor="ctr"/>
+          <a:lstStyle/>
+          <a:p>
+            <a:pPr indent="0" marL="0">
+              <a:buNone/>
+            </a:pPr>
+            <a:r>
+              <a:rPr lang="en-US" sz="1200" dirty="0">
                 <a:solidFill>
                   <a:srgbClr val="FFFFFF"/>
                 </a:solidFill>
@@ -10078,18 +13093,82 @@
               </a:rPr>
               <a:t>Il faut apprendre les bonnes pratiques de sécurité (voir leçons suivantes)</a:t>
             </a:r>
-            <a:endParaRPr lang="en-US" sz="1400" dirty="0"/>
-          </a:p>
-          <a:p>
-            <a:pPr marL="342900" indent="-342900">
-              <a:spcAft>
-                <a:spcPts val="800"/>
-              </a:spcAft>
-              <a:buSzPct val="100000"/>
-              <a:buChar char="•"/>
-            </a:pPr>
-            <a:r>
-              <a:rPr lang="en-US" sz="1400" dirty="0">
+            <a:endParaRPr lang="en-US" sz="1200" dirty="0"/>
+          </a:p>
+        </p:txBody>
+      </p:sp>
+      <p:sp>
+        <p:nvSpPr>
+          <p:cNvPr id="7" name="Shape 4"/>
+          <p:cNvSpPr/>
+          <p:nvPr/>
+        </p:nvSpPr>
+        <p:spPr>
+          <a:xfrm>
+            <a:off x="5120640" y="1737360"/>
+            <a:ext cx="3474720" cy="640080"/>
+          </a:xfrm>
+          <a:prstGeom prst="roundRect">
+            <a:avLst>
+              <a:gd name="adj" fmla="val 14286"/>
+            </a:avLst>
+          </a:prstGeom>
+          <a:solidFill>
+            <a:srgbClr val="1A2332"/>
+          </a:solidFill>
+          <a:ln/>
+        </p:spPr>
+      </p:sp>
+      <p:pic>
+        <p:nvPicPr>
+          <p:cNvPr id="8" name="Image 1" descr="preencoded.png">    </p:cNvPr>
+          <p:cNvPicPr>
+            <a:picLocks noChangeAspect="1"/>
+          </p:cNvPicPr>
+          <p:nvPr/>
+        </p:nvPicPr>
+        <p:blipFill>
+          <a:blip r:embed="rId2"/>
+          <a:stretch>
+            <a:fillRect/>
+          </a:stretch>
+        </p:blipFill>
+        <p:spPr>
+          <a:xfrm>
+            <a:off x="5257800" y="1837944"/>
+            <a:ext cx="438912" cy="438912"/>
+          </a:xfrm>
+          <a:prstGeom prst="rect">
+            <a:avLst/>
+          </a:prstGeom>
+        </p:spPr>
+      </p:pic>
+      <p:sp>
+        <p:nvSpPr>
+          <p:cNvPr id="9" name="Text 5"/>
+          <p:cNvSpPr txBox="1"/>
+          <p:nvPr/>
+        </p:nvSpPr>
+        <p:spPr>
+          <a:xfrm>
+            <a:off x="5806440" y="1737360"/>
+            <a:ext cx="2651760" cy="640080"/>
+          </a:xfrm>
+          <a:prstGeom prst="rect">
+            <a:avLst/>
+          </a:prstGeom>
+          <a:noFill/>
+          <a:ln/>
+        </p:spPr>
+        <p:txBody>
+          <a:bodyPr wrap="square" lIns="0" tIns="0" rIns="0" bIns="0" rtlCol="0" anchor="ctr"/>
+          <a:lstStyle/>
+          <a:p>
+            <a:pPr indent="0" marL="0">
+              <a:buNone/>
+            </a:pPr>
+            <a:r>
+              <a:rPr lang="en-US" sz="1200" dirty="0">
                 <a:solidFill>
                   <a:srgbClr val="FFFFFF"/>
                 </a:solidFill>
@@ -10097,48 +13176,9 @@
                 <a:ea typeface="Calibri" pitchFamily="34" charset="-122"/>
                 <a:cs typeface="Calibri" pitchFamily="34" charset="-120"/>
               </a:rPr>
-              <a:t>Le proverbe crypto : « Not your keys, not your coins » — Si vous n'avez pas les clés, ce ne sont pas vos cryptos.</a:t>
-            </a:r>
-            <a:endParaRPr lang="en-US" sz="1400" dirty="0"/>
-          </a:p>
-        </p:txBody>
-      </p:sp>
-      <p:sp>
-        <p:nvSpPr>
-          <p:cNvPr id="4" name="Text 2"/>
-          <p:cNvSpPr txBox="1"/>
-          <p:nvPr/>
-        </p:nvSpPr>
-        <p:spPr>
-          <a:xfrm>
-            <a:off x="731520" y="4709160"/>
-            <a:ext cx="7680960" cy="274320"/>
-          </a:xfrm>
-          <a:prstGeom prst="rect">
-            <a:avLst/>
-          </a:prstGeom>
-          <a:noFill/>
-          <a:ln/>
-        </p:spPr>
-        <p:txBody>
-          <a:bodyPr wrap="square" lIns="0" tIns="0" rIns="0" bIns="0" rtlCol="0" anchor="ctr"/>
-          <a:lstStyle/>
-          <a:p>
-            <a:pPr algn="r" indent="0" marL="0">
-              <a:buNone/>
-            </a:pPr>
-            <a:r>
-              <a:rPr lang="en-US" sz="900" dirty="0">
-                <a:solidFill>
-                  <a:srgbClr val="64748B"/>
-                </a:solidFill>
-                <a:latin typeface="Calibri" pitchFamily="34" charset="0"/>
-                <a:ea typeface="Calibri" pitchFamily="34" charset="-122"/>
-                <a:cs typeface="Calibri" pitchFamily="34" charset="-120"/>
-              </a:rPr>
-              <a:t>Module 7 — Lecon 1</a:t>
-            </a:r>
-            <a:endParaRPr lang="en-US" sz="900" dirty="0"/>
+              <a:t>Le proverbe crypto : « Not your keys, not your coins » — Si vous n'avez pas l...</a:t>
+            </a:r>
+            <a:endParaRPr lang="en-US" sz="1200" dirty="0"/>
           </a:p>
         </p:txBody>
       </p:sp>
@@ -10182,8 +13222,8 @@
         </p:nvSpPr>
         <p:spPr>
           <a:xfrm>
-            <a:off x="731520" y="365760"/>
-            <a:ext cx="7680960" cy="548640"/>
+            <a:off x="731520" y="274320"/>
+            <a:ext cx="7680960" cy="502920"/>
           </a:xfrm>
           <a:prstGeom prst="rect">
             <a:avLst/>
@@ -10199,9 +13239,9 @@
               <a:buNone/>
             </a:pPr>
             <a:r>
-              <a:rPr lang="en-US" sz="2200" b="1" dirty="0">
-                <a:solidFill>
-                  <a:srgbClr val="00BFA6"/>
+              <a:rPr lang="en-US" sz="2000" b="1" dirty="0">
+                <a:solidFill>
+                  <a:srgbClr val="EF4444"/>
                 </a:solidFill>
                 <a:latin typeface="Calibri" pitchFamily="34" charset="0"/>
                 <a:ea typeface="Calibri" pitchFamily="34" charset="-122"/>
@@ -10209,20 +13249,66 @@
               </a:rPr>
               <a:t>Recommandation Terex</a:t>
             </a:r>
-            <a:endParaRPr lang="en-US" sz="2200" dirty="0"/>
-          </a:p>
-        </p:txBody>
-      </p:sp>
-      <p:sp>
-        <p:nvSpPr>
-          <p:cNvPr id="3" name="Text 1"/>
-          <p:cNvSpPr txBox="1"/>
-          <p:nvPr/>
-        </p:nvSpPr>
-        <p:spPr>
-          <a:xfrm>
-            <a:off x="731520" y="1051560"/>
-            <a:ext cx="7680960" cy="3657600"/>
+            <a:endParaRPr lang="en-US" sz="2000" dirty="0"/>
+          </a:p>
+        </p:txBody>
+      </p:sp>
+      <p:sp>
+        <p:nvSpPr>
+          <p:cNvPr id="3" name="Shape 1"/>
+          <p:cNvSpPr/>
+          <p:nvPr/>
+        </p:nvSpPr>
+        <p:spPr>
+          <a:xfrm>
+            <a:off x="731520" y="1005840"/>
+            <a:ext cx="3657600" cy="1371600"/>
+          </a:xfrm>
+          <a:prstGeom prst="roundRect">
+            <a:avLst>
+              <a:gd name="adj" fmla="val 6667"/>
+            </a:avLst>
+          </a:prstGeom>
+          <a:solidFill>
+            <a:srgbClr val="1A2332"/>
+          </a:solidFill>
+          <a:ln/>
+        </p:spPr>
+      </p:sp>
+      <p:pic>
+        <p:nvPicPr>
+          <p:cNvPr id="4" name="Image 0" descr="preencoded.png">    </p:cNvPr>
+          <p:cNvPicPr>
+            <a:picLocks noChangeAspect="1"/>
+          </p:cNvPicPr>
+          <p:nvPr/>
+        </p:nvPicPr>
+        <p:blipFill>
+          <a:blip r:embed="rId1"/>
+          <a:stretch>
+            <a:fillRect/>
+          </a:stretch>
+        </p:blipFill>
+        <p:spPr>
+          <a:xfrm>
+            <a:off x="868680" y="1143000"/>
+            <a:ext cx="502920" cy="502920"/>
+          </a:xfrm>
+          <a:prstGeom prst="rect">
+            <a:avLst/>
+          </a:prstGeom>
+        </p:spPr>
+      </p:pic>
+      <p:sp>
+        <p:nvSpPr>
+          <p:cNvPr id="5" name="Text 2"/>
+          <p:cNvSpPr txBox="1"/>
+          <p:nvPr/>
+        </p:nvSpPr>
+        <p:spPr>
+          <a:xfrm>
+            <a:off x="868680" y="1719072"/>
+            <a:ext cx="3383280" cy="320040"/>
           </a:xfrm>
           <a:prstGeom prst="rect">
             <a:avLst/>
@@ -10234,15 +13320,11 @@
           <a:bodyPr wrap="square" lIns="0" tIns="0" rIns="0" bIns="0" rtlCol="0" anchor="t"/>
           <a:lstStyle/>
           <a:p>
-            <a:pPr marL="342900" indent="-342900">
-              <a:spcAft>
-                <a:spcPts val="800"/>
-              </a:spcAft>
-              <a:buSzPct val="100000"/>
-              <a:buChar char="•"/>
-            </a:pPr>
-            <a:r>
-              <a:rPr lang="en-US" sz="1400" dirty="0">
+            <a:pPr indent="0" marL="0">
+              <a:buNone/>
+            </a:pPr>
+            <a:r>
+              <a:rPr lang="en-US" sz="1100" b="1" dirty="0">
                 <a:solidFill>
                   <a:srgbClr val="FFFFFF"/>
                 </a:solidFill>
@@ -10250,20 +13332,123 @@
                 <a:ea typeface="Calibri" pitchFamily="34" charset="-122"/>
                 <a:cs typeface="Calibri" pitchFamily="34" charset="-120"/>
               </a:rPr>
-              <a:t>Pour les petits montants (&lt; 500$), un wallet custodial comme Binance suffit pour commencer.</a:t>
-            </a:r>
-            <a:endParaRPr lang="en-US" sz="1400" dirty="0"/>
-          </a:p>
-          <a:p>
-            <a:pPr marL="342900" indent="-342900">
-              <a:spcAft>
-                <a:spcPts val="800"/>
-              </a:spcAft>
-              <a:buSzPct val="100000"/>
-              <a:buChar char="•"/>
-            </a:pPr>
-            <a:r>
-              <a:rPr lang="en-US" sz="1400" dirty="0">
+              <a:t>Pour les petits montants (&lt; 500$), un wallet custodial co...</a:t>
+            </a:r>
+            <a:endParaRPr lang="en-US" sz="1100" dirty="0"/>
+          </a:p>
+        </p:txBody>
+      </p:sp>
+      <p:sp>
+        <p:nvSpPr>
+          <p:cNvPr id="6" name="Text 3"/>
+          <p:cNvSpPr txBox="1"/>
+          <p:nvPr/>
+        </p:nvSpPr>
+        <p:spPr>
+          <a:xfrm>
+            <a:off x="868680" y="2011680"/>
+            <a:ext cx="3383280" cy="274320"/>
+          </a:xfrm>
+          <a:prstGeom prst="rect">
+            <a:avLst/>
+          </a:prstGeom>
+          <a:noFill/>
+          <a:ln/>
+        </p:spPr>
+        <p:txBody>
+          <a:bodyPr wrap="square" lIns="0" tIns="0" rIns="0" bIns="0" rtlCol="0" anchor="t"/>
+          <a:lstStyle/>
+          <a:p>
+            <a:pPr indent="0" marL="0">
+              <a:buNone/>
+            </a:pPr>
+            <a:r>
+              <a:rPr lang="en-US" sz="900" dirty="0">
+                <a:solidFill>
+                  <a:srgbClr val="94A3B8"/>
+                </a:solidFill>
+                <a:latin typeface="Calibri" pitchFamily="34" charset="0"/>
+                <a:ea typeface="Calibri" pitchFamily="34" charset="-122"/>
+                <a:cs typeface="Calibri" pitchFamily="34" charset="-120"/>
+              </a:rPr>
+              <a:t>uffit pour commencer.</a:t>
+            </a:r>
+            <a:endParaRPr lang="en-US" sz="900" dirty="0"/>
+          </a:p>
+        </p:txBody>
+      </p:sp>
+      <p:sp>
+        <p:nvSpPr>
+          <p:cNvPr id="7" name="Shape 4"/>
+          <p:cNvSpPr/>
+          <p:nvPr/>
+        </p:nvSpPr>
+        <p:spPr>
+          <a:xfrm>
+            <a:off x="4754880" y="1005840"/>
+            <a:ext cx="3657600" cy="1371600"/>
+          </a:xfrm>
+          <a:prstGeom prst="roundRect">
+            <a:avLst>
+              <a:gd name="adj" fmla="val 6667"/>
+            </a:avLst>
+          </a:prstGeom>
+          <a:solidFill>
+            <a:srgbClr val="1A2332"/>
+          </a:solidFill>
+          <a:ln/>
+        </p:spPr>
+      </p:sp>
+      <p:pic>
+        <p:nvPicPr>
+          <p:cNvPr id="8" name="Image 1" descr="preencoded.png">    </p:cNvPr>
+          <p:cNvPicPr>
+            <a:picLocks noChangeAspect="1"/>
+          </p:cNvPicPr>
+          <p:nvPr/>
+        </p:nvPicPr>
+        <p:blipFill>
+          <a:blip r:embed="rId2"/>
+          <a:stretch>
+            <a:fillRect/>
+          </a:stretch>
+        </p:blipFill>
+        <p:spPr>
+          <a:xfrm>
+            <a:off x="4892040" y="1143000"/>
+            <a:ext cx="502920" cy="502920"/>
+          </a:xfrm>
+          <a:prstGeom prst="rect">
+            <a:avLst/>
+          </a:prstGeom>
+        </p:spPr>
+      </p:pic>
+      <p:sp>
+        <p:nvSpPr>
+          <p:cNvPr id="9" name="Text 5"/>
+          <p:cNvSpPr txBox="1"/>
+          <p:nvPr/>
+        </p:nvSpPr>
+        <p:spPr>
+          <a:xfrm>
+            <a:off x="4892040" y="1719072"/>
+            <a:ext cx="3383280" cy="320040"/>
+          </a:xfrm>
+          <a:prstGeom prst="rect">
+            <a:avLst/>
+          </a:prstGeom>
+          <a:noFill/>
+          <a:ln/>
+        </p:spPr>
+        <p:txBody>
+          <a:bodyPr wrap="square" lIns="0" tIns="0" rIns="0" bIns="0" rtlCol="0" anchor="t"/>
+          <a:lstStyle/>
+          <a:p>
+            <a:pPr indent="0" marL="0">
+              <a:buNone/>
+            </a:pPr>
+            <a:r>
+              <a:rPr lang="en-US" sz="1100" b="1" dirty="0">
                 <a:solidFill>
                   <a:srgbClr val="FFFFFF"/>
                 </a:solidFill>
@@ -10271,22 +13456,22 @@
                 <a:ea typeface="Calibri" pitchFamily="34" charset="-122"/>
                 <a:cs typeface="Calibri" pitchFamily="34" charset="-120"/>
               </a:rPr>
-              <a:t>Dès que vous avez des sommes significatives, ou dès que vous voulez vraiment être autonome, passez à un wallet non-custodial. Trust Wallet (édité par Binance) est excellent pour...</a:t>
-            </a:r>
-            <a:endParaRPr lang="en-US" sz="1400" dirty="0"/>
-          </a:p>
-        </p:txBody>
-      </p:sp>
-      <p:sp>
-        <p:nvSpPr>
-          <p:cNvPr id="4" name="Text 2"/>
-          <p:cNvSpPr txBox="1"/>
-          <p:nvPr/>
-        </p:nvSpPr>
-        <p:spPr>
-          <a:xfrm>
-            <a:off x="731520" y="4709160"/>
-            <a:ext cx="7680960" cy="274320"/>
+              <a:t>Dès que vous avez des sommes significatives, ou dès que v...</a:t>
+            </a:r>
+            <a:endParaRPr lang="en-US" sz="1100" dirty="0"/>
+          </a:p>
+        </p:txBody>
+      </p:sp>
+      <p:sp>
+        <p:nvSpPr>
+          <p:cNvPr id="10" name="Text 6"/>
+          <p:cNvSpPr txBox="1"/>
+          <p:nvPr/>
+        </p:nvSpPr>
+        <p:spPr>
+          <a:xfrm>
+            <a:off x="4892040" y="2011680"/>
+            <a:ext cx="3383280" cy="274320"/>
           </a:xfrm>
           <a:prstGeom prst="rect">
             <a:avLst/>
@@ -10295,22 +13480,146 @@
           <a:ln/>
         </p:spPr>
         <p:txBody>
-          <a:bodyPr wrap="square" lIns="0" tIns="0" rIns="0" bIns="0" rtlCol="0" anchor="ctr"/>
-          <a:lstStyle/>
-          <a:p>
-            <a:pPr algn="r" indent="0" marL="0">
+          <a:bodyPr wrap="square" lIns="0" tIns="0" rIns="0" bIns="0" rtlCol="0" anchor="t"/>
+          <a:lstStyle/>
+          <a:p>
+            <a:pPr indent="0" marL="0">
               <a:buNone/>
             </a:pPr>
             <a:r>
               <a:rPr lang="en-US" sz="900" dirty="0">
                 <a:solidFill>
-                  <a:srgbClr val="64748B"/>
-                </a:solidFill>
-                <a:latin typeface="Calibri" pitchFamily="34" charset="0"/>
-                <a:ea typeface="Calibri" pitchFamily="34" charset="-122"/>
-                <a:cs typeface="Calibri" pitchFamily="34" charset="-120"/>
-              </a:rPr>
-              <a:t>Module 7 — Lecon 1</a:t>
+                  <a:srgbClr val="94A3B8"/>
+                </a:solidFill>
+                <a:latin typeface="Calibri" pitchFamily="34" charset="0"/>
+                <a:ea typeface="Calibri" pitchFamily="34" charset="-122"/>
+                <a:cs typeface="Calibri" pitchFamily="34" charset="-120"/>
+              </a:rPr>
+              <a:t>aiment être autonome, passez à un wallet non-custodial.</a:t>
+            </a:r>
+            <a:endParaRPr lang="en-US" sz="900" dirty="0"/>
+          </a:p>
+        </p:txBody>
+      </p:sp>
+      <p:sp>
+        <p:nvSpPr>
+          <p:cNvPr id="11" name="Shape 7"/>
+          <p:cNvSpPr/>
+          <p:nvPr/>
+        </p:nvSpPr>
+        <p:spPr>
+          <a:xfrm>
+            <a:off x="731520" y="2514600"/>
+            <a:ext cx="3657600" cy="1371600"/>
+          </a:xfrm>
+          <a:prstGeom prst="roundRect">
+            <a:avLst>
+              <a:gd name="adj" fmla="val 6667"/>
+            </a:avLst>
+          </a:prstGeom>
+          <a:solidFill>
+            <a:srgbClr val="1A2332"/>
+          </a:solidFill>
+          <a:ln/>
+        </p:spPr>
+      </p:sp>
+      <p:pic>
+        <p:nvPicPr>
+          <p:cNvPr id="12" name="Image 2" descr="preencoded.png">    </p:cNvPr>
+          <p:cNvPicPr>
+            <a:picLocks noChangeAspect="1"/>
+          </p:cNvPicPr>
+          <p:nvPr/>
+        </p:nvPicPr>
+        <p:blipFill>
+          <a:blip r:embed="rId3"/>
+          <a:stretch>
+            <a:fillRect/>
+          </a:stretch>
+        </p:blipFill>
+        <p:spPr>
+          <a:xfrm>
+            <a:off x="868680" y="2651760"/>
+            <a:ext cx="502920" cy="502920"/>
+          </a:xfrm>
+          <a:prstGeom prst="rect">
+            <a:avLst/>
+          </a:prstGeom>
+        </p:spPr>
+      </p:pic>
+      <p:sp>
+        <p:nvSpPr>
+          <p:cNvPr id="13" name="Text 8"/>
+          <p:cNvSpPr txBox="1"/>
+          <p:nvPr/>
+        </p:nvSpPr>
+        <p:spPr>
+          <a:xfrm>
+            <a:off x="868680" y="3227832"/>
+            <a:ext cx="3383280" cy="320040"/>
+          </a:xfrm>
+          <a:prstGeom prst="rect">
+            <a:avLst/>
+          </a:prstGeom>
+          <a:noFill/>
+          <a:ln/>
+        </p:spPr>
+        <p:txBody>
+          <a:bodyPr wrap="square" lIns="0" tIns="0" rIns="0" bIns="0" rtlCol="0" anchor="t"/>
+          <a:lstStyle/>
+          <a:p>
+            <a:pPr indent="0" marL="0">
+              <a:buNone/>
+            </a:pPr>
+            <a:r>
+              <a:rPr lang="en-US" sz="1100" b="1" dirty="0">
+                <a:solidFill>
+                  <a:srgbClr val="FFFFFF"/>
+                </a:solidFill>
+                <a:latin typeface="Calibri" pitchFamily="34" charset="0"/>
+                <a:ea typeface="Calibri" pitchFamily="34" charset="-122"/>
+                <a:cs typeface="Calibri" pitchFamily="34" charset="-120"/>
+              </a:rPr>
+              <a:t>Trust Wallet (édité par Binance) est excellent pour début...</a:t>
+            </a:r>
+            <a:endParaRPr lang="en-US" sz="1100" dirty="0"/>
+          </a:p>
+        </p:txBody>
+      </p:sp>
+      <p:sp>
+        <p:nvSpPr>
+          <p:cNvPr id="14" name="Text 9"/>
+          <p:cNvSpPr txBox="1"/>
+          <p:nvPr/>
+        </p:nvSpPr>
+        <p:spPr>
+          <a:xfrm>
+            <a:off x="868680" y="3520440"/>
+            <a:ext cx="3383280" cy="274320"/>
+          </a:xfrm>
+          <a:prstGeom prst="rect">
+            <a:avLst/>
+          </a:prstGeom>
+          <a:noFill/>
+          <a:ln/>
+        </p:spPr>
+        <p:txBody>
+          <a:bodyPr wrap="square" lIns="0" tIns="0" rIns="0" bIns="0" rtlCol="0" anchor="t"/>
+          <a:lstStyle/>
+          <a:p>
+            <a:pPr indent="0" marL="0">
+              <a:buNone/>
+            </a:pPr>
+            <a:r>
+              <a:rPr lang="en-US" sz="900" dirty="0">
+                <a:solidFill>
+                  <a:srgbClr val="94A3B8"/>
+                </a:solidFill>
+                <a:latin typeface="Calibri" pitchFamily="34" charset="0"/>
+                <a:ea typeface="Calibri" pitchFamily="34" charset="-122"/>
+                <a:cs typeface="Calibri" pitchFamily="34" charset="-120"/>
+              </a:rPr>
+              <a:t>montrons la création à la leçon suivante.</a:t>
             </a:r>
             <a:endParaRPr lang="en-US" sz="900" dirty="0"/>
           </a:p>

--- a/public/course-materials/pptx/Module-07-Créer-et-sécuriser-son-portefeuille.pptx
+++ b/public/course-materials/pptx/Module-07-Créer-et-sécuriser-son-portefeuille.pptx
@@ -3438,7 +3438,7 @@
     <p:bg>
       <p:bgPr>
         <a:solidFill>
-          <a:srgbClr val="0F1419"/>
+          <a:srgbClr val="0F1214"/>
         </a:solidFill>
       </p:bgPr>
     </p:bg>
@@ -3471,7 +3471,7 @@
             <a:avLst/>
           </a:prstGeom>
           <a:solidFill>
-            <a:srgbClr val="EF4444">
+            <a:srgbClr val="3B968F">
               <a:alpha val="8000"/>
             </a:srgbClr>
           </a:solidFill>
@@ -3493,7 +3493,7 @@
             <a:avLst/>
           </a:prstGeom>
           <a:solidFill>
-            <a:srgbClr val="EF4444">
+            <a:srgbClr val="3B968F">
               <a:alpha val="5000"/>
             </a:srgbClr>
           </a:solidFill>
@@ -3515,7 +3515,7 @@
             <a:avLst/>
           </a:prstGeom>
           <a:solidFill>
-            <a:srgbClr val="EF4444"/>
+            <a:srgbClr val="3B968F"/>
           </a:solidFill>
           <a:ln/>
         </p:spPr>
@@ -3571,7 +3571,7 @@
             <a:r>
               <a:rPr lang="en-US" sz="1300" b="1" spc="400" kern="0" dirty="0">
                 <a:solidFill>
-                  <a:srgbClr val="EF4444"/>
+                  <a:srgbClr val="3B968F"/>
                 </a:solidFill>
                 <a:latin typeface="Calibri" pitchFamily="34" charset="0"/>
                 <a:ea typeface="Calibri" pitchFamily="34" charset="-122"/>
@@ -3637,7 +3637,7 @@
             <a:avLst/>
           </a:prstGeom>
           <a:solidFill>
-            <a:srgbClr val="EF4444"/>
+            <a:srgbClr val="3B968F"/>
           </a:solidFill>
           <a:ln/>
         </p:spPr>
@@ -3669,7 +3669,7 @@
             <a:r>
               <a:rPr lang="en-US" sz="1100" spc="300" kern="0" dirty="0">
                 <a:solidFill>
-                  <a:srgbClr val="64748B"/>
+                  <a:srgbClr val="5B6672"/>
                 </a:solidFill>
                 <a:latin typeface="Calibri" pitchFamily="34" charset="0"/>
                 <a:ea typeface="Calibri" pitchFamily="34" charset="-122"/>
@@ -3708,7 +3708,7 @@
             <a:r>
               <a:rPr lang="en-US" sz="1100" dirty="0">
                 <a:solidFill>
-                  <a:srgbClr val="94A3B8"/>
+                  <a:srgbClr val="8994A0"/>
                 </a:solidFill>
                 <a:latin typeface="Calibri" pitchFamily="34" charset="0"/>
                 <a:ea typeface="Calibri" pitchFamily="34" charset="-122"/>
@@ -3734,7 +3734,7 @@
     <p:bg>
       <p:bgPr>
         <a:solidFill>
-          <a:srgbClr val="1A2332"/>
+          <a:srgbClr val="1A2026"/>
         </a:solidFill>
       </p:bgPr>
     </p:bg>
@@ -3803,7 +3803,7 @@
             <a:r>
               <a:rPr lang="en-US" sz="1200" b="1" spc="300" kern="0" dirty="0">
                 <a:solidFill>
-                  <a:srgbClr val="F59E0B"/>
+                  <a:srgbClr val="5BC1B8"/>
                 </a:solidFill>
                 <a:latin typeface="Calibri" pitchFamily="34" charset="0"/>
                 <a:ea typeface="Calibri" pitchFamily="34" charset="-122"/>
@@ -3871,7 +3871,7 @@
             </a:avLst>
           </a:prstGeom>
           <a:solidFill>
-            <a:srgbClr val="0F1419"/>
+            <a:srgbClr val="0F1214"/>
           </a:solidFill>
           <a:ln/>
         </p:spPr>
@@ -3893,7 +3893,7 @@
             </a:avLst>
           </a:prstGeom>
           <a:solidFill>
-            <a:srgbClr val="EF4444"/>
+            <a:srgbClr val="3B968F"/>
           </a:solidFill>
           <a:ln/>
         </p:spPr>
@@ -3907,7 +3907,7 @@
             <a:r>
               <a:rPr lang="en-US" sz="1500" b="1" dirty="0">
                 <a:solidFill>
-                  <a:srgbClr val="0F1419"/>
+                  <a:srgbClr val="0F1214"/>
                 </a:solidFill>
                 <a:latin typeface="Calibri" pitchFamily="34" charset="0"/>
                 <a:ea typeface="Calibri" pitchFamily="34" charset="-122"/>
@@ -3975,7 +3975,7 @@
             </a:avLst>
           </a:prstGeom>
           <a:solidFill>
-            <a:srgbClr val="0F1419"/>
+            <a:srgbClr val="0F1214"/>
           </a:solidFill>
           <a:ln/>
         </p:spPr>
@@ -3997,7 +3997,7 @@
             </a:avLst>
           </a:prstGeom>
           <a:solidFill>
-            <a:srgbClr val="EF4444"/>
+            <a:srgbClr val="3B968F"/>
           </a:solidFill>
           <a:ln/>
         </p:spPr>
@@ -4011,7 +4011,7 @@
             <a:r>
               <a:rPr lang="en-US" sz="1500" b="1" dirty="0">
                 <a:solidFill>
-                  <a:srgbClr val="0F1419"/>
+                  <a:srgbClr val="0F1214"/>
                 </a:solidFill>
                 <a:latin typeface="Calibri" pitchFamily="34" charset="0"/>
                 <a:ea typeface="Calibri" pitchFamily="34" charset="-122"/>
@@ -4079,7 +4079,7 @@
             </a:avLst>
           </a:prstGeom>
           <a:solidFill>
-            <a:srgbClr val="0F1419"/>
+            <a:srgbClr val="0F1214"/>
           </a:solidFill>
           <a:ln/>
         </p:spPr>
@@ -4101,7 +4101,7 @@
             </a:avLst>
           </a:prstGeom>
           <a:solidFill>
-            <a:srgbClr val="EF4444"/>
+            <a:srgbClr val="3B968F"/>
           </a:solidFill>
           <a:ln/>
         </p:spPr>
@@ -4115,7 +4115,7 @@
             <a:r>
               <a:rPr lang="en-US" sz="1500" b="1" dirty="0">
                 <a:solidFill>
-                  <a:srgbClr val="0F1419"/>
+                  <a:srgbClr val="0F1214"/>
                 </a:solidFill>
                 <a:latin typeface="Calibri" pitchFamily="34" charset="0"/>
                 <a:ea typeface="Calibri" pitchFamily="34" charset="-122"/>
@@ -4183,7 +4183,7 @@
             </a:avLst>
           </a:prstGeom>
           <a:solidFill>
-            <a:srgbClr val="0F1419"/>
+            <a:srgbClr val="0F1214"/>
           </a:solidFill>
           <a:ln/>
         </p:spPr>
@@ -4205,7 +4205,7 @@
             </a:avLst>
           </a:prstGeom>
           <a:solidFill>
-            <a:srgbClr val="EF4444"/>
+            <a:srgbClr val="3B968F"/>
           </a:solidFill>
           <a:ln/>
         </p:spPr>
@@ -4219,7 +4219,7 @@
             <a:r>
               <a:rPr lang="en-US" sz="1500" b="1" dirty="0">
                 <a:solidFill>
-                  <a:srgbClr val="0F1419"/>
+                  <a:srgbClr val="0F1214"/>
                 </a:solidFill>
                 <a:latin typeface="Calibri" pitchFamily="34" charset="0"/>
                 <a:ea typeface="Calibri" pitchFamily="34" charset="-122"/>
@@ -4287,7 +4287,7 @@
             </a:avLst>
           </a:prstGeom>
           <a:solidFill>
-            <a:srgbClr val="0F1419"/>
+            <a:srgbClr val="0F1214"/>
           </a:solidFill>
           <a:ln/>
         </p:spPr>
@@ -4309,7 +4309,7 @@
             </a:avLst>
           </a:prstGeom>
           <a:solidFill>
-            <a:srgbClr val="EF4444"/>
+            <a:srgbClr val="3B968F"/>
           </a:solidFill>
           <a:ln/>
         </p:spPr>
@@ -4323,7 +4323,7 @@
             <a:r>
               <a:rPr lang="en-US" sz="1500" b="1" dirty="0">
                 <a:solidFill>
-                  <a:srgbClr val="0F1419"/>
+                  <a:srgbClr val="0F1214"/>
                 </a:solidFill>
                 <a:latin typeface="Calibri" pitchFamily="34" charset="0"/>
                 <a:ea typeface="Calibri" pitchFamily="34" charset="-122"/>
@@ -4388,7 +4388,7 @@
     <p:bg>
       <p:bgPr>
         <a:solidFill>
-          <a:srgbClr val="0D2137"/>
+          <a:srgbClr val="12181D"/>
         </a:solidFill>
       </p:bgPr>
     </p:bg>
@@ -4469,7 +4469,7 @@
             <a:avLst/>
           </a:prstGeom>
           <a:solidFill>
-            <a:srgbClr val="EF4444">
+            <a:srgbClr val="3B968F">
               <a:alpha val="6000"/>
             </a:srgbClr>
           </a:solidFill>
@@ -4491,7 +4491,7 @@
             <a:avLst/>
           </a:prstGeom>
           <a:solidFill>
-            <a:srgbClr val="EF4444"/>
+            <a:srgbClr val="3B968F"/>
           </a:solidFill>
           <a:ln/>
         </p:spPr>
@@ -4523,7 +4523,7 @@
             <a:r>
               <a:rPr lang="en-US" sz="1200" b="1" spc="200" kern="0" dirty="0">
                 <a:solidFill>
-                  <a:srgbClr val="EF4444"/>
+                  <a:srgbClr val="3B968F"/>
                 </a:solidFill>
                 <a:latin typeface="Calibri" pitchFamily="34" charset="0"/>
                 <a:ea typeface="Calibri" pitchFamily="34" charset="-122"/>
@@ -4601,7 +4601,7 @@
             <a:r>
               <a:rPr lang="en-US" sz="1100" dirty="0">
                 <a:solidFill>
-                  <a:srgbClr val="64748B"/>
+                  <a:srgbClr val="5B6672"/>
                 </a:solidFill>
                 <a:latin typeface="Calibri" pitchFamily="34" charset="0"/>
                 <a:ea typeface="Calibri" pitchFamily="34" charset="-122"/>
@@ -4627,7 +4627,7 @@
     <p:bg>
       <p:bgPr>
         <a:solidFill>
-          <a:srgbClr val="0F1419"/>
+          <a:srgbClr val="0F1214"/>
         </a:solidFill>
       </p:bgPr>
     </p:bg>
@@ -4660,7 +4660,7 @@
             <a:avLst/>
           </a:prstGeom>
           <a:solidFill>
-            <a:srgbClr val="EF4444">
+            <a:srgbClr val="3B968F">
               <a:alpha val="12000"/>
             </a:srgbClr>
           </a:solidFill>
@@ -4803,7 +4803,7 @@
             <a:r>
               <a:rPr lang="en-US" sz="900" dirty="0">
                 <a:solidFill>
-                  <a:srgbClr val="64748B"/>
+                  <a:srgbClr val="5B6672"/>
                 </a:solidFill>
                 <a:latin typeface="Calibri" pitchFamily="34" charset="0"/>
                 <a:ea typeface="Calibri" pitchFamily="34" charset="-122"/>
@@ -4829,7 +4829,7 @@
     <p:bg>
       <p:bgPr>
         <a:solidFill>
-          <a:srgbClr val="0F1419"/>
+          <a:srgbClr val="0F1214"/>
         </a:solidFill>
       </p:bgPr>
     </p:bg>
@@ -4874,7 +4874,7 @@
             <a:r>
               <a:rPr lang="en-US" sz="2000" b="1" dirty="0">
                 <a:solidFill>
-                  <a:srgbClr val="EF4444"/>
+                  <a:srgbClr val="3B968F"/>
                 </a:solidFill>
                 <a:latin typeface="Calibri" pitchFamily="34" charset="0"/>
                 <a:ea typeface="Calibri" pitchFamily="34" charset="-122"/>
@@ -4967,7 +4967,7 @@
             </a:avLst>
           </a:prstGeom>
           <a:solidFill>
-            <a:srgbClr val="1A2332"/>
+            <a:srgbClr val="1A2026"/>
           </a:solidFill>
           <a:ln/>
         </p:spPr>
@@ -5052,7 +5052,7 @@
             </a:avLst>
           </a:prstGeom>
           <a:solidFill>
-            <a:srgbClr val="1A2332"/>
+            <a:srgbClr val="1A2026"/>
           </a:solidFill>
           <a:ln/>
         </p:spPr>
@@ -5134,7 +5134,7 @@
     <p:bg>
       <p:bgPr>
         <a:solidFill>
-          <a:srgbClr val="0F1419"/>
+          <a:srgbClr val="0F1214"/>
         </a:solidFill>
       </p:bgPr>
     </p:bg>
@@ -5167,7 +5167,7 @@
             <a:avLst/>
           </a:prstGeom>
           <a:solidFill>
-            <a:srgbClr val="EF4444">
+            <a:srgbClr val="3B968F">
               <a:alpha val="12000"/>
             </a:srgbClr>
           </a:solidFill>
@@ -5225,7 +5225,7 @@
             <a:r>
               <a:rPr lang="en-US" sz="2000" b="1" dirty="0">
                 <a:solidFill>
-                  <a:srgbClr val="EF4444"/>
+                  <a:srgbClr val="3B968F"/>
                 </a:solidFill>
                 <a:latin typeface="Calibri" pitchFamily="34" charset="0"/>
                 <a:ea typeface="Calibri" pitchFamily="34" charset="-122"/>
@@ -5328,7 +5328,7 @@
             <a:r>
               <a:rPr lang="en-US" sz="900" dirty="0">
                 <a:solidFill>
-                  <a:srgbClr val="64748B"/>
+                  <a:srgbClr val="5B6672"/>
                 </a:solidFill>
                 <a:latin typeface="Calibri" pitchFamily="34" charset="0"/>
                 <a:ea typeface="Calibri" pitchFamily="34" charset="-122"/>
@@ -5354,7 +5354,7 @@
     <p:bg>
       <p:bgPr>
         <a:solidFill>
-          <a:srgbClr val="0F1419"/>
+          <a:srgbClr val="0F1214"/>
         </a:solidFill>
       </p:bgPr>
     </p:bg>
@@ -5387,7 +5387,7 @@
             <a:avLst/>
           </a:prstGeom>
           <a:solidFill>
-            <a:srgbClr val="EF4444">
+            <a:srgbClr val="3B968F">
               <a:alpha val="12000"/>
             </a:srgbClr>
           </a:solidFill>
@@ -5445,7 +5445,7 @@
             <a:r>
               <a:rPr lang="en-US" sz="2000" b="1" dirty="0">
                 <a:solidFill>
-                  <a:srgbClr val="EF4444"/>
+                  <a:srgbClr val="3B968F"/>
                 </a:solidFill>
                 <a:latin typeface="Calibri" pitchFamily="34" charset="0"/>
                 <a:ea typeface="Calibri" pitchFamily="34" charset="-122"/>
@@ -5590,7 +5590,7 @@
             <a:r>
               <a:rPr lang="en-US" sz="900" dirty="0">
                 <a:solidFill>
-                  <a:srgbClr val="64748B"/>
+                  <a:srgbClr val="5B6672"/>
                 </a:solidFill>
                 <a:latin typeface="Calibri" pitchFamily="34" charset="0"/>
                 <a:ea typeface="Calibri" pitchFamily="34" charset="-122"/>
@@ -5616,7 +5616,7 @@
     <p:bg>
       <p:bgPr>
         <a:solidFill>
-          <a:srgbClr val="0F1419"/>
+          <a:srgbClr val="0F1214"/>
         </a:solidFill>
       </p:bgPr>
     </p:bg>
@@ -5661,7 +5661,7 @@
             <a:r>
               <a:rPr lang="en-US" sz="2000" b="1" dirty="0">
                 <a:solidFill>
-                  <a:srgbClr val="EF4444"/>
+                  <a:srgbClr val="3B968F"/>
                 </a:solidFill>
                 <a:latin typeface="Calibri" pitchFamily="34" charset="0"/>
                 <a:ea typeface="Calibri" pitchFamily="34" charset="-122"/>
@@ -5796,7 +5796,7 @@
             </a:avLst>
           </a:prstGeom>
           <a:solidFill>
-            <a:srgbClr val="1A2332"/>
+            <a:srgbClr val="1A2026"/>
           </a:solidFill>
           <a:ln/>
         </p:spPr>
@@ -5881,7 +5881,7 @@
             </a:avLst>
           </a:prstGeom>
           <a:solidFill>
-            <a:srgbClr val="1A2332"/>
+            <a:srgbClr val="1A2026"/>
           </a:solidFill>
           <a:ln/>
         </p:spPr>
@@ -5966,7 +5966,7 @@
             </a:avLst>
           </a:prstGeom>
           <a:solidFill>
-            <a:srgbClr val="1A2332"/>
+            <a:srgbClr val="1A2026"/>
           </a:solidFill>
           <a:ln/>
         </p:spPr>
@@ -6048,7 +6048,7 @@
     <p:bg>
       <p:bgPr>
         <a:solidFill>
-          <a:srgbClr val="0F1419"/>
+          <a:srgbClr val="0F1214"/>
         </a:solidFill>
       </p:bgPr>
     </p:bg>
@@ -6093,7 +6093,7 @@
             <a:r>
               <a:rPr lang="en-US" sz="2000" b="1" dirty="0">
                 <a:solidFill>
-                  <a:srgbClr val="EF4444"/>
+                  <a:srgbClr val="3B968F"/>
                 </a:solidFill>
                 <a:latin typeface="Calibri" pitchFamily="34" charset="0"/>
                 <a:ea typeface="Calibri" pitchFamily="34" charset="-122"/>
@@ -6122,7 +6122,7 @@
             </a:avLst>
           </a:prstGeom>
           <a:solidFill>
-            <a:srgbClr val="1A2332"/>
+            <a:srgbClr val="1A2026"/>
           </a:solidFill>
           <a:ln/>
         </p:spPr>
@@ -6207,7 +6207,7 @@
             </a:avLst>
           </a:prstGeom>
           <a:solidFill>
-            <a:srgbClr val="1A2332"/>
+            <a:srgbClr val="1A2026"/>
           </a:solidFill>
           <a:ln/>
         </p:spPr>
@@ -6292,7 +6292,7 @@
             </a:avLst>
           </a:prstGeom>
           <a:solidFill>
-            <a:srgbClr val="1A2332"/>
+            <a:srgbClr val="1A2026"/>
           </a:solidFill>
           <a:ln/>
         </p:spPr>
@@ -6374,7 +6374,7 @@
     <p:bg>
       <p:bgPr>
         <a:solidFill>
-          <a:srgbClr val="0F1419"/>
+          <a:srgbClr val="0F1214"/>
         </a:solidFill>
       </p:bgPr>
     </p:bg>
@@ -6407,7 +6407,7 @@
             <a:avLst/>
           </a:prstGeom>
           <a:solidFill>
-            <a:srgbClr val="EF4444">
+            <a:srgbClr val="3B968F">
               <a:alpha val="12000"/>
             </a:srgbClr>
           </a:solidFill>
@@ -6465,7 +6465,7 @@
             <a:r>
               <a:rPr lang="en-US" sz="2000" b="1" dirty="0">
                 <a:solidFill>
-                  <a:srgbClr val="EF4444"/>
+                  <a:srgbClr val="3B968F"/>
                 </a:solidFill>
                 <a:latin typeface="Calibri" pitchFamily="34" charset="0"/>
                 <a:ea typeface="Calibri" pitchFamily="34" charset="-122"/>
@@ -6547,7 +6547,7 @@
             <a:r>
               <a:rPr lang="en-US" sz="900" dirty="0">
                 <a:solidFill>
-                  <a:srgbClr val="64748B"/>
+                  <a:srgbClr val="5B6672"/>
                 </a:solidFill>
                 <a:latin typeface="Calibri" pitchFamily="34" charset="0"/>
                 <a:ea typeface="Calibri" pitchFamily="34" charset="-122"/>
@@ -6573,7 +6573,7 @@
     <p:bg>
       <p:bgPr>
         <a:solidFill>
-          <a:srgbClr val="0F1419"/>
+          <a:srgbClr val="0F1214"/>
         </a:solidFill>
       </p:bgPr>
     </p:bg>
@@ -6618,7 +6618,7 @@
             <a:r>
               <a:rPr lang="en-US" sz="2000" b="1" dirty="0">
                 <a:solidFill>
-                  <a:srgbClr val="EF4444"/>
+                  <a:srgbClr val="3B968F"/>
                 </a:solidFill>
                 <a:latin typeface="Calibri" pitchFamily="34" charset="0"/>
                 <a:ea typeface="Calibri" pitchFamily="34" charset="-122"/>
@@ -6711,7 +6711,7 @@
             </a:avLst>
           </a:prstGeom>
           <a:solidFill>
-            <a:srgbClr val="1A2332"/>
+            <a:srgbClr val="1A2026"/>
           </a:solidFill>
           <a:ln/>
         </p:spPr>
@@ -6796,7 +6796,7 @@
             </a:avLst>
           </a:prstGeom>
           <a:solidFill>
-            <a:srgbClr val="1A2332"/>
+            <a:srgbClr val="1A2026"/>
           </a:solidFill>
           <a:ln/>
         </p:spPr>
@@ -6878,7 +6878,7 @@
     <p:bg>
       <p:bgPr>
         <a:solidFill>
-          <a:srgbClr val="0F1419"/>
+          <a:srgbClr val="0F1214"/>
         </a:solidFill>
       </p:bgPr>
     </p:bg>
@@ -6923,7 +6923,7 @@
             <a:r>
               <a:rPr lang="en-US" sz="1200" b="1" spc="300" kern="0" dirty="0">
                 <a:solidFill>
-                  <a:srgbClr val="EF4444"/>
+                  <a:srgbClr val="3B968F"/>
                 </a:solidFill>
                 <a:latin typeface="Calibri" pitchFamily="34" charset="0"/>
                 <a:ea typeface="Calibri" pitchFamily="34" charset="-122"/>
@@ -6991,7 +6991,7 @@
             </a:avLst>
           </a:prstGeom>
           <a:solidFill>
-            <a:srgbClr val="1A2332"/>
+            <a:srgbClr val="1A2026"/>
           </a:solidFill>
           <a:ln/>
         </p:spPr>
@@ -7023,7 +7023,7 @@
             <a:r>
               <a:rPr lang="en-US" sz="1300" b="1" dirty="0">
                 <a:solidFill>
-                  <a:srgbClr val="EF4444"/>
+                  <a:srgbClr val="3B968F"/>
                 </a:solidFill>
                 <a:latin typeface="Calibri" pitchFamily="34" charset="0"/>
                 <a:ea typeface="Calibri" pitchFamily="34" charset="-122"/>
@@ -7115,7 +7115,7 @@
             </a:avLst>
           </a:prstGeom>
           <a:solidFill>
-            <a:srgbClr val="1A2332"/>
+            <a:srgbClr val="1A2026"/>
           </a:solidFill>
           <a:ln/>
         </p:spPr>
@@ -7147,7 +7147,7 @@
             <a:r>
               <a:rPr lang="en-US" sz="1300" b="1" dirty="0">
                 <a:solidFill>
-                  <a:srgbClr val="EF4444"/>
+                  <a:srgbClr val="3B968F"/>
                 </a:solidFill>
                 <a:latin typeface="Calibri" pitchFamily="34" charset="0"/>
                 <a:ea typeface="Calibri" pitchFamily="34" charset="-122"/>
@@ -7239,7 +7239,7 @@
             </a:avLst>
           </a:prstGeom>
           <a:solidFill>
-            <a:srgbClr val="1A2332"/>
+            <a:srgbClr val="1A2026"/>
           </a:solidFill>
           <a:ln/>
         </p:spPr>
@@ -7271,7 +7271,7 @@
             <a:r>
               <a:rPr lang="en-US" sz="1300" b="1" dirty="0">
                 <a:solidFill>
-                  <a:srgbClr val="EF4444"/>
+                  <a:srgbClr val="3B968F"/>
                 </a:solidFill>
                 <a:latin typeface="Calibri" pitchFamily="34" charset="0"/>
                 <a:ea typeface="Calibri" pitchFamily="34" charset="-122"/>
@@ -7360,7 +7360,7 @@
     <p:bg>
       <p:bgPr>
         <a:solidFill>
-          <a:srgbClr val="1A2332"/>
+          <a:srgbClr val="1A2026"/>
         </a:solidFill>
       </p:bgPr>
     </p:bg>
@@ -7429,7 +7429,7 @@
             <a:r>
               <a:rPr lang="en-US" sz="1200" b="1" spc="300" kern="0" dirty="0">
                 <a:solidFill>
-                  <a:srgbClr val="F59E0B"/>
+                  <a:srgbClr val="5BC1B8"/>
                 </a:solidFill>
                 <a:latin typeface="Calibri" pitchFamily="34" charset="0"/>
                 <a:ea typeface="Calibri" pitchFamily="34" charset="-122"/>
@@ -7497,7 +7497,7 @@
             </a:avLst>
           </a:prstGeom>
           <a:solidFill>
-            <a:srgbClr val="0F1419"/>
+            <a:srgbClr val="0F1214"/>
           </a:solidFill>
           <a:ln/>
         </p:spPr>
@@ -7519,7 +7519,7 @@
             </a:avLst>
           </a:prstGeom>
           <a:solidFill>
-            <a:srgbClr val="EF4444"/>
+            <a:srgbClr val="3B968F"/>
           </a:solidFill>
           <a:ln/>
         </p:spPr>
@@ -7533,7 +7533,7 @@
             <a:r>
               <a:rPr lang="en-US" sz="1500" b="1" dirty="0">
                 <a:solidFill>
-                  <a:srgbClr val="0F1419"/>
+                  <a:srgbClr val="0F1214"/>
                 </a:solidFill>
                 <a:latin typeface="Calibri" pitchFamily="34" charset="0"/>
                 <a:ea typeface="Calibri" pitchFamily="34" charset="-122"/>
@@ -7601,7 +7601,7 @@
             </a:avLst>
           </a:prstGeom>
           <a:solidFill>
-            <a:srgbClr val="0F1419"/>
+            <a:srgbClr val="0F1214"/>
           </a:solidFill>
           <a:ln/>
         </p:spPr>
@@ -7623,7 +7623,7 @@
             </a:avLst>
           </a:prstGeom>
           <a:solidFill>
-            <a:srgbClr val="EF4444"/>
+            <a:srgbClr val="3B968F"/>
           </a:solidFill>
           <a:ln/>
         </p:spPr>
@@ -7637,7 +7637,7 @@
             <a:r>
               <a:rPr lang="en-US" sz="1500" b="1" dirty="0">
                 <a:solidFill>
-                  <a:srgbClr val="0F1419"/>
+                  <a:srgbClr val="0F1214"/>
                 </a:solidFill>
                 <a:latin typeface="Calibri" pitchFamily="34" charset="0"/>
                 <a:ea typeface="Calibri" pitchFamily="34" charset="-122"/>
@@ -7705,7 +7705,7 @@
             </a:avLst>
           </a:prstGeom>
           <a:solidFill>
-            <a:srgbClr val="0F1419"/>
+            <a:srgbClr val="0F1214"/>
           </a:solidFill>
           <a:ln/>
         </p:spPr>
@@ -7727,7 +7727,7 @@
             </a:avLst>
           </a:prstGeom>
           <a:solidFill>
-            <a:srgbClr val="EF4444"/>
+            <a:srgbClr val="3B968F"/>
           </a:solidFill>
           <a:ln/>
         </p:spPr>
@@ -7741,7 +7741,7 @@
             <a:r>
               <a:rPr lang="en-US" sz="1500" b="1" dirty="0">
                 <a:solidFill>
-                  <a:srgbClr val="0F1419"/>
+                  <a:srgbClr val="0F1214"/>
                 </a:solidFill>
                 <a:latin typeface="Calibri" pitchFamily="34" charset="0"/>
                 <a:ea typeface="Calibri" pitchFamily="34" charset="-122"/>
@@ -7809,7 +7809,7 @@
             </a:avLst>
           </a:prstGeom>
           <a:solidFill>
-            <a:srgbClr val="0F1419"/>
+            <a:srgbClr val="0F1214"/>
           </a:solidFill>
           <a:ln/>
         </p:spPr>
@@ -7831,7 +7831,7 @@
             </a:avLst>
           </a:prstGeom>
           <a:solidFill>
-            <a:srgbClr val="EF4444"/>
+            <a:srgbClr val="3B968F"/>
           </a:solidFill>
           <a:ln/>
         </p:spPr>
@@ -7845,7 +7845,7 @@
             <a:r>
               <a:rPr lang="en-US" sz="1500" b="1" dirty="0">
                 <a:solidFill>
-                  <a:srgbClr val="0F1419"/>
+                  <a:srgbClr val="0F1214"/>
                 </a:solidFill>
                 <a:latin typeface="Calibri" pitchFamily="34" charset="0"/>
                 <a:ea typeface="Calibri" pitchFamily="34" charset="-122"/>
@@ -7913,7 +7913,7 @@
             </a:avLst>
           </a:prstGeom>
           <a:solidFill>
-            <a:srgbClr val="0F1419"/>
+            <a:srgbClr val="0F1214"/>
           </a:solidFill>
           <a:ln/>
         </p:spPr>
@@ -7935,7 +7935,7 @@
             </a:avLst>
           </a:prstGeom>
           <a:solidFill>
-            <a:srgbClr val="EF4444"/>
+            <a:srgbClr val="3B968F"/>
           </a:solidFill>
           <a:ln/>
         </p:spPr>
@@ -7949,7 +7949,7 @@
             <a:r>
               <a:rPr lang="en-US" sz="1500" b="1" dirty="0">
                 <a:solidFill>
-                  <a:srgbClr val="0F1419"/>
+                  <a:srgbClr val="0F1214"/>
                 </a:solidFill>
                 <a:latin typeface="Calibri" pitchFamily="34" charset="0"/>
                 <a:ea typeface="Calibri" pitchFamily="34" charset="-122"/>
@@ -8014,7 +8014,7 @@
     <p:bg>
       <p:bgPr>
         <a:solidFill>
-          <a:srgbClr val="0F1419"/>
+          <a:srgbClr val="0F1214"/>
         </a:solidFill>
       </p:bgPr>
     </p:bg>
@@ -8049,7 +8049,7 @@
             </a:avLst>
           </a:prstGeom>
           <a:solidFill>
-            <a:srgbClr val="2D1B1B"/>
+            <a:srgbClr val="2A1414"/>
           </a:solidFill>
           <a:ln/>
         </p:spPr>
@@ -8069,7 +8069,7 @@
             <a:avLst/>
           </a:prstGeom>
           <a:solidFill>
-            <a:srgbClr val="EF4444"/>
+            <a:srgbClr val="DC2626"/>
           </a:solidFill>
           <a:ln/>
         </p:spPr>
@@ -8125,7 +8125,7 @@
             <a:r>
               <a:rPr lang="en-US" sz="1200" b="1" spc="300" kern="0" dirty="0">
                 <a:solidFill>
-                  <a:srgbClr val="EF4444"/>
+                  <a:srgbClr val="DC2626"/>
                 </a:solidFill>
                 <a:latin typeface="Calibri" pitchFamily="34" charset="0"/>
                 <a:ea typeface="Calibri" pitchFamily="34" charset="-122"/>
@@ -8236,7 +8236,7 @@
     <p:bg>
       <p:bgPr>
         <a:solidFill>
-          <a:srgbClr val="0D2137"/>
+          <a:srgbClr val="12181D"/>
         </a:solidFill>
       </p:bgPr>
     </p:bg>
@@ -8317,7 +8317,7 @@
             <a:avLst/>
           </a:prstGeom>
           <a:solidFill>
-            <a:srgbClr val="EF4444">
+            <a:srgbClr val="3B968F">
               <a:alpha val="6000"/>
             </a:srgbClr>
           </a:solidFill>
@@ -8339,7 +8339,7 @@
             <a:avLst/>
           </a:prstGeom>
           <a:solidFill>
-            <a:srgbClr val="EF4444"/>
+            <a:srgbClr val="3B968F"/>
           </a:solidFill>
           <a:ln/>
         </p:spPr>
@@ -8371,7 +8371,7 @@
             <a:r>
               <a:rPr lang="en-US" sz="1200" b="1" spc="200" kern="0" dirty="0">
                 <a:solidFill>
-                  <a:srgbClr val="EF4444"/>
+                  <a:srgbClr val="3B968F"/>
                 </a:solidFill>
                 <a:latin typeface="Calibri" pitchFamily="34" charset="0"/>
                 <a:ea typeface="Calibri" pitchFamily="34" charset="-122"/>
@@ -8449,7 +8449,7 @@
             <a:r>
               <a:rPr lang="en-US" sz="1100" dirty="0">
                 <a:solidFill>
-                  <a:srgbClr val="64748B"/>
+                  <a:srgbClr val="5B6672"/>
                 </a:solidFill>
                 <a:latin typeface="Calibri" pitchFamily="34" charset="0"/>
                 <a:ea typeface="Calibri" pitchFamily="34" charset="-122"/>
@@ -8475,7 +8475,7 @@
     <p:bg>
       <p:bgPr>
         <a:solidFill>
-          <a:srgbClr val="0F1419"/>
+          <a:srgbClr val="0F1214"/>
         </a:solidFill>
       </p:bgPr>
     </p:bg>
@@ -8508,7 +8508,7 @@
             <a:avLst/>
           </a:prstGeom>
           <a:solidFill>
-            <a:srgbClr val="EF4444">
+            <a:srgbClr val="3B968F">
               <a:alpha val="12000"/>
             </a:srgbClr>
           </a:solidFill>
@@ -8609,7 +8609,7 @@
             <a:r>
               <a:rPr lang="en-US" sz="900" dirty="0">
                 <a:solidFill>
-                  <a:srgbClr val="64748B"/>
+                  <a:srgbClr val="5B6672"/>
                 </a:solidFill>
                 <a:latin typeface="Calibri" pitchFamily="34" charset="0"/>
                 <a:ea typeface="Calibri" pitchFamily="34" charset="-122"/>
@@ -8635,7 +8635,7 @@
     <p:bg>
       <p:bgPr>
         <a:solidFill>
-          <a:srgbClr val="0F1419"/>
+          <a:srgbClr val="0F1214"/>
         </a:solidFill>
       </p:bgPr>
     </p:bg>
@@ -8680,7 +8680,7 @@
             <a:r>
               <a:rPr lang="en-US" sz="2000" b="1" dirty="0">
                 <a:solidFill>
-                  <a:srgbClr val="EF4444"/>
+                  <a:srgbClr val="3B968F"/>
                 </a:solidFill>
                 <a:latin typeface="Calibri" pitchFamily="34" charset="0"/>
                 <a:ea typeface="Calibri" pitchFamily="34" charset="-122"/>
@@ -8794,7 +8794,7 @@
             </a:avLst>
           </a:prstGeom>
           <a:solidFill>
-            <a:srgbClr val="1A2332"/>
+            <a:srgbClr val="1A2026"/>
           </a:solidFill>
           <a:ln/>
         </p:spPr>
@@ -8879,7 +8879,7 @@
             </a:avLst>
           </a:prstGeom>
           <a:solidFill>
-            <a:srgbClr val="1A2332"/>
+            <a:srgbClr val="1A2026"/>
           </a:solidFill>
           <a:ln/>
         </p:spPr>
@@ -8961,7 +8961,7 @@
     <p:bg>
       <p:bgPr>
         <a:solidFill>
-          <a:srgbClr val="0F1419"/>
+          <a:srgbClr val="0F1214"/>
         </a:solidFill>
       </p:bgPr>
     </p:bg>
@@ -9006,7 +9006,7 @@
             <a:r>
               <a:rPr lang="en-US" sz="2000" b="1" dirty="0">
                 <a:solidFill>
-                  <a:srgbClr val="EF4444"/>
+                  <a:srgbClr val="3B968F"/>
                 </a:solidFill>
                 <a:latin typeface="Calibri" pitchFamily="34" charset="0"/>
                 <a:ea typeface="Calibri" pitchFamily="34" charset="-122"/>
@@ -9035,7 +9035,7 @@
             </a:avLst>
           </a:prstGeom>
           <a:solidFill>
-            <a:srgbClr val="1A2332"/>
+            <a:srgbClr val="1A2026"/>
           </a:solidFill>
           <a:ln/>
         </p:spPr>
@@ -9130,7 +9130,7 @@
             <a:r>
               <a:rPr lang="en-US" sz="900" dirty="0">
                 <a:solidFill>
-                  <a:srgbClr val="94A3B8"/>
+                  <a:srgbClr val="8994A0"/>
                 </a:solidFill>
                 <a:latin typeface="Calibri" pitchFamily="34" charset="0"/>
                 <a:ea typeface="Calibri" pitchFamily="34" charset="-122"/>
@@ -9159,7 +9159,7 @@
             </a:avLst>
           </a:prstGeom>
           <a:solidFill>
-            <a:srgbClr val="1A2332"/>
+            <a:srgbClr val="1A2026"/>
           </a:solidFill>
           <a:ln/>
         </p:spPr>
@@ -9254,7 +9254,7 @@
             <a:r>
               <a:rPr lang="en-US" sz="900" dirty="0">
                 <a:solidFill>
-                  <a:srgbClr val="94A3B8"/>
+                  <a:srgbClr val="8994A0"/>
                 </a:solidFill>
                 <a:latin typeface="Calibri" pitchFamily="34" charset="0"/>
                 <a:ea typeface="Calibri" pitchFamily="34" charset="-122"/>
@@ -9283,7 +9283,7 @@
             </a:avLst>
           </a:prstGeom>
           <a:solidFill>
-            <a:srgbClr val="1A2332"/>
+            <a:srgbClr val="1A2026"/>
           </a:solidFill>
           <a:ln/>
         </p:spPr>
@@ -9378,7 +9378,7 @@
             <a:r>
               <a:rPr lang="en-US" sz="900" dirty="0">
                 <a:solidFill>
-                  <a:srgbClr val="94A3B8"/>
+                  <a:srgbClr val="8994A0"/>
                 </a:solidFill>
                 <a:latin typeface="Calibri" pitchFamily="34" charset="0"/>
                 <a:ea typeface="Calibri" pitchFamily="34" charset="-122"/>
@@ -9407,7 +9407,7 @@
             </a:avLst>
           </a:prstGeom>
           <a:solidFill>
-            <a:srgbClr val="1A2332"/>
+            <a:srgbClr val="1A2026"/>
           </a:solidFill>
           <a:ln/>
         </p:spPr>
@@ -9502,7 +9502,7 @@
             <a:r>
               <a:rPr lang="en-US" sz="900" dirty="0">
                 <a:solidFill>
-                  <a:srgbClr val="94A3B8"/>
+                  <a:srgbClr val="8994A0"/>
                 </a:solidFill>
                 <a:latin typeface="Calibri" pitchFamily="34" charset="0"/>
                 <a:ea typeface="Calibri" pitchFamily="34" charset="-122"/>
@@ -9531,7 +9531,7 @@
             </a:avLst>
           </a:prstGeom>
           <a:solidFill>
-            <a:srgbClr val="1A2332"/>
+            <a:srgbClr val="1A2026"/>
           </a:solidFill>
           <a:ln/>
         </p:spPr>
@@ -9626,7 +9626,7 @@
             <a:r>
               <a:rPr lang="en-US" sz="900" dirty="0">
                 <a:solidFill>
-                  <a:srgbClr val="94A3B8"/>
+                  <a:srgbClr val="8994A0"/>
                 </a:solidFill>
                 <a:latin typeface="Calibri" pitchFamily="34" charset="0"/>
                 <a:ea typeface="Calibri" pitchFamily="34" charset="-122"/>
@@ -9652,7 +9652,7 @@
     <p:bg>
       <p:bgPr>
         <a:solidFill>
-          <a:srgbClr val="0F1419"/>
+          <a:srgbClr val="0F1214"/>
         </a:solidFill>
       </p:bgPr>
     </p:bg>
@@ -9685,7 +9685,7 @@
             <a:avLst/>
           </a:prstGeom>
           <a:solidFill>
-            <a:srgbClr val="EF4444">
+            <a:srgbClr val="3B968F">
               <a:alpha val="12000"/>
             </a:srgbClr>
           </a:solidFill>
@@ -9743,7 +9743,7 @@
             <a:r>
               <a:rPr lang="en-US" sz="2000" b="1" dirty="0">
                 <a:solidFill>
-                  <a:srgbClr val="EF4444"/>
+                  <a:srgbClr val="3B968F"/>
                 </a:solidFill>
                 <a:latin typeface="Calibri" pitchFamily="34" charset="0"/>
                 <a:ea typeface="Calibri" pitchFamily="34" charset="-122"/>
@@ -9888,7 +9888,7 @@
             <a:r>
               <a:rPr lang="en-US" sz="900" dirty="0">
                 <a:solidFill>
-                  <a:srgbClr val="64748B"/>
+                  <a:srgbClr val="5B6672"/>
                 </a:solidFill>
                 <a:latin typeface="Calibri" pitchFamily="34" charset="0"/>
                 <a:ea typeface="Calibri" pitchFamily="34" charset="-122"/>
@@ -9914,7 +9914,7 @@
     <p:bg>
       <p:bgPr>
         <a:solidFill>
-          <a:srgbClr val="0F1419"/>
+          <a:srgbClr val="0F1214"/>
         </a:solidFill>
       </p:bgPr>
     </p:bg>
@@ -9959,7 +9959,7 @@
             <a:r>
               <a:rPr lang="en-US" sz="2000" b="1" dirty="0">
                 <a:solidFill>
-                  <a:srgbClr val="EF4444"/>
+                  <a:srgbClr val="3B968F"/>
                 </a:solidFill>
                 <a:latin typeface="Calibri" pitchFamily="34" charset="0"/>
                 <a:ea typeface="Calibri" pitchFamily="34" charset="-122"/>
@@ -10073,7 +10073,7 @@
             </a:avLst>
           </a:prstGeom>
           <a:solidFill>
-            <a:srgbClr val="1A2332"/>
+            <a:srgbClr val="1A2026"/>
           </a:solidFill>
           <a:ln/>
         </p:spPr>
@@ -10158,7 +10158,7 @@
             </a:avLst>
           </a:prstGeom>
           <a:solidFill>
-            <a:srgbClr val="1A2332"/>
+            <a:srgbClr val="1A2026"/>
           </a:solidFill>
           <a:ln/>
         </p:spPr>
@@ -10240,7 +10240,7 @@
     <p:bg>
       <p:bgPr>
         <a:solidFill>
-          <a:srgbClr val="1A2332"/>
+          <a:srgbClr val="1A2026"/>
         </a:solidFill>
       </p:bgPr>
     </p:bg>
@@ -10309,7 +10309,7 @@
             <a:r>
               <a:rPr lang="en-US" sz="1200" b="1" spc="300" kern="0" dirty="0">
                 <a:solidFill>
-                  <a:srgbClr val="F59E0B"/>
+                  <a:srgbClr val="5BC1B8"/>
                 </a:solidFill>
                 <a:latin typeface="Calibri" pitchFamily="34" charset="0"/>
                 <a:ea typeface="Calibri" pitchFamily="34" charset="-122"/>
@@ -10377,7 +10377,7 @@
             </a:avLst>
           </a:prstGeom>
           <a:solidFill>
-            <a:srgbClr val="0F1419"/>
+            <a:srgbClr val="0F1214"/>
           </a:solidFill>
           <a:ln/>
         </p:spPr>
@@ -10399,7 +10399,7 @@
             </a:avLst>
           </a:prstGeom>
           <a:solidFill>
-            <a:srgbClr val="EF4444"/>
+            <a:srgbClr val="3B968F"/>
           </a:solidFill>
           <a:ln/>
         </p:spPr>
@@ -10413,7 +10413,7 @@
             <a:r>
               <a:rPr lang="en-US" sz="1500" b="1" dirty="0">
                 <a:solidFill>
-                  <a:srgbClr val="0F1419"/>
+                  <a:srgbClr val="0F1214"/>
                 </a:solidFill>
                 <a:latin typeface="Calibri" pitchFamily="34" charset="0"/>
                 <a:ea typeface="Calibri" pitchFamily="34" charset="-122"/>
@@ -10481,7 +10481,7 @@
             </a:avLst>
           </a:prstGeom>
           <a:solidFill>
-            <a:srgbClr val="0F1419"/>
+            <a:srgbClr val="0F1214"/>
           </a:solidFill>
           <a:ln/>
         </p:spPr>
@@ -10503,7 +10503,7 @@
             </a:avLst>
           </a:prstGeom>
           <a:solidFill>
-            <a:srgbClr val="EF4444"/>
+            <a:srgbClr val="3B968F"/>
           </a:solidFill>
           <a:ln/>
         </p:spPr>
@@ -10517,7 +10517,7 @@
             <a:r>
               <a:rPr lang="en-US" sz="1500" b="1" dirty="0">
                 <a:solidFill>
-                  <a:srgbClr val="0F1419"/>
+                  <a:srgbClr val="0F1214"/>
                 </a:solidFill>
                 <a:latin typeface="Calibri" pitchFamily="34" charset="0"/>
                 <a:ea typeface="Calibri" pitchFamily="34" charset="-122"/>
@@ -10585,7 +10585,7 @@
             </a:avLst>
           </a:prstGeom>
           <a:solidFill>
-            <a:srgbClr val="0F1419"/>
+            <a:srgbClr val="0F1214"/>
           </a:solidFill>
           <a:ln/>
         </p:spPr>
@@ -10607,7 +10607,7 @@
             </a:avLst>
           </a:prstGeom>
           <a:solidFill>
-            <a:srgbClr val="EF4444"/>
+            <a:srgbClr val="3B968F"/>
           </a:solidFill>
           <a:ln/>
         </p:spPr>
@@ -10621,7 +10621,7 @@
             <a:r>
               <a:rPr lang="en-US" sz="1500" b="1" dirty="0">
                 <a:solidFill>
-                  <a:srgbClr val="0F1419"/>
+                  <a:srgbClr val="0F1214"/>
                 </a:solidFill>
                 <a:latin typeface="Calibri" pitchFamily="34" charset="0"/>
                 <a:ea typeface="Calibri" pitchFamily="34" charset="-122"/>
@@ -10689,7 +10689,7 @@
             </a:avLst>
           </a:prstGeom>
           <a:solidFill>
-            <a:srgbClr val="0F1419"/>
+            <a:srgbClr val="0F1214"/>
           </a:solidFill>
           <a:ln/>
         </p:spPr>
@@ -10711,7 +10711,7 @@
             </a:avLst>
           </a:prstGeom>
           <a:solidFill>
-            <a:srgbClr val="EF4444"/>
+            <a:srgbClr val="3B968F"/>
           </a:solidFill>
           <a:ln/>
         </p:spPr>
@@ -10725,7 +10725,7 @@
             <a:r>
               <a:rPr lang="en-US" sz="1500" b="1" dirty="0">
                 <a:solidFill>
-                  <a:srgbClr val="0F1419"/>
+                  <a:srgbClr val="0F1214"/>
                 </a:solidFill>
                 <a:latin typeface="Calibri" pitchFamily="34" charset="0"/>
                 <a:ea typeface="Calibri" pitchFamily="34" charset="-122"/>
@@ -10793,7 +10793,7 @@
             </a:avLst>
           </a:prstGeom>
           <a:solidFill>
-            <a:srgbClr val="0F1419"/>
+            <a:srgbClr val="0F1214"/>
           </a:solidFill>
           <a:ln/>
         </p:spPr>
@@ -10815,7 +10815,7 @@
             </a:avLst>
           </a:prstGeom>
           <a:solidFill>
-            <a:srgbClr val="EF4444"/>
+            <a:srgbClr val="3B968F"/>
           </a:solidFill>
           <a:ln/>
         </p:spPr>
@@ -10829,7 +10829,7 @@
             <a:r>
               <a:rPr lang="en-US" sz="1500" b="1" dirty="0">
                 <a:solidFill>
-                  <a:srgbClr val="0F1419"/>
+                  <a:srgbClr val="0F1214"/>
                 </a:solidFill>
                 <a:latin typeface="Calibri" pitchFamily="34" charset="0"/>
                 <a:ea typeface="Calibri" pitchFamily="34" charset="-122"/>
@@ -10894,7 +10894,7 @@
     <p:bg>
       <p:bgPr>
         <a:solidFill>
-          <a:srgbClr val="0F1419"/>
+          <a:srgbClr val="0F1214"/>
         </a:solidFill>
       </p:bgPr>
     </p:bg>
@@ -10929,7 +10929,7 @@
             </a:avLst>
           </a:prstGeom>
           <a:solidFill>
-            <a:srgbClr val="2D1B1B"/>
+            <a:srgbClr val="2A1414"/>
           </a:solidFill>
           <a:ln/>
         </p:spPr>
@@ -10949,7 +10949,7 @@
             <a:avLst/>
           </a:prstGeom>
           <a:solidFill>
-            <a:srgbClr val="EF4444"/>
+            <a:srgbClr val="DC2626"/>
           </a:solidFill>
           <a:ln/>
         </p:spPr>
@@ -11005,7 +11005,7 @@
             <a:r>
               <a:rPr lang="en-US" sz="1200" b="1" spc="300" kern="0" dirty="0">
                 <a:solidFill>
-                  <a:srgbClr val="EF4444"/>
+                  <a:srgbClr val="DC2626"/>
                 </a:solidFill>
                 <a:latin typeface="Calibri" pitchFamily="34" charset="0"/>
                 <a:ea typeface="Calibri" pitchFamily="34" charset="-122"/>
@@ -11116,7 +11116,7 @@
     <p:bg>
       <p:bgPr>
         <a:solidFill>
-          <a:srgbClr val="0D2137"/>
+          <a:srgbClr val="12181D"/>
         </a:solidFill>
       </p:bgPr>
     </p:bg>
@@ -11197,7 +11197,7 @@
             <a:avLst/>
           </a:prstGeom>
           <a:solidFill>
-            <a:srgbClr val="EF4444">
+            <a:srgbClr val="3B968F">
               <a:alpha val="6000"/>
             </a:srgbClr>
           </a:solidFill>
@@ -11219,7 +11219,7 @@
             <a:avLst/>
           </a:prstGeom>
           <a:solidFill>
-            <a:srgbClr val="EF4444"/>
+            <a:srgbClr val="3B968F"/>
           </a:solidFill>
           <a:ln/>
         </p:spPr>
@@ -11251,7 +11251,7 @@
             <a:r>
               <a:rPr lang="en-US" sz="1200" b="1" spc="200" kern="0" dirty="0">
                 <a:solidFill>
-                  <a:srgbClr val="EF4444"/>
+                  <a:srgbClr val="3B968F"/>
                 </a:solidFill>
                 <a:latin typeface="Calibri" pitchFamily="34" charset="0"/>
                 <a:ea typeface="Calibri" pitchFamily="34" charset="-122"/>
@@ -11329,7 +11329,7 @@
             <a:r>
               <a:rPr lang="en-US" sz="1100" dirty="0">
                 <a:solidFill>
-                  <a:srgbClr val="64748B"/>
+                  <a:srgbClr val="5B6672"/>
                 </a:solidFill>
                 <a:latin typeface="Calibri" pitchFamily="34" charset="0"/>
                 <a:ea typeface="Calibri" pitchFamily="34" charset="-122"/>
@@ -11355,7 +11355,7 @@
     <p:bg>
       <p:bgPr>
         <a:solidFill>
-          <a:srgbClr val="0F1419"/>
+          <a:srgbClr val="0F1214"/>
         </a:solidFill>
       </p:bgPr>
     </p:bg>
@@ -11388,7 +11388,7 @@
             <a:avLst/>
           </a:prstGeom>
           <a:solidFill>
-            <a:srgbClr val="EF4444">
+            <a:srgbClr val="3B968F">
               <a:alpha val="6000"/>
             </a:srgbClr>
           </a:solidFill>
@@ -11485,7 +11485,7 @@
             <a:r>
               <a:rPr lang="en-US" sz="1300" dirty="0">
                 <a:solidFill>
-                  <a:srgbClr val="94A3B8"/>
+                  <a:srgbClr val="8994A0"/>
                 </a:solidFill>
                 <a:latin typeface="Calibri" pitchFamily="34" charset="0"/>
                 <a:ea typeface="Calibri" pitchFamily="34" charset="-122"/>
@@ -11512,7 +11512,7 @@
             <a:avLst/>
           </a:prstGeom>
           <a:solidFill>
-            <a:srgbClr val="EF4444"/>
+            <a:srgbClr val="3B968F"/>
           </a:solidFill>
           <a:ln/>
         </p:spPr>
@@ -11544,7 +11544,7 @@
             <a:r>
               <a:rPr lang="en-US" sz="1100" spc="300" kern="0" dirty="0">
                 <a:solidFill>
-                  <a:srgbClr val="64748B"/>
+                  <a:srgbClr val="5B6672"/>
                 </a:solidFill>
                 <a:latin typeface="Calibri" pitchFamily="34" charset="0"/>
                 <a:ea typeface="Calibri" pitchFamily="34" charset="-122"/>
@@ -11583,7 +11583,7 @@
             <a:r>
               <a:rPr lang="en-US" sz="1100" dirty="0">
                 <a:solidFill>
-                  <a:srgbClr val="009E8B"/>
+                  <a:srgbClr val="000000"/>
                 </a:solidFill>
                 <a:latin typeface="Calibri" pitchFamily="34" charset="0"/>
                 <a:ea typeface="Calibri" pitchFamily="34" charset="-122"/>
@@ -11609,7 +11609,7 @@
     <p:bg>
       <p:bgPr>
         <a:solidFill>
-          <a:srgbClr val="0F1419"/>
+          <a:srgbClr val="0F1214"/>
         </a:solidFill>
       </p:bgPr>
     </p:bg>
@@ -11642,7 +11642,7 @@
             <a:avLst/>
           </a:prstGeom>
           <a:solidFill>
-            <a:srgbClr val="EF4444">
+            <a:srgbClr val="3B968F">
               <a:alpha val="12000"/>
             </a:srgbClr>
           </a:solidFill>
@@ -11743,7 +11743,7 @@
             <a:r>
               <a:rPr lang="en-US" sz="900" dirty="0">
                 <a:solidFill>
-                  <a:srgbClr val="64748B"/>
+                  <a:srgbClr val="5B6672"/>
                 </a:solidFill>
                 <a:latin typeface="Calibri" pitchFamily="34" charset="0"/>
                 <a:ea typeface="Calibri" pitchFamily="34" charset="-122"/>
@@ -11769,7 +11769,7 @@
     <p:bg>
       <p:bgPr>
         <a:solidFill>
-          <a:srgbClr val="0F1419"/>
+          <a:srgbClr val="0F1214"/>
         </a:solidFill>
       </p:bgPr>
     </p:bg>
@@ -11814,7 +11814,7 @@
             <a:r>
               <a:rPr lang="en-US" sz="2000" b="1" dirty="0">
                 <a:solidFill>
-                  <a:srgbClr val="EF4444"/>
+                  <a:srgbClr val="3B968F"/>
                 </a:solidFill>
                 <a:latin typeface="Calibri" pitchFamily="34" charset="0"/>
                 <a:ea typeface="Calibri" pitchFamily="34" charset="-122"/>
@@ -11949,7 +11949,7 @@
             </a:avLst>
           </a:prstGeom>
           <a:solidFill>
-            <a:srgbClr val="1A2332"/>
+            <a:srgbClr val="1A2026"/>
           </a:solidFill>
           <a:ln/>
         </p:spPr>
@@ -12034,7 +12034,7 @@
             </a:avLst>
           </a:prstGeom>
           <a:solidFill>
-            <a:srgbClr val="1A2332"/>
+            <a:srgbClr val="1A2026"/>
           </a:solidFill>
           <a:ln/>
         </p:spPr>
@@ -12119,7 +12119,7 @@
             </a:avLst>
           </a:prstGeom>
           <a:solidFill>
-            <a:srgbClr val="1A2332"/>
+            <a:srgbClr val="1A2026"/>
           </a:solidFill>
           <a:ln/>
         </p:spPr>
@@ -12201,7 +12201,7 @@
     <p:bg>
       <p:bgPr>
         <a:solidFill>
-          <a:srgbClr val="0F1419"/>
+          <a:srgbClr val="0F1214"/>
         </a:solidFill>
       </p:bgPr>
     </p:bg>
@@ -12246,7 +12246,7 @@
             <a:r>
               <a:rPr lang="en-US" sz="2000" b="1" dirty="0">
                 <a:solidFill>
-                  <a:srgbClr val="EF4444"/>
+                  <a:srgbClr val="3B968F"/>
                 </a:solidFill>
                 <a:latin typeface="Calibri" pitchFamily="34" charset="0"/>
                 <a:ea typeface="Calibri" pitchFamily="34" charset="-122"/>
@@ -12275,7 +12275,7 @@
             </a:avLst>
           </a:prstGeom>
           <a:solidFill>
-            <a:srgbClr val="1A2332"/>
+            <a:srgbClr val="1A2026"/>
           </a:solidFill>
           <a:ln/>
         </p:spPr>
@@ -12370,7 +12370,7 @@
             <a:r>
               <a:rPr lang="en-US" sz="900" dirty="0">
                 <a:solidFill>
-                  <a:srgbClr val="94A3B8"/>
+                  <a:srgbClr val="8994A0"/>
                 </a:solidFill>
                 <a:latin typeface="Calibri" pitchFamily="34" charset="0"/>
                 <a:ea typeface="Calibri" pitchFamily="34" charset="-122"/>
@@ -12399,7 +12399,7 @@
             </a:avLst>
           </a:prstGeom>
           <a:solidFill>
-            <a:srgbClr val="1A2332"/>
+            <a:srgbClr val="1A2026"/>
           </a:solidFill>
           <a:ln/>
         </p:spPr>
@@ -12484,7 +12484,7 @@
             </a:avLst>
           </a:prstGeom>
           <a:solidFill>
-            <a:srgbClr val="1A2332"/>
+            <a:srgbClr val="1A2026"/>
           </a:solidFill>
           <a:ln/>
         </p:spPr>
@@ -12566,7 +12566,7 @@
     <p:bg>
       <p:bgPr>
         <a:solidFill>
-          <a:srgbClr val="0F1419"/>
+          <a:srgbClr val="0F1214"/>
         </a:solidFill>
       </p:bgPr>
     </p:bg>
@@ -12599,7 +12599,7 @@
             <a:avLst/>
           </a:prstGeom>
           <a:solidFill>
-            <a:srgbClr val="EF4444">
+            <a:srgbClr val="3B968F">
               <a:alpha val="12000"/>
             </a:srgbClr>
           </a:solidFill>
@@ -12657,7 +12657,7 @@
             <a:r>
               <a:rPr lang="en-US" sz="2000" b="1" dirty="0">
                 <a:solidFill>
-                  <a:srgbClr val="EF4444"/>
+                  <a:srgbClr val="3B968F"/>
                 </a:solidFill>
                 <a:latin typeface="Calibri" pitchFamily="34" charset="0"/>
                 <a:ea typeface="Calibri" pitchFamily="34" charset="-122"/>
@@ -12865,7 +12865,7 @@
             <a:r>
               <a:rPr lang="en-US" sz="900" dirty="0">
                 <a:solidFill>
-                  <a:srgbClr val="64748B"/>
+                  <a:srgbClr val="5B6672"/>
                 </a:solidFill>
                 <a:latin typeface="Calibri" pitchFamily="34" charset="0"/>
                 <a:ea typeface="Calibri" pitchFamily="34" charset="-122"/>
@@ -12891,7 +12891,7 @@
     <p:bg>
       <p:bgPr>
         <a:solidFill>
-          <a:srgbClr val="0F1419"/>
+          <a:srgbClr val="0F1214"/>
         </a:solidFill>
       </p:bgPr>
     </p:bg>
@@ -12936,7 +12936,7 @@
             <a:r>
               <a:rPr lang="en-US" sz="2000" b="1" dirty="0">
                 <a:solidFill>
-                  <a:srgbClr val="EF4444"/>
+                  <a:srgbClr val="3B968F"/>
                 </a:solidFill>
                 <a:latin typeface="Calibri" pitchFamily="34" charset="0"/>
                 <a:ea typeface="Calibri" pitchFamily="34" charset="-122"/>
@@ -13029,7 +13029,7 @@
             </a:avLst>
           </a:prstGeom>
           <a:solidFill>
-            <a:srgbClr val="1A2332"/>
+            <a:srgbClr val="1A2026"/>
           </a:solidFill>
           <a:ln/>
         </p:spPr>
@@ -13114,7 +13114,7 @@
             </a:avLst>
           </a:prstGeom>
           <a:solidFill>
-            <a:srgbClr val="1A2332"/>
+            <a:srgbClr val="1A2026"/>
           </a:solidFill>
           <a:ln/>
         </p:spPr>
@@ -13196,7 +13196,7 @@
     <p:bg>
       <p:bgPr>
         <a:solidFill>
-          <a:srgbClr val="0F1419"/>
+          <a:srgbClr val="0F1214"/>
         </a:solidFill>
       </p:bgPr>
     </p:bg>
@@ -13241,7 +13241,7 @@
             <a:r>
               <a:rPr lang="en-US" sz="2000" b="1" dirty="0">
                 <a:solidFill>
-                  <a:srgbClr val="EF4444"/>
+                  <a:srgbClr val="3B968F"/>
                 </a:solidFill>
                 <a:latin typeface="Calibri" pitchFamily="34" charset="0"/>
                 <a:ea typeface="Calibri" pitchFamily="34" charset="-122"/>
@@ -13270,7 +13270,7 @@
             </a:avLst>
           </a:prstGeom>
           <a:solidFill>
-            <a:srgbClr val="1A2332"/>
+            <a:srgbClr val="1A2026"/>
           </a:solidFill>
           <a:ln/>
         </p:spPr>
@@ -13365,7 +13365,7 @@
             <a:r>
               <a:rPr lang="en-US" sz="900" dirty="0">
                 <a:solidFill>
-                  <a:srgbClr val="94A3B8"/>
+                  <a:srgbClr val="8994A0"/>
                 </a:solidFill>
                 <a:latin typeface="Calibri" pitchFamily="34" charset="0"/>
                 <a:ea typeface="Calibri" pitchFamily="34" charset="-122"/>
@@ -13394,7 +13394,7 @@
             </a:avLst>
           </a:prstGeom>
           <a:solidFill>
-            <a:srgbClr val="1A2332"/>
+            <a:srgbClr val="1A2026"/>
           </a:solidFill>
           <a:ln/>
         </p:spPr>
@@ -13489,7 +13489,7 @@
             <a:r>
               <a:rPr lang="en-US" sz="900" dirty="0">
                 <a:solidFill>
-                  <a:srgbClr val="94A3B8"/>
+                  <a:srgbClr val="8994A0"/>
                 </a:solidFill>
                 <a:latin typeface="Calibri" pitchFamily="34" charset="0"/>
                 <a:ea typeface="Calibri" pitchFamily="34" charset="-122"/>
@@ -13518,7 +13518,7 @@
             </a:avLst>
           </a:prstGeom>
           <a:solidFill>
-            <a:srgbClr val="1A2332"/>
+            <a:srgbClr val="1A2026"/>
           </a:solidFill>
           <a:ln/>
         </p:spPr>
@@ -13613,7 +13613,7 @@
             <a:r>
               <a:rPr lang="en-US" sz="900" dirty="0">
                 <a:solidFill>
-                  <a:srgbClr val="94A3B8"/>
+                  <a:srgbClr val="8994A0"/>
                 </a:solidFill>
                 <a:latin typeface="Calibri" pitchFamily="34" charset="0"/>
                 <a:ea typeface="Calibri" pitchFamily="34" charset="-122"/>
